--- a/output/wordlabs-appear-3day.pptx
+++ b/output/wordlabs-appear-3day.pptx
@@ -5622,7 +5622,7 @@
                 <a:ea typeface="Trebuchet MS" pitchFamily="34" charset="-122"/>
                 <a:cs typeface="Trebuchet MS" pitchFamily="34" charset="-120"/>
               </a:rPr>
-              <a:t>2</a:t>
+              <a:t>1</a:t>
             </a:r>
             <a:pPr algn="ctr" indent="0" marL="0">
               <a:buNone/>
@@ -5636,7 +5636,7 @@
                 <a:ea typeface="Trebuchet MS" pitchFamily="34" charset="-122"/>
                 <a:cs typeface="Trebuchet MS" pitchFamily="34" charset="-120"/>
               </a:rPr>
-              <a:t>  punctuation marks</a:t>
+              <a:t>  punctuation mark</a:t>
             </a:r>
             <a:endParaRPr lang="en-US" sz="2800" dirty="0"/>
           </a:p>
@@ -6040,7 +6040,7 @@
                 <a:ea typeface="Calibri" pitchFamily="34" charset="-122"/>
                 <a:cs typeface="Calibri" pitchFamily="34" charset="-120"/>
               </a:rPr>
-              <a:t>Did the rabbit </a:t>
+              <a:t>The magician could make objects </a:t>
             </a:r>
             <a:pPr algn="l" indent="0" marL="0">
               <a:buNone/>
@@ -6071,7 +6071,7 @@
                 <a:ea typeface="Calibri" pitchFamily="34" charset="-122"/>
                 <a:cs typeface="Calibri" pitchFamily="34" charset="-120"/>
               </a:rPr>
-              <a:t>, or will it </a:t>
+              <a:t>, but their </a:t>
             </a:r>
             <a:pPr algn="l" indent="0" marL="0">
               <a:buNone/>
@@ -6088,7 +6088,7 @@
                 <a:ea typeface="Calibri" pitchFamily="34" charset="-122"/>
                 <a:cs typeface="Calibri" pitchFamily="34" charset="-120"/>
               </a:rPr>
-              <a:t>reappear</a:t>
+              <a:t>reappearance</a:t>
             </a:r>
             <a:pPr algn="l" indent="0" marL="0">
               <a:buNone/>
@@ -6102,7 +6102,7 @@
                 <a:ea typeface="Calibri" pitchFamily="34" charset="-122"/>
                 <a:cs typeface="Calibri" pitchFamily="34" charset="-120"/>
               </a:rPr>
-              <a:t> from behind the curtain?</a:t>
+              <a:t> always amazed the crowd.</a:t>
             </a:r>
             <a:endParaRPr lang="en-US" sz="1800" dirty="0"/>
           </a:p>
@@ -6385,7 +6385,7 @@
                 <a:ea typeface="Trebuchet MS" pitchFamily="34" charset="-122"/>
                 <a:cs typeface="Trebuchet MS" pitchFamily="34" charset="-120"/>
               </a:rPr>
-              <a:t>reappear</a:t>
+              <a:t>reappearance</a:t>
             </a:r>
             <a:endParaRPr lang="en-US" sz="1400" dirty="0"/>
           </a:p>
@@ -7860,7 +7860,7 @@
                 <a:ea typeface="Calibri" pitchFamily="34" charset="-122"/>
                 <a:cs typeface="Calibri" pitchFamily="34" charset="-120"/>
               </a:rPr>
-              <a:t>not, away, opposite</a:t>
+              <a:t>not, opposite of</a:t>
             </a:r>
             <a:endParaRPr lang="en-US" sz="850" dirty="0"/>
           </a:p>
@@ -8845,7 +8845,7 @@
                 <a:ea typeface="Calibri" pitchFamily="34" charset="-122"/>
                 <a:cs typeface="Calibri" pitchFamily="34" charset="-120"/>
               </a:rPr>
-              <a:t>not, away, opposite</a:t>
+              <a:t>not, opposite of</a:t>
             </a:r>
             <a:endParaRPr lang="en-US" sz="850" dirty="0"/>
           </a:p>
@@ -10067,7 +10067,7 @@
                 <a:ea typeface="Calibri" pitchFamily="34" charset="-122"/>
                 <a:cs typeface="Calibri" pitchFamily="34" charset="-120"/>
               </a:rPr>
-              <a:t>not, away, opposite</a:t>
+              <a:t>not, opposite of</a:t>
             </a:r>
             <a:endParaRPr lang="en-US" sz="850" dirty="0"/>
           </a:p>
@@ -11468,7 +11468,7 @@
                 <a:ea typeface="Trebuchet MS" pitchFamily="34" charset="-122"/>
                 <a:cs typeface="Trebuchet MS" pitchFamily="34" charset="-120"/>
               </a:rPr>
-              <a:t>reappear</a:t>
+              <a:t>reappearance</a:t>
             </a:r>
             <a:endParaRPr lang="en-US" sz="2800" dirty="0"/>
           </a:p>
@@ -12295,7 +12295,7 @@
                 <a:ea typeface="Trebuchet MS" pitchFamily="34" charset="-122"/>
                 <a:cs typeface="Trebuchet MS" pitchFamily="34" charset="-120"/>
               </a:rPr>
-              <a:t>reappear</a:t>
+              <a:t>reappearance</a:t>
             </a:r>
             <a:endParaRPr lang="en-US" sz="2800" dirty="0"/>
           </a:p>
@@ -12375,7 +12375,7 @@
         </p:nvSpPr>
         <p:spPr>
           <a:xfrm>
-            <a:off x="2938272" y="2258568"/>
+            <a:off x="2221992" y="2258568"/>
             <a:ext cx="1828800" cy="292608"/>
           </a:xfrm>
           <a:prstGeom prst="rect">
@@ -12409,7 +12409,7 @@
         </p:nvSpPr>
         <p:spPr>
           <a:xfrm>
-            <a:off x="2938272" y="2258568"/>
+            <a:off x="2221992" y="2258568"/>
             <a:ext cx="1828800" cy="292608"/>
           </a:xfrm>
           <a:prstGeom prst="rect">
@@ -12448,7 +12448,7 @@
         </p:nvSpPr>
         <p:spPr>
           <a:xfrm>
-            <a:off x="2938272" y="2569464"/>
+            <a:off x="2221992" y="2569464"/>
             <a:ext cx="1828800" cy="201168"/>
           </a:xfrm>
           <a:prstGeom prst="rect">
@@ -12473,7 +12473,7 @@
                 <a:ea typeface="Calibri" pitchFamily="34" charset="-122"/>
                 <a:cs typeface="Calibri" pitchFamily="34" charset="-120"/>
               </a:rPr>
-              <a:t>again, back</a:t>
+              <a:t>again</a:t>
             </a:r>
             <a:endParaRPr lang="en-US" sz="850" dirty="0"/>
           </a:p>
@@ -12487,7 +12487,7 @@
         </p:nvSpPr>
         <p:spPr>
           <a:xfrm>
-            <a:off x="5803392" y="2258568"/>
+            <a:off x="4370832" y="2258568"/>
             <a:ext cx="1828800" cy="292608"/>
           </a:xfrm>
           <a:prstGeom prst="rect">
@@ -12521,7 +12521,7 @@
         </p:nvSpPr>
         <p:spPr>
           <a:xfrm>
-            <a:off x="5803392" y="2258568"/>
+            <a:off x="4370832" y="2258568"/>
             <a:ext cx="1828800" cy="292608"/>
           </a:xfrm>
           <a:prstGeom prst="rect">
@@ -12560,7 +12560,7 @@
         </p:nvSpPr>
         <p:spPr>
           <a:xfrm>
-            <a:off x="5803392" y="2569464"/>
+            <a:off x="4370832" y="2569464"/>
             <a:ext cx="1828800" cy="201168"/>
           </a:xfrm>
           <a:prstGeom prst="rect">
@@ -12599,6 +12599,118 @@
         </p:nvSpPr>
         <p:spPr>
           <a:xfrm>
+            <a:off x="6519672" y="2258568"/>
+            <a:ext cx="1828800" cy="292608"/>
+          </a:xfrm>
+          <a:prstGeom prst="rect">
+            <a:avLst>
+              <a:gd name="adj" fmla="val 25000"/>
+            </a:avLst>
+          </a:prstGeom>
+          <a:solidFill>
+            <a:srgbClr val="FCE7F3"/>
+          </a:solidFill>
+          <a:ln w="19050">
+            <a:solidFill>
+              <a:srgbClr val="DB2777"/>
+            </a:solidFill>
+            <a:prstDash val="solid"/>
+          </a:ln>
+          <a:effectLst>
+            <a:outerShdw sx="100000" sy="100000" kx="0" ky="0" algn="bl" rotWithShape="0" blurRad="101600" dist="38100" dir="8100000">
+              <a:srgbClr val="000000">
+                <a:alpha val="12000"/>
+              </a:srgbClr>
+            </a:outerShdw>
+          </a:effectLst>
+        </p:spPr>
+      </p:sp>
+      <p:sp>
+        <p:nvSpPr>
+          <p:cNvPr id="23" name="Text 21"/>
+          <p:cNvSpPr/>
+          <p:nvPr/>
+        </p:nvSpPr>
+        <p:spPr>
+          <a:xfrm>
+            <a:off x="6519672" y="2258568"/>
+            <a:ext cx="1828800" cy="292608"/>
+          </a:xfrm>
+          <a:prstGeom prst="rect">
+            <a:avLst/>
+          </a:prstGeom>
+          <a:noFill/>
+          <a:ln/>
+        </p:spPr>
+        <p:txBody>
+          <a:bodyPr wrap="square" lIns="0" tIns="0" rIns="0" bIns="0" rtlCol="0" anchor="ctr"/>
+          <a:lstStyle/>
+          <a:p>
+            <a:pPr algn="ctr" indent="0" marL="0">
+              <a:buNone/>
+            </a:pPr>
+            <a:r>
+              <a:rPr lang="en-US" sz="1300" b="1" dirty="0">
+                <a:solidFill>
+                  <a:srgbClr val="9D174D"/>
+                </a:solidFill>
+                <a:latin typeface="Trebuchet MS" pitchFamily="34" charset="0"/>
+                <a:ea typeface="Trebuchet MS" pitchFamily="34" charset="-122"/>
+                <a:cs typeface="Trebuchet MS" pitchFamily="34" charset="-120"/>
+              </a:rPr>
+              <a:t>ance</a:t>
+            </a:r>
+            <a:endParaRPr lang="en-US" sz="1300" dirty="0"/>
+          </a:p>
+        </p:txBody>
+      </p:sp>
+      <p:sp>
+        <p:nvSpPr>
+          <p:cNvPr id="24" name="Text 22"/>
+          <p:cNvSpPr/>
+          <p:nvPr/>
+        </p:nvSpPr>
+        <p:spPr>
+          <a:xfrm>
+            <a:off x="6519672" y="2569464"/>
+            <a:ext cx="1828800" cy="201168"/>
+          </a:xfrm>
+          <a:prstGeom prst="rect">
+            <a:avLst/>
+          </a:prstGeom>
+          <a:noFill/>
+          <a:ln/>
+        </p:spPr>
+        <p:txBody>
+          <a:bodyPr wrap="square" lIns="0" tIns="0" rIns="0" bIns="0" rtlCol="0" anchor="t"/>
+          <a:lstStyle/>
+          <a:p>
+            <a:pPr algn="ctr" indent="0" marL="0">
+              <a:buNone/>
+            </a:pPr>
+            <a:r>
+              <a:rPr lang="en-US" sz="850" dirty="0">
+                <a:solidFill>
+                  <a:srgbClr val="475569"/>
+                </a:solidFill>
+                <a:latin typeface="Calibri" pitchFamily="34" charset="0"/>
+                <a:ea typeface="Calibri" pitchFamily="34" charset="-122"/>
+                <a:cs typeface="Calibri" pitchFamily="34" charset="-120"/>
+              </a:rPr>
+              <a:t>state or quality of</a:t>
+            </a:r>
+            <a:endParaRPr lang="en-US" sz="850" dirty="0"/>
+          </a:p>
+        </p:txBody>
+      </p:sp>
+      <p:sp>
+        <p:nvSpPr>
+          <p:cNvPr id="25" name="Shape 23"/>
+          <p:cNvSpPr/>
+          <p:nvPr/>
+        </p:nvSpPr>
+        <p:spPr>
+          <a:xfrm>
             <a:off x="365760" y="3273552"/>
             <a:ext cx="1371600" cy="658368"/>
           </a:xfrm>
@@ -12620,7 +12732,7 @@
       </p:sp>
       <p:sp>
         <p:nvSpPr>
-          <p:cNvPr id="23" name="Text 21"/>
+          <p:cNvPr id="26" name="Text 24"/>
           <p:cNvSpPr/>
           <p:nvPr/>
         </p:nvSpPr>
@@ -12659,7 +12771,7 @@
       </p:sp>
       <p:sp>
         <p:nvSpPr>
-          <p:cNvPr id="24" name="Shape 22"/>
+          <p:cNvPr id="27" name="Shape 25"/>
           <p:cNvSpPr/>
           <p:nvPr/>
         </p:nvSpPr>
@@ -12686,7 +12798,7 @@
       </p:sp>
       <p:sp>
         <p:nvSpPr>
-          <p:cNvPr id="25" name="Text 23"/>
+          <p:cNvPr id="28" name="Text 26"/>
           <p:cNvSpPr/>
           <p:nvPr/>
         </p:nvSpPr>
@@ -12725,7 +12837,7 @@
       </p:sp>
       <p:sp>
         <p:nvSpPr>
-          <p:cNvPr id="26" name="Shape 24"/>
+          <p:cNvPr id="29" name="Shape 27"/>
           <p:cNvSpPr/>
           <p:nvPr/>
         </p:nvSpPr>
@@ -12752,7 +12864,7 @@
       </p:sp>
       <p:sp>
         <p:nvSpPr>
-          <p:cNvPr id="27" name="Text 25"/>
+          <p:cNvPr id="30" name="Text 28"/>
           <p:cNvSpPr/>
           <p:nvPr/>
         </p:nvSpPr>
@@ -12791,7 +12903,7 @@
       </p:sp>
       <p:sp>
         <p:nvSpPr>
-          <p:cNvPr id="28" name="Shape 26"/>
+          <p:cNvPr id="31" name="Shape 29"/>
           <p:cNvSpPr/>
           <p:nvPr/>
         </p:nvSpPr>
@@ -12818,7 +12930,7 @@
       </p:sp>
       <p:sp>
         <p:nvSpPr>
-          <p:cNvPr id="29" name="Text 27"/>
+          <p:cNvPr id="32" name="Text 30"/>
           <p:cNvSpPr/>
           <p:nvPr/>
         </p:nvSpPr>
@@ -13280,7 +13392,7 @@
                 <a:ea typeface="Trebuchet MS" pitchFamily="34" charset="-122"/>
                 <a:cs typeface="Trebuchet MS" pitchFamily="34" charset="-120"/>
               </a:rPr>
-              <a:t>reappear</a:t>
+              <a:t>reappearance</a:t>
             </a:r>
             <a:endParaRPr lang="en-US" sz="2800" dirty="0"/>
           </a:p>
@@ -13360,7 +13472,7 @@
         </p:nvSpPr>
         <p:spPr>
           <a:xfrm>
-            <a:off x="2938272" y="2258568"/>
+            <a:off x="2221992" y="2258568"/>
             <a:ext cx="1828800" cy="292608"/>
           </a:xfrm>
           <a:prstGeom prst="rect">
@@ -13394,7 +13506,7 @@
         </p:nvSpPr>
         <p:spPr>
           <a:xfrm>
-            <a:off x="2938272" y="2258568"/>
+            <a:off x="2221992" y="2258568"/>
             <a:ext cx="1828800" cy="292608"/>
           </a:xfrm>
           <a:prstGeom prst="rect">
@@ -13433,7 +13545,7 @@
         </p:nvSpPr>
         <p:spPr>
           <a:xfrm>
-            <a:off x="2938272" y="2569464"/>
+            <a:off x="2221992" y="2569464"/>
             <a:ext cx="1828800" cy="201168"/>
           </a:xfrm>
           <a:prstGeom prst="rect">
@@ -13458,7 +13570,7 @@
                 <a:ea typeface="Calibri" pitchFamily="34" charset="-122"/>
                 <a:cs typeface="Calibri" pitchFamily="34" charset="-120"/>
               </a:rPr>
-              <a:t>again, back</a:t>
+              <a:t>again</a:t>
             </a:r>
             <a:endParaRPr lang="en-US" sz="850" dirty="0"/>
           </a:p>
@@ -13472,7 +13584,7 @@
         </p:nvSpPr>
         <p:spPr>
           <a:xfrm>
-            <a:off x="5803392" y="2258568"/>
+            <a:off x="4370832" y="2258568"/>
             <a:ext cx="1828800" cy="292608"/>
           </a:xfrm>
           <a:prstGeom prst="rect">
@@ -13506,7 +13618,7 @@
         </p:nvSpPr>
         <p:spPr>
           <a:xfrm>
-            <a:off x="5803392" y="2258568"/>
+            <a:off x="4370832" y="2258568"/>
             <a:ext cx="1828800" cy="292608"/>
           </a:xfrm>
           <a:prstGeom prst="rect">
@@ -13545,7 +13657,7 @@
         </p:nvSpPr>
         <p:spPr>
           <a:xfrm>
-            <a:off x="5803392" y="2569464"/>
+            <a:off x="4370832" y="2569464"/>
             <a:ext cx="1828800" cy="201168"/>
           </a:xfrm>
           <a:prstGeom prst="rect">
@@ -13584,6 +13696,118 @@
         </p:nvSpPr>
         <p:spPr>
           <a:xfrm>
+            <a:off x="6519672" y="2258568"/>
+            <a:ext cx="1828800" cy="292608"/>
+          </a:xfrm>
+          <a:prstGeom prst="rect">
+            <a:avLst>
+              <a:gd name="adj" fmla="val 25000"/>
+            </a:avLst>
+          </a:prstGeom>
+          <a:solidFill>
+            <a:srgbClr val="FCE7F3"/>
+          </a:solidFill>
+          <a:ln w="19050">
+            <a:solidFill>
+              <a:srgbClr val="DB2777"/>
+            </a:solidFill>
+            <a:prstDash val="solid"/>
+          </a:ln>
+          <a:effectLst>
+            <a:outerShdw sx="100000" sy="100000" kx="0" ky="0" algn="bl" rotWithShape="0" blurRad="101600" dist="38100" dir="8100000">
+              <a:srgbClr val="000000">
+                <a:alpha val="12000"/>
+              </a:srgbClr>
+            </a:outerShdw>
+          </a:effectLst>
+        </p:spPr>
+      </p:sp>
+      <p:sp>
+        <p:nvSpPr>
+          <p:cNvPr id="23" name="Text 21"/>
+          <p:cNvSpPr/>
+          <p:nvPr/>
+        </p:nvSpPr>
+        <p:spPr>
+          <a:xfrm>
+            <a:off x="6519672" y="2258568"/>
+            <a:ext cx="1828800" cy="292608"/>
+          </a:xfrm>
+          <a:prstGeom prst="rect">
+            <a:avLst/>
+          </a:prstGeom>
+          <a:noFill/>
+          <a:ln/>
+        </p:spPr>
+        <p:txBody>
+          <a:bodyPr wrap="square" lIns="0" tIns="0" rIns="0" bIns="0" rtlCol="0" anchor="ctr"/>
+          <a:lstStyle/>
+          <a:p>
+            <a:pPr algn="ctr" indent="0" marL="0">
+              <a:buNone/>
+            </a:pPr>
+            <a:r>
+              <a:rPr lang="en-US" sz="1300" b="1" dirty="0">
+                <a:solidFill>
+                  <a:srgbClr val="9D174D"/>
+                </a:solidFill>
+                <a:latin typeface="Trebuchet MS" pitchFamily="34" charset="0"/>
+                <a:ea typeface="Trebuchet MS" pitchFamily="34" charset="-122"/>
+                <a:cs typeface="Trebuchet MS" pitchFamily="34" charset="-120"/>
+              </a:rPr>
+              <a:t>ance</a:t>
+            </a:r>
+            <a:endParaRPr lang="en-US" sz="1300" dirty="0"/>
+          </a:p>
+        </p:txBody>
+      </p:sp>
+      <p:sp>
+        <p:nvSpPr>
+          <p:cNvPr id="24" name="Text 22"/>
+          <p:cNvSpPr/>
+          <p:nvPr/>
+        </p:nvSpPr>
+        <p:spPr>
+          <a:xfrm>
+            <a:off x="6519672" y="2569464"/>
+            <a:ext cx="1828800" cy="201168"/>
+          </a:xfrm>
+          <a:prstGeom prst="rect">
+            <a:avLst/>
+          </a:prstGeom>
+          <a:noFill/>
+          <a:ln/>
+        </p:spPr>
+        <p:txBody>
+          <a:bodyPr wrap="square" lIns="0" tIns="0" rIns="0" bIns="0" rtlCol="0" anchor="t"/>
+          <a:lstStyle/>
+          <a:p>
+            <a:pPr algn="ctr" indent="0" marL="0">
+              <a:buNone/>
+            </a:pPr>
+            <a:r>
+              <a:rPr lang="en-US" sz="850" dirty="0">
+                <a:solidFill>
+                  <a:srgbClr val="475569"/>
+                </a:solidFill>
+                <a:latin typeface="Calibri" pitchFamily="34" charset="0"/>
+                <a:ea typeface="Calibri" pitchFamily="34" charset="-122"/>
+                <a:cs typeface="Calibri" pitchFamily="34" charset="-120"/>
+              </a:rPr>
+              <a:t>state or quality of</a:t>
+            </a:r>
+            <a:endParaRPr lang="en-US" sz="850" dirty="0"/>
+          </a:p>
+        </p:txBody>
+      </p:sp>
+      <p:sp>
+        <p:nvSpPr>
+          <p:cNvPr id="25" name="Shape 23"/>
+          <p:cNvSpPr/>
+          <p:nvPr/>
+        </p:nvSpPr>
+        <p:spPr>
+          <a:xfrm>
             <a:off x="365760" y="3273552"/>
             <a:ext cx="1371600" cy="658368"/>
           </a:xfrm>
@@ -13605,7 +13829,7 @@
       </p:sp>
       <p:sp>
         <p:nvSpPr>
-          <p:cNvPr id="23" name="Text 21"/>
+          <p:cNvPr id="26" name="Text 24"/>
           <p:cNvSpPr/>
           <p:nvPr/>
         </p:nvSpPr>
@@ -13644,7 +13868,7 @@
       </p:sp>
       <p:sp>
         <p:nvSpPr>
-          <p:cNvPr id="24" name="Shape 22"/>
+          <p:cNvPr id="27" name="Shape 25"/>
           <p:cNvSpPr/>
           <p:nvPr/>
         </p:nvSpPr>
@@ -13671,14 +13895,14 @@
       </p:sp>
       <p:sp>
         <p:nvSpPr>
-          <p:cNvPr id="25" name="Shape 23"/>
-          <p:cNvSpPr/>
-          <p:nvPr/>
-        </p:nvSpPr>
-        <p:spPr>
-          <a:xfrm>
-            <a:off x="2313432" y="3364992"/>
-            <a:ext cx="1645920" cy="475488"/>
+          <p:cNvPr id="28" name="Shape 26"/>
+          <p:cNvSpPr/>
+          <p:nvPr/>
+        </p:nvSpPr>
+        <p:spPr>
+          <a:xfrm>
+            <a:off x="1975104" y="3364992"/>
+            <a:ext cx="1554480" cy="475488"/>
           </a:xfrm>
           <a:prstGeom prst="rect">
             <a:avLst>
@@ -13698,14 +13922,14 @@
       </p:sp>
       <p:sp>
         <p:nvSpPr>
-          <p:cNvPr id="26" name="Text 24"/>
-          <p:cNvSpPr/>
-          <p:nvPr/>
-        </p:nvSpPr>
-        <p:spPr>
-          <a:xfrm>
-            <a:off x="2313432" y="3364992"/>
-            <a:ext cx="1645920" cy="475488"/>
+          <p:cNvPr id="29" name="Text 27"/>
+          <p:cNvSpPr/>
+          <p:nvPr/>
+        </p:nvSpPr>
+        <p:spPr>
+          <a:xfrm>
+            <a:off x="1975104" y="3364992"/>
+            <a:ext cx="1554480" cy="475488"/>
           </a:xfrm>
           <a:prstGeom prst="rect">
             <a:avLst/>
@@ -13737,14 +13961,14 @@
       </p:sp>
       <p:sp>
         <p:nvSpPr>
-          <p:cNvPr id="27" name="Text 25"/>
-          <p:cNvSpPr/>
-          <p:nvPr/>
-        </p:nvSpPr>
-        <p:spPr>
-          <a:xfrm>
-            <a:off x="3959352" y="3364992"/>
-            <a:ext cx="411480" cy="475488"/>
+          <p:cNvPr id="30" name="Text 28"/>
+          <p:cNvSpPr/>
+          <p:nvPr/>
+        </p:nvSpPr>
+        <p:spPr>
+          <a:xfrm>
+            <a:off x="3529584" y="3364992"/>
+            <a:ext cx="73152" cy="475488"/>
           </a:xfrm>
           <a:prstGeom prst="rect">
             <a:avLst/>
@@ -13776,14 +14000,14 @@
       </p:sp>
       <p:sp>
         <p:nvSpPr>
-          <p:cNvPr id="28" name="Shape 26"/>
-          <p:cNvSpPr/>
-          <p:nvPr/>
-        </p:nvSpPr>
-        <p:spPr>
-          <a:xfrm>
-            <a:off x="4370832" y="3364992"/>
-            <a:ext cx="1645920" cy="475488"/>
+          <p:cNvPr id="31" name="Shape 29"/>
+          <p:cNvSpPr/>
+          <p:nvPr/>
+        </p:nvSpPr>
+        <p:spPr>
+          <a:xfrm>
+            <a:off x="3602736" y="3364992"/>
+            <a:ext cx="1554480" cy="475488"/>
           </a:xfrm>
           <a:prstGeom prst="rect">
             <a:avLst>
@@ -13803,14 +14027,14 @@
       </p:sp>
       <p:sp>
         <p:nvSpPr>
-          <p:cNvPr id="29" name="Text 27"/>
-          <p:cNvSpPr/>
-          <p:nvPr/>
-        </p:nvSpPr>
-        <p:spPr>
-          <a:xfrm>
-            <a:off x="4370832" y="3364992"/>
-            <a:ext cx="1645920" cy="475488"/>
+          <p:cNvPr id="32" name="Text 30"/>
+          <p:cNvSpPr/>
+          <p:nvPr/>
+        </p:nvSpPr>
+        <p:spPr>
+          <a:xfrm>
+            <a:off x="3602736" y="3364992"/>
+            <a:ext cx="1554480" cy="475488"/>
           </a:xfrm>
           <a:prstGeom prst="rect">
             <a:avLst/>
@@ -13842,14 +14066,14 @@
       </p:sp>
       <p:sp>
         <p:nvSpPr>
-          <p:cNvPr id="30" name="Text 28"/>
-          <p:cNvSpPr/>
-          <p:nvPr/>
-        </p:nvSpPr>
-        <p:spPr>
-          <a:xfrm>
-            <a:off x="6016752" y="3364992"/>
-            <a:ext cx="411480" cy="475488"/>
+          <p:cNvPr id="33" name="Text 31"/>
+          <p:cNvSpPr/>
+          <p:nvPr/>
+        </p:nvSpPr>
+        <p:spPr>
+          <a:xfrm>
+            <a:off x="5157216" y="3364992"/>
+            <a:ext cx="73152" cy="475488"/>
           </a:xfrm>
           <a:prstGeom prst="rect">
             <a:avLst/>
@@ -13881,14 +14105,14 @@
       </p:sp>
       <p:sp>
         <p:nvSpPr>
-          <p:cNvPr id="31" name="Shape 29"/>
-          <p:cNvSpPr/>
-          <p:nvPr/>
-        </p:nvSpPr>
-        <p:spPr>
-          <a:xfrm>
-            <a:off x="6428232" y="3364992"/>
-            <a:ext cx="1645920" cy="475488"/>
+          <p:cNvPr id="34" name="Shape 32"/>
+          <p:cNvSpPr/>
+          <p:nvPr/>
+        </p:nvSpPr>
+        <p:spPr>
+          <a:xfrm>
+            <a:off x="5230368" y="3364992"/>
+            <a:ext cx="1554480" cy="475488"/>
           </a:xfrm>
           <a:prstGeom prst="rect">
             <a:avLst>
@@ -13908,14 +14132,14 @@
       </p:sp>
       <p:sp>
         <p:nvSpPr>
-          <p:cNvPr id="32" name="Text 30"/>
-          <p:cNvSpPr/>
-          <p:nvPr/>
-        </p:nvSpPr>
-        <p:spPr>
-          <a:xfrm>
-            <a:off x="6428232" y="3364992"/>
-            <a:ext cx="1645920" cy="475488"/>
+          <p:cNvPr id="35" name="Text 33"/>
+          <p:cNvSpPr/>
+          <p:nvPr/>
+        </p:nvSpPr>
+        <p:spPr>
+          <a:xfrm>
+            <a:off x="5230368" y="3364992"/>
+            <a:ext cx="1554480" cy="475488"/>
           </a:xfrm>
           <a:prstGeom prst="rect">
             <a:avLst/>
@@ -13947,7 +14171,112 @@
       </p:sp>
       <p:sp>
         <p:nvSpPr>
-          <p:cNvPr id="33" name="Shape 31"/>
+          <p:cNvPr id="36" name="Text 34"/>
+          <p:cNvSpPr/>
+          <p:nvPr/>
+        </p:nvSpPr>
+        <p:spPr>
+          <a:xfrm>
+            <a:off x="6784848" y="3364992"/>
+            <a:ext cx="73152" cy="475488"/>
+          </a:xfrm>
+          <a:prstGeom prst="rect">
+            <a:avLst/>
+          </a:prstGeom>
+          <a:noFill/>
+          <a:ln/>
+        </p:spPr>
+        <p:txBody>
+          <a:bodyPr wrap="square" lIns="0" tIns="0" rIns="0" bIns="0" rtlCol="0" anchor="ctr"/>
+          <a:lstStyle/>
+          <a:p>
+            <a:pPr algn="ctr" indent="0" marL="0">
+              <a:buNone/>
+            </a:pPr>
+            <a:r>
+              <a:rPr lang="en-US" sz="1600" b="1" dirty="0">
+                <a:solidFill>
+                  <a:srgbClr val="0D9488"/>
+                </a:solidFill>
+                <a:latin typeface="Trebuchet MS" pitchFamily="34" charset="0"/>
+                <a:ea typeface="Trebuchet MS" pitchFamily="34" charset="-122"/>
+                <a:cs typeface="Trebuchet MS" pitchFamily="34" charset="-120"/>
+              </a:rPr>
+              <a:t>·</a:t>
+            </a:r>
+            <a:endParaRPr lang="en-US" sz="1600" dirty="0"/>
+          </a:p>
+        </p:txBody>
+      </p:sp>
+      <p:sp>
+        <p:nvSpPr>
+          <p:cNvPr id="37" name="Shape 35"/>
+          <p:cNvSpPr/>
+          <p:nvPr/>
+        </p:nvSpPr>
+        <p:spPr>
+          <a:xfrm>
+            <a:off x="6858000" y="3364992"/>
+            <a:ext cx="1554480" cy="475488"/>
+          </a:xfrm>
+          <a:prstGeom prst="rect">
+            <a:avLst>
+              <a:gd name="adj" fmla="val 9615"/>
+            </a:avLst>
+          </a:prstGeom>
+          <a:solidFill>
+            <a:srgbClr val="FFFFFF"/>
+          </a:solidFill>
+          <a:ln w="12700">
+            <a:solidFill>
+              <a:srgbClr val="0D9488"/>
+            </a:solidFill>
+            <a:prstDash val="solid"/>
+          </a:ln>
+        </p:spPr>
+      </p:sp>
+      <p:sp>
+        <p:nvSpPr>
+          <p:cNvPr id="38" name="Text 36"/>
+          <p:cNvSpPr/>
+          <p:nvPr/>
+        </p:nvSpPr>
+        <p:spPr>
+          <a:xfrm>
+            <a:off x="6858000" y="3364992"/>
+            <a:ext cx="1554480" cy="475488"/>
+          </a:xfrm>
+          <a:prstGeom prst="rect">
+            <a:avLst/>
+          </a:prstGeom>
+          <a:noFill/>
+          <a:ln/>
+        </p:spPr>
+        <p:txBody>
+          <a:bodyPr wrap="square" lIns="0" tIns="0" rIns="0" bIns="0" rtlCol="0" anchor="ctr"/>
+          <a:lstStyle/>
+          <a:p>
+            <a:pPr algn="ctr" indent="0" marL="0">
+              <a:buNone/>
+            </a:pPr>
+            <a:r>
+              <a:rPr lang="en-US" sz="1400" b="1" dirty="0">
+                <a:solidFill>
+                  <a:srgbClr val="0D9488"/>
+                </a:solidFill>
+                <a:latin typeface="Trebuchet MS" pitchFamily="34" charset="0"/>
+                <a:ea typeface="Trebuchet MS" pitchFamily="34" charset="-122"/>
+                <a:cs typeface="Trebuchet MS" pitchFamily="34" charset="-120"/>
+              </a:rPr>
+              <a:t>ance</a:t>
+            </a:r>
+            <a:endParaRPr lang="en-US" sz="1400" dirty="0"/>
+          </a:p>
+        </p:txBody>
+      </p:sp>
+      <p:sp>
+        <p:nvSpPr>
+          <p:cNvPr id="39" name="Shape 37"/>
           <p:cNvSpPr/>
           <p:nvPr/>
         </p:nvSpPr>
@@ -13974,7 +14303,7 @@
       </p:sp>
       <p:sp>
         <p:nvSpPr>
-          <p:cNvPr id="34" name="Text 32"/>
+          <p:cNvPr id="40" name="Text 38"/>
           <p:cNvSpPr/>
           <p:nvPr/>
         </p:nvSpPr>
@@ -14013,7 +14342,7 @@
       </p:sp>
       <p:sp>
         <p:nvSpPr>
-          <p:cNvPr id="35" name="Shape 33"/>
+          <p:cNvPr id="41" name="Shape 39"/>
           <p:cNvSpPr/>
           <p:nvPr/>
         </p:nvSpPr>
@@ -14040,7 +14369,7 @@
       </p:sp>
       <p:sp>
         <p:nvSpPr>
-          <p:cNvPr id="36" name="Text 34"/>
+          <p:cNvPr id="42" name="Text 40"/>
           <p:cNvSpPr/>
           <p:nvPr/>
         </p:nvSpPr>
@@ -14767,7 +15096,7 @@
                 <a:ea typeface="Trebuchet MS" pitchFamily="34" charset="-122"/>
                 <a:cs typeface="Trebuchet MS" pitchFamily="34" charset="-120"/>
               </a:rPr>
-              <a:t>reappear</a:t>
+              <a:t>reappearance</a:t>
             </a:r>
             <a:endParaRPr lang="en-US" sz="2800" dirty="0"/>
           </a:p>
@@ -14847,7 +15176,7 @@
         </p:nvSpPr>
         <p:spPr>
           <a:xfrm>
-            <a:off x="2938272" y="2258568"/>
+            <a:off x="2221992" y="2258568"/>
             <a:ext cx="1828800" cy="292608"/>
           </a:xfrm>
           <a:prstGeom prst="rect">
@@ -14881,7 +15210,7 @@
         </p:nvSpPr>
         <p:spPr>
           <a:xfrm>
-            <a:off x="2938272" y="2258568"/>
+            <a:off x="2221992" y="2258568"/>
             <a:ext cx="1828800" cy="292608"/>
           </a:xfrm>
           <a:prstGeom prst="rect">
@@ -14920,7 +15249,7 @@
         </p:nvSpPr>
         <p:spPr>
           <a:xfrm>
-            <a:off x="2938272" y="2569464"/>
+            <a:off x="2221992" y="2569464"/>
             <a:ext cx="1828800" cy="201168"/>
           </a:xfrm>
           <a:prstGeom prst="rect">
@@ -14945,7 +15274,7 @@
                 <a:ea typeface="Calibri" pitchFamily="34" charset="-122"/>
                 <a:cs typeface="Calibri" pitchFamily="34" charset="-120"/>
               </a:rPr>
-              <a:t>again, back</a:t>
+              <a:t>again</a:t>
             </a:r>
             <a:endParaRPr lang="en-US" sz="850" dirty="0"/>
           </a:p>
@@ -14959,7 +15288,7 @@
         </p:nvSpPr>
         <p:spPr>
           <a:xfrm>
-            <a:off x="5803392" y="2258568"/>
+            <a:off x="4370832" y="2258568"/>
             <a:ext cx="1828800" cy="292608"/>
           </a:xfrm>
           <a:prstGeom prst="rect">
@@ -14993,7 +15322,7 @@
         </p:nvSpPr>
         <p:spPr>
           <a:xfrm>
-            <a:off x="5803392" y="2258568"/>
+            <a:off x="4370832" y="2258568"/>
             <a:ext cx="1828800" cy="292608"/>
           </a:xfrm>
           <a:prstGeom prst="rect">
@@ -15032,7 +15361,7 @@
         </p:nvSpPr>
         <p:spPr>
           <a:xfrm>
-            <a:off x="5803392" y="2569464"/>
+            <a:off x="4370832" y="2569464"/>
             <a:ext cx="1828800" cy="201168"/>
           </a:xfrm>
           <a:prstGeom prst="rect">
@@ -15071,6 +15400,118 @@
         </p:nvSpPr>
         <p:spPr>
           <a:xfrm>
+            <a:off x="6519672" y="2258568"/>
+            <a:ext cx="1828800" cy="292608"/>
+          </a:xfrm>
+          <a:prstGeom prst="rect">
+            <a:avLst>
+              <a:gd name="adj" fmla="val 25000"/>
+            </a:avLst>
+          </a:prstGeom>
+          <a:solidFill>
+            <a:srgbClr val="FCE7F3"/>
+          </a:solidFill>
+          <a:ln w="19050">
+            <a:solidFill>
+              <a:srgbClr val="DB2777"/>
+            </a:solidFill>
+            <a:prstDash val="solid"/>
+          </a:ln>
+          <a:effectLst>
+            <a:outerShdw sx="100000" sy="100000" kx="0" ky="0" algn="bl" rotWithShape="0" blurRad="101600" dist="38100" dir="8100000">
+              <a:srgbClr val="000000">
+                <a:alpha val="12000"/>
+              </a:srgbClr>
+            </a:outerShdw>
+          </a:effectLst>
+        </p:spPr>
+      </p:sp>
+      <p:sp>
+        <p:nvSpPr>
+          <p:cNvPr id="23" name="Text 21"/>
+          <p:cNvSpPr/>
+          <p:nvPr/>
+        </p:nvSpPr>
+        <p:spPr>
+          <a:xfrm>
+            <a:off x="6519672" y="2258568"/>
+            <a:ext cx="1828800" cy="292608"/>
+          </a:xfrm>
+          <a:prstGeom prst="rect">
+            <a:avLst/>
+          </a:prstGeom>
+          <a:noFill/>
+          <a:ln/>
+        </p:spPr>
+        <p:txBody>
+          <a:bodyPr wrap="square" lIns="0" tIns="0" rIns="0" bIns="0" rtlCol="0" anchor="ctr"/>
+          <a:lstStyle/>
+          <a:p>
+            <a:pPr algn="ctr" indent="0" marL="0">
+              <a:buNone/>
+            </a:pPr>
+            <a:r>
+              <a:rPr lang="en-US" sz="1300" b="1" dirty="0">
+                <a:solidFill>
+                  <a:srgbClr val="9D174D"/>
+                </a:solidFill>
+                <a:latin typeface="Trebuchet MS" pitchFamily="34" charset="0"/>
+                <a:ea typeface="Trebuchet MS" pitchFamily="34" charset="-122"/>
+                <a:cs typeface="Trebuchet MS" pitchFamily="34" charset="-120"/>
+              </a:rPr>
+              <a:t>ance</a:t>
+            </a:r>
+            <a:endParaRPr lang="en-US" sz="1300" dirty="0"/>
+          </a:p>
+        </p:txBody>
+      </p:sp>
+      <p:sp>
+        <p:nvSpPr>
+          <p:cNvPr id="24" name="Text 22"/>
+          <p:cNvSpPr/>
+          <p:nvPr/>
+        </p:nvSpPr>
+        <p:spPr>
+          <a:xfrm>
+            <a:off x="6519672" y="2569464"/>
+            <a:ext cx="1828800" cy="201168"/>
+          </a:xfrm>
+          <a:prstGeom prst="rect">
+            <a:avLst/>
+          </a:prstGeom>
+          <a:noFill/>
+          <a:ln/>
+        </p:spPr>
+        <p:txBody>
+          <a:bodyPr wrap="square" lIns="0" tIns="0" rIns="0" bIns="0" rtlCol="0" anchor="t"/>
+          <a:lstStyle/>
+          <a:p>
+            <a:pPr algn="ctr" indent="0" marL="0">
+              <a:buNone/>
+            </a:pPr>
+            <a:r>
+              <a:rPr lang="en-US" sz="850" dirty="0">
+                <a:solidFill>
+                  <a:srgbClr val="475569"/>
+                </a:solidFill>
+                <a:latin typeface="Calibri" pitchFamily="34" charset="0"/>
+                <a:ea typeface="Calibri" pitchFamily="34" charset="-122"/>
+                <a:cs typeface="Calibri" pitchFamily="34" charset="-120"/>
+              </a:rPr>
+              <a:t>state or quality of</a:t>
+            </a:r>
+            <a:endParaRPr lang="en-US" sz="850" dirty="0"/>
+          </a:p>
+        </p:txBody>
+      </p:sp>
+      <p:sp>
+        <p:nvSpPr>
+          <p:cNvPr id="25" name="Shape 23"/>
+          <p:cNvSpPr/>
+          <p:nvPr/>
+        </p:nvSpPr>
+        <p:spPr>
+          <a:xfrm>
             <a:off x="365760" y="3273552"/>
             <a:ext cx="1371600" cy="658368"/>
           </a:xfrm>
@@ -15092,7 +15533,7 @@
       </p:sp>
       <p:sp>
         <p:nvSpPr>
-          <p:cNvPr id="23" name="Text 21"/>
+          <p:cNvPr id="26" name="Text 24"/>
           <p:cNvSpPr/>
           <p:nvPr/>
         </p:nvSpPr>
@@ -15131,7 +15572,7 @@
       </p:sp>
       <p:sp>
         <p:nvSpPr>
-          <p:cNvPr id="24" name="Shape 22"/>
+          <p:cNvPr id="27" name="Shape 25"/>
           <p:cNvSpPr/>
           <p:nvPr/>
         </p:nvSpPr>
@@ -15158,14 +15599,14 @@
       </p:sp>
       <p:sp>
         <p:nvSpPr>
-          <p:cNvPr id="25" name="Shape 23"/>
-          <p:cNvSpPr/>
-          <p:nvPr/>
-        </p:nvSpPr>
-        <p:spPr>
-          <a:xfrm>
-            <a:off x="2313432" y="3364992"/>
-            <a:ext cx="1645920" cy="475488"/>
+          <p:cNvPr id="28" name="Shape 26"/>
+          <p:cNvSpPr/>
+          <p:nvPr/>
+        </p:nvSpPr>
+        <p:spPr>
+          <a:xfrm>
+            <a:off x="1975104" y="3364992"/>
+            <a:ext cx="1554480" cy="475488"/>
           </a:xfrm>
           <a:prstGeom prst="rect">
             <a:avLst>
@@ -15185,14 +15626,14 @@
       </p:sp>
       <p:sp>
         <p:nvSpPr>
-          <p:cNvPr id="26" name="Text 24"/>
-          <p:cNvSpPr/>
-          <p:nvPr/>
-        </p:nvSpPr>
-        <p:spPr>
-          <a:xfrm>
-            <a:off x="2313432" y="3364992"/>
-            <a:ext cx="1645920" cy="475488"/>
+          <p:cNvPr id="29" name="Text 27"/>
+          <p:cNvSpPr/>
+          <p:nvPr/>
+        </p:nvSpPr>
+        <p:spPr>
+          <a:xfrm>
+            <a:off x="1975104" y="3364992"/>
+            <a:ext cx="1554480" cy="475488"/>
           </a:xfrm>
           <a:prstGeom prst="rect">
             <a:avLst/>
@@ -15224,14 +15665,14 @@
       </p:sp>
       <p:sp>
         <p:nvSpPr>
-          <p:cNvPr id="27" name="Text 25"/>
-          <p:cNvSpPr/>
-          <p:nvPr/>
-        </p:nvSpPr>
-        <p:spPr>
-          <a:xfrm>
-            <a:off x="3959352" y="3364992"/>
-            <a:ext cx="411480" cy="475488"/>
+          <p:cNvPr id="30" name="Text 28"/>
+          <p:cNvSpPr/>
+          <p:nvPr/>
+        </p:nvSpPr>
+        <p:spPr>
+          <a:xfrm>
+            <a:off x="3529584" y="3364992"/>
+            <a:ext cx="73152" cy="475488"/>
           </a:xfrm>
           <a:prstGeom prst="rect">
             <a:avLst/>
@@ -15263,14 +15704,14 @@
       </p:sp>
       <p:sp>
         <p:nvSpPr>
-          <p:cNvPr id="28" name="Shape 26"/>
-          <p:cNvSpPr/>
-          <p:nvPr/>
-        </p:nvSpPr>
-        <p:spPr>
-          <a:xfrm>
-            <a:off x="4370832" y="3364992"/>
-            <a:ext cx="1645920" cy="475488"/>
+          <p:cNvPr id="31" name="Shape 29"/>
+          <p:cNvSpPr/>
+          <p:nvPr/>
+        </p:nvSpPr>
+        <p:spPr>
+          <a:xfrm>
+            <a:off x="3602736" y="3364992"/>
+            <a:ext cx="1554480" cy="475488"/>
           </a:xfrm>
           <a:prstGeom prst="rect">
             <a:avLst>
@@ -15290,14 +15731,14 @@
       </p:sp>
       <p:sp>
         <p:nvSpPr>
-          <p:cNvPr id="29" name="Text 27"/>
-          <p:cNvSpPr/>
-          <p:nvPr/>
-        </p:nvSpPr>
-        <p:spPr>
-          <a:xfrm>
-            <a:off x="4370832" y="3364992"/>
-            <a:ext cx="1645920" cy="475488"/>
+          <p:cNvPr id="32" name="Text 30"/>
+          <p:cNvSpPr/>
+          <p:nvPr/>
+        </p:nvSpPr>
+        <p:spPr>
+          <a:xfrm>
+            <a:off x="3602736" y="3364992"/>
+            <a:ext cx="1554480" cy="475488"/>
           </a:xfrm>
           <a:prstGeom prst="rect">
             <a:avLst/>
@@ -15329,14 +15770,14 @@
       </p:sp>
       <p:sp>
         <p:nvSpPr>
-          <p:cNvPr id="30" name="Text 28"/>
-          <p:cNvSpPr/>
-          <p:nvPr/>
-        </p:nvSpPr>
-        <p:spPr>
-          <a:xfrm>
-            <a:off x="6016752" y="3364992"/>
-            <a:ext cx="411480" cy="475488"/>
+          <p:cNvPr id="33" name="Text 31"/>
+          <p:cNvSpPr/>
+          <p:nvPr/>
+        </p:nvSpPr>
+        <p:spPr>
+          <a:xfrm>
+            <a:off x="5157216" y="3364992"/>
+            <a:ext cx="73152" cy="475488"/>
           </a:xfrm>
           <a:prstGeom prst="rect">
             <a:avLst/>
@@ -15368,14 +15809,14 @@
       </p:sp>
       <p:sp>
         <p:nvSpPr>
-          <p:cNvPr id="31" name="Shape 29"/>
-          <p:cNvSpPr/>
-          <p:nvPr/>
-        </p:nvSpPr>
-        <p:spPr>
-          <a:xfrm>
-            <a:off x="6428232" y="3364992"/>
-            <a:ext cx="1645920" cy="475488"/>
+          <p:cNvPr id="34" name="Shape 32"/>
+          <p:cNvSpPr/>
+          <p:nvPr/>
+        </p:nvSpPr>
+        <p:spPr>
+          <a:xfrm>
+            <a:off x="5230368" y="3364992"/>
+            <a:ext cx="1554480" cy="475488"/>
           </a:xfrm>
           <a:prstGeom prst="rect">
             <a:avLst>
@@ -15395,14 +15836,14 @@
       </p:sp>
       <p:sp>
         <p:nvSpPr>
-          <p:cNvPr id="32" name="Text 30"/>
-          <p:cNvSpPr/>
-          <p:nvPr/>
-        </p:nvSpPr>
-        <p:spPr>
-          <a:xfrm>
-            <a:off x="6428232" y="3364992"/>
-            <a:ext cx="1645920" cy="475488"/>
+          <p:cNvPr id="35" name="Text 33"/>
+          <p:cNvSpPr/>
+          <p:nvPr/>
+        </p:nvSpPr>
+        <p:spPr>
+          <a:xfrm>
+            <a:off x="5230368" y="3364992"/>
+            <a:ext cx="1554480" cy="475488"/>
           </a:xfrm>
           <a:prstGeom prst="rect">
             <a:avLst/>
@@ -15434,7 +15875,112 @@
       </p:sp>
       <p:sp>
         <p:nvSpPr>
-          <p:cNvPr id="33" name="Shape 31"/>
+          <p:cNvPr id="36" name="Text 34"/>
+          <p:cNvSpPr/>
+          <p:nvPr/>
+        </p:nvSpPr>
+        <p:spPr>
+          <a:xfrm>
+            <a:off x="6784848" y="3364992"/>
+            <a:ext cx="73152" cy="475488"/>
+          </a:xfrm>
+          <a:prstGeom prst="rect">
+            <a:avLst/>
+          </a:prstGeom>
+          <a:noFill/>
+          <a:ln/>
+        </p:spPr>
+        <p:txBody>
+          <a:bodyPr wrap="square" lIns="0" tIns="0" rIns="0" bIns="0" rtlCol="0" anchor="ctr"/>
+          <a:lstStyle/>
+          <a:p>
+            <a:pPr algn="ctr" indent="0" marL="0">
+              <a:buNone/>
+            </a:pPr>
+            <a:r>
+              <a:rPr lang="en-US" sz="1600" b="1" dirty="0">
+                <a:solidFill>
+                  <a:srgbClr val="0D9488"/>
+                </a:solidFill>
+                <a:latin typeface="Trebuchet MS" pitchFamily="34" charset="0"/>
+                <a:ea typeface="Trebuchet MS" pitchFamily="34" charset="-122"/>
+                <a:cs typeface="Trebuchet MS" pitchFamily="34" charset="-120"/>
+              </a:rPr>
+              <a:t>·</a:t>
+            </a:r>
+            <a:endParaRPr lang="en-US" sz="1600" dirty="0"/>
+          </a:p>
+        </p:txBody>
+      </p:sp>
+      <p:sp>
+        <p:nvSpPr>
+          <p:cNvPr id="37" name="Shape 35"/>
+          <p:cNvSpPr/>
+          <p:nvPr/>
+        </p:nvSpPr>
+        <p:spPr>
+          <a:xfrm>
+            <a:off x="6858000" y="3364992"/>
+            <a:ext cx="1554480" cy="475488"/>
+          </a:xfrm>
+          <a:prstGeom prst="rect">
+            <a:avLst>
+              <a:gd name="adj" fmla="val 9615"/>
+            </a:avLst>
+          </a:prstGeom>
+          <a:solidFill>
+            <a:srgbClr val="FFFFFF"/>
+          </a:solidFill>
+          <a:ln w="12700">
+            <a:solidFill>
+              <a:srgbClr val="0D9488"/>
+            </a:solidFill>
+            <a:prstDash val="solid"/>
+          </a:ln>
+        </p:spPr>
+      </p:sp>
+      <p:sp>
+        <p:nvSpPr>
+          <p:cNvPr id="38" name="Text 36"/>
+          <p:cNvSpPr/>
+          <p:nvPr/>
+        </p:nvSpPr>
+        <p:spPr>
+          <a:xfrm>
+            <a:off x="6858000" y="3364992"/>
+            <a:ext cx="1554480" cy="475488"/>
+          </a:xfrm>
+          <a:prstGeom prst="rect">
+            <a:avLst/>
+          </a:prstGeom>
+          <a:noFill/>
+          <a:ln/>
+        </p:spPr>
+        <p:txBody>
+          <a:bodyPr wrap="square" lIns="0" tIns="0" rIns="0" bIns="0" rtlCol="0" anchor="ctr"/>
+          <a:lstStyle/>
+          <a:p>
+            <a:pPr algn="ctr" indent="0" marL="0">
+              <a:buNone/>
+            </a:pPr>
+            <a:r>
+              <a:rPr lang="en-US" sz="1400" b="1" dirty="0">
+                <a:solidFill>
+                  <a:srgbClr val="0D9488"/>
+                </a:solidFill>
+                <a:latin typeface="Trebuchet MS" pitchFamily="34" charset="0"/>
+                <a:ea typeface="Trebuchet MS" pitchFamily="34" charset="-122"/>
+                <a:cs typeface="Trebuchet MS" pitchFamily="34" charset="-120"/>
+              </a:rPr>
+              <a:t>ance</a:t>
+            </a:r>
+            <a:endParaRPr lang="en-US" sz="1400" dirty="0"/>
+          </a:p>
+        </p:txBody>
+      </p:sp>
+      <p:sp>
+        <p:nvSpPr>
+          <p:cNvPr id="39" name="Shape 37"/>
           <p:cNvSpPr/>
           <p:nvPr/>
         </p:nvSpPr>
@@ -15461,7 +16007,7 @@
       </p:sp>
       <p:sp>
         <p:nvSpPr>
-          <p:cNvPr id="34" name="Text 32"/>
+          <p:cNvPr id="40" name="Text 38"/>
           <p:cNvSpPr/>
           <p:nvPr/>
         </p:nvSpPr>
@@ -15500,18 +16046,18 @@
       </p:sp>
       <p:sp>
         <p:nvSpPr>
-          <p:cNvPr id="35" name="Shape 33"/>
+          <p:cNvPr id="41" name="Shape 39"/>
           <p:cNvSpPr/>
           <p:nvPr/>
         </p:nvSpPr>
         <p:spPr>
           <a:xfrm>
             <a:off x="1874520" y="4096512"/>
-            <a:ext cx="6903720" cy="658368"/>
+            <a:ext cx="6903720" cy="804672"/>
           </a:xfrm>
           <a:prstGeom prst="rect">
             <a:avLst>
-              <a:gd name="adj" fmla="val 8333"/>
+              <a:gd name="adj" fmla="val 6818"/>
             </a:avLst>
           </a:prstGeom>
           <a:solidFill>
@@ -15527,18 +16073,18 @@
       </p:sp>
       <p:sp>
         <p:nvSpPr>
-          <p:cNvPr id="36" name="Shape 34"/>
-          <p:cNvSpPr/>
-          <p:nvPr/>
-        </p:nvSpPr>
-        <p:spPr>
-          <a:xfrm>
-            <a:off x="2427732" y="4169664"/>
-            <a:ext cx="685800" cy="475488"/>
+          <p:cNvPr id="42" name="Shape 40"/>
+          <p:cNvSpPr/>
+          <p:nvPr/>
+        </p:nvSpPr>
+        <p:spPr>
+          <a:xfrm>
+            <a:off x="2023872" y="4169664"/>
+            <a:ext cx="685800" cy="384048"/>
           </a:xfrm>
           <a:prstGeom prst="rect">
             <a:avLst>
-              <a:gd name="adj" fmla="val 7692"/>
+              <a:gd name="adj" fmla="val 9524"/>
             </a:avLst>
           </a:prstGeom>
           <a:solidFill>
@@ -15554,14 +16100,14 @@
       </p:sp>
       <p:sp>
         <p:nvSpPr>
-          <p:cNvPr id="37" name="Text 35"/>
-          <p:cNvSpPr/>
-          <p:nvPr/>
-        </p:nvSpPr>
-        <p:spPr>
-          <a:xfrm>
-            <a:off x="2427732" y="4169664"/>
-            <a:ext cx="685800" cy="475488"/>
+          <p:cNvPr id="43" name="Text 41"/>
+          <p:cNvSpPr/>
+          <p:nvPr/>
+        </p:nvSpPr>
+        <p:spPr>
+          <a:xfrm>
+            <a:off x="2023872" y="4169664"/>
+            <a:ext cx="685800" cy="384048"/>
           </a:xfrm>
           <a:prstGeom prst="rect">
             <a:avLst/>
@@ -15593,18 +16139,18 @@
       </p:sp>
       <p:sp>
         <p:nvSpPr>
-          <p:cNvPr id="38" name="Shape 36"/>
-          <p:cNvSpPr/>
-          <p:nvPr/>
-        </p:nvSpPr>
-        <p:spPr>
-          <a:xfrm>
-            <a:off x="3639312" y="4169664"/>
-            <a:ext cx="685800" cy="475488"/>
+          <p:cNvPr id="44" name="Shape 42"/>
+          <p:cNvSpPr/>
+          <p:nvPr/>
+        </p:nvSpPr>
+        <p:spPr>
+          <a:xfrm>
+            <a:off x="2831592" y="4169664"/>
+            <a:ext cx="685800" cy="384048"/>
           </a:xfrm>
           <a:prstGeom prst="rect">
             <a:avLst>
-              <a:gd name="adj" fmla="val 7692"/>
+              <a:gd name="adj" fmla="val 9524"/>
             </a:avLst>
           </a:prstGeom>
           <a:solidFill>
@@ -15620,14 +16166,14 @@
       </p:sp>
       <p:sp>
         <p:nvSpPr>
-          <p:cNvPr id="39" name="Text 37"/>
-          <p:cNvSpPr/>
-          <p:nvPr/>
-        </p:nvSpPr>
-        <p:spPr>
-          <a:xfrm>
-            <a:off x="3639312" y="4169664"/>
-            <a:ext cx="685800" cy="475488"/>
+          <p:cNvPr id="45" name="Text 43"/>
+          <p:cNvSpPr/>
+          <p:nvPr/>
+        </p:nvSpPr>
+        <p:spPr>
+          <a:xfrm>
+            <a:off x="2831592" y="4169664"/>
+            <a:ext cx="685800" cy="384048"/>
           </a:xfrm>
           <a:prstGeom prst="rect">
             <a:avLst/>
@@ -15659,18 +16205,18 @@
       </p:sp>
       <p:sp>
         <p:nvSpPr>
-          <p:cNvPr id="40" name="Shape 38"/>
-          <p:cNvSpPr/>
-          <p:nvPr/>
-        </p:nvSpPr>
-        <p:spPr>
-          <a:xfrm>
-            <a:off x="4850892" y="4169664"/>
-            <a:ext cx="685800" cy="475488"/>
+          <p:cNvPr id="46" name="Shape 44"/>
+          <p:cNvSpPr/>
+          <p:nvPr/>
+        </p:nvSpPr>
+        <p:spPr>
+          <a:xfrm>
+            <a:off x="3639312" y="4169664"/>
+            <a:ext cx="685800" cy="384048"/>
           </a:xfrm>
           <a:prstGeom prst="rect">
             <a:avLst>
-              <a:gd name="adj" fmla="val 7692"/>
+              <a:gd name="adj" fmla="val 9524"/>
             </a:avLst>
           </a:prstGeom>
           <a:solidFill>
@@ -15686,14 +16232,14 @@
       </p:sp>
       <p:sp>
         <p:nvSpPr>
-          <p:cNvPr id="41" name="Text 39"/>
-          <p:cNvSpPr/>
-          <p:nvPr/>
-        </p:nvSpPr>
-        <p:spPr>
-          <a:xfrm>
-            <a:off x="4850892" y="4169664"/>
-            <a:ext cx="685800" cy="475488"/>
+          <p:cNvPr id="47" name="Text 45"/>
+          <p:cNvSpPr/>
+          <p:nvPr/>
+        </p:nvSpPr>
+        <p:spPr>
+          <a:xfrm>
+            <a:off x="3639312" y="4169664"/>
+            <a:ext cx="685800" cy="384048"/>
           </a:xfrm>
           <a:prstGeom prst="rect">
             <a:avLst/>
@@ -15725,18 +16271,18 @@
       </p:sp>
       <p:sp>
         <p:nvSpPr>
-          <p:cNvPr id="42" name="Shape 40"/>
-          <p:cNvSpPr/>
-          <p:nvPr/>
-        </p:nvSpPr>
-        <p:spPr>
-          <a:xfrm>
-            <a:off x="6062472" y="4169664"/>
-            <a:ext cx="685800" cy="475488"/>
+          <p:cNvPr id="48" name="Shape 46"/>
+          <p:cNvSpPr/>
+          <p:nvPr/>
+        </p:nvSpPr>
+        <p:spPr>
+          <a:xfrm>
+            <a:off x="4447032" y="4169664"/>
+            <a:ext cx="685800" cy="384048"/>
           </a:xfrm>
           <a:prstGeom prst="rect">
             <a:avLst>
-              <a:gd name="adj" fmla="val 7692"/>
+              <a:gd name="adj" fmla="val 9524"/>
             </a:avLst>
           </a:prstGeom>
           <a:solidFill>
@@ -15752,14 +16298,14 @@
       </p:sp>
       <p:sp>
         <p:nvSpPr>
-          <p:cNvPr id="43" name="Text 41"/>
-          <p:cNvSpPr/>
-          <p:nvPr/>
-        </p:nvSpPr>
-        <p:spPr>
-          <a:xfrm>
-            <a:off x="6062472" y="4169664"/>
-            <a:ext cx="685800" cy="475488"/>
+          <p:cNvPr id="49" name="Text 47"/>
+          <p:cNvSpPr/>
+          <p:nvPr/>
+        </p:nvSpPr>
+        <p:spPr>
+          <a:xfrm>
+            <a:off x="4447032" y="4169664"/>
+            <a:ext cx="685800" cy="384048"/>
           </a:xfrm>
           <a:prstGeom prst="rect">
             <a:avLst/>
@@ -15791,18 +16337,18 @@
       </p:sp>
       <p:sp>
         <p:nvSpPr>
-          <p:cNvPr id="44" name="Shape 42"/>
-          <p:cNvSpPr/>
-          <p:nvPr/>
-        </p:nvSpPr>
-        <p:spPr>
-          <a:xfrm>
-            <a:off x="7274052" y="4169664"/>
-            <a:ext cx="685800" cy="475488"/>
+          <p:cNvPr id="50" name="Shape 48"/>
+          <p:cNvSpPr/>
+          <p:nvPr/>
+        </p:nvSpPr>
+        <p:spPr>
+          <a:xfrm>
+            <a:off x="5254752" y="4169664"/>
+            <a:ext cx="685800" cy="384048"/>
           </a:xfrm>
           <a:prstGeom prst="rect">
             <a:avLst>
-              <a:gd name="adj" fmla="val 7692"/>
+              <a:gd name="adj" fmla="val 9524"/>
             </a:avLst>
           </a:prstGeom>
           <a:solidFill>
@@ -15818,14 +16364,14 @@
       </p:sp>
       <p:sp>
         <p:nvSpPr>
-          <p:cNvPr id="45" name="Text 43"/>
-          <p:cNvSpPr/>
-          <p:nvPr/>
-        </p:nvSpPr>
-        <p:spPr>
-          <a:xfrm>
-            <a:off x="7274052" y="4169664"/>
-            <a:ext cx="685800" cy="475488"/>
+          <p:cNvPr id="51" name="Text 49"/>
+          <p:cNvSpPr/>
+          <p:nvPr/>
+        </p:nvSpPr>
+        <p:spPr>
+          <a:xfrm>
+            <a:off x="5254752" y="4169664"/>
+            <a:ext cx="685800" cy="384048"/>
           </a:xfrm>
           <a:prstGeom prst="rect">
             <a:avLst/>
@@ -15852,6 +16398,243 @@
               <a:t>ear</a:t>
             </a:r>
             <a:endParaRPr lang="en-US" sz="900" dirty="0"/>
+          </a:p>
+        </p:txBody>
+      </p:sp>
+      <p:sp>
+        <p:nvSpPr>
+          <p:cNvPr id="52" name="Shape 50"/>
+          <p:cNvSpPr/>
+          <p:nvPr/>
+        </p:nvSpPr>
+        <p:spPr>
+          <a:xfrm>
+            <a:off x="6062472" y="4169664"/>
+            <a:ext cx="685800" cy="384048"/>
+          </a:xfrm>
+          <a:prstGeom prst="rect">
+            <a:avLst>
+              <a:gd name="adj" fmla="val 9524"/>
+            </a:avLst>
+          </a:prstGeom>
+          <a:solidFill>
+            <a:srgbClr val="FFFFFF"/>
+          </a:solidFill>
+          <a:ln w="12700">
+            <a:solidFill>
+              <a:srgbClr val="DB2777"/>
+            </a:solidFill>
+            <a:prstDash val="solid"/>
+          </a:ln>
+        </p:spPr>
+      </p:sp>
+      <p:sp>
+        <p:nvSpPr>
+          <p:cNvPr id="53" name="Text 51"/>
+          <p:cNvSpPr/>
+          <p:nvPr/>
+        </p:nvSpPr>
+        <p:spPr>
+          <a:xfrm>
+            <a:off x="6062472" y="4169664"/>
+            <a:ext cx="685800" cy="384048"/>
+          </a:xfrm>
+          <a:prstGeom prst="rect">
+            <a:avLst/>
+          </a:prstGeom>
+          <a:noFill/>
+          <a:ln/>
+        </p:spPr>
+        <p:txBody>
+          <a:bodyPr wrap="square" lIns="0" tIns="0" rIns="0" bIns="0" rtlCol="0" anchor="ctr"/>
+          <a:lstStyle/>
+          <a:p>
+            <a:pPr algn="ctr" indent="0" marL="0">
+              <a:buNone/>
+            </a:pPr>
+            <a:r>
+              <a:rPr lang="en-US" sz="900" b="1" dirty="0">
+                <a:solidFill>
+                  <a:srgbClr val="9D174D"/>
+                </a:solidFill>
+                <a:latin typeface="Trebuchet MS" pitchFamily="34" charset="0"/>
+                <a:ea typeface="Trebuchet MS" pitchFamily="34" charset="-122"/>
+                <a:cs typeface="Trebuchet MS" pitchFamily="34" charset="-120"/>
+              </a:rPr>
+              <a:t>a</a:t>
+            </a:r>
+            <a:endParaRPr lang="en-US" sz="900" dirty="0"/>
+          </a:p>
+        </p:txBody>
+      </p:sp>
+      <p:sp>
+        <p:nvSpPr>
+          <p:cNvPr id="54" name="Shape 52"/>
+          <p:cNvSpPr/>
+          <p:nvPr/>
+        </p:nvSpPr>
+        <p:spPr>
+          <a:xfrm>
+            <a:off x="6870192" y="4169664"/>
+            <a:ext cx="685800" cy="384048"/>
+          </a:xfrm>
+          <a:prstGeom prst="rect">
+            <a:avLst>
+              <a:gd name="adj" fmla="val 9524"/>
+            </a:avLst>
+          </a:prstGeom>
+          <a:solidFill>
+            <a:srgbClr val="FFFFFF"/>
+          </a:solidFill>
+          <a:ln w="12700">
+            <a:solidFill>
+              <a:srgbClr val="DB2777"/>
+            </a:solidFill>
+            <a:prstDash val="solid"/>
+          </a:ln>
+        </p:spPr>
+      </p:sp>
+      <p:sp>
+        <p:nvSpPr>
+          <p:cNvPr id="55" name="Text 53"/>
+          <p:cNvSpPr/>
+          <p:nvPr/>
+        </p:nvSpPr>
+        <p:spPr>
+          <a:xfrm>
+            <a:off x="6870192" y="4169664"/>
+            <a:ext cx="685800" cy="384048"/>
+          </a:xfrm>
+          <a:prstGeom prst="rect">
+            <a:avLst/>
+          </a:prstGeom>
+          <a:noFill/>
+          <a:ln/>
+        </p:spPr>
+        <p:txBody>
+          <a:bodyPr wrap="square" lIns="0" tIns="0" rIns="0" bIns="0" rtlCol="0" anchor="ctr"/>
+          <a:lstStyle/>
+          <a:p>
+            <a:pPr algn="ctr" indent="0" marL="0">
+              <a:buNone/>
+            </a:pPr>
+            <a:r>
+              <a:rPr lang="en-US" sz="900" b="1" dirty="0">
+                <a:solidFill>
+                  <a:srgbClr val="9D174D"/>
+                </a:solidFill>
+                <a:latin typeface="Trebuchet MS" pitchFamily="34" charset="0"/>
+                <a:ea typeface="Trebuchet MS" pitchFamily="34" charset="-122"/>
+                <a:cs typeface="Trebuchet MS" pitchFamily="34" charset="-120"/>
+              </a:rPr>
+              <a:t>n</a:t>
+            </a:r>
+            <a:endParaRPr lang="en-US" sz="900" dirty="0"/>
+          </a:p>
+        </p:txBody>
+      </p:sp>
+      <p:sp>
+        <p:nvSpPr>
+          <p:cNvPr id="56" name="Shape 54"/>
+          <p:cNvSpPr/>
+          <p:nvPr/>
+        </p:nvSpPr>
+        <p:spPr>
+          <a:xfrm>
+            <a:off x="7677912" y="4169664"/>
+            <a:ext cx="685800" cy="384048"/>
+          </a:xfrm>
+          <a:prstGeom prst="rect">
+            <a:avLst>
+              <a:gd name="adj" fmla="val 9524"/>
+            </a:avLst>
+          </a:prstGeom>
+          <a:solidFill>
+            <a:srgbClr val="FFFFFF"/>
+          </a:solidFill>
+          <a:ln w="12700">
+            <a:solidFill>
+              <a:srgbClr val="DB2777"/>
+            </a:solidFill>
+            <a:prstDash val="solid"/>
+          </a:ln>
+        </p:spPr>
+      </p:sp>
+      <p:sp>
+        <p:nvSpPr>
+          <p:cNvPr id="57" name="Text 55"/>
+          <p:cNvSpPr/>
+          <p:nvPr/>
+        </p:nvSpPr>
+        <p:spPr>
+          <a:xfrm>
+            <a:off x="7677912" y="4169664"/>
+            <a:ext cx="685800" cy="384048"/>
+          </a:xfrm>
+          <a:prstGeom prst="rect">
+            <a:avLst/>
+          </a:prstGeom>
+          <a:noFill/>
+          <a:ln/>
+        </p:spPr>
+        <p:txBody>
+          <a:bodyPr wrap="square" lIns="0" tIns="0" rIns="0" bIns="0" rtlCol="0" anchor="ctr"/>
+          <a:lstStyle/>
+          <a:p>
+            <a:pPr algn="ctr" indent="0" marL="0">
+              <a:buNone/>
+            </a:pPr>
+            <a:r>
+              <a:rPr lang="en-US" sz="900" b="1" dirty="0">
+                <a:solidFill>
+                  <a:srgbClr val="9D174D"/>
+                </a:solidFill>
+                <a:latin typeface="Trebuchet MS" pitchFamily="34" charset="0"/>
+                <a:ea typeface="Trebuchet MS" pitchFamily="34" charset="-122"/>
+                <a:cs typeface="Trebuchet MS" pitchFamily="34" charset="-120"/>
+              </a:rPr>
+              <a:t>ce</a:t>
+            </a:r>
+            <a:endParaRPr lang="en-US" sz="900" dirty="0"/>
+          </a:p>
+        </p:txBody>
+      </p:sp>
+      <p:sp>
+        <p:nvSpPr>
+          <p:cNvPr id="58" name="Text 56"/>
+          <p:cNvSpPr/>
+          <p:nvPr/>
+        </p:nvSpPr>
+        <p:spPr>
+          <a:xfrm>
+            <a:off x="7677912" y="4572000"/>
+            <a:ext cx="685800" cy="219456"/>
+          </a:xfrm>
+          <a:prstGeom prst="rect">
+            <a:avLst/>
+          </a:prstGeom>
+          <a:noFill/>
+          <a:ln/>
+        </p:spPr>
+        <p:txBody>
+          <a:bodyPr wrap="square" lIns="0" tIns="0" rIns="0" bIns="0" rtlCol="0" anchor="t"/>
+          <a:lstStyle/>
+          <a:p>
+            <a:pPr algn="ctr" indent="0" marL="0">
+              <a:buNone/>
+            </a:pPr>
+            <a:r>
+              <a:rPr lang="en-US" sz="750" i="1" dirty="0">
+                <a:solidFill>
+                  <a:srgbClr val="94A3B8"/>
+                </a:solidFill>
+                <a:latin typeface="Calibri" pitchFamily="34" charset="0"/>
+                <a:ea typeface="Calibri" pitchFamily="34" charset="-122"/>
+                <a:cs typeface="Calibri" pitchFamily="34" charset="-120"/>
+              </a:rPr>
+              <a:t>/s/</a:t>
+            </a:r>
+            <a:endParaRPr lang="en-US" sz="750" dirty="0"/>
           </a:p>
         </p:txBody>
       </p:sp>
@@ -17206,7 +17989,7 @@
                 <a:ea typeface="Calibri" pitchFamily="34" charset="-122"/>
                 <a:cs typeface="Calibri" pitchFamily="34" charset="-120"/>
               </a:rPr>
-              <a:t> was frightening, but it would </a:t>
+              <a:t> was frightening; it would </a:t>
             </a:r>
             <a:pPr algn="l" indent="0" marL="0">
               <a:buNone/>
@@ -17223,7 +18006,7 @@
                 <a:ea typeface="Calibri" pitchFamily="34" charset="-122"/>
                 <a:cs typeface="Calibri" pitchFamily="34" charset="-120"/>
               </a:rPr>
-              <a:t>disappear</a:t>
+              <a:t>appear</a:t>
             </a:r>
             <a:pPr algn="l" indent="0" marL="0">
               <a:buNone/>
@@ -17237,7 +18020,7 @@
                 <a:ea typeface="Calibri" pitchFamily="34" charset="-122"/>
                 <a:cs typeface="Calibri" pitchFamily="34" charset="-120"/>
               </a:rPr>
-              <a:t> at dawn and </a:t>
+              <a:t> suddenly, then vanish into the </a:t>
             </a:r>
             <a:pPr algn="l" indent="0" marL="0">
               <a:buNone/>
@@ -17254,7 +18037,7 @@
                 <a:ea typeface="Calibri" pitchFamily="34" charset="-122"/>
                 <a:cs typeface="Calibri" pitchFamily="34" charset="-120"/>
               </a:rPr>
-              <a:t>reappear</a:t>
+              <a:t>appearing</a:t>
             </a:r>
             <a:pPr algn="l" indent="0" marL="0">
               <a:buNone/>
@@ -17268,7 +18051,7 @@
                 <a:ea typeface="Calibri" pitchFamily="34" charset="-122"/>
                 <a:cs typeface="Calibri" pitchFamily="34" charset="-120"/>
               </a:rPr>
-              <a:t> the next night.</a:t>
+              <a:t> mist.</a:t>
             </a:r>
             <a:endParaRPr lang="en-US" sz="1800" dirty="0"/>
           </a:p>
@@ -17551,7 +18334,7 @@
                 <a:ea typeface="Trebuchet MS" pitchFamily="34" charset="-122"/>
                 <a:cs typeface="Trebuchet MS" pitchFamily="34" charset="-120"/>
               </a:rPr>
-              <a:t>disappear</a:t>
+              <a:t>appear</a:t>
             </a:r>
             <a:endParaRPr lang="en-US" sz="1400" dirty="0"/>
           </a:p>
@@ -17679,7 +18462,7 @@
                 <a:ea typeface="Trebuchet MS" pitchFamily="34" charset="-122"/>
                 <a:cs typeface="Trebuchet MS" pitchFamily="34" charset="-120"/>
               </a:rPr>
-              <a:t>reappear</a:t>
+              <a:t>appearing</a:t>
             </a:r>
             <a:endParaRPr lang="en-US" sz="1400" dirty="0"/>
           </a:p>
@@ -22801,7 +23584,7 @@
                 <a:ea typeface="Trebuchet MS" pitchFamily="34" charset="-122"/>
                 <a:cs typeface="Trebuchet MS" pitchFamily="34" charset="-120"/>
               </a:rPr>
-              <a:t>disappear</a:t>
+              <a:t>appear</a:t>
             </a:r>
             <a:endParaRPr lang="en-US" sz="2800" dirty="0"/>
           </a:p>
@@ -23628,7 +24411,7 @@
                 <a:ea typeface="Trebuchet MS" pitchFamily="34" charset="-122"/>
                 <a:cs typeface="Trebuchet MS" pitchFamily="34" charset="-120"/>
               </a:rPr>
-              <a:t>disappear</a:t>
+              <a:t>appear</a:t>
             </a:r>
             <a:endParaRPr lang="en-US" sz="2800" dirty="0"/>
           </a:p>
@@ -23708,7 +24491,7 @@
         </p:nvSpPr>
         <p:spPr>
           <a:xfrm>
-            <a:off x="2938272" y="2258568"/>
+            <a:off x="4370832" y="2258568"/>
             <a:ext cx="1828800" cy="292608"/>
           </a:xfrm>
           <a:prstGeom prst="rect">
@@ -23717,11 +24500,11 @@
             </a:avLst>
           </a:prstGeom>
           <a:solidFill>
-            <a:srgbClr val="DDD6FE"/>
+            <a:srgbClr val="CCFBF1"/>
           </a:solidFill>
           <a:ln w="19050">
             <a:solidFill>
-              <a:srgbClr val="7C3AED"/>
+              <a:srgbClr val="0D9488"/>
             </a:solidFill>
             <a:prstDash val="solid"/>
           </a:ln>
@@ -23742,7 +24525,7 @@
         </p:nvSpPr>
         <p:spPr>
           <a:xfrm>
-            <a:off x="2938272" y="2258568"/>
+            <a:off x="4370832" y="2258568"/>
             <a:ext cx="1828800" cy="292608"/>
           </a:xfrm>
           <a:prstGeom prst="rect">
@@ -23761,13 +24544,13 @@
             <a:r>
               <a:rPr lang="en-US" sz="1300" b="1" dirty="0">
                 <a:solidFill>
-                  <a:srgbClr val="4C1D95"/>
+                  <a:srgbClr val="0F766E"/>
                 </a:solidFill>
                 <a:latin typeface="Trebuchet MS" pitchFamily="34" charset="0"/>
                 <a:ea typeface="Trebuchet MS" pitchFamily="34" charset="-122"/>
                 <a:cs typeface="Trebuchet MS" pitchFamily="34" charset="-120"/>
               </a:rPr>
-              <a:t>dis</a:t>
+              <a:t>appear</a:t>
             </a:r>
             <a:endParaRPr lang="en-US" sz="1300" dirty="0"/>
           </a:p>
@@ -23781,7 +24564,7 @@
         </p:nvSpPr>
         <p:spPr>
           <a:xfrm>
-            <a:off x="2938272" y="2569464"/>
+            <a:off x="4370832" y="2569464"/>
             <a:ext cx="1828800" cy="201168"/>
           </a:xfrm>
           <a:prstGeom prst="rect">
@@ -23806,7 +24589,7 @@
                 <a:ea typeface="Calibri" pitchFamily="34" charset="-122"/>
                 <a:cs typeface="Calibri" pitchFamily="34" charset="-120"/>
               </a:rPr>
-              <a:t>not, away, opposite</a:t>
+              <a:t>to come into sight</a:t>
             </a:r>
             <a:endParaRPr lang="en-US" sz="850" dirty="0"/>
           </a:p>
@@ -23820,30 +24603,23 @@
         </p:nvSpPr>
         <p:spPr>
           <a:xfrm>
-            <a:off x="5803392" y="2258568"/>
-            <a:ext cx="1828800" cy="292608"/>
+            <a:off x="365760" y="3273552"/>
+            <a:ext cx="1371600" cy="658368"/>
           </a:xfrm>
           <a:prstGeom prst="rect">
             <a:avLst>
-              <a:gd name="adj" fmla="val 25000"/>
+              <a:gd name="adj" fmla="val 8333"/>
             </a:avLst>
           </a:prstGeom>
           <a:solidFill>
-            <a:srgbClr val="CCFBF1"/>
-          </a:solidFill>
-          <a:ln w="19050">
-            <a:solidFill>
-              <a:srgbClr val="0D9488"/>
-            </a:solidFill>
-            <a:prstDash val="solid"/>
-          </a:ln>
-          <a:effectLst>
-            <a:outerShdw sx="100000" sy="100000" kx="0" ky="0" algn="bl" rotWithShape="0" blurRad="101600" dist="38100" dir="8100000">
-              <a:srgbClr val="000000">
-                <a:alpha val="12000"/>
-              </a:srgbClr>
-            </a:outerShdw>
-          </a:effectLst>
+            <a:srgbClr val="E2E8F0"/>
+          </a:solidFill>
+          <a:ln w="12700">
+            <a:solidFill>
+              <a:srgbClr val="E2E8F0"/>
+            </a:solidFill>
+            <a:prstDash val="solid"/>
+          </a:ln>
         </p:spPr>
       </p:sp>
       <p:sp>
@@ -23854,90 +24630,117 @@
         </p:nvSpPr>
         <p:spPr>
           <a:xfrm>
-            <a:off x="5803392" y="2258568"/>
-            <a:ext cx="1828800" cy="292608"/>
-          </a:xfrm>
-          <a:prstGeom prst="rect">
-            <a:avLst/>
-          </a:prstGeom>
-          <a:noFill/>
-          <a:ln/>
-        </p:spPr>
-        <p:txBody>
-          <a:bodyPr wrap="square" lIns="0" tIns="0" rIns="0" bIns="0" rtlCol="0" anchor="ctr"/>
-          <a:lstStyle/>
-          <a:p>
-            <a:pPr algn="ctr" indent="0" marL="0">
-              <a:buNone/>
-            </a:pPr>
-            <a:r>
-              <a:rPr lang="en-US" sz="1300" b="1" dirty="0">
-                <a:solidFill>
-                  <a:srgbClr val="0F766E"/>
+            <a:off x="365760" y="3273552"/>
+            <a:ext cx="1371600" cy="658368"/>
+          </a:xfrm>
+          <a:prstGeom prst="rect">
+            <a:avLst/>
+          </a:prstGeom>
+          <a:noFill/>
+          <a:ln/>
+        </p:spPr>
+        <p:txBody>
+          <a:bodyPr wrap="square" lIns="0" tIns="0" rIns="0" bIns="0" rtlCol="0" anchor="ctr"/>
+          <a:lstStyle/>
+          <a:p>
+            <a:pPr algn="ctr" indent="0" marL="0">
+              <a:buNone/>
+            </a:pPr>
+            <a:r>
+              <a:rPr lang="en-US" sz="1100" b="1" dirty="0">
+                <a:solidFill>
+                  <a:srgbClr val="475569"/>
                 </a:solidFill>
                 <a:latin typeface="Trebuchet MS" pitchFamily="34" charset="0"/>
                 <a:ea typeface="Trebuchet MS" pitchFamily="34" charset="-122"/>
                 <a:cs typeface="Trebuchet MS" pitchFamily="34" charset="-120"/>
               </a:rPr>
-              <a:t>appear</a:t>
-            </a:r>
-            <a:endParaRPr lang="en-US" sz="1300" dirty="0"/>
-          </a:p>
-        </p:txBody>
-      </p:sp>
-      <p:sp>
-        <p:nvSpPr>
-          <p:cNvPr id="21" name="Text 19"/>
-          <p:cNvSpPr/>
-          <p:nvPr/>
-        </p:nvSpPr>
-        <p:spPr>
-          <a:xfrm>
-            <a:off x="5803392" y="2569464"/>
-            <a:ext cx="1828800" cy="201168"/>
-          </a:xfrm>
-          <a:prstGeom prst="rect">
-            <a:avLst/>
-          </a:prstGeom>
-          <a:noFill/>
-          <a:ln/>
-        </p:spPr>
-        <p:txBody>
-          <a:bodyPr wrap="square" lIns="0" tIns="0" rIns="0" bIns="0" rtlCol="0" anchor="t"/>
-          <a:lstStyle/>
-          <a:p>
-            <a:pPr algn="ctr" indent="0" marL="0">
-              <a:buNone/>
-            </a:pPr>
-            <a:r>
-              <a:rPr lang="en-US" sz="850" dirty="0">
-                <a:solidFill>
-                  <a:srgbClr val="475569"/>
+              <a:t>Syllables</a:t>
+            </a:r>
+            <a:endParaRPr lang="en-US" sz="1100" dirty="0"/>
+          </a:p>
+        </p:txBody>
+      </p:sp>
+      <p:sp>
+        <p:nvSpPr>
+          <p:cNvPr id="21" name="Shape 19"/>
+          <p:cNvSpPr/>
+          <p:nvPr/>
+        </p:nvSpPr>
+        <p:spPr>
+          <a:xfrm>
+            <a:off x="1874520" y="3273552"/>
+            <a:ext cx="6903720" cy="658368"/>
+          </a:xfrm>
+          <a:prstGeom prst="rect">
+            <a:avLst>
+              <a:gd name="adj" fmla="val 8333"/>
+            </a:avLst>
+          </a:prstGeom>
+          <a:solidFill>
+            <a:srgbClr val="F8FAFC"/>
+          </a:solidFill>
+          <a:ln w="12700">
+            <a:solidFill>
+              <a:srgbClr val="E2E8F0"/>
+            </a:solidFill>
+            <a:prstDash val="dash"/>
+          </a:ln>
+        </p:spPr>
+      </p:sp>
+      <p:sp>
+        <p:nvSpPr>
+          <p:cNvPr id="22" name="Text 20"/>
+          <p:cNvSpPr/>
+          <p:nvPr/>
+        </p:nvSpPr>
+        <p:spPr>
+          <a:xfrm>
+            <a:off x="1874520" y="3273552"/>
+            <a:ext cx="6903720" cy="658368"/>
+          </a:xfrm>
+          <a:prstGeom prst="rect">
+            <a:avLst/>
+          </a:prstGeom>
+          <a:noFill/>
+          <a:ln/>
+        </p:spPr>
+        <p:txBody>
+          <a:bodyPr wrap="square" rtlCol="0" anchor="ctr"/>
+          <a:lstStyle/>
+          <a:p>
+            <a:pPr algn="ctr" indent="0" marL="0">
+              <a:buNone/>
+            </a:pPr>
+            <a:r>
+              <a:rPr lang="en-US" sz="1100" i="1" dirty="0">
+                <a:solidFill>
+                  <a:srgbClr val="CBD5E1"/>
                 </a:solidFill>
                 <a:latin typeface="Calibri" pitchFamily="34" charset="0"/>
                 <a:ea typeface="Calibri" pitchFamily="34" charset="-122"/>
                 <a:cs typeface="Calibri" pitchFamily="34" charset="-120"/>
               </a:rPr>
-              <a:t>to come into sight</a:t>
-            </a:r>
-            <a:endParaRPr lang="en-US" sz="850" dirty="0"/>
-          </a:p>
-        </p:txBody>
-      </p:sp>
-      <p:sp>
-        <p:nvSpPr>
-          <p:cNvPr id="22" name="Shape 20"/>
-          <p:cNvSpPr/>
-          <p:nvPr/>
-        </p:nvSpPr>
-        <p:spPr>
-          <a:xfrm>
-            <a:off x="365760" y="3273552"/>
-            <a:ext cx="1371600" cy="658368"/>
+              <a:t>Write here...</a:t>
+            </a:r>
+            <a:endParaRPr lang="en-US" sz="1100" dirty="0"/>
+          </a:p>
+        </p:txBody>
+      </p:sp>
+      <p:sp>
+        <p:nvSpPr>
+          <p:cNvPr id="23" name="Shape 21"/>
+          <p:cNvSpPr/>
+          <p:nvPr/>
+        </p:nvSpPr>
+        <p:spPr>
+          <a:xfrm>
+            <a:off x="365760" y="4096512"/>
+            <a:ext cx="1371600" cy="804672"/>
           </a:xfrm>
           <a:prstGeom prst="rect">
             <a:avLst>
-              <a:gd name="adj" fmla="val 8333"/>
+              <a:gd name="adj" fmla="val 6818"/>
             </a:avLst>
           </a:prstGeom>
           <a:solidFill>
@@ -23953,14 +24756,14 @@
       </p:sp>
       <p:sp>
         <p:nvSpPr>
-          <p:cNvPr id="23" name="Text 21"/>
-          <p:cNvSpPr/>
-          <p:nvPr/>
-        </p:nvSpPr>
-        <p:spPr>
-          <a:xfrm>
-            <a:off x="365760" y="3273552"/>
-            <a:ext cx="1371600" cy="658368"/>
+          <p:cNvPr id="24" name="Text 22"/>
+          <p:cNvSpPr/>
+          <p:nvPr/>
+        </p:nvSpPr>
+        <p:spPr>
+          <a:xfrm>
+            <a:off x="365760" y="4096512"/>
+            <a:ext cx="1371600" cy="804672"/>
           </a:xfrm>
           <a:prstGeom prst="rect">
             <a:avLst/>
@@ -23984,7 +24787,7 @@
                 <a:ea typeface="Trebuchet MS" pitchFamily="34" charset="-122"/>
                 <a:cs typeface="Trebuchet MS" pitchFamily="34" charset="-120"/>
               </a:rPr>
-              <a:t>Syllables</a:t>
+              <a:t>Phonemes</a:t>
             </a:r>
             <a:endParaRPr lang="en-US" sz="1100" dirty="0"/>
           </a:p>
@@ -23992,80 +24795,14 @@
       </p:sp>
       <p:sp>
         <p:nvSpPr>
-          <p:cNvPr id="24" name="Shape 22"/>
-          <p:cNvSpPr/>
-          <p:nvPr/>
-        </p:nvSpPr>
-        <p:spPr>
-          <a:xfrm>
-            <a:off x="1874520" y="3273552"/>
-            <a:ext cx="6903720" cy="658368"/>
-          </a:xfrm>
-          <a:prstGeom prst="rect">
-            <a:avLst>
-              <a:gd name="adj" fmla="val 8333"/>
-            </a:avLst>
-          </a:prstGeom>
-          <a:solidFill>
-            <a:srgbClr val="F8FAFC"/>
-          </a:solidFill>
-          <a:ln w="12700">
-            <a:solidFill>
-              <a:srgbClr val="E2E8F0"/>
-            </a:solidFill>
-            <a:prstDash val="dash"/>
-          </a:ln>
-        </p:spPr>
-      </p:sp>
-      <p:sp>
-        <p:nvSpPr>
-          <p:cNvPr id="25" name="Text 23"/>
-          <p:cNvSpPr/>
-          <p:nvPr/>
-        </p:nvSpPr>
-        <p:spPr>
-          <a:xfrm>
-            <a:off x="1874520" y="3273552"/>
-            <a:ext cx="6903720" cy="658368"/>
-          </a:xfrm>
-          <a:prstGeom prst="rect">
-            <a:avLst/>
-          </a:prstGeom>
-          <a:noFill/>
-          <a:ln/>
-        </p:spPr>
-        <p:txBody>
-          <a:bodyPr wrap="square" rtlCol="0" anchor="ctr"/>
-          <a:lstStyle/>
-          <a:p>
-            <a:pPr algn="ctr" indent="0" marL="0">
-              <a:buNone/>
-            </a:pPr>
-            <a:r>
-              <a:rPr lang="en-US" sz="1100" i="1" dirty="0">
-                <a:solidFill>
-                  <a:srgbClr val="CBD5E1"/>
-                </a:solidFill>
-                <a:latin typeface="Calibri" pitchFamily="34" charset="0"/>
-                <a:ea typeface="Calibri" pitchFamily="34" charset="-122"/>
-                <a:cs typeface="Calibri" pitchFamily="34" charset="-120"/>
-              </a:rPr>
-              <a:t>Write here...</a:t>
-            </a:r>
-            <a:endParaRPr lang="en-US" sz="1100" dirty="0"/>
-          </a:p>
-        </p:txBody>
-      </p:sp>
-      <p:sp>
-        <p:nvSpPr>
-          <p:cNvPr id="26" name="Shape 24"/>
-          <p:cNvSpPr/>
-          <p:nvPr/>
-        </p:nvSpPr>
-        <p:spPr>
-          <a:xfrm>
-            <a:off x="365760" y="4096512"/>
-            <a:ext cx="1371600" cy="804672"/>
+          <p:cNvPr id="25" name="Shape 23"/>
+          <p:cNvSpPr/>
+          <p:nvPr/>
+        </p:nvSpPr>
+        <p:spPr>
+          <a:xfrm>
+            <a:off x="1874520" y="4096512"/>
+            <a:ext cx="6903720" cy="804672"/>
           </a:xfrm>
           <a:prstGeom prst="rect">
             <a:avLst>
@@ -24073,85 +24810,19 @@
             </a:avLst>
           </a:prstGeom>
           <a:solidFill>
-            <a:srgbClr val="E2E8F0"/>
+            <a:srgbClr val="F8FAFC"/>
           </a:solidFill>
           <a:ln w="12700">
             <a:solidFill>
               <a:srgbClr val="E2E8F0"/>
             </a:solidFill>
-            <a:prstDash val="solid"/>
-          </a:ln>
-        </p:spPr>
-      </p:sp>
-      <p:sp>
-        <p:nvSpPr>
-          <p:cNvPr id="27" name="Text 25"/>
-          <p:cNvSpPr/>
-          <p:nvPr/>
-        </p:nvSpPr>
-        <p:spPr>
-          <a:xfrm>
-            <a:off x="365760" y="4096512"/>
-            <a:ext cx="1371600" cy="804672"/>
-          </a:xfrm>
-          <a:prstGeom prst="rect">
-            <a:avLst/>
-          </a:prstGeom>
-          <a:noFill/>
-          <a:ln/>
-        </p:spPr>
-        <p:txBody>
-          <a:bodyPr wrap="square" lIns="0" tIns="0" rIns="0" bIns="0" rtlCol="0" anchor="ctr"/>
-          <a:lstStyle/>
-          <a:p>
-            <a:pPr algn="ctr" indent="0" marL="0">
-              <a:buNone/>
-            </a:pPr>
-            <a:r>
-              <a:rPr lang="en-US" sz="1100" b="1" dirty="0">
-                <a:solidFill>
-                  <a:srgbClr val="475569"/>
-                </a:solidFill>
-                <a:latin typeface="Trebuchet MS" pitchFamily="34" charset="0"/>
-                <a:ea typeface="Trebuchet MS" pitchFamily="34" charset="-122"/>
-                <a:cs typeface="Trebuchet MS" pitchFamily="34" charset="-120"/>
-              </a:rPr>
-              <a:t>Phonemes</a:t>
-            </a:r>
-            <a:endParaRPr lang="en-US" sz="1100" dirty="0"/>
-          </a:p>
-        </p:txBody>
-      </p:sp>
-      <p:sp>
-        <p:nvSpPr>
-          <p:cNvPr id="28" name="Shape 26"/>
-          <p:cNvSpPr/>
-          <p:nvPr/>
-        </p:nvSpPr>
-        <p:spPr>
-          <a:xfrm>
-            <a:off x="1874520" y="4096512"/>
-            <a:ext cx="6903720" cy="804672"/>
-          </a:xfrm>
-          <a:prstGeom prst="rect">
-            <a:avLst>
-              <a:gd name="adj" fmla="val 6818"/>
-            </a:avLst>
-          </a:prstGeom>
-          <a:solidFill>
-            <a:srgbClr val="F8FAFC"/>
-          </a:solidFill>
-          <a:ln w="12700">
-            <a:solidFill>
-              <a:srgbClr val="E2E8F0"/>
-            </a:solidFill>
             <a:prstDash val="dash"/>
           </a:ln>
         </p:spPr>
       </p:sp>
       <p:sp>
         <p:nvSpPr>
-          <p:cNvPr id="29" name="Text 27"/>
+          <p:cNvPr id="26" name="Text 24"/>
           <p:cNvSpPr/>
           <p:nvPr/>
         </p:nvSpPr>
@@ -25332,7 +26003,7 @@
                 <a:ea typeface="Trebuchet MS" pitchFamily="34" charset="-122"/>
                 <a:cs typeface="Trebuchet MS" pitchFamily="34" charset="-120"/>
               </a:rPr>
-              <a:t>disappear</a:t>
+              <a:t>appear</a:t>
             </a:r>
             <a:endParaRPr lang="en-US" sz="2800" dirty="0"/>
           </a:p>
@@ -25412,7 +26083,7 @@
         </p:nvSpPr>
         <p:spPr>
           <a:xfrm>
-            <a:off x="2938272" y="2258568"/>
+            <a:off x="4370832" y="2258568"/>
             <a:ext cx="1828800" cy="292608"/>
           </a:xfrm>
           <a:prstGeom prst="rect">
@@ -25421,11 +26092,11 @@
             </a:avLst>
           </a:prstGeom>
           <a:solidFill>
-            <a:srgbClr val="DDD6FE"/>
+            <a:srgbClr val="CCFBF1"/>
           </a:solidFill>
           <a:ln w="19050">
             <a:solidFill>
-              <a:srgbClr val="7C3AED"/>
+              <a:srgbClr val="0D9488"/>
             </a:solidFill>
             <a:prstDash val="solid"/>
           </a:ln>
@@ -25446,7 +26117,7 @@
         </p:nvSpPr>
         <p:spPr>
           <a:xfrm>
-            <a:off x="2938272" y="2258568"/>
+            <a:off x="4370832" y="2258568"/>
             <a:ext cx="1828800" cy="292608"/>
           </a:xfrm>
           <a:prstGeom prst="rect">
@@ -25465,13 +26136,13 @@
             <a:r>
               <a:rPr lang="en-US" sz="1300" b="1" dirty="0">
                 <a:solidFill>
-                  <a:srgbClr val="4C1D95"/>
+                  <a:srgbClr val="0F766E"/>
                 </a:solidFill>
                 <a:latin typeface="Trebuchet MS" pitchFamily="34" charset="0"/>
                 <a:ea typeface="Trebuchet MS" pitchFamily="34" charset="-122"/>
                 <a:cs typeface="Trebuchet MS" pitchFamily="34" charset="-120"/>
               </a:rPr>
-              <a:t>dis</a:t>
+              <a:t>appear</a:t>
             </a:r>
             <a:endParaRPr lang="en-US" sz="1300" dirty="0"/>
           </a:p>
@@ -25485,7 +26156,7 @@
         </p:nvSpPr>
         <p:spPr>
           <a:xfrm>
-            <a:off x="2938272" y="2569464"/>
+            <a:off x="4370832" y="2569464"/>
             <a:ext cx="1828800" cy="201168"/>
           </a:xfrm>
           <a:prstGeom prst="rect">
@@ -25510,7 +26181,7 @@
                 <a:ea typeface="Calibri" pitchFamily="34" charset="-122"/>
                 <a:cs typeface="Calibri" pitchFamily="34" charset="-120"/>
               </a:rPr>
-              <a:t>not, away, opposite</a:t>
+              <a:t>to come into sight</a:t>
             </a:r>
             <a:endParaRPr lang="en-US" sz="850" dirty="0"/>
           </a:p>
@@ -25524,30 +26195,23 @@
         </p:nvSpPr>
         <p:spPr>
           <a:xfrm>
-            <a:off x="5803392" y="2258568"/>
-            <a:ext cx="1828800" cy="292608"/>
+            <a:off x="365760" y="3273552"/>
+            <a:ext cx="1371600" cy="658368"/>
           </a:xfrm>
           <a:prstGeom prst="rect">
             <a:avLst>
-              <a:gd name="adj" fmla="val 25000"/>
+              <a:gd name="adj" fmla="val 8333"/>
             </a:avLst>
           </a:prstGeom>
           <a:solidFill>
-            <a:srgbClr val="CCFBF1"/>
-          </a:solidFill>
-          <a:ln w="19050">
-            <a:solidFill>
-              <a:srgbClr val="0D9488"/>
-            </a:solidFill>
-            <a:prstDash val="solid"/>
-          </a:ln>
-          <a:effectLst>
-            <a:outerShdw sx="100000" sy="100000" kx="0" ky="0" algn="bl" rotWithShape="0" blurRad="101600" dist="38100" dir="8100000">
-              <a:srgbClr val="000000">
-                <a:alpha val="12000"/>
-              </a:srgbClr>
-            </a:outerShdw>
-          </a:effectLst>
+            <a:srgbClr val="E2E8F0"/>
+          </a:solidFill>
+          <a:ln w="12700">
+            <a:solidFill>
+              <a:srgbClr val="E2E8F0"/>
+            </a:solidFill>
+            <a:prstDash val="solid"/>
+          </a:ln>
         </p:spPr>
       </p:sp>
       <p:sp>
@@ -25558,86 +26222,47 @@
         </p:nvSpPr>
         <p:spPr>
           <a:xfrm>
-            <a:off x="5803392" y="2258568"/>
-            <a:ext cx="1828800" cy="292608"/>
-          </a:xfrm>
-          <a:prstGeom prst="rect">
-            <a:avLst/>
-          </a:prstGeom>
-          <a:noFill/>
-          <a:ln/>
-        </p:spPr>
-        <p:txBody>
-          <a:bodyPr wrap="square" lIns="0" tIns="0" rIns="0" bIns="0" rtlCol="0" anchor="ctr"/>
-          <a:lstStyle/>
-          <a:p>
-            <a:pPr algn="ctr" indent="0" marL="0">
-              <a:buNone/>
-            </a:pPr>
-            <a:r>
-              <a:rPr lang="en-US" sz="1300" b="1" dirty="0">
-                <a:solidFill>
-                  <a:srgbClr val="0F766E"/>
+            <a:off x="365760" y="3273552"/>
+            <a:ext cx="1371600" cy="658368"/>
+          </a:xfrm>
+          <a:prstGeom prst="rect">
+            <a:avLst/>
+          </a:prstGeom>
+          <a:noFill/>
+          <a:ln/>
+        </p:spPr>
+        <p:txBody>
+          <a:bodyPr wrap="square" lIns="0" tIns="0" rIns="0" bIns="0" rtlCol="0" anchor="ctr"/>
+          <a:lstStyle/>
+          <a:p>
+            <a:pPr algn="ctr" indent="0" marL="0">
+              <a:buNone/>
+            </a:pPr>
+            <a:r>
+              <a:rPr lang="en-US" sz="1100" b="1" dirty="0">
+                <a:solidFill>
+                  <a:srgbClr val="475569"/>
                 </a:solidFill>
                 <a:latin typeface="Trebuchet MS" pitchFamily="34" charset="0"/>
                 <a:ea typeface="Trebuchet MS" pitchFamily="34" charset="-122"/>
                 <a:cs typeface="Trebuchet MS" pitchFamily="34" charset="-120"/>
               </a:rPr>
-              <a:t>appear</a:t>
-            </a:r>
-            <a:endParaRPr lang="en-US" sz="1300" dirty="0"/>
-          </a:p>
-        </p:txBody>
-      </p:sp>
-      <p:sp>
-        <p:nvSpPr>
-          <p:cNvPr id="21" name="Text 19"/>
-          <p:cNvSpPr/>
-          <p:nvPr/>
-        </p:nvSpPr>
-        <p:spPr>
-          <a:xfrm>
-            <a:off x="5803392" y="2569464"/>
-            <a:ext cx="1828800" cy="201168"/>
-          </a:xfrm>
-          <a:prstGeom prst="rect">
-            <a:avLst/>
-          </a:prstGeom>
-          <a:noFill/>
-          <a:ln/>
-        </p:spPr>
-        <p:txBody>
-          <a:bodyPr wrap="square" lIns="0" tIns="0" rIns="0" bIns="0" rtlCol="0" anchor="t"/>
-          <a:lstStyle/>
-          <a:p>
-            <a:pPr algn="ctr" indent="0" marL="0">
-              <a:buNone/>
-            </a:pPr>
-            <a:r>
-              <a:rPr lang="en-US" sz="850" dirty="0">
-                <a:solidFill>
-                  <a:srgbClr val="475569"/>
-                </a:solidFill>
-                <a:latin typeface="Calibri" pitchFamily="34" charset="0"/>
-                <a:ea typeface="Calibri" pitchFamily="34" charset="-122"/>
-                <a:cs typeface="Calibri" pitchFamily="34" charset="-120"/>
-              </a:rPr>
-              <a:t>to come into sight</a:t>
-            </a:r>
-            <a:endParaRPr lang="en-US" sz="850" dirty="0"/>
-          </a:p>
-        </p:txBody>
-      </p:sp>
-      <p:sp>
-        <p:nvSpPr>
-          <p:cNvPr id="22" name="Shape 20"/>
-          <p:cNvSpPr/>
-          <p:nvPr/>
-        </p:nvSpPr>
-        <p:spPr>
-          <a:xfrm>
-            <a:off x="365760" y="3273552"/>
-            <a:ext cx="1371600" cy="658368"/>
+              <a:t>Syllables</a:t>
+            </a:r>
+            <a:endParaRPr lang="en-US" sz="1100" dirty="0"/>
+          </a:p>
+        </p:txBody>
+      </p:sp>
+      <p:sp>
+        <p:nvSpPr>
+          <p:cNvPr id="21" name="Shape 19"/>
+          <p:cNvSpPr/>
+          <p:nvPr/>
+        </p:nvSpPr>
+        <p:spPr>
+          <a:xfrm>
+            <a:off x="1874520" y="3273552"/>
+            <a:ext cx="6903720" cy="658368"/>
           </a:xfrm>
           <a:prstGeom prst="rect">
             <a:avLst>
@@ -25645,11 +26270,38 @@
             </a:avLst>
           </a:prstGeom>
           <a:solidFill>
-            <a:srgbClr val="E2E8F0"/>
-          </a:solidFill>
-          <a:ln w="12700">
-            <a:solidFill>
-              <a:srgbClr val="E2E8F0"/>
+            <a:srgbClr val="CCFBF1"/>
+          </a:solidFill>
+          <a:ln w="12700">
+            <a:solidFill>
+              <a:srgbClr val="0D9488"/>
+            </a:solidFill>
+            <a:prstDash val="solid"/>
+          </a:ln>
+        </p:spPr>
+      </p:sp>
+      <p:sp>
+        <p:nvSpPr>
+          <p:cNvPr id="22" name="Shape 20"/>
+          <p:cNvSpPr/>
+          <p:nvPr/>
+        </p:nvSpPr>
+        <p:spPr>
+          <a:xfrm>
+            <a:off x="2999232" y="3364992"/>
+            <a:ext cx="1645920" cy="475488"/>
+          </a:xfrm>
+          <a:prstGeom prst="rect">
+            <a:avLst>
+              <a:gd name="adj" fmla="val 9615"/>
+            </a:avLst>
+          </a:prstGeom>
+          <a:solidFill>
+            <a:srgbClr val="FFFFFF"/>
+          </a:solidFill>
+          <a:ln w="12700">
+            <a:solidFill>
+              <a:srgbClr val="0D9488"/>
             </a:solidFill>
             <a:prstDash val="solid"/>
           </a:ln>
@@ -25663,63 +26315,75 @@
         </p:nvSpPr>
         <p:spPr>
           <a:xfrm>
-            <a:off x="365760" y="3273552"/>
-            <a:ext cx="1371600" cy="658368"/>
-          </a:xfrm>
-          <a:prstGeom prst="rect">
-            <a:avLst/>
-          </a:prstGeom>
-          <a:noFill/>
-          <a:ln/>
-        </p:spPr>
-        <p:txBody>
-          <a:bodyPr wrap="square" lIns="0" tIns="0" rIns="0" bIns="0" rtlCol="0" anchor="ctr"/>
-          <a:lstStyle/>
-          <a:p>
-            <a:pPr algn="ctr" indent="0" marL="0">
-              <a:buNone/>
-            </a:pPr>
-            <a:r>
-              <a:rPr lang="en-US" sz="1100" b="1" dirty="0">
-                <a:solidFill>
-                  <a:srgbClr val="475569"/>
+            <a:off x="2999232" y="3364992"/>
+            <a:ext cx="1645920" cy="475488"/>
+          </a:xfrm>
+          <a:prstGeom prst="rect">
+            <a:avLst/>
+          </a:prstGeom>
+          <a:noFill/>
+          <a:ln/>
+        </p:spPr>
+        <p:txBody>
+          <a:bodyPr wrap="square" lIns="0" tIns="0" rIns="0" bIns="0" rtlCol="0" anchor="ctr"/>
+          <a:lstStyle/>
+          <a:p>
+            <a:pPr algn="ctr" indent="0" marL="0">
+              <a:buNone/>
+            </a:pPr>
+            <a:r>
+              <a:rPr lang="en-US" sz="1400" b="1" dirty="0">
+                <a:solidFill>
+                  <a:srgbClr val="0D9488"/>
                 </a:solidFill>
                 <a:latin typeface="Trebuchet MS" pitchFamily="34" charset="0"/>
                 <a:ea typeface="Trebuchet MS" pitchFamily="34" charset="-122"/>
                 <a:cs typeface="Trebuchet MS" pitchFamily="34" charset="-120"/>
               </a:rPr>
-              <a:t>Syllables</a:t>
-            </a:r>
-            <a:endParaRPr lang="en-US" sz="1100" dirty="0"/>
-          </a:p>
-        </p:txBody>
-      </p:sp>
-      <p:sp>
-        <p:nvSpPr>
-          <p:cNvPr id="24" name="Shape 22"/>
-          <p:cNvSpPr/>
-          <p:nvPr/>
-        </p:nvSpPr>
-        <p:spPr>
-          <a:xfrm>
-            <a:off x="1874520" y="3273552"/>
-            <a:ext cx="6903720" cy="658368"/>
-          </a:xfrm>
-          <a:prstGeom prst="rect">
-            <a:avLst>
-              <a:gd name="adj" fmla="val 8333"/>
-            </a:avLst>
-          </a:prstGeom>
-          <a:solidFill>
-            <a:srgbClr val="CCFBF1"/>
-          </a:solidFill>
-          <a:ln w="12700">
-            <a:solidFill>
-              <a:srgbClr val="0D9488"/>
-            </a:solidFill>
-            <a:prstDash val="solid"/>
-          </a:ln>
-        </p:spPr>
+              <a:t>ap</a:t>
+            </a:r>
+            <a:endParaRPr lang="en-US" sz="1400" dirty="0"/>
+          </a:p>
+        </p:txBody>
+      </p:sp>
+      <p:sp>
+        <p:nvSpPr>
+          <p:cNvPr id="24" name="Text 22"/>
+          <p:cNvSpPr/>
+          <p:nvPr/>
+        </p:nvSpPr>
+        <p:spPr>
+          <a:xfrm>
+            <a:off x="4645152" y="3364992"/>
+            <a:ext cx="1097280" cy="475488"/>
+          </a:xfrm>
+          <a:prstGeom prst="rect">
+            <a:avLst/>
+          </a:prstGeom>
+          <a:noFill/>
+          <a:ln/>
+        </p:spPr>
+        <p:txBody>
+          <a:bodyPr wrap="square" lIns="0" tIns="0" rIns="0" bIns="0" rtlCol="0" anchor="ctr"/>
+          <a:lstStyle/>
+          <a:p>
+            <a:pPr algn="ctr" indent="0" marL="0">
+              <a:buNone/>
+            </a:pPr>
+            <a:r>
+              <a:rPr lang="en-US" sz="1600" b="1" dirty="0">
+                <a:solidFill>
+                  <a:srgbClr val="0D9488"/>
+                </a:solidFill>
+                <a:latin typeface="Trebuchet MS" pitchFamily="34" charset="0"/>
+                <a:ea typeface="Trebuchet MS" pitchFamily="34" charset="-122"/>
+                <a:cs typeface="Trebuchet MS" pitchFamily="34" charset="-120"/>
+              </a:rPr>
+              <a:t>·</a:t>
+            </a:r>
+            <a:endParaRPr lang="en-US" sz="1600" dirty="0"/>
+          </a:p>
+        </p:txBody>
       </p:sp>
       <p:sp>
         <p:nvSpPr>
@@ -25729,7 +26393,7 @@
         </p:nvSpPr>
         <p:spPr>
           <a:xfrm>
-            <a:off x="2313432" y="3364992"/>
+            <a:off x="5742432" y="3364992"/>
             <a:ext cx="1645920" cy="475488"/>
           </a:xfrm>
           <a:prstGeom prst="rect">
@@ -25756,7 +26420,7 @@
         </p:nvSpPr>
         <p:spPr>
           <a:xfrm>
-            <a:off x="2313432" y="3364992"/>
+            <a:off x="5742432" y="3364992"/>
             <a:ext cx="1645920" cy="475488"/>
           </a:xfrm>
           <a:prstGeom prst="rect">
@@ -25781,7 +26445,7 @@
                 <a:ea typeface="Trebuchet MS" pitchFamily="34" charset="-122"/>
                 <a:cs typeface="Trebuchet MS" pitchFamily="34" charset="-120"/>
               </a:rPr>
-              <a:t>dis</a:t>
+              <a:t>pear</a:t>
             </a:r>
             <a:endParaRPr lang="en-US" sz="1400" dirty="0"/>
           </a:p>
@@ -25789,224 +26453,80 @@
       </p:sp>
       <p:sp>
         <p:nvSpPr>
-          <p:cNvPr id="27" name="Text 25"/>
-          <p:cNvSpPr/>
-          <p:nvPr/>
-        </p:nvSpPr>
-        <p:spPr>
-          <a:xfrm>
-            <a:off x="3959352" y="3364992"/>
-            <a:ext cx="411480" cy="475488"/>
-          </a:xfrm>
-          <a:prstGeom prst="rect">
-            <a:avLst/>
-          </a:prstGeom>
-          <a:noFill/>
-          <a:ln/>
-        </p:spPr>
-        <p:txBody>
-          <a:bodyPr wrap="square" lIns="0" tIns="0" rIns="0" bIns="0" rtlCol="0" anchor="ctr"/>
-          <a:lstStyle/>
-          <a:p>
-            <a:pPr algn="ctr" indent="0" marL="0">
-              <a:buNone/>
-            </a:pPr>
-            <a:r>
-              <a:rPr lang="en-US" sz="1600" b="1" dirty="0">
-                <a:solidFill>
-                  <a:srgbClr val="0D9488"/>
+          <p:cNvPr id="27" name="Shape 25"/>
+          <p:cNvSpPr/>
+          <p:nvPr/>
+        </p:nvSpPr>
+        <p:spPr>
+          <a:xfrm>
+            <a:off x="365760" y="4096512"/>
+            <a:ext cx="1371600" cy="804672"/>
+          </a:xfrm>
+          <a:prstGeom prst="rect">
+            <a:avLst>
+              <a:gd name="adj" fmla="val 6818"/>
+            </a:avLst>
+          </a:prstGeom>
+          <a:solidFill>
+            <a:srgbClr val="E2E8F0"/>
+          </a:solidFill>
+          <a:ln w="12700">
+            <a:solidFill>
+              <a:srgbClr val="E2E8F0"/>
+            </a:solidFill>
+            <a:prstDash val="solid"/>
+          </a:ln>
+        </p:spPr>
+      </p:sp>
+      <p:sp>
+        <p:nvSpPr>
+          <p:cNvPr id="28" name="Text 26"/>
+          <p:cNvSpPr/>
+          <p:nvPr/>
+        </p:nvSpPr>
+        <p:spPr>
+          <a:xfrm>
+            <a:off x="365760" y="4096512"/>
+            <a:ext cx="1371600" cy="804672"/>
+          </a:xfrm>
+          <a:prstGeom prst="rect">
+            <a:avLst/>
+          </a:prstGeom>
+          <a:noFill/>
+          <a:ln/>
+        </p:spPr>
+        <p:txBody>
+          <a:bodyPr wrap="square" lIns="0" tIns="0" rIns="0" bIns="0" rtlCol="0" anchor="ctr"/>
+          <a:lstStyle/>
+          <a:p>
+            <a:pPr algn="ctr" indent="0" marL="0">
+              <a:buNone/>
+            </a:pPr>
+            <a:r>
+              <a:rPr lang="en-US" sz="1100" b="1" dirty="0">
+                <a:solidFill>
+                  <a:srgbClr val="475569"/>
                 </a:solidFill>
                 <a:latin typeface="Trebuchet MS" pitchFamily="34" charset="0"/>
                 <a:ea typeface="Trebuchet MS" pitchFamily="34" charset="-122"/>
                 <a:cs typeface="Trebuchet MS" pitchFamily="34" charset="-120"/>
               </a:rPr>
-              <a:t>·</a:t>
-            </a:r>
-            <a:endParaRPr lang="en-US" sz="1600" dirty="0"/>
-          </a:p>
-        </p:txBody>
-      </p:sp>
-      <p:sp>
-        <p:nvSpPr>
-          <p:cNvPr id="28" name="Shape 26"/>
-          <p:cNvSpPr/>
-          <p:nvPr/>
-        </p:nvSpPr>
-        <p:spPr>
-          <a:xfrm>
-            <a:off x="4370832" y="3364992"/>
-            <a:ext cx="1645920" cy="475488"/>
-          </a:xfrm>
-          <a:prstGeom prst="rect">
-            <a:avLst>
-              <a:gd name="adj" fmla="val 9615"/>
-            </a:avLst>
-          </a:prstGeom>
-          <a:solidFill>
-            <a:srgbClr val="FFFFFF"/>
-          </a:solidFill>
-          <a:ln w="12700">
-            <a:solidFill>
-              <a:srgbClr val="0D9488"/>
-            </a:solidFill>
-            <a:prstDash val="solid"/>
-          </a:ln>
-        </p:spPr>
-      </p:sp>
-      <p:sp>
-        <p:nvSpPr>
-          <p:cNvPr id="29" name="Text 27"/>
-          <p:cNvSpPr/>
-          <p:nvPr/>
-        </p:nvSpPr>
-        <p:spPr>
-          <a:xfrm>
-            <a:off x="4370832" y="3364992"/>
-            <a:ext cx="1645920" cy="475488"/>
-          </a:xfrm>
-          <a:prstGeom prst="rect">
-            <a:avLst/>
-          </a:prstGeom>
-          <a:noFill/>
-          <a:ln/>
-        </p:spPr>
-        <p:txBody>
-          <a:bodyPr wrap="square" lIns="0" tIns="0" rIns="0" bIns="0" rtlCol="0" anchor="ctr"/>
-          <a:lstStyle/>
-          <a:p>
-            <a:pPr algn="ctr" indent="0" marL="0">
-              <a:buNone/>
-            </a:pPr>
-            <a:r>
-              <a:rPr lang="en-US" sz="1400" b="1" dirty="0">
-                <a:solidFill>
-                  <a:srgbClr val="0D9488"/>
-                </a:solidFill>
-                <a:latin typeface="Trebuchet MS" pitchFamily="34" charset="0"/>
-                <a:ea typeface="Trebuchet MS" pitchFamily="34" charset="-122"/>
-                <a:cs typeface="Trebuchet MS" pitchFamily="34" charset="-120"/>
-              </a:rPr>
-              <a:t>ap</a:t>
-            </a:r>
-            <a:endParaRPr lang="en-US" sz="1400" dirty="0"/>
-          </a:p>
-        </p:txBody>
-      </p:sp>
-      <p:sp>
-        <p:nvSpPr>
-          <p:cNvPr id="30" name="Text 28"/>
-          <p:cNvSpPr/>
-          <p:nvPr/>
-        </p:nvSpPr>
-        <p:spPr>
-          <a:xfrm>
-            <a:off x="6016752" y="3364992"/>
-            <a:ext cx="411480" cy="475488"/>
-          </a:xfrm>
-          <a:prstGeom prst="rect">
-            <a:avLst/>
-          </a:prstGeom>
-          <a:noFill/>
-          <a:ln/>
-        </p:spPr>
-        <p:txBody>
-          <a:bodyPr wrap="square" lIns="0" tIns="0" rIns="0" bIns="0" rtlCol="0" anchor="ctr"/>
-          <a:lstStyle/>
-          <a:p>
-            <a:pPr algn="ctr" indent="0" marL="0">
-              <a:buNone/>
-            </a:pPr>
-            <a:r>
-              <a:rPr lang="en-US" sz="1600" b="1" dirty="0">
-                <a:solidFill>
-                  <a:srgbClr val="0D9488"/>
-                </a:solidFill>
-                <a:latin typeface="Trebuchet MS" pitchFamily="34" charset="0"/>
-                <a:ea typeface="Trebuchet MS" pitchFamily="34" charset="-122"/>
-                <a:cs typeface="Trebuchet MS" pitchFamily="34" charset="-120"/>
-              </a:rPr>
-              <a:t>·</a:t>
-            </a:r>
-            <a:endParaRPr lang="en-US" sz="1600" dirty="0"/>
-          </a:p>
-        </p:txBody>
-      </p:sp>
-      <p:sp>
-        <p:nvSpPr>
-          <p:cNvPr id="31" name="Shape 29"/>
-          <p:cNvSpPr/>
-          <p:nvPr/>
-        </p:nvSpPr>
-        <p:spPr>
-          <a:xfrm>
-            <a:off x="6428232" y="3364992"/>
-            <a:ext cx="1645920" cy="475488"/>
-          </a:xfrm>
-          <a:prstGeom prst="rect">
-            <a:avLst>
-              <a:gd name="adj" fmla="val 9615"/>
-            </a:avLst>
-          </a:prstGeom>
-          <a:solidFill>
-            <a:srgbClr val="FFFFFF"/>
-          </a:solidFill>
-          <a:ln w="12700">
-            <a:solidFill>
-              <a:srgbClr val="0D9488"/>
-            </a:solidFill>
-            <a:prstDash val="solid"/>
-          </a:ln>
-        </p:spPr>
-      </p:sp>
-      <p:sp>
-        <p:nvSpPr>
-          <p:cNvPr id="32" name="Text 30"/>
-          <p:cNvSpPr/>
-          <p:nvPr/>
-        </p:nvSpPr>
-        <p:spPr>
-          <a:xfrm>
-            <a:off x="6428232" y="3364992"/>
-            <a:ext cx="1645920" cy="475488"/>
-          </a:xfrm>
-          <a:prstGeom prst="rect">
-            <a:avLst/>
-          </a:prstGeom>
-          <a:noFill/>
-          <a:ln/>
-        </p:spPr>
-        <p:txBody>
-          <a:bodyPr wrap="square" lIns="0" tIns="0" rIns="0" bIns="0" rtlCol="0" anchor="ctr"/>
-          <a:lstStyle/>
-          <a:p>
-            <a:pPr algn="ctr" indent="0" marL="0">
-              <a:buNone/>
-            </a:pPr>
-            <a:r>
-              <a:rPr lang="en-US" sz="1400" b="1" dirty="0">
-                <a:solidFill>
-                  <a:srgbClr val="0D9488"/>
-                </a:solidFill>
-                <a:latin typeface="Trebuchet MS" pitchFamily="34" charset="0"/>
-                <a:ea typeface="Trebuchet MS" pitchFamily="34" charset="-122"/>
-                <a:cs typeface="Trebuchet MS" pitchFamily="34" charset="-120"/>
-              </a:rPr>
-              <a:t>pear</a:t>
-            </a:r>
-            <a:endParaRPr lang="en-US" sz="1400" dirty="0"/>
-          </a:p>
-        </p:txBody>
-      </p:sp>
-      <p:sp>
-        <p:nvSpPr>
-          <p:cNvPr id="33" name="Shape 31"/>
-          <p:cNvSpPr/>
-          <p:nvPr/>
-        </p:nvSpPr>
-        <p:spPr>
-          <a:xfrm>
-            <a:off x="365760" y="4096512"/>
-            <a:ext cx="1371600" cy="804672"/>
+              <a:t>Phonemes</a:t>
+            </a:r>
+            <a:endParaRPr lang="en-US" sz="1100" dirty="0"/>
+          </a:p>
+        </p:txBody>
+      </p:sp>
+      <p:sp>
+        <p:nvSpPr>
+          <p:cNvPr id="29" name="Shape 27"/>
+          <p:cNvSpPr/>
+          <p:nvPr/>
+        </p:nvSpPr>
+        <p:spPr>
+          <a:xfrm>
+            <a:off x="1874520" y="4096512"/>
+            <a:ext cx="6903720" cy="804672"/>
           </a:xfrm>
           <a:prstGeom prst="rect">
             <a:avLst>
@@ -26014,85 +26534,19 @@
             </a:avLst>
           </a:prstGeom>
           <a:solidFill>
-            <a:srgbClr val="E2E8F0"/>
+            <a:srgbClr val="F8FAFC"/>
           </a:solidFill>
           <a:ln w="12700">
             <a:solidFill>
               <a:srgbClr val="E2E8F0"/>
             </a:solidFill>
-            <a:prstDash val="solid"/>
-          </a:ln>
-        </p:spPr>
-      </p:sp>
-      <p:sp>
-        <p:nvSpPr>
-          <p:cNvPr id="34" name="Text 32"/>
-          <p:cNvSpPr/>
-          <p:nvPr/>
-        </p:nvSpPr>
-        <p:spPr>
-          <a:xfrm>
-            <a:off x="365760" y="4096512"/>
-            <a:ext cx="1371600" cy="804672"/>
-          </a:xfrm>
-          <a:prstGeom prst="rect">
-            <a:avLst/>
-          </a:prstGeom>
-          <a:noFill/>
-          <a:ln/>
-        </p:spPr>
-        <p:txBody>
-          <a:bodyPr wrap="square" lIns="0" tIns="0" rIns="0" bIns="0" rtlCol="0" anchor="ctr"/>
-          <a:lstStyle/>
-          <a:p>
-            <a:pPr algn="ctr" indent="0" marL="0">
-              <a:buNone/>
-            </a:pPr>
-            <a:r>
-              <a:rPr lang="en-US" sz="1100" b="1" dirty="0">
-                <a:solidFill>
-                  <a:srgbClr val="475569"/>
-                </a:solidFill>
-                <a:latin typeface="Trebuchet MS" pitchFamily="34" charset="0"/>
-                <a:ea typeface="Trebuchet MS" pitchFamily="34" charset="-122"/>
-                <a:cs typeface="Trebuchet MS" pitchFamily="34" charset="-120"/>
-              </a:rPr>
-              <a:t>Phonemes</a:t>
-            </a:r>
-            <a:endParaRPr lang="en-US" sz="1100" dirty="0"/>
-          </a:p>
-        </p:txBody>
-      </p:sp>
-      <p:sp>
-        <p:nvSpPr>
-          <p:cNvPr id="35" name="Shape 33"/>
-          <p:cNvSpPr/>
-          <p:nvPr/>
-        </p:nvSpPr>
-        <p:spPr>
-          <a:xfrm>
-            <a:off x="1874520" y="4096512"/>
-            <a:ext cx="6903720" cy="804672"/>
-          </a:xfrm>
-          <a:prstGeom prst="rect">
-            <a:avLst>
-              <a:gd name="adj" fmla="val 6818"/>
-            </a:avLst>
-          </a:prstGeom>
-          <a:solidFill>
-            <a:srgbClr val="F8FAFC"/>
-          </a:solidFill>
-          <a:ln w="12700">
-            <a:solidFill>
-              <a:srgbClr val="E2E8F0"/>
-            </a:solidFill>
             <a:prstDash val="dash"/>
           </a:ln>
         </p:spPr>
       </p:sp>
       <p:sp>
         <p:nvSpPr>
-          <p:cNvPr id="36" name="Text 34"/>
+          <p:cNvPr id="30" name="Text 28"/>
           <p:cNvSpPr/>
           <p:nvPr/>
         </p:nvSpPr>
@@ -26554,7 +27008,7 @@
                 <a:ea typeface="Trebuchet MS" pitchFamily="34" charset="-122"/>
                 <a:cs typeface="Trebuchet MS" pitchFamily="34" charset="-120"/>
               </a:rPr>
-              <a:t>disappear</a:t>
+              <a:t>appear</a:t>
             </a:r>
             <a:endParaRPr lang="en-US" sz="2800" dirty="0"/>
           </a:p>
@@ -26634,7 +27088,7 @@
         </p:nvSpPr>
         <p:spPr>
           <a:xfrm>
-            <a:off x="2938272" y="2258568"/>
+            <a:off x="4370832" y="2258568"/>
             <a:ext cx="1828800" cy="292608"/>
           </a:xfrm>
           <a:prstGeom prst="rect">
@@ -26643,11 +27097,11 @@
             </a:avLst>
           </a:prstGeom>
           <a:solidFill>
-            <a:srgbClr val="DDD6FE"/>
+            <a:srgbClr val="CCFBF1"/>
           </a:solidFill>
           <a:ln w="19050">
             <a:solidFill>
-              <a:srgbClr val="7C3AED"/>
+              <a:srgbClr val="0D9488"/>
             </a:solidFill>
             <a:prstDash val="solid"/>
           </a:ln>
@@ -26668,7 +27122,7 @@
         </p:nvSpPr>
         <p:spPr>
           <a:xfrm>
-            <a:off x="2938272" y="2258568"/>
+            <a:off x="4370832" y="2258568"/>
             <a:ext cx="1828800" cy="292608"/>
           </a:xfrm>
           <a:prstGeom prst="rect">
@@ -26687,13 +27141,13 @@
             <a:r>
               <a:rPr lang="en-US" sz="1300" b="1" dirty="0">
                 <a:solidFill>
-                  <a:srgbClr val="4C1D95"/>
+                  <a:srgbClr val="0F766E"/>
                 </a:solidFill>
                 <a:latin typeface="Trebuchet MS" pitchFamily="34" charset="0"/>
                 <a:ea typeface="Trebuchet MS" pitchFamily="34" charset="-122"/>
                 <a:cs typeface="Trebuchet MS" pitchFamily="34" charset="-120"/>
               </a:rPr>
-              <a:t>dis</a:t>
+              <a:t>appear</a:t>
             </a:r>
             <a:endParaRPr lang="en-US" sz="1300" dirty="0"/>
           </a:p>
@@ -26707,7 +27161,7 @@
         </p:nvSpPr>
         <p:spPr>
           <a:xfrm>
-            <a:off x="2938272" y="2569464"/>
+            <a:off x="4370832" y="2569464"/>
             <a:ext cx="1828800" cy="201168"/>
           </a:xfrm>
           <a:prstGeom prst="rect">
@@ -26732,7 +27186,7 @@
                 <a:ea typeface="Calibri" pitchFamily="34" charset="-122"/>
                 <a:cs typeface="Calibri" pitchFamily="34" charset="-120"/>
               </a:rPr>
-              <a:t>not, away, opposite</a:t>
+              <a:t>to come into sight</a:t>
             </a:r>
             <a:endParaRPr lang="en-US" sz="850" dirty="0"/>
           </a:p>
@@ -26746,30 +27200,23 @@
         </p:nvSpPr>
         <p:spPr>
           <a:xfrm>
-            <a:off x="5803392" y="2258568"/>
-            <a:ext cx="1828800" cy="292608"/>
+            <a:off x="365760" y="3273552"/>
+            <a:ext cx="1371600" cy="658368"/>
           </a:xfrm>
           <a:prstGeom prst="rect">
             <a:avLst>
-              <a:gd name="adj" fmla="val 25000"/>
+              <a:gd name="adj" fmla="val 8333"/>
             </a:avLst>
           </a:prstGeom>
           <a:solidFill>
-            <a:srgbClr val="CCFBF1"/>
-          </a:solidFill>
-          <a:ln w="19050">
-            <a:solidFill>
-              <a:srgbClr val="0D9488"/>
-            </a:solidFill>
-            <a:prstDash val="solid"/>
-          </a:ln>
-          <a:effectLst>
-            <a:outerShdw sx="100000" sy="100000" kx="0" ky="0" algn="bl" rotWithShape="0" blurRad="101600" dist="38100" dir="8100000">
-              <a:srgbClr val="000000">
-                <a:alpha val="12000"/>
-              </a:srgbClr>
-            </a:outerShdw>
-          </a:effectLst>
+            <a:srgbClr val="E2E8F0"/>
+          </a:solidFill>
+          <a:ln w="12700">
+            <a:solidFill>
+              <a:srgbClr val="E2E8F0"/>
+            </a:solidFill>
+            <a:prstDash val="solid"/>
+          </a:ln>
         </p:spPr>
       </p:sp>
       <p:sp>
@@ -26780,86 +27227,47 @@
         </p:nvSpPr>
         <p:spPr>
           <a:xfrm>
-            <a:off x="5803392" y="2258568"/>
-            <a:ext cx="1828800" cy="292608"/>
-          </a:xfrm>
-          <a:prstGeom prst="rect">
-            <a:avLst/>
-          </a:prstGeom>
-          <a:noFill/>
-          <a:ln/>
-        </p:spPr>
-        <p:txBody>
-          <a:bodyPr wrap="square" lIns="0" tIns="0" rIns="0" bIns="0" rtlCol="0" anchor="ctr"/>
-          <a:lstStyle/>
-          <a:p>
-            <a:pPr algn="ctr" indent="0" marL="0">
-              <a:buNone/>
-            </a:pPr>
-            <a:r>
-              <a:rPr lang="en-US" sz="1300" b="1" dirty="0">
-                <a:solidFill>
-                  <a:srgbClr val="0F766E"/>
+            <a:off x="365760" y="3273552"/>
+            <a:ext cx="1371600" cy="658368"/>
+          </a:xfrm>
+          <a:prstGeom prst="rect">
+            <a:avLst/>
+          </a:prstGeom>
+          <a:noFill/>
+          <a:ln/>
+        </p:spPr>
+        <p:txBody>
+          <a:bodyPr wrap="square" lIns="0" tIns="0" rIns="0" bIns="0" rtlCol="0" anchor="ctr"/>
+          <a:lstStyle/>
+          <a:p>
+            <a:pPr algn="ctr" indent="0" marL="0">
+              <a:buNone/>
+            </a:pPr>
+            <a:r>
+              <a:rPr lang="en-US" sz="1100" b="1" dirty="0">
+                <a:solidFill>
+                  <a:srgbClr val="475569"/>
                 </a:solidFill>
                 <a:latin typeface="Trebuchet MS" pitchFamily="34" charset="0"/>
                 <a:ea typeface="Trebuchet MS" pitchFamily="34" charset="-122"/>
                 <a:cs typeface="Trebuchet MS" pitchFamily="34" charset="-120"/>
               </a:rPr>
-              <a:t>appear</a:t>
-            </a:r>
-            <a:endParaRPr lang="en-US" sz="1300" dirty="0"/>
-          </a:p>
-        </p:txBody>
-      </p:sp>
-      <p:sp>
-        <p:nvSpPr>
-          <p:cNvPr id="21" name="Text 19"/>
-          <p:cNvSpPr/>
-          <p:nvPr/>
-        </p:nvSpPr>
-        <p:spPr>
-          <a:xfrm>
-            <a:off x="5803392" y="2569464"/>
-            <a:ext cx="1828800" cy="201168"/>
-          </a:xfrm>
-          <a:prstGeom prst="rect">
-            <a:avLst/>
-          </a:prstGeom>
-          <a:noFill/>
-          <a:ln/>
-        </p:spPr>
-        <p:txBody>
-          <a:bodyPr wrap="square" lIns="0" tIns="0" rIns="0" bIns="0" rtlCol="0" anchor="t"/>
-          <a:lstStyle/>
-          <a:p>
-            <a:pPr algn="ctr" indent="0" marL="0">
-              <a:buNone/>
-            </a:pPr>
-            <a:r>
-              <a:rPr lang="en-US" sz="850" dirty="0">
-                <a:solidFill>
-                  <a:srgbClr val="475569"/>
-                </a:solidFill>
-                <a:latin typeface="Calibri" pitchFamily="34" charset="0"/>
-                <a:ea typeface="Calibri" pitchFamily="34" charset="-122"/>
-                <a:cs typeface="Calibri" pitchFamily="34" charset="-120"/>
-              </a:rPr>
-              <a:t>to come into sight</a:t>
-            </a:r>
-            <a:endParaRPr lang="en-US" sz="850" dirty="0"/>
-          </a:p>
-        </p:txBody>
-      </p:sp>
-      <p:sp>
-        <p:nvSpPr>
-          <p:cNvPr id="22" name="Shape 20"/>
-          <p:cNvSpPr/>
-          <p:nvPr/>
-        </p:nvSpPr>
-        <p:spPr>
-          <a:xfrm>
-            <a:off x="365760" y="3273552"/>
-            <a:ext cx="1371600" cy="658368"/>
+              <a:t>Syllables</a:t>
+            </a:r>
+            <a:endParaRPr lang="en-US" sz="1100" dirty="0"/>
+          </a:p>
+        </p:txBody>
+      </p:sp>
+      <p:sp>
+        <p:nvSpPr>
+          <p:cNvPr id="21" name="Shape 19"/>
+          <p:cNvSpPr/>
+          <p:nvPr/>
+        </p:nvSpPr>
+        <p:spPr>
+          <a:xfrm>
+            <a:off x="1874520" y="3273552"/>
+            <a:ext cx="6903720" cy="658368"/>
           </a:xfrm>
           <a:prstGeom prst="rect">
             <a:avLst>
@@ -26867,11 +27275,38 @@
             </a:avLst>
           </a:prstGeom>
           <a:solidFill>
-            <a:srgbClr val="E2E8F0"/>
-          </a:solidFill>
-          <a:ln w="12700">
-            <a:solidFill>
-              <a:srgbClr val="E2E8F0"/>
+            <a:srgbClr val="CCFBF1"/>
+          </a:solidFill>
+          <a:ln w="12700">
+            <a:solidFill>
+              <a:srgbClr val="0D9488"/>
+            </a:solidFill>
+            <a:prstDash val="solid"/>
+          </a:ln>
+        </p:spPr>
+      </p:sp>
+      <p:sp>
+        <p:nvSpPr>
+          <p:cNvPr id="22" name="Shape 20"/>
+          <p:cNvSpPr/>
+          <p:nvPr/>
+        </p:nvSpPr>
+        <p:spPr>
+          <a:xfrm>
+            <a:off x="2999232" y="3364992"/>
+            <a:ext cx="1645920" cy="475488"/>
+          </a:xfrm>
+          <a:prstGeom prst="rect">
+            <a:avLst>
+              <a:gd name="adj" fmla="val 9615"/>
+            </a:avLst>
+          </a:prstGeom>
+          <a:solidFill>
+            <a:srgbClr val="FFFFFF"/>
+          </a:solidFill>
+          <a:ln w="12700">
+            <a:solidFill>
+              <a:srgbClr val="0D9488"/>
             </a:solidFill>
             <a:prstDash val="solid"/>
           </a:ln>
@@ -26885,32 +27320,203 @@
         </p:nvSpPr>
         <p:spPr>
           <a:xfrm>
-            <a:off x="365760" y="3273552"/>
-            <a:ext cx="1371600" cy="658368"/>
-          </a:xfrm>
-          <a:prstGeom prst="rect">
-            <a:avLst/>
-          </a:prstGeom>
-          <a:noFill/>
-          <a:ln/>
-        </p:spPr>
-        <p:txBody>
-          <a:bodyPr wrap="square" lIns="0" tIns="0" rIns="0" bIns="0" rtlCol="0" anchor="ctr"/>
-          <a:lstStyle/>
-          <a:p>
-            <a:pPr algn="ctr" indent="0" marL="0">
-              <a:buNone/>
-            </a:pPr>
-            <a:r>
-              <a:rPr lang="en-US" sz="1100" b="1" dirty="0">
-                <a:solidFill>
-                  <a:srgbClr val="475569"/>
+            <a:off x="2999232" y="3364992"/>
+            <a:ext cx="1645920" cy="475488"/>
+          </a:xfrm>
+          <a:prstGeom prst="rect">
+            <a:avLst/>
+          </a:prstGeom>
+          <a:noFill/>
+          <a:ln/>
+        </p:spPr>
+        <p:txBody>
+          <a:bodyPr wrap="square" lIns="0" tIns="0" rIns="0" bIns="0" rtlCol="0" anchor="ctr"/>
+          <a:lstStyle/>
+          <a:p>
+            <a:pPr algn="ctr" indent="0" marL="0">
+              <a:buNone/>
+            </a:pPr>
+            <a:r>
+              <a:rPr lang="en-US" sz="1400" b="1" dirty="0">
+                <a:solidFill>
+                  <a:srgbClr val="0D9488"/>
                 </a:solidFill>
                 <a:latin typeface="Trebuchet MS" pitchFamily="34" charset="0"/>
                 <a:ea typeface="Trebuchet MS" pitchFamily="34" charset="-122"/>
                 <a:cs typeface="Trebuchet MS" pitchFamily="34" charset="-120"/>
               </a:rPr>
-              <a:t>Syllables</a:t>
+              <a:t>ap</a:t>
+            </a:r>
+            <a:endParaRPr lang="en-US" sz="1400" dirty="0"/>
+          </a:p>
+        </p:txBody>
+      </p:sp>
+      <p:sp>
+        <p:nvSpPr>
+          <p:cNvPr id="24" name="Text 22"/>
+          <p:cNvSpPr/>
+          <p:nvPr/>
+        </p:nvSpPr>
+        <p:spPr>
+          <a:xfrm>
+            <a:off x="4645152" y="3364992"/>
+            <a:ext cx="1097280" cy="475488"/>
+          </a:xfrm>
+          <a:prstGeom prst="rect">
+            <a:avLst/>
+          </a:prstGeom>
+          <a:noFill/>
+          <a:ln/>
+        </p:spPr>
+        <p:txBody>
+          <a:bodyPr wrap="square" lIns="0" tIns="0" rIns="0" bIns="0" rtlCol="0" anchor="ctr"/>
+          <a:lstStyle/>
+          <a:p>
+            <a:pPr algn="ctr" indent="0" marL="0">
+              <a:buNone/>
+            </a:pPr>
+            <a:r>
+              <a:rPr lang="en-US" sz="1600" b="1" dirty="0">
+                <a:solidFill>
+                  <a:srgbClr val="0D9488"/>
+                </a:solidFill>
+                <a:latin typeface="Trebuchet MS" pitchFamily="34" charset="0"/>
+                <a:ea typeface="Trebuchet MS" pitchFamily="34" charset="-122"/>
+                <a:cs typeface="Trebuchet MS" pitchFamily="34" charset="-120"/>
+              </a:rPr>
+              <a:t>·</a:t>
+            </a:r>
+            <a:endParaRPr lang="en-US" sz="1600" dirty="0"/>
+          </a:p>
+        </p:txBody>
+      </p:sp>
+      <p:sp>
+        <p:nvSpPr>
+          <p:cNvPr id="25" name="Shape 23"/>
+          <p:cNvSpPr/>
+          <p:nvPr/>
+        </p:nvSpPr>
+        <p:spPr>
+          <a:xfrm>
+            <a:off x="5742432" y="3364992"/>
+            <a:ext cx="1645920" cy="475488"/>
+          </a:xfrm>
+          <a:prstGeom prst="rect">
+            <a:avLst>
+              <a:gd name="adj" fmla="val 9615"/>
+            </a:avLst>
+          </a:prstGeom>
+          <a:solidFill>
+            <a:srgbClr val="FFFFFF"/>
+          </a:solidFill>
+          <a:ln w="12700">
+            <a:solidFill>
+              <a:srgbClr val="0D9488"/>
+            </a:solidFill>
+            <a:prstDash val="solid"/>
+          </a:ln>
+        </p:spPr>
+      </p:sp>
+      <p:sp>
+        <p:nvSpPr>
+          <p:cNvPr id="26" name="Text 24"/>
+          <p:cNvSpPr/>
+          <p:nvPr/>
+        </p:nvSpPr>
+        <p:spPr>
+          <a:xfrm>
+            <a:off x="5742432" y="3364992"/>
+            <a:ext cx="1645920" cy="475488"/>
+          </a:xfrm>
+          <a:prstGeom prst="rect">
+            <a:avLst/>
+          </a:prstGeom>
+          <a:noFill/>
+          <a:ln/>
+        </p:spPr>
+        <p:txBody>
+          <a:bodyPr wrap="square" lIns="0" tIns="0" rIns="0" bIns="0" rtlCol="0" anchor="ctr"/>
+          <a:lstStyle/>
+          <a:p>
+            <a:pPr algn="ctr" indent="0" marL="0">
+              <a:buNone/>
+            </a:pPr>
+            <a:r>
+              <a:rPr lang="en-US" sz="1400" b="1" dirty="0">
+                <a:solidFill>
+                  <a:srgbClr val="0D9488"/>
+                </a:solidFill>
+                <a:latin typeface="Trebuchet MS" pitchFamily="34" charset="0"/>
+                <a:ea typeface="Trebuchet MS" pitchFamily="34" charset="-122"/>
+                <a:cs typeface="Trebuchet MS" pitchFamily="34" charset="-120"/>
+              </a:rPr>
+              <a:t>pear</a:t>
+            </a:r>
+            <a:endParaRPr lang="en-US" sz="1400" dirty="0"/>
+          </a:p>
+        </p:txBody>
+      </p:sp>
+      <p:sp>
+        <p:nvSpPr>
+          <p:cNvPr id="27" name="Shape 25"/>
+          <p:cNvSpPr/>
+          <p:nvPr/>
+        </p:nvSpPr>
+        <p:spPr>
+          <a:xfrm>
+            <a:off x="365760" y="4096512"/>
+            <a:ext cx="1371600" cy="804672"/>
+          </a:xfrm>
+          <a:prstGeom prst="rect">
+            <a:avLst>
+              <a:gd name="adj" fmla="val 6818"/>
+            </a:avLst>
+          </a:prstGeom>
+          <a:solidFill>
+            <a:srgbClr val="E2E8F0"/>
+          </a:solidFill>
+          <a:ln w="12700">
+            <a:solidFill>
+              <a:srgbClr val="E2E8F0"/>
+            </a:solidFill>
+            <a:prstDash val="solid"/>
+          </a:ln>
+        </p:spPr>
+      </p:sp>
+      <p:sp>
+        <p:nvSpPr>
+          <p:cNvPr id="28" name="Text 26"/>
+          <p:cNvSpPr/>
+          <p:nvPr/>
+        </p:nvSpPr>
+        <p:spPr>
+          <a:xfrm>
+            <a:off x="365760" y="4096512"/>
+            <a:ext cx="1371600" cy="804672"/>
+          </a:xfrm>
+          <a:prstGeom prst="rect">
+            <a:avLst/>
+          </a:prstGeom>
+          <a:noFill/>
+          <a:ln/>
+        </p:spPr>
+        <p:txBody>
+          <a:bodyPr wrap="square" lIns="0" tIns="0" rIns="0" bIns="0" rtlCol="0" anchor="ctr"/>
+          <a:lstStyle/>
+          <a:p>
+            <a:pPr algn="ctr" indent="0" marL="0">
+              <a:buNone/>
+            </a:pPr>
+            <a:r>
+              <a:rPr lang="en-US" sz="1100" b="1" dirty="0">
+                <a:solidFill>
+                  <a:srgbClr val="475569"/>
+                </a:solidFill>
+                <a:latin typeface="Trebuchet MS" pitchFamily="34" charset="0"/>
+                <a:ea typeface="Trebuchet MS" pitchFamily="34" charset="-122"/>
+                <a:cs typeface="Trebuchet MS" pitchFamily="34" charset="-120"/>
+              </a:rPr>
+              <a:t>Phonemes</a:t>
             </a:r>
             <a:endParaRPr lang="en-US" sz="1100" dirty="0"/>
           </a:p>
@@ -26918,13 +27524,13 @@
       </p:sp>
       <p:sp>
         <p:nvSpPr>
-          <p:cNvPr id="24" name="Shape 22"/>
-          <p:cNvSpPr/>
-          <p:nvPr/>
-        </p:nvSpPr>
-        <p:spPr>
-          <a:xfrm>
-            <a:off x="1874520" y="3273552"/>
+          <p:cNvPr id="29" name="Shape 27"/>
+          <p:cNvSpPr/>
+          <p:nvPr/>
+        </p:nvSpPr>
+        <p:spPr>
+          <a:xfrm>
+            <a:off x="1874520" y="4096512"/>
             <a:ext cx="6903720" cy="658368"/>
           </a:xfrm>
           <a:prstGeom prst="rect">
@@ -26933,30 +27539,30 @@
             </a:avLst>
           </a:prstGeom>
           <a:solidFill>
-            <a:srgbClr val="CCFBF1"/>
-          </a:solidFill>
-          <a:ln w="12700">
-            <a:solidFill>
-              <a:srgbClr val="0D9488"/>
-            </a:solidFill>
-            <a:prstDash val="solid"/>
-          </a:ln>
-        </p:spPr>
-      </p:sp>
-      <p:sp>
-        <p:nvSpPr>
-          <p:cNvPr id="25" name="Shape 23"/>
-          <p:cNvSpPr/>
-          <p:nvPr/>
-        </p:nvSpPr>
-        <p:spPr>
-          <a:xfrm>
-            <a:off x="2313432" y="3364992"/>
-            <a:ext cx="1645920" cy="475488"/>
+            <a:srgbClr val="FCE7F3"/>
+          </a:solidFill>
+          <a:ln w="12700">
+            <a:solidFill>
+              <a:srgbClr val="DB2777"/>
+            </a:solidFill>
+            <a:prstDash val="solid"/>
+          </a:ln>
+        </p:spPr>
+      </p:sp>
+      <p:sp>
+        <p:nvSpPr>
+          <p:cNvPr id="30" name="Shape 28"/>
+          <p:cNvSpPr/>
+          <p:nvPr/>
+        </p:nvSpPr>
+        <p:spPr>
+          <a:xfrm>
+            <a:off x="3033522" y="4169664"/>
+            <a:ext cx="685800" cy="475488"/>
           </a:xfrm>
           <a:prstGeom prst="rect">
             <a:avLst>
-              <a:gd name="adj" fmla="val 9615"/>
+              <a:gd name="adj" fmla="val 7692"/>
             </a:avLst>
           </a:prstGeom>
           <a:solidFill>
@@ -26964,104 +27570,131 @@
           </a:solidFill>
           <a:ln w="12700">
             <a:solidFill>
-              <a:srgbClr val="0D9488"/>
-            </a:solidFill>
-            <a:prstDash val="solid"/>
-          </a:ln>
-        </p:spPr>
-      </p:sp>
-      <p:sp>
-        <p:nvSpPr>
-          <p:cNvPr id="26" name="Text 24"/>
-          <p:cNvSpPr/>
-          <p:nvPr/>
-        </p:nvSpPr>
-        <p:spPr>
-          <a:xfrm>
-            <a:off x="2313432" y="3364992"/>
-            <a:ext cx="1645920" cy="475488"/>
-          </a:xfrm>
-          <a:prstGeom prst="rect">
-            <a:avLst/>
-          </a:prstGeom>
-          <a:noFill/>
-          <a:ln/>
-        </p:spPr>
-        <p:txBody>
-          <a:bodyPr wrap="square" lIns="0" tIns="0" rIns="0" bIns="0" rtlCol="0" anchor="ctr"/>
-          <a:lstStyle/>
-          <a:p>
-            <a:pPr algn="ctr" indent="0" marL="0">
-              <a:buNone/>
-            </a:pPr>
-            <a:r>
-              <a:rPr lang="en-US" sz="1400" b="1" dirty="0">
-                <a:solidFill>
-                  <a:srgbClr val="0D9488"/>
+              <a:srgbClr val="DB2777"/>
+            </a:solidFill>
+            <a:prstDash val="solid"/>
+          </a:ln>
+        </p:spPr>
+      </p:sp>
+      <p:sp>
+        <p:nvSpPr>
+          <p:cNvPr id="31" name="Text 29"/>
+          <p:cNvSpPr/>
+          <p:nvPr/>
+        </p:nvSpPr>
+        <p:spPr>
+          <a:xfrm>
+            <a:off x="3033522" y="4169664"/>
+            <a:ext cx="685800" cy="475488"/>
+          </a:xfrm>
+          <a:prstGeom prst="rect">
+            <a:avLst/>
+          </a:prstGeom>
+          <a:noFill/>
+          <a:ln/>
+        </p:spPr>
+        <p:txBody>
+          <a:bodyPr wrap="square" lIns="0" tIns="0" rIns="0" bIns="0" rtlCol="0" anchor="ctr"/>
+          <a:lstStyle/>
+          <a:p>
+            <a:pPr algn="ctr" indent="0" marL="0">
+              <a:buNone/>
+            </a:pPr>
+            <a:r>
+              <a:rPr lang="en-US" sz="1000" b="1" dirty="0">
+                <a:solidFill>
+                  <a:srgbClr val="9D174D"/>
                 </a:solidFill>
                 <a:latin typeface="Trebuchet MS" pitchFamily="34" charset="0"/>
                 <a:ea typeface="Trebuchet MS" pitchFamily="34" charset="-122"/>
                 <a:cs typeface="Trebuchet MS" pitchFamily="34" charset="-120"/>
               </a:rPr>
-              <a:t>dis</a:t>
-            </a:r>
-            <a:endParaRPr lang="en-US" sz="1400" dirty="0"/>
-          </a:p>
-        </p:txBody>
-      </p:sp>
-      <p:sp>
-        <p:nvSpPr>
-          <p:cNvPr id="27" name="Text 25"/>
-          <p:cNvSpPr/>
-          <p:nvPr/>
-        </p:nvSpPr>
-        <p:spPr>
-          <a:xfrm>
-            <a:off x="3959352" y="3364992"/>
-            <a:ext cx="411480" cy="475488"/>
-          </a:xfrm>
-          <a:prstGeom prst="rect">
-            <a:avLst/>
-          </a:prstGeom>
-          <a:noFill/>
-          <a:ln/>
-        </p:spPr>
-        <p:txBody>
-          <a:bodyPr wrap="square" lIns="0" tIns="0" rIns="0" bIns="0" rtlCol="0" anchor="ctr"/>
-          <a:lstStyle/>
-          <a:p>
-            <a:pPr algn="ctr" indent="0" marL="0">
-              <a:buNone/>
-            </a:pPr>
-            <a:r>
-              <a:rPr lang="en-US" sz="1600" b="1" dirty="0">
-                <a:solidFill>
-                  <a:srgbClr val="0D9488"/>
+              <a:t>a</a:t>
+            </a:r>
+            <a:endParaRPr lang="en-US" sz="1000" dirty="0"/>
+          </a:p>
+        </p:txBody>
+      </p:sp>
+      <p:sp>
+        <p:nvSpPr>
+          <p:cNvPr id="32" name="Shape 30"/>
+          <p:cNvSpPr/>
+          <p:nvPr/>
+        </p:nvSpPr>
+        <p:spPr>
+          <a:xfrm>
+            <a:off x="4850892" y="4169664"/>
+            <a:ext cx="685800" cy="475488"/>
+          </a:xfrm>
+          <a:prstGeom prst="rect">
+            <a:avLst>
+              <a:gd name="adj" fmla="val 7692"/>
+            </a:avLst>
+          </a:prstGeom>
+          <a:solidFill>
+            <a:srgbClr val="FFFFFF"/>
+          </a:solidFill>
+          <a:ln w="12700">
+            <a:solidFill>
+              <a:srgbClr val="DB2777"/>
+            </a:solidFill>
+            <a:prstDash val="solid"/>
+          </a:ln>
+        </p:spPr>
+      </p:sp>
+      <p:sp>
+        <p:nvSpPr>
+          <p:cNvPr id="33" name="Text 31"/>
+          <p:cNvSpPr/>
+          <p:nvPr/>
+        </p:nvSpPr>
+        <p:spPr>
+          <a:xfrm>
+            <a:off x="4850892" y="4169664"/>
+            <a:ext cx="685800" cy="475488"/>
+          </a:xfrm>
+          <a:prstGeom prst="rect">
+            <a:avLst/>
+          </a:prstGeom>
+          <a:noFill/>
+          <a:ln/>
+        </p:spPr>
+        <p:txBody>
+          <a:bodyPr wrap="square" lIns="0" tIns="0" rIns="0" bIns="0" rtlCol="0" anchor="ctr"/>
+          <a:lstStyle/>
+          <a:p>
+            <a:pPr algn="ctr" indent="0" marL="0">
+              <a:buNone/>
+            </a:pPr>
+            <a:r>
+              <a:rPr lang="en-US" sz="1000" b="1" dirty="0">
+                <a:solidFill>
+                  <a:srgbClr val="9D174D"/>
                 </a:solidFill>
                 <a:latin typeface="Trebuchet MS" pitchFamily="34" charset="0"/>
                 <a:ea typeface="Trebuchet MS" pitchFamily="34" charset="-122"/>
                 <a:cs typeface="Trebuchet MS" pitchFamily="34" charset="-120"/>
               </a:rPr>
-              <a:t>·</a:t>
-            </a:r>
-            <a:endParaRPr lang="en-US" sz="1600" dirty="0"/>
-          </a:p>
-        </p:txBody>
-      </p:sp>
-      <p:sp>
-        <p:nvSpPr>
-          <p:cNvPr id="28" name="Shape 26"/>
-          <p:cNvSpPr/>
-          <p:nvPr/>
-        </p:nvSpPr>
-        <p:spPr>
-          <a:xfrm>
-            <a:off x="4370832" y="3364992"/>
-            <a:ext cx="1645920" cy="475488"/>
+              <a:t>pp</a:t>
+            </a:r>
+            <a:endParaRPr lang="en-US" sz="1000" dirty="0"/>
+          </a:p>
+        </p:txBody>
+      </p:sp>
+      <p:sp>
+        <p:nvSpPr>
+          <p:cNvPr id="34" name="Shape 32"/>
+          <p:cNvSpPr/>
+          <p:nvPr/>
+        </p:nvSpPr>
+        <p:spPr>
+          <a:xfrm>
+            <a:off x="6668262" y="4169664"/>
+            <a:ext cx="685800" cy="475488"/>
           </a:xfrm>
           <a:prstGeom prst="rect">
             <a:avLst>
-              <a:gd name="adj" fmla="val 9615"/>
+              <a:gd name="adj" fmla="val 7692"/>
             </a:avLst>
           </a:prstGeom>
           <a:solidFill>
@@ -27069,642 +27702,48 @@
           </a:solidFill>
           <a:ln w="12700">
             <a:solidFill>
-              <a:srgbClr val="0D9488"/>
-            </a:solidFill>
-            <a:prstDash val="solid"/>
-          </a:ln>
-        </p:spPr>
-      </p:sp>
-      <p:sp>
-        <p:nvSpPr>
-          <p:cNvPr id="29" name="Text 27"/>
-          <p:cNvSpPr/>
-          <p:nvPr/>
-        </p:nvSpPr>
-        <p:spPr>
-          <a:xfrm>
-            <a:off x="4370832" y="3364992"/>
-            <a:ext cx="1645920" cy="475488"/>
-          </a:xfrm>
-          <a:prstGeom prst="rect">
-            <a:avLst/>
-          </a:prstGeom>
-          <a:noFill/>
-          <a:ln/>
-        </p:spPr>
-        <p:txBody>
-          <a:bodyPr wrap="square" lIns="0" tIns="0" rIns="0" bIns="0" rtlCol="0" anchor="ctr"/>
-          <a:lstStyle/>
-          <a:p>
-            <a:pPr algn="ctr" indent="0" marL="0">
-              <a:buNone/>
-            </a:pPr>
-            <a:r>
-              <a:rPr lang="en-US" sz="1400" b="1" dirty="0">
-                <a:solidFill>
-                  <a:srgbClr val="0D9488"/>
+              <a:srgbClr val="DB2777"/>
+            </a:solidFill>
+            <a:prstDash val="solid"/>
+          </a:ln>
+        </p:spPr>
+      </p:sp>
+      <p:sp>
+        <p:nvSpPr>
+          <p:cNvPr id="35" name="Text 33"/>
+          <p:cNvSpPr/>
+          <p:nvPr/>
+        </p:nvSpPr>
+        <p:spPr>
+          <a:xfrm>
+            <a:off x="6668262" y="4169664"/>
+            <a:ext cx="685800" cy="475488"/>
+          </a:xfrm>
+          <a:prstGeom prst="rect">
+            <a:avLst/>
+          </a:prstGeom>
+          <a:noFill/>
+          <a:ln/>
+        </p:spPr>
+        <p:txBody>
+          <a:bodyPr wrap="square" lIns="0" tIns="0" rIns="0" bIns="0" rtlCol="0" anchor="ctr"/>
+          <a:lstStyle/>
+          <a:p>
+            <a:pPr algn="ctr" indent="0" marL="0">
+              <a:buNone/>
+            </a:pPr>
+            <a:r>
+              <a:rPr lang="en-US" sz="1000" b="1" dirty="0">
+                <a:solidFill>
+                  <a:srgbClr val="9D174D"/>
                 </a:solidFill>
                 <a:latin typeface="Trebuchet MS" pitchFamily="34" charset="0"/>
                 <a:ea typeface="Trebuchet MS" pitchFamily="34" charset="-122"/>
                 <a:cs typeface="Trebuchet MS" pitchFamily="34" charset="-120"/>
               </a:rPr>
-              <a:t>ap</a:t>
-            </a:r>
-            <a:endParaRPr lang="en-US" sz="1400" dirty="0"/>
-          </a:p>
-        </p:txBody>
-      </p:sp>
-      <p:sp>
-        <p:nvSpPr>
-          <p:cNvPr id="30" name="Text 28"/>
-          <p:cNvSpPr/>
-          <p:nvPr/>
-        </p:nvSpPr>
-        <p:spPr>
-          <a:xfrm>
-            <a:off x="6016752" y="3364992"/>
-            <a:ext cx="411480" cy="475488"/>
-          </a:xfrm>
-          <a:prstGeom prst="rect">
-            <a:avLst/>
-          </a:prstGeom>
-          <a:noFill/>
-          <a:ln/>
-        </p:spPr>
-        <p:txBody>
-          <a:bodyPr wrap="square" lIns="0" tIns="0" rIns="0" bIns="0" rtlCol="0" anchor="ctr"/>
-          <a:lstStyle/>
-          <a:p>
-            <a:pPr algn="ctr" indent="0" marL="0">
-              <a:buNone/>
-            </a:pPr>
-            <a:r>
-              <a:rPr lang="en-US" sz="1600" b="1" dirty="0">
-                <a:solidFill>
-                  <a:srgbClr val="0D9488"/>
-                </a:solidFill>
-                <a:latin typeface="Trebuchet MS" pitchFamily="34" charset="0"/>
-                <a:ea typeface="Trebuchet MS" pitchFamily="34" charset="-122"/>
-                <a:cs typeface="Trebuchet MS" pitchFamily="34" charset="-120"/>
-              </a:rPr>
-              <a:t>·</a:t>
-            </a:r>
-            <a:endParaRPr lang="en-US" sz="1600" dirty="0"/>
-          </a:p>
-        </p:txBody>
-      </p:sp>
-      <p:sp>
-        <p:nvSpPr>
-          <p:cNvPr id="31" name="Shape 29"/>
-          <p:cNvSpPr/>
-          <p:nvPr/>
-        </p:nvSpPr>
-        <p:spPr>
-          <a:xfrm>
-            <a:off x="6428232" y="3364992"/>
-            <a:ext cx="1645920" cy="475488"/>
-          </a:xfrm>
-          <a:prstGeom prst="rect">
-            <a:avLst>
-              <a:gd name="adj" fmla="val 9615"/>
-            </a:avLst>
-          </a:prstGeom>
-          <a:solidFill>
-            <a:srgbClr val="FFFFFF"/>
-          </a:solidFill>
-          <a:ln w="12700">
-            <a:solidFill>
-              <a:srgbClr val="0D9488"/>
-            </a:solidFill>
-            <a:prstDash val="solid"/>
-          </a:ln>
-        </p:spPr>
-      </p:sp>
-      <p:sp>
-        <p:nvSpPr>
-          <p:cNvPr id="32" name="Text 30"/>
-          <p:cNvSpPr/>
-          <p:nvPr/>
-        </p:nvSpPr>
-        <p:spPr>
-          <a:xfrm>
-            <a:off x="6428232" y="3364992"/>
-            <a:ext cx="1645920" cy="475488"/>
-          </a:xfrm>
-          <a:prstGeom prst="rect">
-            <a:avLst/>
-          </a:prstGeom>
-          <a:noFill/>
-          <a:ln/>
-        </p:spPr>
-        <p:txBody>
-          <a:bodyPr wrap="square" lIns="0" tIns="0" rIns="0" bIns="0" rtlCol="0" anchor="ctr"/>
-          <a:lstStyle/>
-          <a:p>
-            <a:pPr algn="ctr" indent="0" marL="0">
-              <a:buNone/>
-            </a:pPr>
-            <a:r>
-              <a:rPr lang="en-US" sz="1400" b="1" dirty="0">
-                <a:solidFill>
-                  <a:srgbClr val="0D9488"/>
-                </a:solidFill>
-                <a:latin typeface="Trebuchet MS" pitchFamily="34" charset="0"/>
-                <a:ea typeface="Trebuchet MS" pitchFamily="34" charset="-122"/>
-                <a:cs typeface="Trebuchet MS" pitchFamily="34" charset="-120"/>
-              </a:rPr>
-              <a:t>pear</a:t>
-            </a:r>
-            <a:endParaRPr lang="en-US" sz="1400" dirty="0"/>
-          </a:p>
-        </p:txBody>
-      </p:sp>
-      <p:sp>
-        <p:nvSpPr>
-          <p:cNvPr id="33" name="Shape 31"/>
-          <p:cNvSpPr/>
-          <p:nvPr/>
-        </p:nvSpPr>
-        <p:spPr>
-          <a:xfrm>
-            <a:off x="365760" y="4096512"/>
-            <a:ext cx="1371600" cy="804672"/>
-          </a:xfrm>
-          <a:prstGeom prst="rect">
-            <a:avLst>
-              <a:gd name="adj" fmla="val 6818"/>
-            </a:avLst>
-          </a:prstGeom>
-          <a:solidFill>
-            <a:srgbClr val="E2E8F0"/>
-          </a:solidFill>
-          <a:ln w="12700">
-            <a:solidFill>
-              <a:srgbClr val="E2E8F0"/>
-            </a:solidFill>
-            <a:prstDash val="solid"/>
-          </a:ln>
-        </p:spPr>
-      </p:sp>
-      <p:sp>
-        <p:nvSpPr>
-          <p:cNvPr id="34" name="Text 32"/>
-          <p:cNvSpPr/>
-          <p:nvPr/>
-        </p:nvSpPr>
-        <p:spPr>
-          <a:xfrm>
-            <a:off x="365760" y="4096512"/>
-            <a:ext cx="1371600" cy="804672"/>
-          </a:xfrm>
-          <a:prstGeom prst="rect">
-            <a:avLst/>
-          </a:prstGeom>
-          <a:noFill/>
-          <a:ln/>
-        </p:spPr>
-        <p:txBody>
-          <a:bodyPr wrap="square" lIns="0" tIns="0" rIns="0" bIns="0" rtlCol="0" anchor="ctr"/>
-          <a:lstStyle/>
-          <a:p>
-            <a:pPr algn="ctr" indent="0" marL="0">
-              <a:buNone/>
-            </a:pPr>
-            <a:r>
-              <a:rPr lang="en-US" sz="1100" b="1" dirty="0">
-                <a:solidFill>
-                  <a:srgbClr val="475569"/>
-                </a:solidFill>
-                <a:latin typeface="Trebuchet MS" pitchFamily="34" charset="0"/>
-                <a:ea typeface="Trebuchet MS" pitchFamily="34" charset="-122"/>
-                <a:cs typeface="Trebuchet MS" pitchFamily="34" charset="-120"/>
-              </a:rPr>
-              <a:t>Phonemes</a:t>
-            </a:r>
-            <a:endParaRPr lang="en-US" sz="1100" dirty="0"/>
-          </a:p>
-        </p:txBody>
-      </p:sp>
-      <p:sp>
-        <p:nvSpPr>
-          <p:cNvPr id="35" name="Shape 33"/>
-          <p:cNvSpPr/>
-          <p:nvPr/>
-        </p:nvSpPr>
-        <p:spPr>
-          <a:xfrm>
-            <a:off x="1874520" y="4096512"/>
-            <a:ext cx="6903720" cy="658368"/>
-          </a:xfrm>
-          <a:prstGeom prst="rect">
-            <a:avLst>
-              <a:gd name="adj" fmla="val 8333"/>
-            </a:avLst>
-          </a:prstGeom>
-          <a:solidFill>
-            <a:srgbClr val="FCE7F3"/>
-          </a:solidFill>
-          <a:ln w="12700">
-            <a:solidFill>
-              <a:srgbClr val="DB2777"/>
-            </a:solidFill>
-            <a:prstDash val="solid"/>
-          </a:ln>
-        </p:spPr>
-      </p:sp>
-      <p:sp>
-        <p:nvSpPr>
-          <p:cNvPr id="36" name="Shape 34"/>
-          <p:cNvSpPr/>
-          <p:nvPr/>
-        </p:nvSpPr>
-        <p:spPr>
-          <a:xfrm>
-            <a:off x="2254649" y="4169664"/>
-            <a:ext cx="685800" cy="475488"/>
-          </a:xfrm>
-          <a:prstGeom prst="rect">
-            <a:avLst>
-              <a:gd name="adj" fmla="val 7692"/>
-            </a:avLst>
-          </a:prstGeom>
-          <a:solidFill>
-            <a:srgbClr val="FFFFFF"/>
-          </a:solidFill>
-          <a:ln w="12700">
-            <a:solidFill>
-              <a:srgbClr val="DB2777"/>
-            </a:solidFill>
-            <a:prstDash val="solid"/>
-          </a:ln>
-        </p:spPr>
-      </p:sp>
-      <p:sp>
-        <p:nvSpPr>
-          <p:cNvPr id="37" name="Text 35"/>
-          <p:cNvSpPr/>
-          <p:nvPr/>
-        </p:nvSpPr>
-        <p:spPr>
-          <a:xfrm>
-            <a:off x="2254649" y="4169664"/>
-            <a:ext cx="685800" cy="475488"/>
-          </a:xfrm>
-          <a:prstGeom prst="rect">
-            <a:avLst/>
-          </a:prstGeom>
-          <a:noFill/>
-          <a:ln/>
-        </p:spPr>
-        <p:txBody>
-          <a:bodyPr wrap="square" lIns="0" tIns="0" rIns="0" bIns="0" rtlCol="0" anchor="ctr"/>
-          <a:lstStyle/>
-          <a:p>
-            <a:pPr algn="ctr" indent="0" marL="0">
-              <a:buNone/>
-            </a:pPr>
-            <a:r>
-              <a:rPr lang="en-US" sz="900" b="1" dirty="0">
-                <a:solidFill>
-                  <a:srgbClr val="9D174D"/>
-                </a:solidFill>
-                <a:latin typeface="Trebuchet MS" pitchFamily="34" charset="0"/>
-                <a:ea typeface="Trebuchet MS" pitchFamily="34" charset="-122"/>
-                <a:cs typeface="Trebuchet MS" pitchFamily="34" charset="-120"/>
-              </a:rPr>
-              <a:t>d</a:t>
-            </a:r>
-            <a:endParaRPr lang="en-US" sz="900" dirty="0"/>
-          </a:p>
-        </p:txBody>
-      </p:sp>
-      <p:sp>
-        <p:nvSpPr>
-          <p:cNvPr id="38" name="Shape 36"/>
-          <p:cNvSpPr/>
-          <p:nvPr/>
-        </p:nvSpPr>
-        <p:spPr>
-          <a:xfrm>
-            <a:off x="3293146" y="4169664"/>
-            <a:ext cx="685800" cy="475488"/>
-          </a:xfrm>
-          <a:prstGeom prst="rect">
-            <a:avLst>
-              <a:gd name="adj" fmla="val 7692"/>
-            </a:avLst>
-          </a:prstGeom>
-          <a:solidFill>
-            <a:srgbClr val="FFFFFF"/>
-          </a:solidFill>
-          <a:ln w="12700">
-            <a:solidFill>
-              <a:srgbClr val="DB2777"/>
-            </a:solidFill>
-            <a:prstDash val="solid"/>
-          </a:ln>
-        </p:spPr>
-      </p:sp>
-      <p:sp>
-        <p:nvSpPr>
-          <p:cNvPr id="39" name="Text 37"/>
-          <p:cNvSpPr/>
-          <p:nvPr/>
-        </p:nvSpPr>
-        <p:spPr>
-          <a:xfrm>
-            <a:off x="3293146" y="4169664"/>
-            <a:ext cx="685800" cy="475488"/>
-          </a:xfrm>
-          <a:prstGeom prst="rect">
-            <a:avLst/>
-          </a:prstGeom>
-          <a:noFill/>
-          <a:ln/>
-        </p:spPr>
-        <p:txBody>
-          <a:bodyPr wrap="square" lIns="0" tIns="0" rIns="0" bIns="0" rtlCol="0" anchor="ctr"/>
-          <a:lstStyle/>
-          <a:p>
-            <a:pPr algn="ctr" indent="0" marL="0">
-              <a:buNone/>
-            </a:pPr>
-            <a:r>
-              <a:rPr lang="en-US" sz="900" b="1" dirty="0">
-                <a:solidFill>
-                  <a:srgbClr val="9D174D"/>
-                </a:solidFill>
-                <a:latin typeface="Trebuchet MS" pitchFamily="34" charset="0"/>
-                <a:ea typeface="Trebuchet MS" pitchFamily="34" charset="-122"/>
-                <a:cs typeface="Trebuchet MS" pitchFamily="34" charset="-120"/>
-              </a:rPr>
-              <a:t>i</a:t>
-            </a:r>
-            <a:endParaRPr lang="en-US" sz="900" dirty="0"/>
-          </a:p>
-        </p:txBody>
-      </p:sp>
-      <p:sp>
-        <p:nvSpPr>
-          <p:cNvPr id="40" name="Shape 38"/>
-          <p:cNvSpPr/>
-          <p:nvPr/>
-        </p:nvSpPr>
-        <p:spPr>
-          <a:xfrm>
-            <a:off x="4331643" y="4169664"/>
-            <a:ext cx="685800" cy="475488"/>
-          </a:xfrm>
-          <a:prstGeom prst="rect">
-            <a:avLst>
-              <a:gd name="adj" fmla="val 7692"/>
-            </a:avLst>
-          </a:prstGeom>
-          <a:solidFill>
-            <a:srgbClr val="FFFFFF"/>
-          </a:solidFill>
-          <a:ln w="12700">
-            <a:solidFill>
-              <a:srgbClr val="DB2777"/>
-            </a:solidFill>
-            <a:prstDash val="solid"/>
-          </a:ln>
-        </p:spPr>
-      </p:sp>
-      <p:sp>
-        <p:nvSpPr>
-          <p:cNvPr id="41" name="Text 39"/>
-          <p:cNvSpPr/>
-          <p:nvPr/>
-        </p:nvSpPr>
-        <p:spPr>
-          <a:xfrm>
-            <a:off x="4331643" y="4169664"/>
-            <a:ext cx="685800" cy="475488"/>
-          </a:xfrm>
-          <a:prstGeom prst="rect">
-            <a:avLst/>
-          </a:prstGeom>
-          <a:noFill/>
-          <a:ln/>
-        </p:spPr>
-        <p:txBody>
-          <a:bodyPr wrap="square" lIns="0" tIns="0" rIns="0" bIns="0" rtlCol="0" anchor="ctr"/>
-          <a:lstStyle/>
-          <a:p>
-            <a:pPr algn="ctr" indent="0" marL="0">
-              <a:buNone/>
-            </a:pPr>
-            <a:r>
-              <a:rPr lang="en-US" sz="900" b="1" dirty="0">
-                <a:solidFill>
-                  <a:srgbClr val="9D174D"/>
-                </a:solidFill>
-                <a:latin typeface="Trebuchet MS" pitchFamily="34" charset="0"/>
-                <a:ea typeface="Trebuchet MS" pitchFamily="34" charset="-122"/>
-                <a:cs typeface="Trebuchet MS" pitchFamily="34" charset="-120"/>
-              </a:rPr>
-              <a:t>s</a:t>
-            </a:r>
-            <a:endParaRPr lang="en-US" sz="900" dirty="0"/>
-          </a:p>
-        </p:txBody>
-      </p:sp>
-      <p:sp>
-        <p:nvSpPr>
-          <p:cNvPr id="42" name="Shape 40"/>
-          <p:cNvSpPr/>
-          <p:nvPr/>
-        </p:nvSpPr>
-        <p:spPr>
-          <a:xfrm>
-            <a:off x="5370141" y="4169664"/>
-            <a:ext cx="685800" cy="475488"/>
-          </a:xfrm>
-          <a:prstGeom prst="rect">
-            <a:avLst>
-              <a:gd name="adj" fmla="val 7692"/>
-            </a:avLst>
-          </a:prstGeom>
-          <a:solidFill>
-            <a:srgbClr val="FFFFFF"/>
-          </a:solidFill>
-          <a:ln w="12700">
-            <a:solidFill>
-              <a:srgbClr val="DB2777"/>
-            </a:solidFill>
-            <a:prstDash val="solid"/>
-          </a:ln>
-        </p:spPr>
-      </p:sp>
-      <p:sp>
-        <p:nvSpPr>
-          <p:cNvPr id="43" name="Text 41"/>
-          <p:cNvSpPr/>
-          <p:nvPr/>
-        </p:nvSpPr>
-        <p:spPr>
-          <a:xfrm>
-            <a:off x="5370141" y="4169664"/>
-            <a:ext cx="685800" cy="475488"/>
-          </a:xfrm>
-          <a:prstGeom prst="rect">
-            <a:avLst/>
-          </a:prstGeom>
-          <a:noFill/>
-          <a:ln/>
-        </p:spPr>
-        <p:txBody>
-          <a:bodyPr wrap="square" lIns="0" tIns="0" rIns="0" bIns="0" rtlCol="0" anchor="ctr"/>
-          <a:lstStyle/>
-          <a:p>
-            <a:pPr algn="ctr" indent="0" marL="0">
-              <a:buNone/>
-            </a:pPr>
-            <a:r>
-              <a:rPr lang="en-US" sz="900" b="1" dirty="0">
-                <a:solidFill>
-                  <a:srgbClr val="9D174D"/>
-                </a:solidFill>
-                <a:latin typeface="Trebuchet MS" pitchFamily="34" charset="0"/>
-                <a:ea typeface="Trebuchet MS" pitchFamily="34" charset="-122"/>
-                <a:cs typeface="Trebuchet MS" pitchFamily="34" charset="-120"/>
-              </a:rPr>
-              <a:t>a</a:t>
-            </a:r>
-            <a:endParaRPr lang="en-US" sz="900" dirty="0"/>
-          </a:p>
-        </p:txBody>
-      </p:sp>
-      <p:sp>
-        <p:nvSpPr>
-          <p:cNvPr id="44" name="Shape 42"/>
-          <p:cNvSpPr/>
-          <p:nvPr/>
-        </p:nvSpPr>
-        <p:spPr>
-          <a:xfrm>
-            <a:off x="6408638" y="4169664"/>
-            <a:ext cx="685800" cy="475488"/>
-          </a:xfrm>
-          <a:prstGeom prst="rect">
-            <a:avLst>
-              <a:gd name="adj" fmla="val 7692"/>
-            </a:avLst>
-          </a:prstGeom>
-          <a:solidFill>
-            <a:srgbClr val="FFFFFF"/>
-          </a:solidFill>
-          <a:ln w="12700">
-            <a:solidFill>
-              <a:srgbClr val="DB2777"/>
-            </a:solidFill>
-            <a:prstDash val="solid"/>
-          </a:ln>
-        </p:spPr>
-      </p:sp>
-      <p:sp>
-        <p:nvSpPr>
-          <p:cNvPr id="45" name="Text 43"/>
-          <p:cNvSpPr/>
-          <p:nvPr/>
-        </p:nvSpPr>
-        <p:spPr>
-          <a:xfrm>
-            <a:off x="6408638" y="4169664"/>
-            <a:ext cx="685800" cy="475488"/>
-          </a:xfrm>
-          <a:prstGeom prst="rect">
-            <a:avLst/>
-          </a:prstGeom>
-          <a:noFill/>
-          <a:ln/>
-        </p:spPr>
-        <p:txBody>
-          <a:bodyPr wrap="square" lIns="0" tIns="0" rIns="0" bIns="0" rtlCol="0" anchor="ctr"/>
-          <a:lstStyle/>
-          <a:p>
-            <a:pPr algn="ctr" indent="0" marL="0">
-              <a:buNone/>
-            </a:pPr>
-            <a:r>
-              <a:rPr lang="en-US" sz="900" b="1" dirty="0">
-                <a:solidFill>
-                  <a:srgbClr val="9D174D"/>
-                </a:solidFill>
-                <a:latin typeface="Trebuchet MS" pitchFamily="34" charset="0"/>
-                <a:ea typeface="Trebuchet MS" pitchFamily="34" charset="-122"/>
-                <a:cs typeface="Trebuchet MS" pitchFamily="34" charset="-120"/>
-              </a:rPr>
-              <a:t>pp</a:t>
-            </a:r>
-            <a:endParaRPr lang="en-US" sz="900" dirty="0"/>
-          </a:p>
-        </p:txBody>
-      </p:sp>
-      <p:sp>
-        <p:nvSpPr>
-          <p:cNvPr id="46" name="Shape 44"/>
-          <p:cNvSpPr/>
-          <p:nvPr/>
-        </p:nvSpPr>
-        <p:spPr>
-          <a:xfrm>
-            <a:off x="7447135" y="4169664"/>
-            <a:ext cx="685800" cy="475488"/>
-          </a:xfrm>
-          <a:prstGeom prst="rect">
-            <a:avLst>
-              <a:gd name="adj" fmla="val 7692"/>
-            </a:avLst>
-          </a:prstGeom>
-          <a:solidFill>
-            <a:srgbClr val="FFFFFF"/>
-          </a:solidFill>
-          <a:ln w="12700">
-            <a:solidFill>
-              <a:srgbClr val="DB2777"/>
-            </a:solidFill>
-            <a:prstDash val="solid"/>
-          </a:ln>
-        </p:spPr>
-      </p:sp>
-      <p:sp>
-        <p:nvSpPr>
-          <p:cNvPr id="47" name="Text 45"/>
-          <p:cNvSpPr/>
-          <p:nvPr/>
-        </p:nvSpPr>
-        <p:spPr>
-          <a:xfrm>
-            <a:off x="7447135" y="4169664"/>
-            <a:ext cx="685800" cy="475488"/>
-          </a:xfrm>
-          <a:prstGeom prst="rect">
-            <a:avLst/>
-          </a:prstGeom>
-          <a:noFill/>
-          <a:ln/>
-        </p:spPr>
-        <p:txBody>
-          <a:bodyPr wrap="square" lIns="0" tIns="0" rIns="0" bIns="0" rtlCol="0" anchor="ctr"/>
-          <a:lstStyle/>
-          <a:p>
-            <a:pPr algn="ctr" indent="0" marL="0">
-              <a:buNone/>
-            </a:pPr>
-            <a:r>
-              <a:rPr lang="en-US" sz="900" b="1" dirty="0">
-                <a:solidFill>
-                  <a:srgbClr val="9D174D"/>
-                </a:solidFill>
-                <a:latin typeface="Trebuchet MS" pitchFamily="34" charset="0"/>
-                <a:ea typeface="Trebuchet MS" pitchFamily="34" charset="-122"/>
-                <a:cs typeface="Trebuchet MS" pitchFamily="34" charset="-120"/>
-              </a:rPr>
               <a:t>ear</a:t>
             </a:r>
-            <a:endParaRPr lang="en-US" sz="900" dirty="0"/>
+            <a:endParaRPr lang="en-US" sz="1000" dirty="0"/>
           </a:p>
         </p:txBody>
       </p:sp>
@@ -28133,7 +28172,7 @@
                 <a:ea typeface="Trebuchet MS" pitchFamily="34" charset="-122"/>
                 <a:cs typeface="Trebuchet MS" pitchFamily="34" charset="-120"/>
               </a:rPr>
-              <a:t>reappear</a:t>
+              <a:t>appearing</a:t>
             </a:r>
             <a:endParaRPr lang="en-US" sz="2800" dirty="0"/>
           </a:p>
@@ -28960,7 +28999,7 @@
                 <a:ea typeface="Trebuchet MS" pitchFamily="34" charset="-122"/>
                 <a:cs typeface="Trebuchet MS" pitchFamily="34" charset="-120"/>
               </a:rPr>
-              <a:t>reappear</a:t>
+              <a:t>appearing</a:t>
             </a:r>
             <a:endParaRPr lang="en-US" sz="2800" dirty="0"/>
           </a:p>
@@ -29049,11 +29088,11 @@
             </a:avLst>
           </a:prstGeom>
           <a:solidFill>
-            <a:srgbClr val="DDD6FE"/>
+            <a:srgbClr val="CCFBF1"/>
           </a:solidFill>
           <a:ln w="19050">
             <a:solidFill>
-              <a:srgbClr val="7C3AED"/>
+              <a:srgbClr val="0D9488"/>
             </a:solidFill>
             <a:prstDash val="solid"/>
           </a:ln>
@@ -29093,13 +29132,13 @@
             <a:r>
               <a:rPr lang="en-US" sz="1300" b="1" dirty="0">
                 <a:solidFill>
-                  <a:srgbClr val="4C1D95"/>
+                  <a:srgbClr val="0F766E"/>
                 </a:solidFill>
                 <a:latin typeface="Trebuchet MS" pitchFamily="34" charset="0"/>
                 <a:ea typeface="Trebuchet MS" pitchFamily="34" charset="-122"/>
                 <a:cs typeface="Trebuchet MS" pitchFamily="34" charset="-120"/>
               </a:rPr>
-              <a:t>re</a:t>
+              <a:t>appear</a:t>
             </a:r>
             <a:endParaRPr lang="en-US" sz="1300" dirty="0"/>
           </a:p>
@@ -29138,7 +29177,7 @@
                 <a:ea typeface="Calibri" pitchFamily="34" charset="-122"/>
                 <a:cs typeface="Calibri" pitchFamily="34" charset="-120"/>
               </a:rPr>
-              <a:t>again, back</a:t>
+              <a:t>to come into sight</a:t>
             </a:r>
             <a:endParaRPr lang="en-US" sz="850" dirty="0"/>
           </a:p>
@@ -29161,11 +29200,11 @@
             </a:avLst>
           </a:prstGeom>
           <a:solidFill>
-            <a:srgbClr val="CCFBF1"/>
+            <a:srgbClr val="FCE7F3"/>
           </a:solidFill>
           <a:ln w="19050">
             <a:solidFill>
-              <a:srgbClr val="0D9488"/>
+              <a:srgbClr val="DB2777"/>
             </a:solidFill>
             <a:prstDash val="solid"/>
           </a:ln>
@@ -29205,13 +29244,13 @@
             <a:r>
               <a:rPr lang="en-US" sz="1300" b="1" dirty="0">
                 <a:solidFill>
-                  <a:srgbClr val="0F766E"/>
+                  <a:srgbClr val="9D174D"/>
                 </a:solidFill>
                 <a:latin typeface="Trebuchet MS" pitchFamily="34" charset="0"/>
                 <a:ea typeface="Trebuchet MS" pitchFamily="34" charset="-122"/>
                 <a:cs typeface="Trebuchet MS" pitchFamily="34" charset="-120"/>
               </a:rPr>
-              <a:t>appear</a:t>
+              <a:t>ing</a:t>
             </a:r>
             <a:endParaRPr lang="en-US" sz="1300" dirty="0"/>
           </a:p>
@@ -29250,7 +29289,7 @@
                 <a:ea typeface="Calibri" pitchFamily="34" charset="-122"/>
                 <a:cs typeface="Calibri" pitchFamily="34" charset="-120"/>
               </a:rPr>
-              <a:t>to come into sight</a:t>
+              <a:t>action in progress</a:t>
             </a:r>
             <a:endParaRPr lang="en-US" sz="850" dirty="0"/>
           </a:p>
@@ -29945,7 +29984,7 @@
                 <a:ea typeface="Trebuchet MS" pitchFamily="34" charset="-122"/>
                 <a:cs typeface="Trebuchet MS" pitchFamily="34" charset="-120"/>
               </a:rPr>
-              <a:t>reappear</a:t>
+              <a:t>appearing</a:t>
             </a:r>
             <a:endParaRPr lang="en-US" sz="2800" dirty="0"/>
           </a:p>
@@ -30034,11 +30073,11 @@
             </a:avLst>
           </a:prstGeom>
           <a:solidFill>
-            <a:srgbClr val="DDD6FE"/>
+            <a:srgbClr val="CCFBF1"/>
           </a:solidFill>
           <a:ln w="19050">
             <a:solidFill>
-              <a:srgbClr val="7C3AED"/>
+              <a:srgbClr val="0D9488"/>
             </a:solidFill>
             <a:prstDash val="solid"/>
           </a:ln>
@@ -30078,13 +30117,13 @@
             <a:r>
               <a:rPr lang="en-US" sz="1300" b="1" dirty="0">
                 <a:solidFill>
-                  <a:srgbClr val="4C1D95"/>
+                  <a:srgbClr val="0F766E"/>
                 </a:solidFill>
                 <a:latin typeface="Trebuchet MS" pitchFamily="34" charset="0"/>
                 <a:ea typeface="Trebuchet MS" pitchFamily="34" charset="-122"/>
                 <a:cs typeface="Trebuchet MS" pitchFamily="34" charset="-120"/>
               </a:rPr>
-              <a:t>re</a:t>
+              <a:t>appear</a:t>
             </a:r>
             <a:endParaRPr lang="en-US" sz="1300" dirty="0"/>
           </a:p>
@@ -30123,7 +30162,7 @@
                 <a:ea typeface="Calibri" pitchFamily="34" charset="-122"/>
                 <a:cs typeface="Calibri" pitchFamily="34" charset="-120"/>
               </a:rPr>
-              <a:t>again, back</a:t>
+              <a:t>to come into sight</a:t>
             </a:r>
             <a:endParaRPr lang="en-US" sz="850" dirty="0"/>
           </a:p>
@@ -30146,11 +30185,11 @@
             </a:avLst>
           </a:prstGeom>
           <a:solidFill>
-            <a:srgbClr val="CCFBF1"/>
+            <a:srgbClr val="FCE7F3"/>
           </a:solidFill>
           <a:ln w="19050">
             <a:solidFill>
-              <a:srgbClr val="0D9488"/>
+              <a:srgbClr val="DB2777"/>
             </a:solidFill>
             <a:prstDash val="solid"/>
           </a:ln>
@@ -30190,13 +30229,13 @@
             <a:r>
               <a:rPr lang="en-US" sz="1300" b="1" dirty="0">
                 <a:solidFill>
-                  <a:srgbClr val="0F766E"/>
+                  <a:srgbClr val="9D174D"/>
                 </a:solidFill>
                 <a:latin typeface="Trebuchet MS" pitchFamily="34" charset="0"/>
                 <a:ea typeface="Trebuchet MS" pitchFamily="34" charset="-122"/>
                 <a:cs typeface="Trebuchet MS" pitchFamily="34" charset="-120"/>
               </a:rPr>
-              <a:t>appear</a:t>
+              <a:t>ing</a:t>
             </a:r>
             <a:endParaRPr lang="en-US" sz="1300" dirty="0"/>
           </a:p>
@@ -30235,7 +30274,7 @@
                 <a:ea typeface="Calibri" pitchFamily="34" charset="-122"/>
                 <a:cs typeface="Calibri" pitchFamily="34" charset="-120"/>
               </a:rPr>
-              <a:t>to come into sight</a:t>
+              <a:t>action in progress</a:t>
             </a:r>
             <a:endParaRPr lang="en-US" sz="850" dirty="0"/>
           </a:p>
@@ -30394,7 +30433,7 @@
                 <a:ea typeface="Trebuchet MS" pitchFamily="34" charset="-122"/>
                 <a:cs typeface="Trebuchet MS" pitchFamily="34" charset="-120"/>
               </a:rPr>
-              <a:t>re</a:t>
+              <a:t>ap</a:t>
             </a:r>
             <a:endParaRPr lang="en-US" sz="1400" dirty="0"/>
           </a:p>
@@ -30499,7 +30538,7 @@
                 <a:ea typeface="Trebuchet MS" pitchFamily="34" charset="-122"/>
                 <a:cs typeface="Trebuchet MS" pitchFamily="34" charset="-120"/>
               </a:rPr>
-              <a:t>ap</a:t>
+              <a:t>pear</a:t>
             </a:r>
             <a:endParaRPr lang="en-US" sz="1400" dirty="0"/>
           </a:p>
@@ -30604,7 +30643,7 @@
                 <a:ea typeface="Trebuchet MS" pitchFamily="34" charset="-122"/>
                 <a:cs typeface="Trebuchet MS" pitchFamily="34" charset="-120"/>
               </a:rPr>
-              <a:t>pear</a:t>
+              <a:t>ing</a:t>
             </a:r>
             <a:endParaRPr lang="en-US" sz="1400" dirty="0"/>
           </a:p>
@@ -31167,7 +31206,7 @@
                 <a:ea typeface="Trebuchet MS" pitchFamily="34" charset="-122"/>
                 <a:cs typeface="Trebuchet MS" pitchFamily="34" charset="-120"/>
               </a:rPr>
-              <a:t>reappear</a:t>
+              <a:t>appearing</a:t>
             </a:r>
             <a:endParaRPr lang="en-US" sz="2800" dirty="0"/>
           </a:p>
@@ -31256,11 +31295,11 @@
             </a:avLst>
           </a:prstGeom>
           <a:solidFill>
-            <a:srgbClr val="DDD6FE"/>
+            <a:srgbClr val="CCFBF1"/>
           </a:solidFill>
           <a:ln w="19050">
             <a:solidFill>
-              <a:srgbClr val="7C3AED"/>
+              <a:srgbClr val="0D9488"/>
             </a:solidFill>
             <a:prstDash val="solid"/>
           </a:ln>
@@ -31300,13 +31339,13 @@
             <a:r>
               <a:rPr lang="en-US" sz="1300" b="1" dirty="0">
                 <a:solidFill>
-                  <a:srgbClr val="4C1D95"/>
+                  <a:srgbClr val="0F766E"/>
                 </a:solidFill>
                 <a:latin typeface="Trebuchet MS" pitchFamily="34" charset="0"/>
                 <a:ea typeface="Trebuchet MS" pitchFamily="34" charset="-122"/>
                 <a:cs typeface="Trebuchet MS" pitchFamily="34" charset="-120"/>
               </a:rPr>
-              <a:t>re</a:t>
+              <a:t>appear</a:t>
             </a:r>
             <a:endParaRPr lang="en-US" sz="1300" dirty="0"/>
           </a:p>
@@ -31345,7 +31384,7 @@
                 <a:ea typeface="Calibri" pitchFamily="34" charset="-122"/>
                 <a:cs typeface="Calibri" pitchFamily="34" charset="-120"/>
               </a:rPr>
-              <a:t>again, back</a:t>
+              <a:t>to come into sight</a:t>
             </a:r>
             <a:endParaRPr lang="en-US" sz="850" dirty="0"/>
           </a:p>
@@ -31368,11 +31407,11 @@
             </a:avLst>
           </a:prstGeom>
           <a:solidFill>
-            <a:srgbClr val="CCFBF1"/>
+            <a:srgbClr val="FCE7F3"/>
           </a:solidFill>
           <a:ln w="19050">
             <a:solidFill>
-              <a:srgbClr val="0D9488"/>
+              <a:srgbClr val="DB2777"/>
             </a:solidFill>
             <a:prstDash val="solid"/>
           </a:ln>
@@ -31412,13 +31451,13 @@
             <a:r>
               <a:rPr lang="en-US" sz="1300" b="1" dirty="0">
                 <a:solidFill>
-                  <a:srgbClr val="0F766E"/>
+                  <a:srgbClr val="9D174D"/>
                 </a:solidFill>
                 <a:latin typeface="Trebuchet MS" pitchFamily="34" charset="0"/>
                 <a:ea typeface="Trebuchet MS" pitchFamily="34" charset="-122"/>
                 <a:cs typeface="Trebuchet MS" pitchFamily="34" charset="-120"/>
               </a:rPr>
-              <a:t>appear</a:t>
+              <a:t>ing</a:t>
             </a:r>
             <a:endParaRPr lang="en-US" sz="1300" dirty="0"/>
           </a:p>
@@ -31457,7 +31496,7 @@
                 <a:ea typeface="Calibri" pitchFamily="34" charset="-122"/>
                 <a:cs typeface="Calibri" pitchFamily="34" charset="-120"/>
               </a:rPr>
-              <a:t>to come into sight</a:t>
+              <a:t>action in progress</a:t>
             </a:r>
             <a:endParaRPr lang="en-US" sz="850" dirty="0"/>
           </a:p>
@@ -31616,7 +31655,7 @@
                 <a:ea typeface="Trebuchet MS" pitchFamily="34" charset="-122"/>
                 <a:cs typeface="Trebuchet MS" pitchFamily="34" charset="-120"/>
               </a:rPr>
-              <a:t>re</a:t>
+              <a:t>ap</a:t>
             </a:r>
             <a:endParaRPr lang="en-US" sz="1400" dirty="0"/>
           </a:p>
@@ -31721,7 +31760,7 @@
                 <a:ea typeface="Trebuchet MS" pitchFamily="34" charset="-122"/>
                 <a:cs typeface="Trebuchet MS" pitchFamily="34" charset="-120"/>
               </a:rPr>
-              <a:t>ap</a:t>
+              <a:t>pear</a:t>
             </a:r>
             <a:endParaRPr lang="en-US" sz="1400" dirty="0"/>
           </a:p>
@@ -31826,7 +31865,7 @@
                 <a:ea typeface="Trebuchet MS" pitchFamily="34" charset="-122"/>
                 <a:cs typeface="Trebuchet MS" pitchFamily="34" charset="-120"/>
               </a:rPr>
-              <a:t>pear</a:t>
+              <a:t>ing</a:t>
             </a:r>
             <a:endParaRPr lang="en-US" sz="1400" dirty="0"/>
           </a:p>
@@ -31985,7 +32024,7 @@
                 <a:ea typeface="Trebuchet MS" pitchFamily="34" charset="-122"/>
                 <a:cs typeface="Trebuchet MS" pitchFamily="34" charset="-120"/>
               </a:rPr>
-              <a:t>r</a:t>
+              <a:t>a</a:t>
             </a:r>
             <a:endParaRPr lang="en-US" sz="900" dirty="0"/>
           </a:p>
@@ -32051,7 +32090,7 @@
                 <a:ea typeface="Trebuchet MS" pitchFamily="34" charset="-122"/>
                 <a:cs typeface="Trebuchet MS" pitchFamily="34" charset="-120"/>
               </a:rPr>
-              <a:t>e</a:t>
+              <a:t>pp</a:t>
             </a:r>
             <a:endParaRPr lang="en-US" sz="900" dirty="0"/>
           </a:p>
@@ -32117,7 +32156,7 @@
                 <a:ea typeface="Trebuchet MS" pitchFamily="34" charset="-122"/>
                 <a:cs typeface="Trebuchet MS" pitchFamily="34" charset="-120"/>
               </a:rPr>
-              <a:t>a</a:t>
+              <a:t>ear</a:t>
             </a:r>
             <a:endParaRPr lang="en-US" sz="900" dirty="0"/>
           </a:p>
@@ -32183,7 +32222,7 @@
                 <a:ea typeface="Trebuchet MS" pitchFamily="34" charset="-122"/>
                 <a:cs typeface="Trebuchet MS" pitchFamily="34" charset="-120"/>
               </a:rPr>
-              <a:t>pp</a:t>
+              <a:t>i</a:t>
             </a:r>
             <a:endParaRPr lang="en-US" sz="900" dirty="0"/>
           </a:p>
@@ -32249,7 +32288,7 @@
                 <a:ea typeface="Trebuchet MS" pitchFamily="34" charset="-122"/>
                 <a:cs typeface="Trebuchet MS" pitchFamily="34" charset="-120"/>
               </a:rPr>
-              <a:t>ear</a:t>
+              <a:t>ng</a:t>
             </a:r>
             <a:endParaRPr lang="en-US" sz="900" dirty="0"/>
           </a:p>
@@ -34292,7 +34331,7 @@
                 <a:ea typeface="Trebuchet MS" pitchFamily="34" charset="-122"/>
                 <a:cs typeface="Trebuchet MS" pitchFamily="34" charset="-120"/>
               </a:rPr>
-              <a:t>-ed</a:t>
+              <a:t>-ing</a:t>
             </a:r>
             <a:endParaRPr lang="en-US" sz="1300" dirty="0"/>
           </a:p>
@@ -34445,7 +34484,7 @@
                 <a:ea typeface="Trebuchet MS" pitchFamily="34" charset="-122"/>
                 <a:cs typeface="Trebuchet MS" pitchFamily="34" charset="-120"/>
               </a:rPr>
-              <a:t>-ing</a:t>
+              <a:t>-ed</a:t>
             </a:r>
             <a:endParaRPr lang="en-US" sz="1300" dirty="0"/>
           </a:p>
@@ -35186,7 +35225,7 @@
                 <a:ea typeface="Trebuchet MS" pitchFamily="34" charset="-122"/>
                 <a:cs typeface="Trebuchet MS" pitchFamily="34" charset="-120"/>
               </a:rPr>
-              <a:t>reappear</a:t>
+              <a:t>disappear</a:t>
             </a:r>
             <a:endParaRPr lang="en-US" sz="1200" dirty="0"/>
           </a:p>
@@ -35252,7 +35291,7 @@
                 <a:ea typeface="Trebuchet MS" pitchFamily="34" charset="-122"/>
                 <a:cs typeface="Trebuchet MS" pitchFamily="34" charset="-120"/>
               </a:rPr>
-              <a:t>disappear</a:t>
+              <a:t>disappearing</a:t>
             </a:r>
             <a:endParaRPr lang="en-US" sz="1200" dirty="0"/>
           </a:p>
@@ -35318,7 +35357,7 @@
                 <a:ea typeface="Trebuchet MS" pitchFamily="34" charset="-122"/>
                 <a:cs typeface="Trebuchet MS" pitchFamily="34" charset="-120"/>
               </a:rPr>
-              <a:t>disappearance</a:t>
+              <a:t>reappear</a:t>
             </a:r>
             <a:endParaRPr lang="en-US" sz="1200" dirty="0"/>
           </a:p>
@@ -36506,7 +36545,7 @@
                 <a:ea typeface="Calibri" pitchFamily="34" charset="-122"/>
                 <a:cs typeface="Calibri" pitchFamily="34" charset="-120"/>
               </a:rPr>
-              <a:t>1.  The word 'disappear' contains the root 'appear'.</a:t>
+              <a:t>1.  The root 'appear' comes from the Greek language.</a:t>
             </a:r>
             <a:endParaRPr lang="en-US" sz="1300" dirty="0"/>
           </a:p>
@@ -36529,11 +36568,11 @@
             </a:avLst>
           </a:prstGeom>
           <a:solidFill>
-            <a:srgbClr val="DCFCE7"/>
-          </a:solidFill>
-          <a:ln w="12700">
-            <a:solidFill>
-              <a:srgbClr val="16A34A"/>
+            <a:srgbClr val="FEE2E2"/>
+          </a:solidFill>
+          <a:ln w="12700">
+            <a:solidFill>
+              <a:srgbClr val="DC2626"/>
             </a:solidFill>
             <a:prstDash val="solid"/>
           </a:ln>
@@ -36566,13 +36605,13 @@
             <a:r>
               <a:rPr lang="en-US" sz="1100" b="1" dirty="0">
                 <a:solidFill>
-                  <a:srgbClr val="16A34A"/>
+                  <a:srgbClr val="DC2626"/>
                 </a:solidFill>
                 <a:latin typeface="Trebuchet MS" pitchFamily="34" charset="0"/>
                 <a:ea typeface="Trebuchet MS" pitchFamily="34" charset="-122"/>
                 <a:cs typeface="Trebuchet MS" pitchFamily="34" charset="-120"/>
               </a:rPr>
-              <a:t>TRUE</a:t>
+              <a:t>FALSE</a:t>
             </a:r>
             <a:endParaRPr lang="en-US" sz="1100" dirty="0"/>
           </a:p>
@@ -36645,7 +36684,7 @@
                 <a:ea typeface="Calibri" pitchFamily="34" charset="-122"/>
                 <a:cs typeface="Calibri" pitchFamily="34" charset="-120"/>
               </a:rPr>
-              <a:t>2.  The root 'appear' comes from Greek.</a:t>
+              <a:t>2.  Adding the suffix '-ance' to 'appear' makes the word 'appearance'.</a:t>
             </a:r>
             <a:endParaRPr lang="en-US" sz="1300" dirty="0"/>
           </a:p>
@@ -36668,11 +36707,11 @@
             </a:avLst>
           </a:prstGeom>
           <a:solidFill>
-            <a:srgbClr val="FEE2E2"/>
-          </a:solidFill>
-          <a:ln w="12700">
-            <a:solidFill>
-              <a:srgbClr val="DC2626"/>
+            <a:srgbClr val="DCFCE7"/>
+          </a:solidFill>
+          <a:ln w="12700">
+            <a:solidFill>
+              <a:srgbClr val="16A34A"/>
             </a:solidFill>
             <a:prstDash val="solid"/>
           </a:ln>
@@ -36705,13 +36744,13 @@
             <a:r>
               <a:rPr lang="en-US" sz="1100" b="1" dirty="0">
                 <a:solidFill>
-                  <a:srgbClr val="DC2626"/>
+                  <a:srgbClr val="16A34A"/>
                 </a:solidFill>
                 <a:latin typeface="Trebuchet MS" pitchFamily="34" charset="0"/>
                 <a:ea typeface="Trebuchet MS" pitchFamily="34" charset="-122"/>
                 <a:cs typeface="Trebuchet MS" pitchFamily="34" charset="-120"/>
               </a:rPr>
-              <a:t>FALSE</a:t>
+              <a:t>TRUE</a:t>
             </a:r>
             <a:endParaRPr lang="en-US" sz="1100" dirty="0"/>
           </a:p>
@@ -36923,7 +36962,7 @@
                 <a:ea typeface="Calibri" pitchFamily="34" charset="-122"/>
                 <a:cs typeface="Calibri" pitchFamily="34" charset="-120"/>
               </a:rPr>
-              <a:t>4.  The suffix '-ance' in 'appearance' turns the verb into a noun.</a:t>
+              <a:t>4.  The word 'disappear' contains the root 'appear'.</a:t>
             </a:r>
             <a:endParaRPr lang="en-US" sz="1300" dirty="0"/>
           </a:p>
@@ -37062,7 +37101,7 @@
                 <a:ea typeface="Calibri" pitchFamily="34" charset="-122"/>
                 <a:cs typeface="Calibri" pitchFamily="34" charset="-120"/>
               </a:rPr>
-              <a:t>5.  'Disappear' means to come into view suddenly.</a:t>
+              <a:t>5.  The root 'appear' means to make a loud noise.</a:t>
             </a:r>
             <a:endParaRPr lang="en-US" sz="1300" dirty="0"/>
           </a:p>
@@ -38031,7 +38070,7 @@
                 <a:ea typeface="Trebuchet MS" pitchFamily="34" charset="-122"/>
                 <a:cs typeface="Trebuchet MS" pitchFamily="34" charset="-120"/>
               </a:rPr>
-              <a:t>reappear</a:t>
+              <a:t>disappear</a:t>
             </a:r>
             <a:endParaRPr lang="en-US" sz="1300" dirty="0"/>
           </a:p>
@@ -38097,7 +38136,7 @@
                 <a:ea typeface="Trebuchet MS" pitchFamily="34" charset="-122"/>
                 <a:cs typeface="Trebuchet MS" pitchFamily="34" charset="-120"/>
               </a:rPr>
-              <a:t>disappear</a:t>
+              <a:t>disappearing</a:t>
             </a:r>
             <a:endParaRPr lang="en-US" sz="1300" dirty="0"/>
           </a:p>
@@ -38971,7 +39010,7 @@
                 <a:ea typeface="Trebuchet MS" pitchFamily="34" charset="-122"/>
                 <a:cs typeface="Trebuchet MS" pitchFamily="34" charset="-120"/>
               </a:rPr>
-              <a:t>-ed</a:t>
+              <a:t>-ing</a:t>
             </a:r>
             <a:endParaRPr lang="en-US" sz="1300" dirty="0"/>
           </a:p>
@@ -39124,7 +39163,7 @@
                 <a:ea typeface="Trebuchet MS" pitchFamily="34" charset="-122"/>
                 <a:cs typeface="Trebuchet MS" pitchFamily="34" charset="-120"/>
               </a:rPr>
-              <a:t>-ing</a:t>
+              <a:t>-ed</a:t>
             </a:r>
             <a:endParaRPr lang="en-US" sz="1300" dirty="0"/>
           </a:p>
@@ -40341,7 +40380,7 @@
                 <a:ea typeface="Calibri" pitchFamily="34" charset="-122"/>
                 <a:cs typeface="Calibri" pitchFamily="34" charset="-120"/>
               </a:rPr>
-              <a:t>The way something or someone looks to others.</a:t>
+              <a:t>The way something or someone looks to other people.</a:t>
             </a:r>
             <a:endParaRPr lang="en-US" sz="1200" dirty="0"/>
           </a:p>
@@ -40480,7 +40519,7 @@
                 <a:ea typeface="Calibri" pitchFamily="34" charset="-122"/>
                 <a:cs typeface="Calibri" pitchFamily="34" charset="-120"/>
               </a:rPr>
-              <a:t>The act of coming into view or becoming visible right now.</a:t>
+              <a:t>The act of coming into sight or showing up somewhere.</a:t>
             </a:r>
             <a:endParaRPr lang="en-US" sz="1200" dirty="0"/>
           </a:p>
@@ -40619,7 +40658,7 @@
                 <a:ea typeface="Calibri" pitchFamily="34" charset="-122"/>
                 <a:cs typeface="Calibri" pitchFamily="34" charset="-120"/>
               </a:rPr>
-              <a:t>To come back into view after being gone or hidden.</a:t>
+              <a:t>To go out of sight or stop being visible.</a:t>
             </a:r>
             <a:endParaRPr lang="en-US" sz="1200" dirty="0"/>
           </a:p>
@@ -40758,7 +40797,7 @@
                 <a:ea typeface="Calibri" pitchFamily="34" charset="-122"/>
                 <a:cs typeface="Calibri" pitchFamily="34" charset="-120"/>
               </a:rPr>
-              <a:t>When something came into view or became visible in the past.</a:t>
+              <a:t>When something came into view or was seen in the past.</a:t>
             </a:r>
             <a:endParaRPr lang="en-US" sz="1200" dirty="0"/>
           </a:p>
@@ -40897,7 +40936,7 @@
                 <a:ea typeface="Calibri" pitchFamily="34" charset="-122"/>
                 <a:cs typeface="Calibri" pitchFamily="34" charset="-120"/>
               </a:rPr>
-              <a:t>To go out of sight; to no longer be visible.</a:t>
+              <a:t>The act of going out of sight or vanishing.</a:t>
             </a:r>
             <a:endParaRPr lang="en-US" sz="1200" dirty="0"/>
           </a:p>
@@ -40970,7 +41009,7 @@
                 <a:ea typeface="Trebuchet MS" pitchFamily="34" charset="-122"/>
                 <a:cs typeface="Trebuchet MS" pitchFamily="34" charset="-120"/>
               </a:rPr>
-              <a:t>reappear</a:t>
+              <a:t>disappear</a:t>
             </a:r>
             <a:endParaRPr lang="en-US" sz="1200" dirty="0"/>
           </a:p>
@@ -41036,7 +41075,7 @@
                 <a:ea typeface="Calibri" pitchFamily="34" charset="-122"/>
                 <a:cs typeface="Calibri" pitchFamily="34" charset="-120"/>
               </a:rPr>
-              <a:t>To come into view or become visible to someone.</a:t>
+              <a:t>To come into sight or become visible to someone.</a:t>
             </a:r>
             <a:endParaRPr lang="en-US" sz="1200" dirty="0"/>
           </a:p>
@@ -41109,7 +41148,7 @@
                 <a:ea typeface="Trebuchet MS" pitchFamily="34" charset="-122"/>
                 <a:cs typeface="Trebuchet MS" pitchFamily="34" charset="-120"/>
               </a:rPr>
-              <a:t>disappear</a:t>
+              <a:t>disappearing</a:t>
             </a:r>
             <a:endParaRPr lang="en-US" sz="1200" dirty="0"/>
           </a:p>
@@ -41670,7 +41709,7 @@
                 <a:ea typeface="Calibri" pitchFamily="34" charset="-122"/>
                 <a:cs typeface="Calibri" pitchFamily="34" charset="-120"/>
               </a:rPr>
-              <a:t>The magician made the rabbit disappear right before our eyes.</a:t>
+              <a:t>The magician made a rabbit appear out of the empty hat, which amazed the whole audience.</a:t>
             </a:r>
             <a:endParaRPr lang="en-US" sz="1500" dirty="0"/>
           </a:p>
@@ -41834,7 +41873,7 @@
                 <a:ea typeface="Calibri" pitchFamily="34" charset="-122"/>
                 <a:cs typeface="Calibri" pitchFamily="34" charset="-120"/>
               </a:rPr>
-              <a:t>After the storm, a beautiful rainbow began to appear in the sky.</a:t>
+              <a:t>After the storm passed, a beautiful rainbow began to appear across the sky.</a:t>
             </a:r>
             <a:endParaRPr lang="en-US" sz="1500" dirty="0"/>
           </a:p>
@@ -41998,7 +42037,7 @@
                 <a:ea typeface="Calibri" pitchFamily="34" charset="-122"/>
                 <a:cs typeface="Calibri" pitchFamily="34" charset="-120"/>
               </a:rPr>
-              <a:t>Everyone was surprised by the sudden appearance of the new student in class.</a:t>
+              <a:t>The shy student did not want to make an appearance at the school concert this year.</a:t>
             </a:r>
             <a:endParaRPr lang="en-US" sz="1500" dirty="0"/>
           </a:p>

--- a/output/wordlabs-appear-3day.pptx
+++ b/output/wordlabs-appear-3day.pptx
@@ -4240,7 +4240,7 @@
                 <a:ea typeface="Calibri" pitchFamily="34" charset="-122"/>
                 <a:cs typeface="Calibri" pitchFamily="34" charset="-120"/>
               </a:rPr>
-              <a:t>"to come into sight"</a:t>
+              <a:t>"come into view"</a:t>
             </a:r>
             <a:endParaRPr lang="en-US" sz="2200" dirty="0"/>
           </a:p>
@@ -4279,7 +4279,7 @@
                 <a:ea typeface="Calibri" pitchFamily="34" charset="-122"/>
                 <a:cs typeface="Calibri" pitchFamily="34" charset="-120"/>
               </a:rPr>
-              <a:t>Origin: Latin: apparere</a:t>
+              <a:t>Origin: Core English root</a:t>
             </a:r>
             <a:endParaRPr lang="en-US" sz="1300" dirty="0"/>
           </a:p>
@@ -5288,7 +5288,7 @@
                 <a:ea typeface="Calibri" pitchFamily="34" charset="-122"/>
                 <a:cs typeface="Calibri" pitchFamily="34" charset="-120"/>
               </a:rPr>
-              <a:t>Word Labs  •  wordlabs.app  •  Root: 'appear' = to come into sight</a:t>
+              <a:t>Word Labs  •  wordlabs.app  •  Root: 'appear' = come into view</a:t>
             </a:r>
             <a:endParaRPr lang="en-US" sz="800" dirty="0"/>
           </a:p>
@@ -5622,7 +5622,7 @@
                 <a:ea typeface="Trebuchet MS" pitchFamily="34" charset="-122"/>
                 <a:cs typeface="Trebuchet MS" pitchFamily="34" charset="-120"/>
               </a:rPr>
-              <a:t>1</a:t>
+              <a:t>0</a:t>
             </a:r>
             <a:pPr algn="ctr" indent="0" marL="0">
               <a:buNone/>
@@ -5928,7 +5928,7 @@
                 <a:ea typeface="Calibri" pitchFamily="34" charset="-122"/>
                 <a:cs typeface="Calibri" pitchFamily="34" charset="-120"/>
               </a:rPr>
-              <a:t>Word Labs  •  wordlabs.app  •  Root: 'appear' = to come into sight</a:t>
+              <a:t>Word Labs  •  wordlabs.app  •  Root: 'appear' = come into view</a:t>
             </a:r>
             <a:endParaRPr lang="en-US" sz="800" dirty="0"/>
           </a:p>
@@ -6040,7 +6040,7 @@
                 <a:ea typeface="Calibri" pitchFamily="34" charset="-122"/>
                 <a:cs typeface="Calibri" pitchFamily="34" charset="-120"/>
               </a:rPr>
-              <a:t>The magician could make objects </a:t>
+              <a:t>The sun </a:t>
             </a:r>
             <a:pPr algn="l" indent="0" marL="0">
               <a:buNone/>
@@ -6057,7 +6057,7 @@
                 <a:ea typeface="Calibri" pitchFamily="34" charset="-122"/>
                 <a:cs typeface="Calibri" pitchFamily="34" charset="-120"/>
               </a:rPr>
-              <a:t>disappear</a:t>
+              <a:t>disappeared</a:t>
             </a:r>
             <a:pPr algn="l" indent="0" marL="0">
               <a:buNone/>
@@ -6071,7 +6071,7 @@
                 <a:ea typeface="Calibri" pitchFamily="34" charset="-122"/>
                 <a:cs typeface="Calibri" pitchFamily="34" charset="-120"/>
               </a:rPr>
-              <a:t>, but their </a:t>
+              <a:t> behind the clouds. The stars kept </a:t>
             </a:r>
             <a:pPr algn="l" indent="0" marL="0">
               <a:buNone/>
@@ -6088,7 +6088,7 @@
                 <a:ea typeface="Calibri" pitchFamily="34" charset="-122"/>
                 <a:cs typeface="Calibri" pitchFamily="34" charset="-120"/>
               </a:rPr>
-              <a:t>reappearance</a:t>
+              <a:t>reappearing</a:t>
             </a:r>
             <a:pPr algn="l" indent="0" marL="0">
               <a:buNone/>
@@ -6102,7 +6102,7 @@
                 <a:ea typeface="Calibri" pitchFamily="34" charset="-122"/>
                 <a:cs typeface="Calibri" pitchFamily="34" charset="-120"/>
               </a:rPr>
-              <a:t> always amazed the crowd.</a:t>
+              <a:t> between the fast-moving clouds.</a:t>
             </a:r>
             <a:endParaRPr lang="en-US" sz="1800" dirty="0"/>
           </a:p>
@@ -6257,7 +6257,7 @@
                 <a:ea typeface="Trebuchet MS" pitchFamily="34" charset="-122"/>
                 <a:cs typeface="Trebuchet MS" pitchFamily="34" charset="-120"/>
               </a:rPr>
-              <a:t>disappear</a:t>
+              <a:t>disappeared</a:t>
             </a:r>
             <a:endParaRPr lang="en-US" sz="1400" dirty="0"/>
           </a:p>
@@ -6385,7 +6385,7 @@
                 <a:ea typeface="Trebuchet MS" pitchFamily="34" charset="-122"/>
                 <a:cs typeface="Trebuchet MS" pitchFamily="34" charset="-120"/>
               </a:rPr>
-              <a:t>reappearance</a:t>
+              <a:t>reappearing</a:t>
             </a:r>
             <a:endParaRPr lang="en-US" sz="1400" dirty="0"/>
           </a:p>
@@ -6716,7 +6716,7 @@
                 <a:ea typeface="Calibri" pitchFamily="34" charset="-122"/>
                 <a:cs typeface="Calibri" pitchFamily="34" charset="-120"/>
               </a:rPr>
-              <a:t>Word Labs  •  wordlabs.app  •  Root: 'appear' = to come into sight</a:t>
+              <a:t>Word Labs  •  wordlabs.app  •  Root: 'appear' = come into view</a:t>
             </a:r>
             <a:endParaRPr lang="en-US" sz="800" dirty="0"/>
           </a:p>
@@ -6855,7 +6855,7 @@
                 <a:ea typeface="Trebuchet MS" pitchFamily="34" charset="-122"/>
                 <a:cs typeface="Trebuchet MS" pitchFamily="34" charset="-120"/>
               </a:rPr>
-              <a:t>disappear</a:t>
+              <a:t>disappeared</a:t>
             </a:r>
             <a:endParaRPr lang="en-US" sz="2800" dirty="0"/>
           </a:p>
@@ -7543,7 +7543,7 @@
                 <a:ea typeface="Calibri" pitchFamily="34" charset="-122"/>
                 <a:cs typeface="Calibri" pitchFamily="34" charset="-120"/>
               </a:rPr>
-              <a:t>Word Labs  •  wordlabs.app  •  Root: 'appear' = to come into sight</a:t>
+              <a:t>Word Labs  •  wordlabs.app  •  Root: 'appear' = come into view</a:t>
             </a:r>
             <a:endParaRPr lang="en-US" sz="800" dirty="0"/>
           </a:p>
@@ -7682,7 +7682,7 @@
                 <a:ea typeface="Trebuchet MS" pitchFamily="34" charset="-122"/>
                 <a:cs typeface="Trebuchet MS" pitchFamily="34" charset="-120"/>
               </a:rPr>
-              <a:t>disappear</a:t>
+              <a:t>disappeared</a:t>
             </a:r>
             <a:endParaRPr lang="en-US" sz="2800" dirty="0"/>
           </a:p>
@@ -7762,7 +7762,7 @@
         </p:nvSpPr>
         <p:spPr>
           <a:xfrm>
-            <a:off x="2938272" y="2258568"/>
+            <a:off x="2221992" y="2258568"/>
             <a:ext cx="1828800" cy="292608"/>
           </a:xfrm>
           <a:prstGeom prst="rect">
@@ -7796,7 +7796,7 @@
         </p:nvSpPr>
         <p:spPr>
           <a:xfrm>
-            <a:off x="2938272" y="2258568"/>
+            <a:off x="2221992" y="2258568"/>
             <a:ext cx="1828800" cy="292608"/>
           </a:xfrm>
           <a:prstGeom prst="rect">
@@ -7835,7 +7835,7 @@
         </p:nvSpPr>
         <p:spPr>
           <a:xfrm>
-            <a:off x="2938272" y="2569464"/>
+            <a:off x="2221992" y="2569464"/>
             <a:ext cx="1828800" cy="201168"/>
           </a:xfrm>
           <a:prstGeom prst="rect">
@@ -7860,7 +7860,7 @@
                 <a:ea typeface="Calibri" pitchFamily="34" charset="-122"/>
                 <a:cs typeface="Calibri" pitchFamily="34" charset="-120"/>
               </a:rPr>
-              <a:t>not, opposite of</a:t>
+              <a:t>not; opposite; apart</a:t>
             </a:r>
             <a:endParaRPr lang="en-US" sz="850" dirty="0"/>
           </a:p>
@@ -7874,7 +7874,7 @@
         </p:nvSpPr>
         <p:spPr>
           <a:xfrm>
-            <a:off x="5803392" y="2258568"/>
+            <a:off x="4370832" y="2258568"/>
             <a:ext cx="1828800" cy="292608"/>
           </a:xfrm>
           <a:prstGeom prst="rect">
@@ -7908,7 +7908,7 @@
         </p:nvSpPr>
         <p:spPr>
           <a:xfrm>
-            <a:off x="5803392" y="2258568"/>
+            <a:off x="4370832" y="2258568"/>
             <a:ext cx="1828800" cy="292608"/>
           </a:xfrm>
           <a:prstGeom prst="rect">
@@ -7947,7 +7947,7 @@
         </p:nvSpPr>
         <p:spPr>
           <a:xfrm>
-            <a:off x="5803392" y="2569464"/>
+            <a:off x="4370832" y="2569464"/>
             <a:ext cx="1828800" cy="201168"/>
           </a:xfrm>
           <a:prstGeom prst="rect">
@@ -7972,7 +7972,7 @@
                 <a:ea typeface="Calibri" pitchFamily="34" charset="-122"/>
                 <a:cs typeface="Calibri" pitchFamily="34" charset="-120"/>
               </a:rPr>
-              <a:t>to come into sight</a:t>
+              <a:t>come into view</a:t>
             </a:r>
             <a:endParaRPr lang="en-US" sz="850" dirty="0"/>
           </a:p>
@@ -7981,6 +7981,118 @@
       <p:sp>
         <p:nvSpPr>
           <p:cNvPr id="22" name="Shape 20"/>
+          <p:cNvSpPr/>
+          <p:nvPr/>
+        </p:nvSpPr>
+        <p:spPr>
+          <a:xfrm>
+            <a:off x="6519672" y="2258568"/>
+            <a:ext cx="1828800" cy="292608"/>
+          </a:xfrm>
+          <a:prstGeom prst="rect">
+            <a:avLst>
+              <a:gd name="adj" fmla="val 25000"/>
+            </a:avLst>
+          </a:prstGeom>
+          <a:solidFill>
+            <a:srgbClr val="FCE7F3"/>
+          </a:solidFill>
+          <a:ln w="19050">
+            <a:solidFill>
+              <a:srgbClr val="DB2777"/>
+            </a:solidFill>
+            <a:prstDash val="solid"/>
+          </a:ln>
+          <a:effectLst>
+            <a:outerShdw sx="100000" sy="100000" kx="0" ky="0" algn="bl" rotWithShape="0" blurRad="101600" dist="38100" dir="8100000">
+              <a:srgbClr val="000000">
+                <a:alpha val="12000"/>
+              </a:srgbClr>
+            </a:outerShdw>
+          </a:effectLst>
+        </p:spPr>
+      </p:sp>
+      <p:sp>
+        <p:nvSpPr>
+          <p:cNvPr id="23" name="Text 21"/>
+          <p:cNvSpPr/>
+          <p:nvPr/>
+        </p:nvSpPr>
+        <p:spPr>
+          <a:xfrm>
+            <a:off x="6519672" y="2258568"/>
+            <a:ext cx="1828800" cy="292608"/>
+          </a:xfrm>
+          <a:prstGeom prst="rect">
+            <a:avLst/>
+          </a:prstGeom>
+          <a:noFill/>
+          <a:ln/>
+        </p:spPr>
+        <p:txBody>
+          <a:bodyPr wrap="square" lIns="0" tIns="0" rIns="0" bIns="0" rtlCol="0" anchor="ctr"/>
+          <a:lstStyle/>
+          <a:p>
+            <a:pPr algn="ctr" indent="0" marL="0">
+              <a:buNone/>
+            </a:pPr>
+            <a:r>
+              <a:rPr lang="en-US" sz="1300" b="1" dirty="0">
+                <a:solidFill>
+                  <a:srgbClr val="9D174D"/>
+                </a:solidFill>
+                <a:latin typeface="Trebuchet MS" pitchFamily="34" charset="0"/>
+                <a:ea typeface="Trebuchet MS" pitchFamily="34" charset="-122"/>
+                <a:cs typeface="Trebuchet MS" pitchFamily="34" charset="-120"/>
+              </a:rPr>
+              <a:t>ed</a:t>
+            </a:r>
+            <a:endParaRPr lang="en-US" sz="1300" dirty="0"/>
+          </a:p>
+        </p:txBody>
+      </p:sp>
+      <p:sp>
+        <p:nvSpPr>
+          <p:cNvPr id="24" name="Text 22"/>
+          <p:cNvSpPr/>
+          <p:nvPr/>
+        </p:nvSpPr>
+        <p:spPr>
+          <a:xfrm>
+            <a:off x="6519672" y="2569464"/>
+            <a:ext cx="1828800" cy="201168"/>
+          </a:xfrm>
+          <a:prstGeom prst="rect">
+            <a:avLst/>
+          </a:prstGeom>
+          <a:noFill/>
+          <a:ln/>
+        </p:spPr>
+        <p:txBody>
+          <a:bodyPr wrap="square" lIns="0" tIns="0" rIns="0" bIns="0" rtlCol="0" anchor="t"/>
+          <a:lstStyle/>
+          <a:p>
+            <a:pPr algn="ctr" indent="0" marL="0">
+              <a:buNone/>
+            </a:pPr>
+            <a:r>
+              <a:rPr lang="en-US" sz="850" dirty="0">
+                <a:solidFill>
+                  <a:srgbClr val="475569"/>
+                </a:solidFill>
+                <a:latin typeface="Calibri" pitchFamily="34" charset="0"/>
+                <a:ea typeface="Calibri" pitchFamily="34" charset="-122"/>
+                <a:cs typeface="Calibri" pitchFamily="34" charset="-120"/>
+              </a:rPr>
+              <a:t>past tense</a:t>
+            </a:r>
+            <a:endParaRPr lang="en-US" sz="850" dirty="0"/>
+          </a:p>
+        </p:txBody>
+      </p:sp>
+      <p:sp>
+        <p:nvSpPr>
+          <p:cNvPr id="25" name="Shape 23"/>
           <p:cNvSpPr/>
           <p:nvPr/>
         </p:nvSpPr>
@@ -8007,7 +8119,7 @@
       </p:sp>
       <p:sp>
         <p:nvSpPr>
-          <p:cNvPr id="23" name="Text 21"/>
+          <p:cNvPr id="26" name="Text 24"/>
           <p:cNvSpPr/>
           <p:nvPr/>
         </p:nvSpPr>
@@ -8046,7 +8158,7 @@
       </p:sp>
       <p:sp>
         <p:nvSpPr>
-          <p:cNvPr id="24" name="Shape 22"/>
+          <p:cNvPr id="27" name="Shape 25"/>
           <p:cNvSpPr/>
           <p:nvPr/>
         </p:nvSpPr>
@@ -8073,7 +8185,7 @@
       </p:sp>
       <p:sp>
         <p:nvSpPr>
-          <p:cNvPr id="25" name="Text 23"/>
+          <p:cNvPr id="28" name="Text 26"/>
           <p:cNvSpPr/>
           <p:nvPr/>
         </p:nvSpPr>
@@ -8112,7 +8224,7 @@
       </p:sp>
       <p:sp>
         <p:nvSpPr>
-          <p:cNvPr id="26" name="Shape 24"/>
+          <p:cNvPr id="29" name="Shape 27"/>
           <p:cNvSpPr/>
           <p:nvPr/>
         </p:nvSpPr>
@@ -8139,7 +8251,7 @@
       </p:sp>
       <p:sp>
         <p:nvSpPr>
-          <p:cNvPr id="27" name="Text 25"/>
+          <p:cNvPr id="30" name="Text 28"/>
           <p:cNvSpPr/>
           <p:nvPr/>
         </p:nvSpPr>
@@ -8178,7 +8290,7 @@
       </p:sp>
       <p:sp>
         <p:nvSpPr>
-          <p:cNvPr id="28" name="Shape 26"/>
+          <p:cNvPr id="31" name="Shape 29"/>
           <p:cNvSpPr/>
           <p:nvPr/>
         </p:nvSpPr>
@@ -8205,7 +8317,7 @@
       </p:sp>
       <p:sp>
         <p:nvSpPr>
-          <p:cNvPr id="29" name="Text 27"/>
+          <p:cNvPr id="32" name="Text 30"/>
           <p:cNvSpPr/>
           <p:nvPr/>
         </p:nvSpPr>
@@ -8528,7 +8640,7 @@
                 <a:ea typeface="Calibri" pitchFamily="34" charset="-122"/>
                 <a:cs typeface="Calibri" pitchFamily="34" charset="-120"/>
               </a:rPr>
-              <a:t>Word Labs  •  wordlabs.app  •  Root: 'appear' = to come into sight</a:t>
+              <a:t>Word Labs  •  wordlabs.app  •  Root: 'appear' = come into view</a:t>
             </a:r>
             <a:endParaRPr lang="en-US" sz="800" dirty="0"/>
           </a:p>
@@ -8667,7 +8779,7 @@
                 <a:ea typeface="Trebuchet MS" pitchFamily="34" charset="-122"/>
                 <a:cs typeface="Trebuchet MS" pitchFamily="34" charset="-120"/>
               </a:rPr>
-              <a:t>disappear</a:t>
+              <a:t>disappeared</a:t>
             </a:r>
             <a:endParaRPr lang="en-US" sz="2800" dirty="0"/>
           </a:p>
@@ -8747,7 +8859,7 @@
         </p:nvSpPr>
         <p:spPr>
           <a:xfrm>
-            <a:off x="2938272" y="2258568"/>
+            <a:off x="2221992" y="2258568"/>
             <a:ext cx="1828800" cy="292608"/>
           </a:xfrm>
           <a:prstGeom prst="rect">
@@ -8781,7 +8893,7 @@
         </p:nvSpPr>
         <p:spPr>
           <a:xfrm>
-            <a:off x="2938272" y="2258568"/>
+            <a:off x="2221992" y="2258568"/>
             <a:ext cx="1828800" cy="292608"/>
           </a:xfrm>
           <a:prstGeom prst="rect">
@@ -8820,7 +8932,7 @@
         </p:nvSpPr>
         <p:spPr>
           <a:xfrm>
-            <a:off x="2938272" y="2569464"/>
+            <a:off x="2221992" y="2569464"/>
             <a:ext cx="1828800" cy="201168"/>
           </a:xfrm>
           <a:prstGeom prst="rect">
@@ -8845,7 +8957,7 @@
                 <a:ea typeface="Calibri" pitchFamily="34" charset="-122"/>
                 <a:cs typeface="Calibri" pitchFamily="34" charset="-120"/>
               </a:rPr>
-              <a:t>not, opposite of</a:t>
+              <a:t>not; opposite; apart</a:t>
             </a:r>
             <a:endParaRPr lang="en-US" sz="850" dirty="0"/>
           </a:p>
@@ -8859,7 +8971,7 @@
         </p:nvSpPr>
         <p:spPr>
           <a:xfrm>
-            <a:off x="5803392" y="2258568"/>
+            <a:off x="4370832" y="2258568"/>
             <a:ext cx="1828800" cy="292608"/>
           </a:xfrm>
           <a:prstGeom prst="rect">
@@ -8893,7 +9005,7 @@
         </p:nvSpPr>
         <p:spPr>
           <a:xfrm>
-            <a:off x="5803392" y="2258568"/>
+            <a:off x="4370832" y="2258568"/>
             <a:ext cx="1828800" cy="292608"/>
           </a:xfrm>
           <a:prstGeom prst="rect">
@@ -8932,7 +9044,7 @@
         </p:nvSpPr>
         <p:spPr>
           <a:xfrm>
-            <a:off x="5803392" y="2569464"/>
+            <a:off x="4370832" y="2569464"/>
             <a:ext cx="1828800" cy="201168"/>
           </a:xfrm>
           <a:prstGeom prst="rect">
@@ -8957,7 +9069,7 @@
                 <a:ea typeface="Calibri" pitchFamily="34" charset="-122"/>
                 <a:cs typeface="Calibri" pitchFamily="34" charset="-120"/>
               </a:rPr>
-              <a:t>to come into sight</a:t>
+              <a:t>come into view</a:t>
             </a:r>
             <a:endParaRPr lang="en-US" sz="850" dirty="0"/>
           </a:p>
@@ -8966,6 +9078,118 @@
       <p:sp>
         <p:nvSpPr>
           <p:cNvPr id="22" name="Shape 20"/>
+          <p:cNvSpPr/>
+          <p:nvPr/>
+        </p:nvSpPr>
+        <p:spPr>
+          <a:xfrm>
+            <a:off x="6519672" y="2258568"/>
+            <a:ext cx="1828800" cy="292608"/>
+          </a:xfrm>
+          <a:prstGeom prst="rect">
+            <a:avLst>
+              <a:gd name="adj" fmla="val 25000"/>
+            </a:avLst>
+          </a:prstGeom>
+          <a:solidFill>
+            <a:srgbClr val="FCE7F3"/>
+          </a:solidFill>
+          <a:ln w="19050">
+            <a:solidFill>
+              <a:srgbClr val="DB2777"/>
+            </a:solidFill>
+            <a:prstDash val="solid"/>
+          </a:ln>
+          <a:effectLst>
+            <a:outerShdw sx="100000" sy="100000" kx="0" ky="0" algn="bl" rotWithShape="0" blurRad="101600" dist="38100" dir="8100000">
+              <a:srgbClr val="000000">
+                <a:alpha val="12000"/>
+              </a:srgbClr>
+            </a:outerShdw>
+          </a:effectLst>
+        </p:spPr>
+      </p:sp>
+      <p:sp>
+        <p:nvSpPr>
+          <p:cNvPr id="23" name="Text 21"/>
+          <p:cNvSpPr/>
+          <p:nvPr/>
+        </p:nvSpPr>
+        <p:spPr>
+          <a:xfrm>
+            <a:off x="6519672" y="2258568"/>
+            <a:ext cx="1828800" cy="292608"/>
+          </a:xfrm>
+          <a:prstGeom prst="rect">
+            <a:avLst/>
+          </a:prstGeom>
+          <a:noFill/>
+          <a:ln/>
+        </p:spPr>
+        <p:txBody>
+          <a:bodyPr wrap="square" lIns="0" tIns="0" rIns="0" bIns="0" rtlCol="0" anchor="ctr"/>
+          <a:lstStyle/>
+          <a:p>
+            <a:pPr algn="ctr" indent="0" marL="0">
+              <a:buNone/>
+            </a:pPr>
+            <a:r>
+              <a:rPr lang="en-US" sz="1300" b="1" dirty="0">
+                <a:solidFill>
+                  <a:srgbClr val="9D174D"/>
+                </a:solidFill>
+                <a:latin typeface="Trebuchet MS" pitchFamily="34" charset="0"/>
+                <a:ea typeface="Trebuchet MS" pitchFamily="34" charset="-122"/>
+                <a:cs typeface="Trebuchet MS" pitchFamily="34" charset="-120"/>
+              </a:rPr>
+              <a:t>ed</a:t>
+            </a:r>
+            <a:endParaRPr lang="en-US" sz="1300" dirty="0"/>
+          </a:p>
+        </p:txBody>
+      </p:sp>
+      <p:sp>
+        <p:nvSpPr>
+          <p:cNvPr id="24" name="Text 22"/>
+          <p:cNvSpPr/>
+          <p:nvPr/>
+        </p:nvSpPr>
+        <p:spPr>
+          <a:xfrm>
+            <a:off x="6519672" y="2569464"/>
+            <a:ext cx="1828800" cy="201168"/>
+          </a:xfrm>
+          <a:prstGeom prst="rect">
+            <a:avLst/>
+          </a:prstGeom>
+          <a:noFill/>
+          <a:ln/>
+        </p:spPr>
+        <p:txBody>
+          <a:bodyPr wrap="square" lIns="0" tIns="0" rIns="0" bIns="0" rtlCol="0" anchor="t"/>
+          <a:lstStyle/>
+          <a:p>
+            <a:pPr algn="ctr" indent="0" marL="0">
+              <a:buNone/>
+            </a:pPr>
+            <a:r>
+              <a:rPr lang="en-US" sz="850" dirty="0">
+                <a:solidFill>
+                  <a:srgbClr val="475569"/>
+                </a:solidFill>
+                <a:latin typeface="Calibri" pitchFamily="34" charset="0"/>
+                <a:ea typeface="Calibri" pitchFamily="34" charset="-122"/>
+                <a:cs typeface="Calibri" pitchFamily="34" charset="-120"/>
+              </a:rPr>
+              <a:t>past tense</a:t>
+            </a:r>
+            <a:endParaRPr lang="en-US" sz="850" dirty="0"/>
+          </a:p>
+        </p:txBody>
+      </p:sp>
+      <p:sp>
+        <p:nvSpPr>
+          <p:cNvPr id="25" name="Shape 23"/>
           <p:cNvSpPr/>
           <p:nvPr/>
         </p:nvSpPr>
@@ -8992,7 +9216,7 @@
       </p:sp>
       <p:sp>
         <p:nvSpPr>
-          <p:cNvPr id="23" name="Text 21"/>
+          <p:cNvPr id="26" name="Text 24"/>
           <p:cNvSpPr/>
           <p:nvPr/>
         </p:nvSpPr>
@@ -9031,7 +9255,7 @@
       </p:sp>
       <p:sp>
         <p:nvSpPr>
-          <p:cNvPr id="24" name="Shape 22"/>
+          <p:cNvPr id="27" name="Shape 25"/>
           <p:cNvSpPr/>
           <p:nvPr/>
         </p:nvSpPr>
@@ -9058,7 +9282,7 @@
       </p:sp>
       <p:sp>
         <p:nvSpPr>
-          <p:cNvPr id="25" name="Shape 23"/>
+          <p:cNvPr id="28" name="Shape 26"/>
           <p:cNvSpPr/>
           <p:nvPr/>
         </p:nvSpPr>
@@ -9085,7 +9309,7 @@
       </p:sp>
       <p:sp>
         <p:nvSpPr>
-          <p:cNvPr id="26" name="Text 24"/>
+          <p:cNvPr id="29" name="Text 27"/>
           <p:cNvSpPr/>
           <p:nvPr/>
         </p:nvSpPr>
@@ -9124,7 +9348,7 @@
       </p:sp>
       <p:sp>
         <p:nvSpPr>
-          <p:cNvPr id="27" name="Text 25"/>
+          <p:cNvPr id="30" name="Text 28"/>
           <p:cNvSpPr/>
           <p:nvPr/>
         </p:nvSpPr>
@@ -9163,7 +9387,7 @@
       </p:sp>
       <p:sp>
         <p:nvSpPr>
-          <p:cNvPr id="28" name="Shape 26"/>
+          <p:cNvPr id="31" name="Shape 29"/>
           <p:cNvSpPr/>
           <p:nvPr/>
         </p:nvSpPr>
@@ -9190,7 +9414,7 @@
       </p:sp>
       <p:sp>
         <p:nvSpPr>
-          <p:cNvPr id="29" name="Text 27"/>
+          <p:cNvPr id="32" name="Text 30"/>
           <p:cNvSpPr/>
           <p:nvPr/>
         </p:nvSpPr>
@@ -9229,7 +9453,7 @@
       </p:sp>
       <p:sp>
         <p:nvSpPr>
-          <p:cNvPr id="30" name="Text 28"/>
+          <p:cNvPr id="33" name="Text 31"/>
           <p:cNvSpPr/>
           <p:nvPr/>
         </p:nvSpPr>
@@ -9268,7 +9492,7 @@
       </p:sp>
       <p:sp>
         <p:nvSpPr>
-          <p:cNvPr id="31" name="Shape 29"/>
+          <p:cNvPr id="34" name="Shape 32"/>
           <p:cNvSpPr/>
           <p:nvPr/>
         </p:nvSpPr>
@@ -9295,7 +9519,7 @@
       </p:sp>
       <p:sp>
         <p:nvSpPr>
-          <p:cNvPr id="32" name="Text 30"/>
+          <p:cNvPr id="35" name="Text 33"/>
           <p:cNvSpPr/>
           <p:nvPr/>
         </p:nvSpPr>
@@ -9326,7 +9550,7 @@
                 <a:ea typeface="Trebuchet MS" pitchFamily="34" charset="-122"/>
                 <a:cs typeface="Trebuchet MS" pitchFamily="34" charset="-120"/>
               </a:rPr>
-              <a:t>pear</a:t>
+              <a:t>peared</a:t>
             </a:r>
             <a:endParaRPr lang="en-US" sz="1400" dirty="0"/>
           </a:p>
@@ -9334,7 +9558,7 @@
       </p:sp>
       <p:sp>
         <p:nvSpPr>
-          <p:cNvPr id="33" name="Shape 31"/>
+          <p:cNvPr id="36" name="Shape 34"/>
           <p:cNvSpPr/>
           <p:nvPr/>
         </p:nvSpPr>
@@ -9361,7 +9585,7 @@
       </p:sp>
       <p:sp>
         <p:nvSpPr>
-          <p:cNvPr id="34" name="Text 32"/>
+          <p:cNvPr id="37" name="Text 35"/>
           <p:cNvSpPr/>
           <p:nvPr/>
         </p:nvSpPr>
@@ -9400,7 +9624,7 @@
       </p:sp>
       <p:sp>
         <p:nvSpPr>
-          <p:cNvPr id="35" name="Shape 33"/>
+          <p:cNvPr id="38" name="Shape 36"/>
           <p:cNvSpPr/>
           <p:nvPr/>
         </p:nvSpPr>
@@ -9427,7 +9651,7 @@
       </p:sp>
       <p:sp>
         <p:nvSpPr>
-          <p:cNvPr id="36" name="Text 34"/>
+          <p:cNvPr id="39" name="Text 37"/>
           <p:cNvSpPr/>
           <p:nvPr/>
         </p:nvSpPr>
@@ -9750,7 +9974,7 @@
                 <a:ea typeface="Calibri" pitchFamily="34" charset="-122"/>
                 <a:cs typeface="Calibri" pitchFamily="34" charset="-120"/>
               </a:rPr>
-              <a:t>Word Labs  •  wordlabs.app  •  Root: 'appear' = to come into sight</a:t>
+              <a:t>Word Labs  •  wordlabs.app  •  Root: 'appear' = come into view</a:t>
             </a:r>
             <a:endParaRPr lang="en-US" sz="800" dirty="0"/>
           </a:p>
@@ -9889,7 +10113,7 @@
                 <a:ea typeface="Trebuchet MS" pitchFamily="34" charset="-122"/>
                 <a:cs typeface="Trebuchet MS" pitchFamily="34" charset="-120"/>
               </a:rPr>
-              <a:t>disappear</a:t>
+              <a:t>disappeared</a:t>
             </a:r>
             <a:endParaRPr lang="en-US" sz="2800" dirty="0"/>
           </a:p>
@@ -9969,7 +10193,7 @@
         </p:nvSpPr>
         <p:spPr>
           <a:xfrm>
-            <a:off x="2938272" y="2258568"/>
+            <a:off x="2221992" y="2258568"/>
             <a:ext cx="1828800" cy="292608"/>
           </a:xfrm>
           <a:prstGeom prst="rect">
@@ -10003,7 +10227,7 @@
         </p:nvSpPr>
         <p:spPr>
           <a:xfrm>
-            <a:off x="2938272" y="2258568"/>
+            <a:off x="2221992" y="2258568"/>
             <a:ext cx="1828800" cy="292608"/>
           </a:xfrm>
           <a:prstGeom prst="rect">
@@ -10042,7 +10266,7 @@
         </p:nvSpPr>
         <p:spPr>
           <a:xfrm>
-            <a:off x="2938272" y="2569464"/>
+            <a:off x="2221992" y="2569464"/>
             <a:ext cx="1828800" cy="201168"/>
           </a:xfrm>
           <a:prstGeom prst="rect">
@@ -10067,7 +10291,7 @@
                 <a:ea typeface="Calibri" pitchFamily="34" charset="-122"/>
                 <a:cs typeface="Calibri" pitchFamily="34" charset="-120"/>
               </a:rPr>
-              <a:t>not, opposite of</a:t>
+              <a:t>not; opposite; apart</a:t>
             </a:r>
             <a:endParaRPr lang="en-US" sz="850" dirty="0"/>
           </a:p>
@@ -10081,7 +10305,7 @@
         </p:nvSpPr>
         <p:spPr>
           <a:xfrm>
-            <a:off x="5803392" y="2258568"/>
+            <a:off x="4370832" y="2258568"/>
             <a:ext cx="1828800" cy="292608"/>
           </a:xfrm>
           <a:prstGeom prst="rect">
@@ -10115,7 +10339,7 @@
         </p:nvSpPr>
         <p:spPr>
           <a:xfrm>
-            <a:off x="5803392" y="2258568"/>
+            <a:off x="4370832" y="2258568"/>
             <a:ext cx="1828800" cy="292608"/>
           </a:xfrm>
           <a:prstGeom prst="rect">
@@ -10154,7 +10378,7 @@
         </p:nvSpPr>
         <p:spPr>
           <a:xfrm>
-            <a:off x="5803392" y="2569464"/>
+            <a:off x="4370832" y="2569464"/>
             <a:ext cx="1828800" cy="201168"/>
           </a:xfrm>
           <a:prstGeom prst="rect">
@@ -10179,7 +10403,7 @@
                 <a:ea typeface="Calibri" pitchFamily="34" charset="-122"/>
                 <a:cs typeface="Calibri" pitchFamily="34" charset="-120"/>
               </a:rPr>
-              <a:t>to come into sight</a:t>
+              <a:t>come into view</a:t>
             </a:r>
             <a:endParaRPr lang="en-US" sz="850" dirty="0"/>
           </a:p>
@@ -10188,6 +10412,118 @@
       <p:sp>
         <p:nvSpPr>
           <p:cNvPr id="22" name="Shape 20"/>
+          <p:cNvSpPr/>
+          <p:nvPr/>
+        </p:nvSpPr>
+        <p:spPr>
+          <a:xfrm>
+            <a:off x="6519672" y="2258568"/>
+            <a:ext cx="1828800" cy="292608"/>
+          </a:xfrm>
+          <a:prstGeom prst="rect">
+            <a:avLst>
+              <a:gd name="adj" fmla="val 25000"/>
+            </a:avLst>
+          </a:prstGeom>
+          <a:solidFill>
+            <a:srgbClr val="FCE7F3"/>
+          </a:solidFill>
+          <a:ln w="19050">
+            <a:solidFill>
+              <a:srgbClr val="DB2777"/>
+            </a:solidFill>
+            <a:prstDash val="solid"/>
+          </a:ln>
+          <a:effectLst>
+            <a:outerShdw sx="100000" sy="100000" kx="0" ky="0" algn="bl" rotWithShape="0" blurRad="101600" dist="38100" dir="8100000">
+              <a:srgbClr val="000000">
+                <a:alpha val="12000"/>
+              </a:srgbClr>
+            </a:outerShdw>
+          </a:effectLst>
+        </p:spPr>
+      </p:sp>
+      <p:sp>
+        <p:nvSpPr>
+          <p:cNvPr id="23" name="Text 21"/>
+          <p:cNvSpPr/>
+          <p:nvPr/>
+        </p:nvSpPr>
+        <p:spPr>
+          <a:xfrm>
+            <a:off x="6519672" y="2258568"/>
+            <a:ext cx="1828800" cy="292608"/>
+          </a:xfrm>
+          <a:prstGeom prst="rect">
+            <a:avLst/>
+          </a:prstGeom>
+          <a:noFill/>
+          <a:ln/>
+        </p:spPr>
+        <p:txBody>
+          <a:bodyPr wrap="square" lIns="0" tIns="0" rIns="0" bIns="0" rtlCol="0" anchor="ctr"/>
+          <a:lstStyle/>
+          <a:p>
+            <a:pPr algn="ctr" indent="0" marL="0">
+              <a:buNone/>
+            </a:pPr>
+            <a:r>
+              <a:rPr lang="en-US" sz="1300" b="1" dirty="0">
+                <a:solidFill>
+                  <a:srgbClr val="9D174D"/>
+                </a:solidFill>
+                <a:latin typeface="Trebuchet MS" pitchFamily="34" charset="0"/>
+                <a:ea typeface="Trebuchet MS" pitchFamily="34" charset="-122"/>
+                <a:cs typeface="Trebuchet MS" pitchFamily="34" charset="-120"/>
+              </a:rPr>
+              <a:t>ed</a:t>
+            </a:r>
+            <a:endParaRPr lang="en-US" sz="1300" dirty="0"/>
+          </a:p>
+        </p:txBody>
+      </p:sp>
+      <p:sp>
+        <p:nvSpPr>
+          <p:cNvPr id="24" name="Text 22"/>
+          <p:cNvSpPr/>
+          <p:nvPr/>
+        </p:nvSpPr>
+        <p:spPr>
+          <a:xfrm>
+            <a:off x="6519672" y="2569464"/>
+            <a:ext cx="1828800" cy="201168"/>
+          </a:xfrm>
+          <a:prstGeom prst="rect">
+            <a:avLst/>
+          </a:prstGeom>
+          <a:noFill/>
+          <a:ln/>
+        </p:spPr>
+        <p:txBody>
+          <a:bodyPr wrap="square" lIns="0" tIns="0" rIns="0" bIns="0" rtlCol="0" anchor="t"/>
+          <a:lstStyle/>
+          <a:p>
+            <a:pPr algn="ctr" indent="0" marL="0">
+              <a:buNone/>
+            </a:pPr>
+            <a:r>
+              <a:rPr lang="en-US" sz="850" dirty="0">
+                <a:solidFill>
+                  <a:srgbClr val="475569"/>
+                </a:solidFill>
+                <a:latin typeface="Calibri" pitchFamily="34" charset="0"/>
+                <a:ea typeface="Calibri" pitchFamily="34" charset="-122"/>
+                <a:cs typeface="Calibri" pitchFamily="34" charset="-120"/>
+              </a:rPr>
+              <a:t>past tense</a:t>
+            </a:r>
+            <a:endParaRPr lang="en-US" sz="850" dirty="0"/>
+          </a:p>
+        </p:txBody>
+      </p:sp>
+      <p:sp>
+        <p:nvSpPr>
+          <p:cNvPr id="25" name="Shape 23"/>
           <p:cNvSpPr/>
           <p:nvPr/>
         </p:nvSpPr>
@@ -10214,7 +10550,7 @@
       </p:sp>
       <p:sp>
         <p:nvSpPr>
-          <p:cNvPr id="23" name="Text 21"/>
+          <p:cNvPr id="26" name="Text 24"/>
           <p:cNvSpPr/>
           <p:nvPr/>
         </p:nvSpPr>
@@ -10253,7 +10589,7 @@
       </p:sp>
       <p:sp>
         <p:nvSpPr>
-          <p:cNvPr id="24" name="Shape 22"/>
+          <p:cNvPr id="27" name="Shape 25"/>
           <p:cNvSpPr/>
           <p:nvPr/>
         </p:nvSpPr>
@@ -10280,7 +10616,7 @@
       </p:sp>
       <p:sp>
         <p:nvSpPr>
-          <p:cNvPr id="25" name="Shape 23"/>
+          <p:cNvPr id="28" name="Shape 26"/>
           <p:cNvSpPr/>
           <p:nvPr/>
         </p:nvSpPr>
@@ -10307,7 +10643,7 @@
       </p:sp>
       <p:sp>
         <p:nvSpPr>
-          <p:cNvPr id="26" name="Text 24"/>
+          <p:cNvPr id="29" name="Text 27"/>
           <p:cNvSpPr/>
           <p:nvPr/>
         </p:nvSpPr>
@@ -10346,7 +10682,7 @@
       </p:sp>
       <p:sp>
         <p:nvSpPr>
-          <p:cNvPr id="27" name="Text 25"/>
+          <p:cNvPr id="30" name="Text 28"/>
           <p:cNvSpPr/>
           <p:nvPr/>
         </p:nvSpPr>
@@ -10385,7 +10721,7 @@
       </p:sp>
       <p:sp>
         <p:nvSpPr>
-          <p:cNvPr id="28" name="Shape 26"/>
+          <p:cNvPr id="31" name="Shape 29"/>
           <p:cNvSpPr/>
           <p:nvPr/>
         </p:nvSpPr>
@@ -10412,7 +10748,7 @@
       </p:sp>
       <p:sp>
         <p:nvSpPr>
-          <p:cNvPr id="29" name="Text 27"/>
+          <p:cNvPr id="32" name="Text 30"/>
           <p:cNvSpPr/>
           <p:nvPr/>
         </p:nvSpPr>
@@ -10451,7 +10787,7 @@
       </p:sp>
       <p:sp>
         <p:nvSpPr>
-          <p:cNvPr id="30" name="Text 28"/>
+          <p:cNvPr id="33" name="Text 31"/>
           <p:cNvSpPr/>
           <p:nvPr/>
         </p:nvSpPr>
@@ -10490,7 +10826,7 @@
       </p:sp>
       <p:sp>
         <p:nvSpPr>
-          <p:cNvPr id="31" name="Shape 29"/>
+          <p:cNvPr id="34" name="Shape 32"/>
           <p:cNvSpPr/>
           <p:nvPr/>
         </p:nvSpPr>
@@ -10517,7 +10853,7 @@
       </p:sp>
       <p:sp>
         <p:nvSpPr>
-          <p:cNvPr id="32" name="Text 30"/>
+          <p:cNvPr id="35" name="Text 33"/>
           <p:cNvSpPr/>
           <p:nvPr/>
         </p:nvSpPr>
@@ -10548,7 +10884,7 @@
                 <a:ea typeface="Trebuchet MS" pitchFamily="34" charset="-122"/>
                 <a:cs typeface="Trebuchet MS" pitchFamily="34" charset="-120"/>
               </a:rPr>
-              <a:t>pear</a:t>
+              <a:t>peared</a:t>
             </a:r>
             <a:endParaRPr lang="en-US" sz="1400" dirty="0"/>
           </a:p>
@@ -10556,7 +10892,7 @@
       </p:sp>
       <p:sp>
         <p:nvSpPr>
-          <p:cNvPr id="33" name="Shape 31"/>
+          <p:cNvPr id="36" name="Shape 34"/>
           <p:cNvSpPr/>
           <p:nvPr/>
         </p:nvSpPr>
@@ -10583,7 +10919,7 @@
       </p:sp>
       <p:sp>
         <p:nvSpPr>
-          <p:cNvPr id="34" name="Text 32"/>
+          <p:cNvPr id="37" name="Text 35"/>
           <p:cNvSpPr/>
           <p:nvPr/>
         </p:nvSpPr>
@@ -10622,7 +10958,7 @@
       </p:sp>
       <p:sp>
         <p:nvSpPr>
-          <p:cNvPr id="35" name="Shape 33"/>
+          <p:cNvPr id="38" name="Shape 36"/>
           <p:cNvSpPr/>
           <p:nvPr/>
         </p:nvSpPr>
@@ -10649,14 +10985,14 @@
       </p:sp>
       <p:sp>
         <p:nvSpPr>
-          <p:cNvPr id="36" name="Shape 34"/>
-          <p:cNvSpPr/>
-          <p:nvPr/>
-        </p:nvSpPr>
-        <p:spPr>
-          <a:xfrm>
-            <a:off x="2254649" y="4169664"/>
-            <a:ext cx="685800" cy="475488"/>
+          <p:cNvPr id="39" name="Shape 37"/>
+          <p:cNvSpPr/>
+          <p:nvPr/>
+        </p:nvSpPr>
+        <p:spPr>
+          <a:xfrm>
+            <a:off x="1951330" y="4169664"/>
+            <a:ext cx="676656" cy="475488"/>
           </a:xfrm>
           <a:prstGeom prst="rect">
             <a:avLst>
@@ -10676,14 +11012,14 @@
       </p:sp>
       <p:sp>
         <p:nvSpPr>
-          <p:cNvPr id="37" name="Text 35"/>
-          <p:cNvSpPr/>
-          <p:nvPr/>
-        </p:nvSpPr>
-        <p:spPr>
-          <a:xfrm>
-            <a:off x="2254649" y="4169664"/>
-            <a:ext cx="685800" cy="475488"/>
+          <p:cNvPr id="40" name="Text 38"/>
+          <p:cNvSpPr/>
+          <p:nvPr/>
+        </p:nvSpPr>
+        <p:spPr>
+          <a:xfrm>
+            <a:off x="1951330" y="4169664"/>
+            <a:ext cx="676656" cy="475488"/>
           </a:xfrm>
           <a:prstGeom prst="rect">
             <a:avLst/>
@@ -10715,14 +11051,14 @@
       </p:sp>
       <p:sp>
         <p:nvSpPr>
-          <p:cNvPr id="38" name="Shape 36"/>
-          <p:cNvSpPr/>
-          <p:nvPr/>
-        </p:nvSpPr>
-        <p:spPr>
-          <a:xfrm>
-            <a:off x="3293146" y="4169664"/>
-            <a:ext cx="685800" cy="475488"/>
+          <p:cNvPr id="41" name="Shape 39"/>
+          <p:cNvSpPr/>
+          <p:nvPr/>
+        </p:nvSpPr>
+        <p:spPr>
+          <a:xfrm>
+            <a:off x="2677363" y="4169664"/>
+            <a:ext cx="676656" cy="475488"/>
           </a:xfrm>
           <a:prstGeom prst="rect">
             <a:avLst>
@@ -10742,14 +11078,14 @@
       </p:sp>
       <p:sp>
         <p:nvSpPr>
-          <p:cNvPr id="39" name="Text 37"/>
-          <p:cNvSpPr/>
-          <p:nvPr/>
-        </p:nvSpPr>
-        <p:spPr>
-          <a:xfrm>
-            <a:off x="3293146" y="4169664"/>
-            <a:ext cx="685800" cy="475488"/>
+          <p:cNvPr id="42" name="Text 40"/>
+          <p:cNvSpPr/>
+          <p:nvPr/>
+        </p:nvSpPr>
+        <p:spPr>
+          <a:xfrm>
+            <a:off x="2677363" y="4169664"/>
+            <a:ext cx="676656" cy="475488"/>
           </a:xfrm>
           <a:prstGeom prst="rect">
             <a:avLst/>
@@ -10781,14 +11117,14 @@
       </p:sp>
       <p:sp>
         <p:nvSpPr>
-          <p:cNvPr id="40" name="Shape 38"/>
-          <p:cNvSpPr/>
-          <p:nvPr/>
-        </p:nvSpPr>
-        <p:spPr>
-          <a:xfrm>
-            <a:off x="4331643" y="4169664"/>
-            <a:ext cx="685800" cy="475488"/>
+          <p:cNvPr id="43" name="Shape 41"/>
+          <p:cNvSpPr/>
+          <p:nvPr/>
+        </p:nvSpPr>
+        <p:spPr>
+          <a:xfrm>
+            <a:off x="3403397" y="4169664"/>
+            <a:ext cx="676656" cy="475488"/>
           </a:xfrm>
           <a:prstGeom prst="rect">
             <a:avLst>
@@ -10808,14 +11144,14 @@
       </p:sp>
       <p:sp>
         <p:nvSpPr>
-          <p:cNvPr id="41" name="Text 39"/>
-          <p:cNvSpPr/>
-          <p:nvPr/>
-        </p:nvSpPr>
-        <p:spPr>
-          <a:xfrm>
-            <a:off x="4331643" y="4169664"/>
-            <a:ext cx="685800" cy="475488"/>
+          <p:cNvPr id="44" name="Text 42"/>
+          <p:cNvSpPr/>
+          <p:nvPr/>
+        </p:nvSpPr>
+        <p:spPr>
+          <a:xfrm>
+            <a:off x="3403397" y="4169664"/>
+            <a:ext cx="676656" cy="475488"/>
           </a:xfrm>
           <a:prstGeom prst="rect">
             <a:avLst/>
@@ -10847,14 +11183,14 @@
       </p:sp>
       <p:sp>
         <p:nvSpPr>
-          <p:cNvPr id="42" name="Shape 40"/>
-          <p:cNvSpPr/>
-          <p:nvPr/>
-        </p:nvSpPr>
-        <p:spPr>
-          <a:xfrm>
-            <a:off x="5370141" y="4169664"/>
-            <a:ext cx="685800" cy="475488"/>
+          <p:cNvPr id="45" name="Shape 43"/>
+          <p:cNvSpPr/>
+          <p:nvPr/>
+        </p:nvSpPr>
+        <p:spPr>
+          <a:xfrm>
+            <a:off x="4129430" y="4169664"/>
+            <a:ext cx="676656" cy="475488"/>
           </a:xfrm>
           <a:prstGeom prst="rect">
             <a:avLst>
@@ -10874,14 +11210,14 @@
       </p:sp>
       <p:sp>
         <p:nvSpPr>
-          <p:cNvPr id="43" name="Text 41"/>
-          <p:cNvSpPr/>
-          <p:nvPr/>
-        </p:nvSpPr>
-        <p:spPr>
-          <a:xfrm>
-            <a:off x="5370141" y="4169664"/>
-            <a:ext cx="685800" cy="475488"/>
+          <p:cNvPr id="46" name="Text 44"/>
+          <p:cNvSpPr/>
+          <p:nvPr/>
+        </p:nvSpPr>
+        <p:spPr>
+          <a:xfrm>
+            <a:off x="4129430" y="4169664"/>
+            <a:ext cx="676656" cy="475488"/>
           </a:xfrm>
           <a:prstGeom prst="rect">
             <a:avLst/>
@@ -10913,14 +11249,14 @@
       </p:sp>
       <p:sp>
         <p:nvSpPr>
-          <p:cNvPr id="44" name="Shape 42"/>
-          <p:cNvSpPr/>
-          <p:nvPr/>
-        </p:nvSpPr>
-        <p:spPr>
-          <a:xfrm>
-            <a:off x="6408638" y="4169664"/>
-            <a:ext cx="685800" cy="475488"/>
+          <p:cNvPr id="47" name="Shape 45"/>
+          <p:cNvSpPr/>
+          <p:nvPr/>
+        </p:nvSpPr>
+        <p:spPr>
+          <a:xfrm>
+            <a:off x="4855464" y="4169664"/>
+            <a:ext cx="676656" cy="475488"/>
           </a:xfrm>
           <a:prstGeom prst="rect">
             <a:avLst>
@@ -10940,14 +11276,14 @@
       </p:sp>
       <p:sp>
         <p:nvSpPr>
-          <p:cNvPr id="45" name="Text 43"/>
-          <p:cNvSpPr/>
-          <p:nvPr/>
-        </p:nvSpPr>
-        <p:spPr>
-          <a:xfrm>
-            <a:off x="6408638" y="4169664"/>
-            <a:ext cx="685800" cy="475488"/>
+          <p:cNvPr id="48" name="Text 46"/>
+          <p:cNvSpPr/>
+          <p:nvPr/>
+        </p:nvSpPr>
+        <p:spPr>
+          <a:xfrm>
+            <a:off x="4855464" y="4169664"/>
+            <a:ext cx="676656" cy="475488"/>
           </a:xfrm>
           <a:prstGeom prst="rect">
             <a:avLst/>
@@ -10971,7 +11307,7 @@
                 <a:ea typeface="Trebuchet MS" pitchFamily="34" charset="-122"/>
                 <a:cs typeface="Trebuchet MS" pitchFamily="34" charset="-120"/>
               </a:rPr>
-              <a:t>pp</a:t>
+              <a:t>p</a:t>
             </a:r>
             <a:endParaRPr lang="en-US" sz="900" dirty="0"/>
           </a:p>
@@ -10979,14 +11315,14 @@
       </p:sp>
       <p:sp>
         <p:nvSpPr>
-          <p:cNvPr id="46" name="Shape 44"/>
-          <p:cNvSpPr/>
-          <p:nvPr/>
-        </p:nvSpPr>
-        <p:spPr>
-          <a:xfrm>
-            <a:off x="7447135" y="4169664"/>
-            <a:ext cx="685800" cy="475488"/>
+          <p:cNvPr id="49" name="Shape 47"/>
+          <p:cNvSpPr/>
+          <p:nvPr/>
+        </p:nvSpPr>
+        <p:spPr>
+          <a:xfrm>
+            <a:off x="5581498" y="4169664"/>
+            <a:ext cx="676656" cy="475488"/>
           </a:xfrm>
           <a:prstGeom prst="rect">
             <a:avLst>
@@ -11006,14 +11342,14 @@
       </p:sp>
       <p:sp>
         <p:nvSpPr>
-          <p:cNvPr id="47" name="Text 45"/>
-          <p:cNvSpPr/>
-          <p:nvPr/>
-        </p:nvSpPr>
-        <p:spPr>
-          <a:xfrm>
-            <a:off x="7447135" y="4169664"/>
-            <a:ext cx="685800" cy="475488"/>
+          <p:cNvPr id="50" name="Text 48"/>
+          <p:cNvSpPr/>
+          <p:nvPr/>
+        </p:nvSpPr>
+        <p:spPr>
+          <a:xfrm>
+            <a:off x="5581498" y="4169664"/>
+            <a:ext cx="676656" cy="475488"/>
           </a:xfrm>
           <a:prstGeom prst="rect">
             <a:avLst/>
@@ -11037,7 +11373,205 @@
                 <a:ea typeface="Trebuchet MS" pitchFamily="34" charset="-122"/>
                 <a:cs typeface="Trebuchet MS" pitchFamily="34" charset="-120"/>
               </a:rPr>
+              <a:t>p</a:t>
+            </a:r>
+            <a:endParaRPr lang="en-US" sz="900" dirty="0"/>
+          </a:p>
+        </p:txBody>
+      </p:sp>
+      <p:sp>
+        <p:nvSpPr>
+          <p:cNvPr id="51" name="Shape 49"/>
+          <p:cNvSpPr/>
+          <p:nvPr/>
+        </p:nvSpPr>
+        <p:spPr>
+          <a:xfrm>
+            <a:off x="6307531" y="4169664"/>
+            <a:ext cx="676656" cy="475488"/>
+          </a:xfrm>
+          <a:prstGeom prst="rect">
+            <a:avLst>
+              <a:gd name="adj" fmla="val 7692"/>
+            </a:avLst>
+          </a:prstGeom>
+          <a:solidFill>
+            <a:srgbClr val="FFFFFF"/>
+          </a:solidFill>
+          <a:ln w="12700">
+            <a:solidFill>
+              <a:srgbClr val="DB2777"/>
+            </a:solidFill>
+            <a:prstDash val="solid"/>
+          </a:ln>
+        </p:spPr>
+      </p:sp>
+      <p:sp>
+        <p:nvSpPr>
+          <p:cNvPr id="52" name="Text 50"/>
+          <p:cNvSpPr/>
+          <p:nvPr/>
+        </p:nvSpPr>
+        <p:spPr>
+          <a:xfrm>
+            <a:off x="6307531" y="4169664"/>
+            <a:ext cx="676656" cy="475488"/>
+          </a:xfrm>
+          <a:prstGeom prst="rect">
+            <a:avLst/>
+          </a:prstGeom>
+          <a:noFill/>
+          <a:ln/>
+        </p:spPr>
+        <p:txBody>
+          <a:bodyPr wrap="square" lIns="0" tIns="0" rIns="0" bIns="0" rtlCol="0" anchor="ctr"/>
+          <a:lstStyle/>
+          <a:p>
+            <a:pPr algn="ctr" indent="0" marL="0">
+              <a:buNone/>
+            </a:pPr>
+            <a:r>
+              <a:rPr lang="en-US" sz="900" b="1" dirty="0">
+                <a:solidFill>
+                  <a:srgbClr val="9D174D"/>
+                </a:solidFill>
+                <a:latin typeface="Trebuchet MS" pitchFamily="34" charset="0"/>
+                <a:ea typeface="Trebuchet MS" pitchFamily="34" charset="-122"/>
+                <a:cs typeface="Trebuchet MS" pitchFamily="34" charset="-120"/>
+              </a:rPr>
               <a:t>ear</a:t>
+            </a:r>
+            <a:endParaRPr lang="en-US" sz="900" dirty="0"/>
+          </a:p>
+        </p:txBody>
+      </p:sp>
+      <p:sp>
+        <p:nvSpPr>
+          <p:cNvPr id="53" name="Shape 51"/>
+          <p:cNvSpPr/>
+          <p:nvPr/>
+        </p:nvSpPr>
+        <p:spPr>
+          <a:xfrm>
+            <a:off x="7033565" y="4169664"/>
+            <a:ext cx="676656" cy="475488"/>
+          </a:xfrm>
+          <a:prstGeom prst="rect">
+            <a:avLst>
+              <a:gd name="adj" fmla="val 7692"/>
+            </a:avLst>
+          </a:prstGeom>
+          <a:solidFill>
+            <a:srgbClr val="FFFFFF"/>
+          </a:solidFill>
+          <a:ln w="12700">
+            <a:solidFill>
+              <a:srgbClr val="DB2777"/>
+            </a:solidFill>
+            <a:prstDash val="solid"/>
+          </a:ln>
+        </p:spPr>
+      </p:sp>
+      <p:sp>
+        <p:nvSpPr>
+          <p:cNvPr id="54" name="Text 52"/>
+          <p:cNvSpPr/>
+          <p:nvPr/>
+        </p:nvSpPr>
+        <p:spPr>
+          <a:xfrm>
+            <a:off x="7033565" y="4169664"/>
+            <a:ext cx="676656" cy="475488"/>
+          </a:xfrm>
+          <a:prstGeom prst="rect">
+            <a:avLst/>
+          </a:prstGeom>
+          <a:noFill/>
+          <a:ln/>
+        </p:spPr>
+        <p:txBody>
+          <a:bodyPr wrap="square" lIns="0" tIns="0" rIns="0" bIns="0" rtlCol="0" anchor="ctr"/>
+          <a:lstStyle/>
+          <a:p>
+            <a:pPr algn="ctr" indent="0" marL="0">
+              <a:buNone/>
+            </a:pPr>
+            <a:r>
+              <a:rPr lang="en-US" sz="900" b="1" dirty="0">
+                <a:solidFill>
+                  <a:srgbClr val="9D174D"/>
+                </a:solidFill>
+                <a:latin typeface="Trebuchet MS" pitchFamily="34" charset="0"/>
+                <a:ea typeface="Trebuchet MS" pitchFamily="34" charset="-122"/>
+                <a:cs typeface="Trebuchet MS" pitchFamily="34" charset="-120"/>
+              </a:rPr>
+              <a:t>e</a:t>
+            </a:r>
+            <a:endParaRPr lang="en-US" sz="900" dirty="0"/>
+          </a:p>
+        </p:txBody>
+      </p:sp>
+      <p:sp>
+        <p:nvSpPr>
+          <p:cNvPr id="55" name="Shape 53"/>
+          <p:cNvSpPr/>
+          <p:nvPr/>
+        </p:nvSpPr>
+        <p:spPr>
+          <a:xfrm>
+            <a:off x="7759598" y="4169664"/>
+            <a:ext cx="676656" cy="475488"/>
+          </a:xfrm>
+          <a:prstGeom prst="rect">
+            <a:avLst>
+              <a:gd name="adj" fmla="val 7692"/>
+            </a:avLst>
+          </a:prstGeom>
+          <a:solidFill>
+            <a:srgbClr val="FFFFFF"/>
+          </a:solidFill>
+          <a:ln w="12700">
+            <a:solidFill>
+              <a:srgbClr val="DB2777"/>
+            </a:solidFill>
+            <a:prstDash val="solid"/>
+          </a:ln>
+        </p:spPr>
+      </p:sp>
+      <p:sp>
+        <p:nvSpPr>
+          <p:cNvPr id="56" name="Text 54"/>
+          <p:cNvSpPr/>
+          <p:nvPr/>
+        </p:nvSpPr>
+        <p:spPr>
+          <a:xfrm>
+            <a:off x="7759598" y="4169664"/>
+            <a:ext cx="676656" cy="475488"/>
+          </a:xfrm>
+          <a:prstGeom prst="rect">
+            <a:avLst/>
+          </a:prstGeom>
+          <a:noFill/>
+          <a:ln/>
+        </p:spPr>
+        <p:txBody>
+          <a:bodyPr wrap="square" lIns="0" tIns="0" rIns="0" bIns="0" rtlCol="0" anchor="ctr"/>
+          <a:lstStyle/>
+          <a:p>
+            <a:pPr algn="ctr" indent="0" marL="0">
+              <a:buNone/>
+            </a:pPr>
+            <a:r>
+              <a:rPr lang="en-US" sz="900" b="1" dirty="0">
+                <a:solidFill>
+                  <a:srgbClr val="9D174D"/>
+                </a:solidFill>
+                <a:latin typeface="Trebuchet MS" pitchFamily="34" charset="0"/>
+                <a:ea typeface="Trebuchet MS" pitchFamily="34" charset="-122"/>
+                <a:cs typeface="Trebuchet MS" pitchFamily="34" charset="-120"/>
+              </a:rPr>
+              <a:t>d</a:t>
             </a:r>
             <a:endParaRPr lang="en-US" sz="900" dirty="0"/>
           </a:p>
@@ -11329,7 +11863,7 @@
                 <a:ea typeface="Calibri" pitchFamily="34" charset="-122"/>
                 <a:cs typeface="Calibri" pitchFamily="34" charset="-120"/>
               </a:rPr>
-              <a:t>Word Labs  •  wordlabs.app  •  Root: 'appear' = to come into sight</a:t>
+              <a:t>Word Labs  •  wordlabs.app  •  Root: 'appear' = come into view</a:t>
             </a:r>
             <a:endParaRPr lang="en-US" sz="800" dirty="0"/>
           </a:p>
@@ -11468,7 +12002,7 @@
                 <a:ea typeface="Trebuchet MS" pitchFamily="34" charset="-122"/>
                 <a:cs typeface="Trebuchet MS" pitchFamily="34" charset="-120"/>
               </a:rPr>
-              <a:t>reappearance</a:t>
+              <a:t>reappearing</a:t>
             </a:r>
             <a:endParaRPr lang="en-US" sz="2800" dirty="0"/>
           </a:p>
@@ -12156,7 +12690,7 @@
                 <a:ea typeface="Calibri" pitchFamily="34" charset="-122"/>
                 <a:cs typeface="Calibri" pitchFamily="34" charset="-120"/>
               </a:rPr>
-              <a:t>Word Labs  •  wordlabs.app  •  Root: 'appear' = to come into sight</a:t>
+              <a:t>Word Labs  •  wordlabs.app  •  Root: 'appear' = come into view</a:t>
             </a:r>
             <a:endParaRPr lang="en-US" sz="800" dirty="0"/>
           </a:p>
@@ -12295,7 +12829,7 @@
                 <a:ea typeface="Trebuchet MS" pitchFamily="34" charset="-122"/>
                 <a:cs typeface="Trebuchet MS" pitchFamily="34" charset="-120"/>
               </a:rPr>
-              <a:t>reappearance</a:t>
+              <a:t>reappearing</a:t>
             </a:r>
             <a:endParaRPr lang="en-US" sz="2800" dirty="0"/>
           </a:p>
@@ -12585,7 +13119,7 @@
                 <a:ea typeface="Calibri" pitchFamily="34" charset="-122"/>
                 <a:cs typeface="Calibri" pitchFamily="34" charset="-120"/>
               </a:rPr>
-              <a:t>to come into sight</a:t>
+              <a:t>come into view</a:t>
             </a:r>
             <a:endParaRPr lang="en-US" sz="850" dirty="0"/>
           </a:p>
@@ -12658,7 +13192,7 @@
                 <a:ea typeface="Trebuchet MS" pitchFamily="34" charset="-122"/>
                 <a:cs typeface="Trebuchet MS" pitchFamily="34" charset="-120"/>
               </a:rPr>
-              <a:t>ance</a:t>
+              <a:t>ing</a:t>
             </a:r>
             <a:endParaRPr lang="en-US" sz="1300" dirty="0"/>
           </a:p>
@@ -12697,7 +13231,7 @@
                 <a:ea typeface="Calibri" pitchFamily="34" charset="-122"/>
                 <a:cs typeface="Calibri" pitchFamily="34" charset="-120"/>
               </a:rPr>
-              <a:t>state or quality of</a:t>
+              <a:t>happening now</a:t>
             </a:r>
             <a:endParaRPr lang="en-US" sz="850" dirty="0"/>
           </a:p>
@@ -13253,7 +13787,7 @@
                 <a:ea typeface="Calibri" pitchFamily="34" charset="-122"/>
                 <a:cs typeface="Calibri" pitchFamily="34" charset="-120"/>
               </a:rPr>
-              <a:t>Word Labs  •  wordlabs.app  •  Root: 'appear' = to come into sight</a:t>
+              <a:t>Word Labs  •  wordlabs.app  •  Root: 'appear' = come into view</a:t>
             </a:r>
             <a:endParaRPr lang="en-US" sz="800" dirty="0"/>
           </a:p>
@@ -13392,7 +13926,7 @@
                 <a:ea typeface="Trebuchet MS" pitchFamily="34" charset="-122"/>
                 <a:cs typeface="Trebuchet MS" pitchFamily="34" charset="-120"/>
               </a:rPr>
-              <a:t>reappearance</a:t>
+              <a:t>reappearing</a:t>
             </a:r>
             <a:endParaRPr lang="en-US" sz="2800" dirty="0"/>
           </a:p>
@@ -13682,7 +14216,7 @@
                 <a:ea typeface="Calibri" pitchFamily="34" charset="-122"/>
                 <a:cs typeface="Calibri" pitchFamily="34" charset="-120"/>
               </a:rPr>
-              <a:t>to come into sight</a:t>
+              <a:t>come into view</a:t>
             </a:r>
             <a:endParaRPr lang="en-US" sz="850" dirty="0"/>
           </a:p>
@@ -13755,7 +14289,7 @@
                 <a:ea typeface="Trebuchet MS" pitchFamily="34" charset="-122"/>
                 <a:cs typeface="Trebuchet MS" pitchFamily="34" charset="-120"/>
               </a:rPr>
-              <a:t>ance</a:t>
+              <a:t>ing</a:t>
             </a:r>
             <a:endParaRPr lang="en-US" sz="1300" dirty="0"/>
           </a:p>
@@ -13794,7 +14328,7 @@
                 <a:ea typeface="Calibri" pitchFamily="34" charset="-122"/>
                 <a:cs typeface="Calibri" pitchFamily="34" charset="-120"/>
               </a:rPr>
-              <a:t>state or quality of</a:t>
+              <a:t>happening now</a:t>
             </a:r>
             <a:endParaRPr lang="en-US" sz="850" dirty="0"/>
           </a:p>
@@ -14268,7 +14802,7 @@
                 <a:ea typeface="Trebuchet MS" pitchFamily="34" charset="-122"/>
                 <a:cs typeface="Trebuchet MS" pitchFamily="34" charset="-120"/>
               </a:rPr>
-              <a:t>ance</a:t>
+              <a:t>ing</a:t>
             </a:r>
             <a:endParaRPr lang="en-US" sz="1400" dirty="0"/>
           </a:p>
@@ -14601,7 +15135,7 @@
                 <a:ea typeface="Calibri" pitchFamily="34" charset="-122"/>
                 <a:cs typeface="Calibri" pitchFamily="34" charset="-120"/>
               </a:rPr>
-              <a:t>Root 'appear' — to come into sight</a:t>
+              <a:t>Root 'appear' — come into view</a:t>
             </a:r>
             <a:endParaRPr lang="en-US" sz="1600" dirty="0"/>
           </a:p>
@@ -14957,7 +15491,7 @@
                 <a:ea typeface="Calibri" pitchFamily="34" charset="-122"/>
                 <a:cs typeface="Calibri" pitchFamily="34" charset="-120"/>
               </a:rPr>
-              <a:t>Word Labs  •  wordlabs.app  •  Root: 'appear' = to come into sight</a:t>
+              <a:t>Word Labs  •  wordlabs.app  •  Root: 'appear' = come into view</a:t>
             </a:r>
             <a:endParaRPr lang="en-US" sz="800" dirty="0"/>
           </a:p>
@@ -15096,7 +15630,7 @@
                 <a:ea typeface="Trebuchet MS" pitchFamily="34" charset="-122"/>
                 <a:cs typeface="Trebuchet MS" pitchFamily="34" charset="-120"/>
               </a:rPr>
-              <a:t>reappearance</a:t>
+              <a:t>reappearing</a:t>
             </a:r>
             <a:endParaRPr lang="en-US" sz="2800" dirty="0"/>
           </a:p>
@@ -15386,7 +15920,7 @@
                 <a:ea typeface="Calibri" pitchFamily="34" charset="-122"/>
                 <a:cs typeface="Calibri" pitchFamily="34" charset="-120"/>
               </a:rPr>
-              <a:t>to come into sight</a:t>
+              <a:t>come into view</a:t>
             </a:r>
             <a:endParaRPr lang="en-US" sz="850" dirty="0"/>
           </a:p>
@@ -15459,7 +15993,7 @@
                 <a:ea typeface="Trebuchet MS" pitchFamily="34" charset="-122"/>
                 <a:cs typeface="Trebuchet MS" pitchFamily="34" charset="-120"/>
               </a:rPr>
-              <a:t>ance</a:t>
+              <a:t>ing</a:t>
             </a:r>
             <a:endParaRPr lang="en-US" sz="1300" dirty="0"/>
           </a:p>
@@ -15498,7 +16032,7 @@
                 <a:ea typeface="Calibri" pitchFamily="34" charset="-122"/>
                 <a:cs typeface="Calibri" pitchFamily="34" charset="-120"/>
               </a:rPr>
-              <a:t>state or quality of</a:t>
+              <a:t>happening now</a:t>
             </a:r>
             <a:endParaRPr lang="en-US" sz="850" dirty="0"/>
           </a:p>
@@ -15972,7 +16506,7 @@
                 <a:ea typeface="Trebuchet MS" pitchFamily="34" charset="-122"/>
                 <a:cs typeface="Trebuchet MS" pitchFamily="34" charset="-120"/>
               </a:rPr>
-              <a:t>ance</a:t>
+              <a:t>ing</a:t>
             </a:r>
             <a:endParaRPr lang="en-US" sz="1400" dirty="0"/>
           </a:p>
@@ -16053,11 +16587,11 @@
         <p:spPr>
           <a:xfrm>
             <a:off x="1874520" y="4096512"/>
-            <a:ext cx="6903720" cy="804672"/>
+            <a:ext cx="6903720" cy="658368"/>
           </a:xfrm>
           <a:prstGeom prst="rect">
             <a:avLst>
-              <a:gd name="adj" fmla="val 6818"/>
+              <a:gd name="adj" fmla="val 8333"/>
             </a:avLst>
           </a:prstGeom>
           <a:solidFill>
@@ -16080,11 +16614,11 @@
         <p:spPr>
           <a:xfrm>
             <a:off x="2023872" y="4169664"/>
-            <a:ext cx="685800" cy="384048"/>
+            <a:ext cx="685800" cy="475488"/>
           </a:xfrm>
           <a:prstGeom prst="rect">
             <a:avLst>
-              <a:gd name="adj" fmla="val 9524"/>
+              <a:gd name="adj" fmla="val 7692"/>
             </a:avLst>
           </a:prstGeom>
           <a:solidFill>
@@ -16107,7 +16641,7 @@
         <p:spPr>
           <a:xfrm>
             <a:off x="2023872" y="4169664"/>
-            <a:ext cx="685800" cy="384048"/>
+            <a:ext cx="685800" cy="475488"/>
           </a:xfrm>
           <a:prstGeom prst="rect">
             <a:avLst/>
@@ -16146,11 +16680,11 @@
         <p:spPr>
           <a:xfrm>
             <a:off x="2831592" y="4169664"/>
-            <a:ext cx="685800" cy="384048"/>
+            <a:ext cx="685800" cy="475488"/>
           </a:xfrm>
           <a:prstGeom prst="rect">
             <a:avLst>
-              <a:gd name="adj" fmla="val 9524"/>
+              <a:gd name="adj" fmla="val 7692"/>
             </a:avLst>
           </a:prstGeom>
           <a:solidFill>
@@ -16173,7 +16707,7 @@
         <p:spPr>
           <a:xfrm>
             <a:off x="2831592" y="4169664"/>
-            <a:ext cx="685800" cy="384048"/>
+            <a:ext cx="685800" cy="475488"/>
           </a:xfrm>
           <a:prstGeom prst="rect">
             <a:avLst/>
@@ -16212,11 +16746,11 @@
         <p:spPr>
           <a:xfrm>
             <a:off x="3639312" y="4169664"/>
-            <a:ext cx="685800" cy="384048"/>
+            <a:ext cx="685800" cy="475488"/>
           </a:xfrm>
           <a:prstGeom prst="rect">
             <a:avLst>
-              <a:gd name="adj" fmla="val 9524"/>
+              <a:gd name="adj" fmla="val 7692"/>
             </a:avLst>
           </a:prstGeom>
           <a:solidFill>
@@ -16239,7 +16773,7 @@
         <p:spPr>
           <a:xfrm>
             <a:off x="3639312" y="4169664"/>
-            <a:ext cx="685800" cy="384048"/>
+            <a:ext cx="685800" cy="475488"/>
           </a:xfrm>
           <a:prstGeom prst="rect">
             <a:avLst/>
@@ -16278,11 +16812,11 @@
         <p:spPr>
           <a:xfrm>
             <a:off x="4447032" y="4169664"/>
-            <a:ext cx="685800" cy="384048"/>
+            <a:ext cx="685800" cy="475488"/>
           </a:xfrm>
           <a:prstGeom prst="rect">
             <a:avLst>
-              <a:gd name="adj" fmla="val 9524"/>
+              <a:gd name="adj" fmla="val 7692"/>
             </a:avLst>
           </a:prstGeom>
           <a:solidFill>
@@ -16305,7 +16839,7 @@
         <p:spPr>
           <a:xfrm>
             <a:off x="4447032" y="4169664"/>
-            <a:ext cx="685800" cy="384048"/>
+            <a:ext cx="685800" cy="475488"/>
           </a:xfrm>
           <a:prstGeom prst="rect">
             <a:avLst/>
@@ -16344,11 +16878,11 @@
         <p:spPr>
           <a:xfrm>
             <a:off x="5254752" y="4169664"/>
-            <a:ext cx="685800" cy="384048"/>
+            <a:ext cx="685800" cy="475488"/>
           </a:xfrm>
           <a:prstGeom prst="rect">
             <a:avLst>
-              <a:gd name="adj" fmla="val 9524"/>
+              <a:gd name="adj" fmla="val 7692"/>
             </a:avLst>
           </a:prstGeom>
           <a:solidFill>
@@ -16371,7 +16905,7 @@
         <p:spPr>
           <a:xfrm>
             <a:off x="5254752" y="4169664"/>
-            <a:ext cx="685800" cy="384048"/>
+            <a:ext cx="685800" cy="475488"/>
           </a:xfrm>
           <a:prstGeom prst="rect">
             <a:avLst/>
@@ -16395,7 +16929,7 @@
                 <a:ea typeface="Trebuchet MS" pitchFamily="34" charset="-122"/>
                 <a:cs typeface="Trebuchet MS" pitchFamily="34" charset="-120"/>
               </a:rPr>
-              <a:t>ear</a:t>
+              <a:t>ea</a:t>
             </a:r>
             <a:endParaRPr lang="en-US" sz="900" dirty="0"/>
           </a:p>
@@ -16410,11 +16944,11 @@
         <p:spPr>
           <a:xfrm>
             <a:off x="6062472" y="4169664"/>
-            <a:ext cx="685800" cy="384048"/>
+            <a:ext cx="685800" cy="475488"/>
           </a:xfrm>
           <a:prstGeom prst="rect">
             <a:avLst>
-              <a:gd name="adj" fmla="val 9524"/>
+              <a:gd name="adj" fmla="val 7692"/>
             </a:avLst>
           </a:prstGeom>
           <a:solidFill>
@@ -16437,7 +16971,7 @@
         <p:spPr>
           <a:xfrm>
             <a:off x="6062472" y="4169664"/>
-            <a:ext cx="685800" cy="384048"/>
+            <a:ext cx="685800" cy="475488"/>
           </a:xfrm>
           <a:prstGeom prst="rect">
             <a:avLst/>
@@ -16461,7 +16995,7 @@
                 <a:ea typeface="Trebuchet MS" pitchFamily="34" charset="-122"/>
                 <a:cs typeface="Trebuchet MS" pitchFamily="34" charset="-120"/>
               </a:rPr>
-              <a:t>a</a:t>
+              <a:t>r</a:t>
             </a:r>
             <a:endParaRPr lang="en-US" sz="900" dirty="0"/>
           </a:p>
@@ -16476,11 +17010,11 @@
         <p:spPr>
           <a:xfrm>
             <a:off x="6870192" y="4169664"/>
-            <a:ext cx="685800" cy="384048"/>
+            <a:ext cx="685800" cy="475488"/>
           </a:xfrm>
           <a:prstGeom prst="rect">
             <a:avLst>
-              <a:gd name="adj" fmla="val 9524"/>
+              <a:gd name="adj" fmla="val 7692"/>
             </a:avLst>
           </a:prstGeom>
           <a:solidFill>
@@ -16503,7 +17037,7 @@
         <p:spPr>
           <a:xfrm>
             <a:off x="6870192" y="4169664"/>
-            <a:ext cx="685800" cy="384048"/>
+            <a:ext cx="685800" cy="475488"/>
           </a:xfrm>
           <a:prstGeom prst="rect">
             <a:avLst/>
@@ -16527,7 +17061,7 @@
                 <a:ea typeface="Trebuchet MS" pitchFamily="34" charset="-122"/>
                 <a:cs typeface="Trebuchet MS" pitchFamily="34" charset="-120"/>
               </a:rPr>
-              <a:t>n</a:t>
+              <a:t>i</a:t>
             </a:r>
             <a:endParaRPr lang="en-US" sz="900" dirty="0"/>
           </a:p>
@@ -16542,11 +17076,11 @@
         <p:spPr>
           <a:xfrm>
             <a:off x="7677912" y="4169664"/>
-            <a:ext cx="685800" cy="384048"/>
+            <a:ext cx="685800" cy="475488"/>
           </a:xfrm>
           <a:prstGeom prst="rect">
             <a:avLst>
-              <a:gd name="adj" fmla="val 9524"/>
+              <a:gd name="adj" fmla="val 7692"/>
             </a:avLst>
           </a:prstGeom>
           <a:solidFill>
@@ -16569,7 +17103,7 @@
         <p:spPr>
           <a:xfrm>
             <a:off x="7677912" y="4169664"/>
-            <a:ext cx="685800" cy="384048"/>
+            <a:ext cx="685800" cy="475488"/>
           </a:xfrm>
           <a:prstGeom prst="rect">
             <a:avLst/>
@@ -16593,48 +17127,9 @@
                 <a:ea typeface="Trebuchet MS" pitchFamily="34" charset="-122"/>
                 <a:cs typeface="Trebuchet MS" pitchFamily="34" charset="-120"/>
               </a:rPr>
-              <a:t>ce</a:t>
+              <a:t>ng</a:t>
             </a:r>
             <a:endParaRPr lang="en-US" sz="900" dirty="0"/>
-          </a:p>
-        </p:txBody>
-      </p:sp>
-      <p:sp>
-        <p:nvSpPr>
-          <p:cNvPr id="58" name="Text 56"/>
-          <p:cNvSpPr/>
-          <p:nvPr/>
-        </p:nvSpPr>
-        <p:spPr>
-          <a:xfrm>
-            <a:off x="7677912" y="4572000"/>
-            <a:ext cx="685800" cy="219456"/>
-          </a:xfrm>
-          <a:prstGeom prst="rect">
-            <a:avLst/>
-          </a:prstGeom>
-          <a:noFill/>
-          <a:ln/>
-        </p:spPr>
-        <p:txBody>
-          <a:bodyPr wrap="square" lIns="0" tIns="0" rIns="0" bIns="0" rtlCol="0" anchor="t"/>
-          <a:lstStyle/>
-          <a:p>
-            <a:pPr algn="ctr" indent="0" marL="0">
-              <a:buNone/>
-            </a:pPr>
-            <a:r>
-              <a:rPr lang="en-US" sz="750" i="1" dirty="0">
-                <a:solidFill>
-                  <a:srgbClr val="94A3B8"/>
-                </a:solidFill>
-                <a:latin typeface="Calibri" pitchFamily="34" charset="0"/>
-                <a:ea typeface="Calibri" pitchFamily="34" charset="-122"/>
-                <a:cs typeface="Calibri" pitchFamily="34" charset="-120"/>
-              </a:rPr>
-              <a:t>/s/</a:t>
-            </a:r>
-            <a:endParaRPr lang="en-US" sz="750" dirty="0"/>
           </a:p>
         </p:txBody>
       </p:sp>
@@ -17206,7 +17701,7 @@
                 <a:ea typeface="Calibri" pitchFamily="34" charset="-122"/>
                 <a:cs typeface="Calibri" pitchFamily="34" charset="-120"/>
               </a:rPr>
-              <a:t>Word Labs  •  wordlabs.app  •  Root: 'appear' = to come into sight</a:t>
+              <a:t>Word Labs  •  wordlabs.app  •  Root: 'appear' = come into view</a:t>
             </a:r>
             <a:endParaRPr lang="en-US" sz="800" dirty="0"/>
           </a:p>
@@ -17540,7 +18035,7 @@
                 <a:ea typeface="Trebuchet MS" pitchFamily="34" charset="-122"/>
                 <a:cs typeface="Trebuchet MS" pitchFamily="34" charset="-120"/>
               </a:rPr>
-              <a:t>2</a:t>
+              <a:t>0</a:t>
             </a:r>
             <a:pPr algn="ctr" indent="0" marL="0">
               <a:buNone/>
@@ -17554,7 +18049,7 @@
                 <a:ea typeface="Trebuchet MS" pitchFamily="34" charset="-122"/>
                 <a:cs typeface="Trebuchet MS" pitchFamily="34" charset="-120"/>
               </a:rPr>
-              <a:t>  punctuation marks</a:t>
+              <a:t>  punctuation mark</a:t>
             </a:r>
             <a:endParaRPr lang="en-US" sz="2800" dirty="0"/>
           </a:p>
@@ -17846,7 +18341,7 @@
                 <a:ea typeface="Calibri" pitchFamily="34" charset="-122"/>
                 <a:cs typeface="Calibri" pitchFamily="34" charset="-120"/>
               </a:rPr>
-              <a:t>Word Labs  •  wordlabs.app  •  Root: 'appear' = to come into sight</a:t>
+              <a:t>Word Labs  •  wordlabs.app  •  Root: 'appear' = come into view</a:t>
             </a:r>
             <a:endParaRPr lang="en-US" sz="800" dirty="0"/>
           </a:p>
@@ -17958,7 +18453,7 @@
                 <a:ea typeface="Calibri" pitchFamily="34" charset="-122"/>
                 <a:cs typeface="Calibri" pitchFamily="34" charset="-120"/>
               </a:rPr>
-              <a:t>The ghost's </a:t>
+              <a:t>Her </a:t>
             </a:r>
             <a:pPr algn="l" indent="0" marL="0">
               <a:buNone/>
@@ -17989,7 +18484,7 @@
                 <a:ea typeface="Calibri" pitchFamily="34" charset="-122"/>
                 <a:cs typeface="Calibri" pitchFamily="34" charset="-120"/>
               </a:rPr>
-              <a:t> was frightening; it would </a:t>
+              <a:t> had changed a lot since we last met. The judges were not swayed by </a:t>
             </a:r>
             <a:pPr algn="l" indent="0" marL="0">
               <a:buNone/>
@@ -18006,7 +18501,7 @@
                 <a:ea typeface="Calibri" pitchFamily="34" charset="-122"/>
                 <a:cs typeface="Calibri" pitchFamily="34" charset="-120"/>
               </a:rPr>
-              <a:t>appear</a:t>
+              <a:t>appearances</a:t>
             </a:r>
             <a:pPr algn="l" indent="0" marL="0">
               <a:buNone/>
@@ -18020,7 +18515,7 @@
                 <a:ea typeface="Calibri" pitchFamily="34" charset="-122"/>
                 <a:cs typeface="Calibri" pitchFamily="34" charset="-120"/>
               </a:rPr>
-              <a:t> suddenly, then vanish into the </a:t>
+              <a:t> alone. Fans were thrilled by the singer's </a:t>
             </a:r>
             <a:pPr algn="l" indent="0" marL="0">
               <a:buNone/>
@@ -18037,7 +18532,7 @@
                 <a:ea typeface="Calibri" pitchFamily="34" charset="-122"/>
                 <a:cs typeface="Calibri" pitchFamily="34" charset="-120"/>
               </a:rPr>
-              <a:t>appearing</a:t>
+              <a:t>reappearance</a:t>
             </a:r>
             <a:pPr algn="l" indent="0" marL="0">
               <a:buNone/>
@@ -18051,7 +18546,7 @@
                 <a:ea typeface="Calibri" pitchFamily="34" charset="-122"/>
                 <a:cs typeface="Calibri" pitchFamily="34" charset="-120"/>
               </a:rPr>
-              <a:t> mist.</a:t>
+              <a:t> on stage after years away.</a:t>
             </a:r>
             <a:endParaRPr lang="en-US" sz="1800" dirty="0"/>
           </a:p>
@@ -18334,7 +18829,7 @@
                 <a:ea typeface="Trebuchet MS" pitchFamily="34" charset="-122"/>
                 <a:cs typeface="Trebuchet MS" pitchFamily="34" charset="-120"/>
               </a:rPr>
-              <a:t>appear</a:t>
+              <a:t>appearances</a:t>
             </a:r>
             <a:endParaRPr lang="en-US" sz="1400" dirty="0"/>
           </a:p>
@@ -18462,7 +18957,7 @@
                 <a:ea typeface="Trebuchet MS" pitchFamily="34" charset="-122"/>
                 <a:cs typeface="Trebuchet MS" pitchFamily="34" charset="-120"/>
               </a:rPr>
-              <a:t>appearing</a:t>
+              <a:t>reappearance</a:t>
             </a:r>
             <a:endParaRPr lang="en-US" sz="1400" dirty="0"/>
           </a:p>
@@ -18793,7 +19288,7 @@
                 <a:ea typeface="Calibri" pitchFamily="34" charset="-122"/>
                 <a:cs typeface="Calibri" pitchFamily="34" charset="-120"/>
               </a:rPr>
-              <a:t>Word Labs  •  wordlabs.app  •  Root: 'appear' = to come into sight</a:t>
+              <a:t>Word Labs  •  wordlabs.app  •  Root: 'appear' = come into view</a:t>
             </a:r>
             <a:endParaRPr lang="en-US" sz="800" dirty="0"/>
           </a:p>
@@ -19620,7 +20115,7 @@
                 <a:ea typeface="Calibri" pitchFamily="34" charset="-122"/>
                 <a:cs typeface="Calibri" pitchFamily="34" charset="-120"/>
               </a:rPr>
-              <a:t>Word Labs  •  wordlabs.app  •  Root: 'appear' = to come into sight</a:t>
+              <a:t>Word Labs  •  wordlabs.app  •  Root: 'appear' = come into view</a:t>
             </a:r>
             <a:endParaRPr lang="en-US" sz="800" dirty="0"/>
           </a:p>
@@ -19937,7 +20432,7 @@
                 <a:ea typeface="Calibri" pitchFamily="34" charset="-122"/>
                 <a:cs typeface="Calibri" pitchFamily="34" charset="-120"/>
               </a:rPr>
-              <a:t>to come into sight</a:t>
+              <a:t>come into view</a:t>
             </a:r>
             <a:endParaRPr lang="en-US" sz="850" dirty="0"/>
           </a:p>
@@ -20049,7 +20544,7 @@
                 <a:ea typeface="Calibri" pitchFamily="34" charset="-122"/>
                 <a:cs typeface="Calibri" pitchFamily="34" charset="-120"/>
               </a:rPr>
-              <a:t>state or quality of</a:t>
+              <a:t>state of</a:t>
             </a:r>
             <a:endParaRPr lang="en-US" sz="850" dirty="0"/>
           </a:p>
@@ -20605,7 +21100,7 @@
                 <a:ea typeface="Calibri" pitchFamily="34" charset="-122"/>
                 <a:cs typeface="Calibri" pitchFamily="34" charset="-120"/>
               </a:rPr>
-              <a:t>Word Labs  •  wordlabs.app  •  Root: 'appear' = to come into sight</a:t>
+              <a:t>Word Labs  •  wordlabs.app  •  Root: 'appear' = come into view</a:t>
             </a:r>
             <a:endParaRPr lang="en-US" sz="800" dirty="0"/>
           </a:p>
@@ -20922,7 +21417,7 @@
                 <a:ea typeface="Calibri" pitchFamily="34" charset="-122"/>
                 <a:cs typeface="Calibri" pitchFamily="34" charset="-120"/>
               </a:rPr>
-              <a:t>to come into sight</a:t>
+              <a:t>come into view</a:t>
             </a:r>
             <a:endParaRPr lang="en-US" sz="850" dirty="0"/>
           </a:p>
@@ -21034,7 +21529,7 @@
                 <a:ea typeface="Calibri" pitchFamily="34" charset="-122"/>
                 <a:cs typeface="Calibri" pitchFamily="34" charset="-120"/>
               </a:rPr>
-              <a:t>state or quality of</a:t>
+              <a:t>state of</a:t>
             </a:r>
             <a:endParaRPr lang="en-US" sz="850" dirty="0"/>
           </a:p>
@@ -21827,7 +22322,7 @@
                 <a:ea typeface="Calibri" pitchFamily="34" charset="-122"/>
                 <a:cs typeface="Calibri" pitchFamily="34" charset="-120"/>
               </a:rPr>
-              <a:t>Word Labs  •  wordlabs.app  •  Root: 'appear' = to come into sight</a:t>
+              <a:t>Word Labs  •  wordlabs.app  •  Root: 'appear' = come into view</a:t>
             </a:r>
             <a:endParaRPr lang="en-US" sz="800" dirty="0"/>
           </a:p>
@@ -22144,7 +22639,7 @@
                 <a:ea typeface="Calibri" pitchFamily="34" charset="-122"/>
                 <a:cs typeface="Calibri" pitchFamily="34" charset="-120"/>
               </a:rPr>
-              <a:t>to come into sight</a:t>
+              <a:t>come into view</a:t>
             </a:r>
             <a:endParaRPr lang="en-US" sz="850" dirty="0"/>
           </a:p>
@@ -22256,7 +22751,7 @@
                 <a:ea typeface="Calibri" pitchFamily="34" charset="-122"/>
                 <a:cs typeface="Calibri" pitchFamily="34" charset="-120"/>
               </a:rPr>
-              <a:t>state or quality of</a:t>
+              <a:t>state of</a:t>
             </a:r>
             <a:endParaRPr lang="en-US" sz="850" dirty="0"/>
           </a:p>
@@ -22706,11 +23201,11 @@
         <p:spPr>
           <a:xfrm>
             <a:off x="1874520" y="4096512"/>
-            <a:ext cx="6903720" cy="804672"/>
+            <a:ext cx="6903720" cy="658368"/>
           </a:xfrm>
           <a:prstGeom prst="rect">
             <a:avLst>
-              <a:gd name="adj" fmla="val 6818"/>
+              <a:gd name="adj" fmla="val 8333"/>
             </a:avLst>
           </a:prstGeom>
           <a:solidFill>
@@ -22733,11 +23228,11 @@
         <p:spPr>
           <a:xfrm>
             <a:off x="2254649" y="4169664"/>
-            <a:ext cx="685800" cy="384048"/>
+            <a:ext cx="685800" cy="475488"/>
           </a:xfrm>
           <a:prstGeom prst="rect">
             <a:avLst>
-              <a:gd name="adj" fmla="val 9524"/>
+              <a:gd name="adj" fmla="val 7692"/>
             </a:avLst>
           </a:prstGeom>
           <a:solidFill>
@@ -22760,7 +23255,7 @@
         <p:spPr>
           <a:xfrm>
             <a:off x="2254649" y="4169664"/>
-            <a:ext cx="685800" cy="384048"/>
+            <a:ext cx="685800" cy="475488"/>
           </a:xfrm>
           <a:prstGeom prst="rect">
             <a:avLst/>
@@ -22799,11 +23294,11 @@
         <p:spPr>
           <a:xfrm>
             <a:off x="3293146" y="4169664"/>
-            <a:ext cx="685800" cy="384048"/>
+            <a:ext cx="685800" cy="475488"/>
           </a:xfrm>
           <a:prstGeom prst="rect">
             <a:avLst>
-              <a:gd name="adj" fmla="val 9524"/>
+              <a:gd name="adj" fmla="val 7692"/>
             </a:avLst>
           </a:prstGeom>
           <a:solidFill>
@@ -22826,7 +23321,7 @@
         <p:spPr>
           <a:xfrm>
             <a:off x="3293146" y="4169664"/>
-            <a:ext cx="685800" cy="384048"/>
+            <a:ext cx="685800" cy="475488"/>
           </a:xfrm>
           <a:prstGeom prst="rect">
             <a:avLst/>
@@ -22865,11 +23360,11 @@
         <p:spPr>
           <a:xfrm>
             <a:off x="4331643" y="4169664"/>
-            <a:ext cx="685800" cy="384048"/>
+            <a:ext cx="685800" cy="475488"/>
           </a:xfrm>
           <a:prstGeom prst="rect">
             <a:avLst>
-              <a:gd name="adj" fmla="val 9524"/>
+              <a:gd name="adj" fmla="val 7692"/>
             </a:avLst>
           </a:prstGeom>
           <a:solidFill>
@@ -22892,7 +23387,7 @@
         <p:spPr>
           <a:xfrm>
             <a:off x="4331643" y="4169664"/>
-            <a:ext cx="685800" cy="384048"/>
+            <a:ext cx="685800" cy="475488"/>
           </a:xfrm>
           <a:prstGeom prst="rect">
             <a:avLst/>
@@ -22931,11 +23426,11 @@
         <p:spPr>
           <a:xfrm>
             <a:off x="5370141" y="4169664"/>
-            <a:ext cx="685800" cy="384048"/>
+            <a:ext cx="685800" cy="475488"/>
           </a:xfrm>
           <a:prstGeom prst="rect">
             <a:avLst>
-              <a:gd name="adj" fmla="val 9524"/>
+              <a:gd name="adj" fmla="val 7692"/>
             </a:avLst>
           </a:prstGeom>
           <a:solidFill>
@@ -22958,7 +23453,7 @@
         <p:spPr>
           <a:xfrm>
             <a:off x="5370141" y="4169664"/>
-            <a:ext cx="685800" cy="384048"/>
+            <a:ext cx="685800" cy="475488"/>
           </a:xfrm>
           <a:prstGeom prst="rect">
             <a:avLst/>
@@ -22997,11 +23492,11 @@
         <p:spPr>
           <a:xfrm>
             <a:off x="6408638" y="4169664"/>
-            <a:ext cx="685800" cy="384048"/>
+            <a:ext cx="685800" cy="475488"/>
           </a:xfrm>
           <a:prstGeom prst="rect">
             <a:avLst>
-              <a:gd name="adj" fmla="val 9524"/>
+              <a:gd name="adj" fmla="val 7692"/>
             </a:avLst>
           </a:prstGeom>
           <a:solidFill>
@@ -23024,7 +23519,7 @@
         <p:spPr>
           <a:xfrm>
             <a:off x="6408638" y="4169664"/>
-            <a:ext cx="685800" cy="384048"/>
+            <a:ext cx="685800" cy="475488"/>
           </a:xfrm>
           <a:prstGeom prst="rect">
             <a:avLst/>
@@ -23063,11 +23558,11 @@
         <p:spPr>
           <a:xfrm>
             <a:off x="7447135" y="4169664"/>
-            <a:ext cx="685800" cy="384048"/>
+            <a:ext cx="685800" cy="475488"/>
           </a:xfrm>
           <a:prstGeom prst="rect">
             <a:avLst>
-              <a:gd name="adj" fmla="val 9524"/>
+              <a:gd name="adj" fmla="val 7692"/>
             </a:avLst>
           </a:prstGeom>
           <a:solidFill>
@@ -23090,7 +23585,7 @@
         <p:spPr>
           <a:xfrm>
             <a:off x="7447135" y="4169664"/>
-            <a:ext cx="685800" cy="384048"/>
+            <a:ext cx="685800" cy="475488"/>
           </a:xfrm>
           <a:prstGeom prst="rect">
             <a:avLst/>
@@ -23117,45 +23612,6 @@
               <a:t>ce</a:t>
             </a:r>
             <a:endParaRPr lang="en-US" sz="900" dirty="0"/>
-          </a:p>
-        </p:txBody>
-      </p:sp>
-      <p:sp>
-        <p:nvSpPr>
-          <p:cNvPr id="48" name="Text 46"/>
-          <p:cNvSpPr/>
-          <p:nvPr/>
-        </p:nvSpPr>
-        <p:spPr>
-          <a:xfrm>
-            <a:off x="7447135" y="4572000"/>
-            <a:ext cx="685800" cy="219456"/>
-          </a:xfrm>
-          <a:prstGeom prst="rect">
-            <a:avLst/>
-          </a:prstGeom>
-          <a:noFill/>
-          <a:ln/>
-        </p:spPr>
-        <p:txBody>
-          <a:bodyPr wrap="square" lIns="0" tIns="0" rIns="0" bIns="0" rtlCol="0" anchor="t"/>
-          <a:lstStyle/>
-          <a:p>
-            <a:pPr algn="ctr" indent="0" marL="0">
-              <a:buNone/>
-            </a:pPr>
-            <a:r>
-              <a:rPr lang="en-US" sz="750" i="1" dirty="0">
-                <a:solidFill>
-                  <a:srgbClr val="94A3B8"/>
-                </a:solidFill>
-                <a:latin typeface="Calibri" pitchFamily="34" charset="0"/>
-                <a:ea typeface="Calibri" pitchFamily="34" charset="-122"/>
-                <a:cs typeface="Calibri" pitchFamily="34" charset="-120"/>
-              </a:rPr>
-              <a:t>/s/</a:t>
-            </a:r>
-            <a:endParaRPr lang="en-US" sz="750" dirty="0"/>
           </a:p>
         </p:txBody>
       </p:sp>
@@ -23445,7 +23901,7 @@
                 <a:ea typeface="Calibri" pitchFamily="34" charset="-122"/>
                 <a:cs typeface="Calibri" pitchFamily="34" charset="-120"/>
               </a:rPr>
-              <a:t>Word Labs  •  wordlabs.app  •  Root: 'appear' = to come into sight</a:t>
+              <a:t>Word Labs  •  wordlabs.app  •  Root: 'appear' = come into view</a:t>
             </a:r>
             <a:endParaRPr lang="en-US" sz="800" dirty="0"/>
           </a:p>
@@ -23584,7 +24040,7 @@
                 <a:ea typeface="Trebuchet MS" pitchFamily="34" charset="-122"/>
                 <a:cs typeface="Trebuchet MS" pitchFamily="34" charset="-120"/>
               </a:rPr>
-              <a:t>appear</a:t>
+              <a:t>appearances</a:t>
             </a:r>
             <a:endParaRPr lang="en-US" sz="2800" dirty="0"/>
           </a:p>
@@ -24272,7 +24728,7 @@
                 <a:ea typeface="Calibri" pitchFamily="34" charset="-122"/>
                 <a:cs typeface="Calibri" pitchFamily="34" charset="-120"/>
               </a:rPr>
-              <a:t>Word Labs  •  wordlabs.app  •  Root: 'appear' = to come into sight</a:t>
+              <a:t>Word Labs  •  wordlabs.app  •  Root: 'appear' = come into view</a:t>
             </a:r>
             <a:endParaRPr lang="en-US" sz="800" dirty="0"/>
           </a:p>
@@ -24411,7 +24867,7 @@
                 <a:ea typeface="Trebuchet MS" pitchFamily="34" charset="-122"/>
                 <a:cs typeface="Trebuchet MS" pitchFamily="34" charset="-120"/>
               </a:rPr>
-              <a:t>appear</a:t>
+              <a:t>appearances</a:t>
             </a:r>
             <a:endParaRPr lang="en-US" sz="2800" dirty="0"/>
           </a:p>
@@ -24491,7 +24947,7 @@
         </p:nvSpPr>
         <p:spPr>
           <a:xfrm>
-            <a:off x="4370832" y="2258568"/>
+            <a:off x="2221992" y="2258568"/>
             <a:ext cx="1828800" cy="292608"/>
           </a:xfrm>
           <a:prstGeom prst="rect">
@@ -24525,7 +24981,7 @@
         </p:nvSpPr>
         <p:spPr>
           <a:xfrm>
-            <a:off x="4370832" y="2258568"/>
+            <a:off x="2221992" y="2258568"/>
             <a:ext cx="1828800" cy="292608"/>
           </a:xfrm>
           <a:prstGeom prst="rect">
@@ -24564,7 +25020,7 @@
         </p:nvSpPr>
         <p:spPr>
           <a:xfrm>
-            <a:off x="4370832" y="2569464"/>
+            <a:off x="2221992" y="2569464"/>
             <a:ext cx="1828800" cy="201168"/>
           </a:xfrm>
           <a:prstGeom prst="rect">
@@ -24589,7 +25045,7 @@
                 <a:ea typeface="Calibri" pitchFamily="34" charset="-122"/>
                 <a:cs typeface="Calibri" pitchFamily="34" charset="-120"/>
               </a:rPr>
-              <a:t>to come into sight</a:t>
+              <a:t>come into view</a:t>
             </a:r>
             <a:endParaRPr lang="en-US" sz="850" dirty="0"/>
           </a:p>
@@ -24598,6 +25054,230 @@
       <p:sp>
         <p:nvSpPr>
           <p:cNvPr id="19" name="Shape 17"/>
+          <p:cNvSpPr/>
+          <p:nvPr/>
+        </p:nvSpPr>
+        <p:spPr>
+          <a:xfrm>
+            <a:off x="4370832" y="2258568"/>
+            <a:ext cx="1828800" cy="292608"/>
+          </a:xfrm>
+          <a:prstGeom prst="rect">
+            <a:avLst>
+              <a:gd name="adj" fmla="val 25000"/>
+            </a:avLst>
+          </a:prstGeom>
+          <a:solidFill>
+            <a:srgbClr val="FCE7F3"/>
+          </a:solidFill>
+          <a:ln w="19050">
+            <a:solidFill>
+              <a:srgbClr val="DB2777"/>
+            </a:solidFill>
+            <a:prstDash val="solid"/>
+          </a:ln>
+          <a:effectLst>
+            <a:outerShdw sx="100000" sy="100000" kx="0" ky="0" algn="bl" rotWithShape="0" blurRad="101600" dist="38100" dir="8100000">
+              <a:srgbClr val="000000">
+                <a:alpha val="12000"/>
+              </a:srgbClr>
+            </a:outerShdw>
+          </a:effectLst>
+        </p:spPr>
+      </p:sp>
+      <p:sp>
+        <p:nvSpPr>
+          <p:cNvPr id="20" name="Text 18"/>
+          <p:cNvSpPr/>
+          <p:nvPr/>
+        </p:nvSpPr>
+        <p:spPr>
+          <a:xfrm>
+            <a:off x="4370832" y="2258568"/>
+            <a:ext cx="1828800" cy="292608"/>
+          </a:xfrm>
+          <a:prstGeom prst="rect">
+            <a:avLst/>
+          </a:prstGeom>
+          <a:noFill/>
+          <a:ln/>
+        </p:spPr>
+        <p:txBody>
+          <a:bodyPr wrap="square" lIns="0" tIns="0" rIns="0" bIns="0" rtlCol="0" anchor="ctr"/>
+          <a:lstStyle/>
+          <a:p>
+            <a:pPr algn="ctr" indent="0" marL="0">
+              <a:buNone/>
+            </a:pPr>
+            <a:r>
+              <a:rPr lang="en-US" sz="1300" b="1" dirty="0">
+                <a:solidFill>
+                  <a:srgbClr val="9D174D"/>
+                </a:solidFill>
+                <a:latin typeface="Trebuchet MS" pitchFamily="34" charset="0"/>
+                <a:ea typeface="Trebuchet MS" pitchFamily="34" charset="-122"/>
+                <a:cs typeface="Trebuchet MS" pitchFamily="34" charset="-120"/>
+              </a:rPr>
+              <a:t>ance</a:t>
+            </a:r>
+            <a:endParaRPr lang="en-US" sz="1300" dirty="0"/>
+          </a:p>
+        </p:txBody>
+      </p:sp>
+      <p:sp>
+        <p:nvSpPr>
+          <p:cNvPr id="21" name="Text 19"/>
+          <p:cNvSpPr/>
+          <p:nvPr/>
+        </p:nvSpPr>
+        <p:spPr>
+          <a:xfrm>
+            <a:off x="4370832" y="2569464"/>
+            <a:ext cx="1828800" cy="201168"/>
+          </a:xfrm>
+          <a:prstGeom prst="rect">
+            <a:avLst/>
+          </a:prstGeom>
+          <a:noFill/>
+          <a:ln/>
+        </p:spPr>
+        <p:txBody>
+          <a:bodyPr wrap="square" lIns="0" tIns="0" rIns="0" bIns="0" rtlCol="0" anchor="t"/>
+          <a:lstStyle/>
+          <a:p>
+            <a:pPr algn="ctr" indent="0" marL="0">
+              <a:buNone/>
+            </a:pPr>
+            <a:r>
+              <a:rPr lang="en-US" sz="850" dirty="0">
+                <a:solidFill>
+                  <a:srgbClr val="475569"/>
+                </a:solidFill>
+                <a:latin typeface="Calibri" pitchFamily="34" charset="0"/>
+                <a:ea typeface="Calibri" pitchFamily="34" charset="-122"/>
+                <a:cs typeface="Calibri" pitchFamily="34" charset="-120"/>
+              </a:rPr>
+              <a:t>state of</a:t>
+            </a:r>
+            <a:endParaRPr lang="en-US" sz="850" dirty="0"/>
+          </a:p>
+        </p:txBody>
+      </p:sp>
+      <p:sp>
+        <p:nvSpPr>
+          <p:cNvPr id="22" name="Shape 20"/>
+          <p:cNvSpPr/>
+          <p:nvPr/>
+        </p:nvSpPr>
+        <p:spPr>
+          <a:xfrm>
+            <a:off x="6519672" y="2258568"/>
+            <a:ext cx="1828800" cy="292608"/>
+          </a:xfrm>
+          <a:prstGeom prst="rect">
+            <a:avLst>
+              <a:gd name="adj" fmla="val 25000"/>
+            </a:avLst>
+          </a:prstGeom>
+          <a:solidFill>
+            <a:srgbClr val="FCE7F3"/>
+          </a:solidFill>
+          <a:ln w="19050">
+            <a:solidFill>
+              <a:srgbClr val="DB2777"/>
+            </a:solidFill>
+            <a:prstDash val="solid"/>
+          </a:ln>
+          <a:effectLst>
+            <a:outerShdw sx="100000" sy="100000" kx="0" ky="0" algn="bl" rotWithShape="0" blurRad="101600" dist="38100" dir="8100000">
+              <a:srgbClr val="000000">
+                <a:alpha val="12000"/>
+              </a:srgbClr>
+            </a:outerShdw>
+          </a:effectLst>
+        </p:spPr>
+      </p:sp>
+      <p:sp>
+        <p:nvSpPr>
+          <p:cNvPr id="23" name="Text 21"/>
+          <p:cNvSpPr/>
+          <p:nvPr/>
+        </p:nvSpPr>
+        <p:spPr>
+          <a:xfrm>
+            <a:off x="6519672" y="2258568"/>
+            <a:ext cx="1828800" cy="292608"/>
+          </a:xfrm>
+          <a:prstGeom prst="rect">
+            <a:avLst/>
+          </a:prstGeom>
+          <a:noFill/>
+          <a:ln/>
+        </p:spPr>
+        <p:txBody>
+          <a:bodyPr wrap="square" lIns="0" tIns="0" rIns="0" bIns="0" rtlCol="0" anchor="ctr"/>
+          <a:lstStyle/>
+          <a:p>
+            <a:pPr algn="ctr" indent="0" marL="0">
+              <a:buNone/>
+            </a:pPr>
+            <a:r>
+              <a:rPr lang="en-US" sz="1300" b="1" dirty="0">
+                <a:solidFill>
+                  <a:srgbClr val="9D174D"/>
+                </a:solidFill>
+                <a:latin typeface="Trebuchet MS" pitchFamily="34" charset="0"/>
+                <a:ea typeface="Trebuchet MS" pitchFamily="34" charset="-122"/>
+                <a:cs typeface="Trebuchet MS" pitchFamily="34" charset="-120"/>
+              </a:rPr>
+              <a:t>s</a:t>
+            </a:r>
+            <a:endParaRPr lang="en-US" sz="1300" dirty="0"/>
+          </a:p>
+        </p:txBody>
+      </p:sp>
+      <p:sp>
+        <p:nvSpPr>
+          <p:cNvPr id="24" name="Text 22"/>
+          <p:cNvSpPr/>
+          <p:nvPr/>
+        </p:nvSpPr>
+        <p:spPr>
+          <a:xfrm>
+            <a:off x="6519672" y="2569464"/>
+            <a:ext cx="1828800" cy="201168"/>
+          </a:xfrm>
+          <a:prstGeom prst="rect">
+            <a:avLst/>
+          </a:prstGeom>
+          <a:noFill/>
+          <a:ln/>
+        </p:spPr>
+        <p:txBody>
+          <a:bodyPr wrap="square" lIns="0" tIns="0" rIns="0" bIns="0" rtlCol="0" anchor="t"/>
+          <a:lstStyle/>
+          <a:p>
+            <a:pPr algn="ctr" indent="0" marL="0">
+              <a:buNone/>
+            </a:pPr>
+            <a:r>
+              <a:rPr lang="en-US" sz="850" dirty="0">
+                <a:solidFill>
+                  <a:srgbClr val="475569"/>
+                </a:solidFill>
+                <a:latin typeface="Calibri" pitchFamily="34" charset="0"/>
+                <a:ea typeface="Calibri" pitchFamily="34" charset="-122"/>
+                <a:cs typeface="Calibri" pitchFamily="34" charset="-120"/>
+              </a:rPr>
+              <a:t>plural or present tense</a:t>
+            </a:r>
+            <a:endParaRPr lang="en-US" sz="850" dirty="0"/>
+          </a:p>
+        </p:txBody>
+      </p:sp>
+      <p:sp>
+        <p:nvSpPr>
+          <p:cNvPr id="25" name="Shape 23"/>
           <p:cNvSpPr/>
           <p:nvPr/>
         </p:nvSpPr>
@@ -24624,7 +25304,7 @@
       </p:sp>
       <p:sp>
         <p:nvSpPr>
-          <p:cNvPr id="20" name="Text 18"/>
+          <p:cNvPr id="26" name="Text 24"/>
           <p:cNvSpPr/>
           <p:nvPr/>
         </p:nvSpPr>
@@ -24663,7 +25343,7 @@
       </p:sp>
       <p:sp>
         <p:nvSpPr>
-          <p:cNvPr id="21" name="Shape 19"/>
+          <p:cNvPr id="27" name="Shape 25"/>
           <p:cNvSpPr/>
           <p:nvPr/>
         </p:nvSpPr>
@@ -24690,7 +25370,7 @@
       </p:sp>
       <p:sp>
         <p:nvSpPr>
-          <p:cNvPr id="22" name="Text 20"/>
+          <p:cNvPr id="28" name="Text 26"/>
           <p:cNvSpPr/>
           <p:nvPr/>
         </p:nvSpPr>
@@ -24729,7 +25409,7 @@
       </p:sp>
       <p:sp>
         <p:nvSpPr>
-          <p:cNvPr id="23" name="Shape 21"/>
+          <p:cNvPr id="29" name="Shape 27"/>
           <p:cNvSpPr/>
           <p:nvPr/>
         </p:nvSpPr>
@@ -24756,7 +25436,7 @@
       </p:sp>
       <p:sp>
         <p:nvSpPr>
-          <p:cNvPr id="24" name="Text 22"/>
+          <p:cNvPr id="30" name="Text 28"/>
           <p:cNvSpPr/>
           <p:nvPr/>
         </p:nvSpPr>
@@ -24795,7 +25475,7 @@
       </p:sp>
       <p:sp>
         <p:nvSpPr>
-          <p:cNvPr id="25" name="Shape 23"/>
+          <p:cNvPr id="31" name="Shape 29"/>
           <p:cNvSpPr/>
           <p:nvPr/>
         </p:nvSpPr>
@@ -24822,7 +25502,7 @@
       </p:sp>
       <p:sp>
         <p:nvSpPr>
-          <p:cNvPr id="26" name="Text 24"/>
+          <p:cNvPr id="32" name="Text 30"/>
           <p:cNvSpPr/>
           <p:nvPr/>
         </p:nvSpPr>
@@ -25145,7 +25825,7 @@
                 <a:ea typeface="Calibri" pitchFamily="34" charset="-122"/>
                 <a:cs typeface="Calibri" pitchFamily="34" charset="-120"/>
               </a:rPr>
-              <a:t>Word Labs  •  wordlabs.app  •  Root: 'appear' = to come into sight</a:t>
+              <a:t>Word Labs  •  wordlabs.app  •  Root: 'appear' = come into view</a:t>
             </a:r>
             <a:endParaRPr lang="en-US" sz="800" dirty="0"/>
           </a:p>
@@ -25218,7 +25898,7 @@
                 <a:ea typeface="Trebuchet MS" pitchFamily="34" charset="-122"/>
                 <a:cs typeface="Trebuchet MS" pitchFamily="34" charset="-120"/>
               </a:rPr>
-              <a:t>We are learning that the root 'appear' means 'to come into sight'.</a:t>
+              <a:t>We are learning that the root 'appear' means 'come into view'.</a:t>
             </a:r>
             <a:endParaRPr lang="en-US" sz="2000" dirty="0"/>
           </a:p>
@@ -25864,7 +26544,7 @@
                 <a:ea typeface="Calibri" pitchFamily="34" charset="-122"/>
                 <a:cs typeface="Calibri" pitchFamily="34" charset="-120"/>
               </a:rPr>
-              <a:t>Word Labs  •  wordlabs.app  •  Root: 'appear' = to come into sight</a:t>
+              <a:t>Word Labs  •  wordlabs.app  •  Root: 'appear' = come into view</a:t>
             </a:r>
             <a:endParaRPr lang="en-US" sz="800" dirty="0"/>
           </a:p>
@@ -26003,7 +26683,7 @@
                 <a:ea typeface="Trebuchet MS" pitchFamily="34" charset="-122"/>
                 <a:cs typeface="Trebuchet MS" pitchFamily="34" charset="-120"/>
               </a:rPr>
-              <a:t>appear</a:t>
+              <a:t>appearances</a:t>
             </a:r>
             <a:endParaRPr lang="en-US" sz="2800" dirty="0"/>
           </a:p>
@@ -26083,7 +26763,7 @@
         </p:nvSpPr>
         <p:spPr>
           <a:xfrm>
-            <a:off x="4370832" y="2258568"/>
+            <a:off x="2221992" y="2258568"/>
             <a:ext cx="1828800" cy="292608"/>
           </a:xfrm>
           <a:prstGeom prst="rect">
@@ -26117,7 +26797,7 @@
         </p:nvSpPr>
         <p:spPr>
           <a:xfrm>
-            <a:off x="4370832" y="2258568"/>
+            <a:off x="2221992" y="2258568"/>
             <a:ext cx="1828800" cy="292608"/>
           </a:xfrm>
           <a:prstGeom prst="rect">
@@ -26156,7 +26836,7 @@
         </p:nvSpPr>
         <p:spPr>
           <a:xfrm>
-            <a:off x="4370832" y="2569464"/>
+            <a:off x="2221992" y="2569464"/>
             <a:ext cx="1828800" cy="201168"/>
           </a:xfrm>
           <a:prstGeom prst="rect">
@@ -26181,7 +26861,7 @@
                 <a:ea typeface="Calibri" pitchFamily="34" charset="-122"/>
                 <a:cs typeface="Calibri" pitchFamily="34" charset="-120"/>
               </a:rPr>
-              <a:t>to come into sight</a:t>
+              <a:t>come into view</a:t>
             </a:r>
             <a:endParaRPr lang="en-US" sz="850" dirty="0"/>
           </a:p>
@@ -26190,6 +26870,230 @@
       <p:sp>
         <p:nvSpPr>
           <p:cNvPr id="19" name="Shape 17"/>
+          <p:cNvSpPr/>
+          <p:nvPr/>
+        </p:nvSpPr>
+        <p:spPr>
+          <a:xfrm>
+            <a:off x="4370832" y="2258568"/>
+            <a:ext cx="1828800" cy="292608"/>
+          </a:xfrm>
+          <a:prstGeom prst="rect">
+            <a:avLst>
+              <a:gd name="adj" fmla="val 25000"/>
+            </a:avLst>
+          </a:prstGeom>
+          <a:solidFill>
+            <a:srgbClr val="FCE7F3"/>
+          </a:solidFill>
+          <a:ln w="19050">
+            <a:solidFill>
+              <a:srgbClr val="DB2777"/>
+            </a:solidFill>
+            <a:prstDash val="solid"/>
+          </a:ln>
+          <a:effectLst>
+            <a:outerShdw sx="100000" sy="100000" kx="0" ky="0" algn="bl" rotWithShape="0" blurRad="101600" dist="38100" dir="8100000">
+              <a:srgbClr val="000000">
+                <a:alpha val="12000"/>
+              </a:srgbClr>
+            </a:outerShdw>
+          </a:effectLst>
+        </p:spPr>
+      </p:sp>
+      <p:sp>
+        <p:nvSpPr>
+          <p:cNvPr id="20" name="Text 18"/>
+          <p:cNvSpPr/>
+          <p:nvPr/>
+        </p:nvSpPr>
+        <p:spPr>
+          <a:xfrm>
+            <a:off x="4370832" y="2258568"/>
+            <a:ext cx="1828800" cy="292608"/>
+          </a:xfrm>
+          <a:prstGeom prst="rect">
+            <a:avLst/>
+          </a:prstGeom>
+          <a:noFill/>
+          <a:ln/>
+        </p:spPr>
+        <p:txBody>
+          <a:bodyPr wrap="square" lIns="0" tIns="0" rIns="0" bIns="0" rtlCol="0" anchor="ctr"/>
+          <a:lstStyle/>
+          <a:p>
+            <a:pPr algn="ctr" indent="0" marL="0">
+              <a:buNone/>
+            </a:pPr>
+            <a:r>
+              <a:rPr lang="en-US" sz="1300" b="1" dirty="0">
+                <a:solidFill>
+                  <a:srgbClr val="9D174D"/>
+                </a:solidFill>
+                <a:latin typeface="Trebuchet MS" pitchFamily="34" charset="0"/>
+                <a:ea typeface="Trebuchet MS" pitchFamily="34" charset="-122"/>
+                <a:cs typeface="Trebuchet MS" pitchFamily="34" charset="-120"/>
+              </a:rPr>
+              <a:t>ance</a:t>
+            </a:r>
+            <a:endParaRPr lang="en-US" sz="1300" dirty="0"/>
+          </a:p>
+        </p:txBody>
+      </p:sp>
+      <p:sp>
+        <p:nvSpPr>
+          <p:cNvPr id="21" name="Text 19"/>
+          <p:cNvSpPr/>
+          <p:nvPr/>
+        </p:nvSpPr>
+        <p:spPr>
+          <a:xfrm>
+            <a:off x="4370832" y="2569464"/>
+            <a:ext cx="1828800" cy="201168"/>
+          </a:xfrm>
+          <a:prstGeom prst="rect">
+            <a:avLst/>
+          </a:prstGeom>
+          <a:noFill/>
+          <a:ln/>
+        </p:spPr>
+        <p:txBody>
+          <a:bodyPr wrap="square" lIns="0" tIns="0" rIns="0" bIns="0" rtlCol="0" anchor="t"/>
+          <a:lstStyle/>
+          <a:p>
+            <a:pPr algn="ctr" indent="0" marL="0">
+              <a:buNone/>
+            </a:pPr>
+            <a:r>
+              <a:rPr lang="en-US" sz="850" dirty="0">
+                <a:solidFill>
+                  <a:srgbClr val="475569"/>
+                </a:solidFill>
+                <a:latin typeface="Calibri" pitchFamily="34" charset="0"/>
+                <a:ea typeface="Calibri" pitchFamily="34" charset="-122"/>
+                <a:cs typeface="Calibri" pitchFamily="34" charset="-120"/>
+              </a:rPr>
+              <a:t>state of</a:t>
+            </a:r>
+            <a:endParaRPr lang="en-US" sz="850" dirty="0"/>
+          </a:p>
+        </p:txBody>
+      </p:sp>
+      <p:sp>
+        <p:nvSpPr>
+          <p:cNvPr id="22" name="Shape 20"/>
+          <p:cNvSpPr/>
+          <p:nvPr/>
+        </p:nvSpPr>
+        <p:spPr>
+          <a:xfrm>
+            <a:off x="6519672" y="2258568"/>
+            <a:ext cx="1828800" cy="292608"/>
+          </a:xfrm>
+          <a:prstGeom prst="rect">
+            <a:avLst>
+              <a:gd name="adj" fmla="val 25000"/>
+            </a:avLst>
+          </a:prstGeom>
+          <a:solidFill>
+            <a:srgbClr val="FCE7F3"/>
+          </a:solidFill>
+          <a:ln w="19050">
+            <a:solidFill>
+              <a:srgbClr val="DB2777"/>
+            </a:solidFill>
+            <a:prstDash val="solid"/>
+          </a:ln>
+          <a:effectLst>
+            <a:outerShdw sx="100000" sy="100000" kx="0" ky="0" algn="bl" rotWithShape="0" blurRad="101600" dist="38100" dir="8100000">
+              <a:srgbClr val="000000">
+                <a:alpha val="12000"/>
+              </a:srgbClr>
+            </a:outerShdw>
+          </a:effectLst>
+        </p:spPr>
+      </p:sp>
+      <p:sp>
+        <p:nvSpPr>
+          <p:cNvPr id="23" name="Text 21"/>
+          <p:cNvSpPr/>
+          <p:nvPr/>
+        </p:nvSpPr>
+        <p:spPr>
+          <a:xfrm>
+            <a:off x="6519672" y="2258568"/>
+            <a:ext cx="1828800" cy="292608"/>
+          </a:xfrm>
+          <a:prstGeom prst="rect">
+            <a:avLst/>
+          </a:prstGeom>
+          <a:noFill/>
+          <a:ln/>
+        </p:spPr>
+        <p:txBody>
+          <a:bodyPr wrap="square" lIns="0" tIns="0" rIns="0" bIns="0" rtlCol="0" anchor="ctr"/>
+          <a:lstStyle/>
+          <a:p>
+            <a:pPr algn="ctr" indent="0" marL="0">
+              <a:buNone/>
+            </a:pPr>
+            <a:r>
+              <a:rPr lang="en-US" sz="1300" b="1" dirty="0">
+                <a:solidFill>
+                  <a:srgbClr val="9D174D"/>
+                </a:solidFill>
+                <a:latin typeface="Trebuchet MS" pitchFamily="34" charset="0"/>
+                <a:ea typeface="Trebuchet MS" pitchFamily="34" charset="-122"/>
+                <a:cs typeface="Trebuchet MS" pitchFamily="34" charset="-120"/>
+              </a:rPr>
+              <a:t>s</a:t>
+            </a:r>
+            <a:endParaRPr lang="en-US" sz="1300" dirty="0"/>
+          </a:p>
+        </p:txBody>
+      </p:sp>
+      <p:sp>
+        <p:nvSpPr>
+          <p:cNvPr id="24" name="Text 22"/>
+          <p:cNvSpPr/>
+          <p:nvPr/>
+        </p:nvSpPr>
+        <p:spPr>
+          <a:xfrm>
+            <a:off x="6519672" y="2569464"/>
+            <a:ext cx="1828800" cy="201168"/>
+          </a:xfrm>
+          <a:prstGeom prst="rect">
+            <a:avLst/>
+          </a:prstGeom>
+          <a:noFill/>
+          <a:ln/>
+        </p:spPr>
+        <p:txBody>
+          <a:bodyPr wrap="square" lIns="0" tIns="0" rIns="0" bIns="0" rtlCol="0" anchor="t"/>
+          <a:lstStyle/>
+          <a:p>
+            <a:pPr algn="ctr" indent="0" marL="0">
+              <a:buNone/>
+            </a:pPr>
+            <a:r>
+              <a:rPr lang="en-US" sz="850" dirty="0">
+                <a:solidFill>
+                  <a:srgbClr val="475569"/>
+                </a:solidFill>
+                <a:latin typeface="Calibri" pitchFamily="34" charset="0"/>
+                <a:ea typeface="Calibri" pitchFamily="34" charset="-122"/>
+                <a:cs typeface="Calibri" pitchFamily="34" charset="-120"/>
+              </a:rPr>
+              <a:t>plural or present tense</a:t>
+            </a:r>
+            <a:endParaRPr lang="en-US" sz="850" dirty="0"/>
+          </a:p>
+        </p:txBody>
+      </p:sp>
+      <p:sp>
+        <p:nvSpPr>
+          <p:cNvPr id="25" name="Shape 23"/>
           <p:cNvSpPr/>
           <p:nvPr/>
         </p:nvSpPr>
@@ -26216,7 +27120,7 @@
       </p:sp>
       <p:sp>
         <p:nvSpPr>
-          <p:cNvPr id="20" name="Text 18"/>
+          <p:cNvPr id="26" name="Text 24"/>
           <p:cNvSpPr/>
           <p:nvPr/>
         </p:nvSpPr>
@@ -26255,7 +27159,7 @@
       </p:sp>
       <p:sp>
         <p:nvSpPr>
-          <p:cNvPr id="21" name="Shape 19"/>
+          <p:cNvPr id="27" name="Shape 25"/>
           <p:cNvSpPr/>
           <p:nvPr/>
         </p:nvSpPr>
@@ -26282,13 +27186,13 @@
       </p:sp>
       <p:sp>
         <p:nvSpPr>
-          <p:cNvPr id="22" name="Shape 20"/>
-          <p:cNvSpPr/>
-          <p:nvPr/>
-        </p:nvSpPr>
-        <p:spPr>
-          <a:xfrm>
-            <a:off x="2999232" y="3364992"/>
+          <p:cNvPr id="28" name="Shape 26"/>
+          <p:cNvSpPr/>
+          <p:nvPr/>
+        </p:nvSpPr>
+        <p:spPr>
+          <a:xfrm>
+            <a:off x="2313432" y="3364992"/>
             <a:ext cx="1645920" cy="475488"/>
           </a:xfrm>
           <a:prstGeom prst="rect">
@@ -26309,13 +27213,13 @@
       </p:sp>
       <p:sp>
         <p:nvSpPr>
-          <p:cNvPr id="23" name="Text 21"/>
-          <p:cNvSpPr/>
-          <p:nvPr/>
-        </p:nvSpPr>
-        <p:spPr>
-          <a:xfrm>
-            <a:off x="2999232" y="3364992"/>
+          <p:cNvPr id="29" name="Text 27"/>
+          <p:cNvSpPr/>
+          <p:nvPr/>
+        </p:nvSpPr>
+        <p:spPr>
+          <a:xfrm>
+            <a:off x="2313432" y="3364992"/>
             <a:ext cx="1645920" cy="475488"/>
           </a:xfrm>
           <a:prstGeom prst="rect">
@@ -26348,14 +27252,14 @@
       </p:sp>
       <p:sp>
         <p:nvSpPr>
-          <p:cNvPr id="24" name="Text 22"/>
-          <p:cNvSpPr/>
-          <p:nvPr/>
-        </p:nvSpPr>
-        <p:spPr>
-          <a:xfrm>
-            <a:off x="4645152" y="3364992"/>
-            <a:ext cx="1097280" cy="475488"/>
+          <p:cNvPr id="30" name="Text 28"/>
+          <p:cNvSpPr/>
+          <p:nvPr/>
+        </p:nvSpPr>
+        <p:spPr>
+          <a:xfrm>
+            <a:off x="3959352" y="3364992"/>
+            <a:ext cx="411480" cy="475488"/>
           </a:xfrm>
           <a:prstGeom prst="rect">
             <a:avLst/>
@@ -26387,13 +27291,13 @@
       </p:sp>
       <p:sp>
         <p:nvSpPr>
-          <p:cNvPr id="25" name="Shape 23"/>
-          <p:cNvSpPr/>
-          <p:nvPr/>
-        </p:nvSpPr>
-        <p:spPr>
-          <a:xfrm>
-            <a:off x="5742432" y="3364992"/>
+          <p:cNvPr id="31" name="Shape 29"/>
+          <p:cNvSpPr/>
+          <p:nvPr/>
+        </p:nvSpPr>
+        <p:spPr>
+          <a:xfrm>
+            <a:off x="4370832" y="3364992"/>
             <a:ext cx="1645920" cy="475488"/>
           </a:xfrm>
           <a:prstGeom prst="rect">
@@ -26414,13 +27318,13 @@
       </p:sp>
       <p:sp>
         <p:nvSpPr>
-          <p:cNvPr id="26" name="Text 24"/>
-          <p:cNvSpPr/>
-          <p:nvPr/>
-        </p:nvSpPr>
-        <p:spPr>
-          <a:xfrm>
-            <a:off x="5742432" y="3364992"/>
+          <p:cNvPr id="32" name="Text 30"/>
+          <p:cNvSpPr/>
+          <p:nvPr/>
+        </p:nvSpPr>
+        <p:spPr>
+          <a:xfrm>
+            <a:off x="4370832" y="3364992"/>
             <a:ext cx="1645920" cy="475488"/>
           </a:xfrm>
           <a:prstGeom prst="rect">
@@ -26453,7 +27357,112 @@
       </p:sp>
       <p:sp>
         <p:nvSpPr>
-          <p:cNvPr id="27" name="Shape 25"/>
+          <p:cNvPr id="33" name="Text 31"/>
+          <p:cNvSpPr/>
+          <p:nvPr/>
+        </p:nvSpPr>
+        <p:spPr>
+          <a:xfrm>
+            <a:off x="6016752" y="3364992"/>
+            <a:ext cx="411480" cy="475488"/>
+          </a:xfrm>
+          <a:prstGeom prst="rect">
+            <a:avLst/>
+          </a:prstGeom>
+          <a:noFill/>
+          <a:ln/>
+        </p:spPr>
+        <p:txBody>
+          <a:bodyPr wrap="square" lIns="0" tIns="0" rIns="0" bIns="0" rtlCol="0" anchor="ctr"/>
+          <a:lstStyle/>
+          <a:p>
+            <a:pPr algn="ctr" indent="0" marL="0">
+              <a:buNone/>
+            </a:pPr>
+            <a:r>
+              <a:rPr lang="en-US" sz="1600" b="1" dirty="0">
+                <a:solidFill>
+                  <a:srgbClr val="0D9488"/>
+                </a:solidFill>
+                <a:latin typeface="Trebuchet MS" pitchFamily="34" charset="0"/>
+                <a:ea typeface="Trebuchet MS" pitchFamily="34" charset="-122"/>
+                <a:cs typeface="Trebuchet MS" pitchFamily="34" charset="-120"/>
+              </a:rPr>
+              <a:t>·</a:t>
+            </a:r>
+            <a:endParaRPr lang="en-US" sz="1600" dirty="0"/>
+          </a:p>
+        </p:txBody>
+      </p:sp>
+      <p:sp>
+        <p:nvSpPr>
+          <p:cNvPr id="34" name="Shape 32"/>
+          <p:cNvSpPr/>
+          <p:nvPr/>
+        </p:nvSpPr>
+        <p:spPr>
+          <a:xfrm>
+            <a:off x="6428232" y="3364992"/>
+            <a:ext cx="1645920" cy="475488"/>
+          </a:xfrm>
+          <a:prstGeom prst="rect">
+            <a:avLst>
+              <a:gd name="adj" fmla="val 9615"/>
+            </a:avLst>
+          </a:prstGeom>
+          <a:solidFill>
+            <a:srgbClr val="FFFFFF"/>
+          </a:solidFill>
+          <a:ln w="12700">
+            <a:solidFill>
+              <a:srgbClr val="0D9488"/>
+            </a:solidFill>
+            <a:prstDash val="solid"/>
+          </a:ln>
+        </p:spPr>
+      </p:sp>
+      <p:sp>
+        <p:nvSpPr>
+          <p:cNvPr id="35" name="Text 33"/>
+          <p:cNvSpPr/>
+          <p:nvPr/>
+        </p:nvSpPr>
+        <p:spPr>
+          <a:xfrm>
+            <a:off x="6428232" y="3364992"/>
+            <a:ext cx="1645920" cy="475488"/>
+          </a:xfrm>
+          <a:prstGeom prst="rect">
+            <a:avLst/>
+          </a:prstGeom>
+          <a:noFill/>
+          <a:ln/>
+        </p:spPr>
+        <p:txBody>
+          <a:bodyPr wrap="square" lIns="0" tIns="0" rIns="0" bIns="0" rtlCol="0" anchor="ctr"/>
+          <a:lstStyle/>
+          <a:p>
+            <a:pPr algn="ctr" indent="0" marL="0">
+              <a:buNone/>
+            </a:pPr>
+            <a:r>
+              <a:rPr lang="en-US" sz="1400" b="1" dirty="0">
+                <a:solidFill>
+                  <a:srgbClr val="0D9488"/>
+                </a:solidFill>
+                <a:latin typeface="Trebuchet MS" pitchFamily="34" charset="0"/>
+                <a:ea typeface="Trebuchet MS" pitchFamily="34" charset="-122"/>
+                <a:cs typeface="Trebuchet MS" pitchFamily="34" charset="-120"/>
+              </a:rPr>
+              <a:t>ances</a:t>
+            </a:r>
+            <a:endParaRPr lang="en-US" sz="1400" dirty="0"/>
+          </a:p>
+        </p:txBody>
+      </p:sp>
+      <p:sp>
+        <p:nvSpPr>
+          <p:cNvPr id="36" name="Shape 34"/>
           <p:cNvSpPr/>
           <p:nvPr/>
         </p:nvSpPr>
@@ -26480,7 +27489,7 @@
       </p:sp>
       <p:sp>
         <p:nvSpPr>
-          <p:cNvPr id="28" name="Text 26"/>
+          <p:cNvPr id="37" name="Text 35"/>
           <p:cNvSpPr/>
           <p:nvPr/>
         </p:nvSpPr>
@@ -26519,7 +27528,7 @@
       </p:sp>
       <p:sp>
         <p:nvSpPr>
-          <p:cNvPr id="29" name="Shape 27"/>
+          <p:cNvPr id="38" name="Shape 36"/>
           <p:cNvSpPr/>
           <p:nvPr/>
         </p:nvSpPr>
@@ -26546,7 +27555,7 @@
       </p:sp>
       <p:sp>
         <p:nvSpPr>
-          <p:cNvPr id="30" name="Text 28"/>
+          <p:cNvPr id="39" name="Text 37"/>
           <p:cNvSpPr/>
           <p:nvPr/>
         </p:nvSpPr>
@@ -26869,7 +27878,7 @@
                 <a:ea typeface="Calibri" pitchFamily="34" charset="-122"/>
                 <a:cs typeface="Calibri" pitchFamily="34" charset="-120"/>
               </a:rPr>
-              <a:t>Word Labs  •  wordlabs.app  •  Root: 'appear' = to come into sight</a:t>
+              <a:t>Word Labs  •  wordlabs.app  •  Root: 'appear' = come into view</a:t>
             </a:r>
             <a:endParaRPr lang="en-US" sz="800" dirty="0"/>
           </a:p>
@@ -27008,7 +28017,7 @@
                 <a:ea typeface="Trebuchet MS" pitchFamily="34" charset="-122"/>
                 <a:cs typeface="Trebuchet MS" pitchFamily="34" charset="-120"/>
               </a:rPr>
-              <a:t>appear</a:t>
+              <a:t>appearances</a:t>
             </a:r>
             <a:endParaRPr lang="en-US" sz="2800" dirty="0"/>
           </a:p>
@@ -27088,7 +28097,7 @@
         </p:nvSpPr>
         <p:spPr>
           <a:xfrm>
-            <a:off x="4370832" y="2258568"/>
+            <a:off x="2221992" y="2258568"/>
             <a:ext cx="1828800" cy="292608"/>
           </a:xfrm>
           <a:prstGeom prst="rect">
@@ -27122,7 +28131,7 @@
         </p:nvSpPr>
         <p:spPr>
           <a:xfrm>
-            <a:off x="4370832" y="2258568"/>
+            <a:off x="2221992" y="2258568"/>
             <a:ext cx="1828800" cy="292608"/>
           </a:xfrm>
           <a:prstGeom prst="rect">
@@ -27161,7 +28170,7 @@
         </p:nvSpPr>
         <p:spPr>
           <a:xfrm>
-            <a:off x="4370832" y="2569464"/>
+            <a:off x="2221992" y="2569464"/>
             <a:ext cx="1828800" cy="201168"/>
           </a:xfrm>
           <a:prstGeom prst="rect">
@@ -27186,7 +28195,7 @@
                 <a:ea typeface="Calibri" pitchFamily="34" charset="-122"/>
                 <a:cs typeface="Calibri" pitchFamily="34" charset="-120"/>
               </a:rPr>
-              <a:t>to come into sight</a:t>
+              <a:t>come into view</a:t>
             </a:r>
             <a:endParaRPr lang="en-US" sz="850" dirty="0"/>
           </a:p>
@@ -27195,6 +28204,230 @@
       <p:sp>
         <p:nvSpPr>
           <p:cNvPr id="19" name="Shape 17"/>
+          <p:cNvSpPr/>
+          <p:nvPr/>
+        </p:nvSpPr>
+        <p:spPr>
+          <a:xfrm>
+            <a:off x="4370832" y="2258568"/>
+            <a:ext cx="1828800" cy="292608"/>
+          </a:xfrm>
+          <a:prstGeom prst="rect">
+            <a:avLst>
+              <a:gd name="adj" fmla="val 25000"/>
+            </a:avLst>
+          </a:prstGeom>
+          <a:solidFill>
+            <a:srgbClr val="FCE7F3"/>
+          </a:solidFill>
+          <a:ln w="19050">
+            <a:solidFill>
+              <a:srgbClr val="DB2777"/>
+            </a:solidFill>
+            <a:prstDash val="solid"/>
+          </a:ln>
+          <a:effectLst>
+            <a:outerShdw sx="100000" sy="100000" kx="0" ky="0" algn="bl" rotWithShape="0" blurRad="101600" dist="38100" dir="8100000">
+              <a:srgbClr val="000000">
+                <a:alpha val="12000"/>
+              </a:srgbClr>
+            </a:outerShdw>
+          </a:effectLst>
+        </p:spPr>
+      </p:sp>
+      <p:sp>
+        <p:nvSpPr>
+          <p:cNvPr id="20" name="Text 18"/>
+          <p:cNvSpPr/>
+          <p:nvPr/>
+        </p:nvSpPr>
+        <p:spPr>
+          <a:xfrm>
+            <a:off x="4370832" y="2258568"/>
+            <a:ext cx="1828800" cy="292608"/>
+          </a:xfrm>
+          <a:prstGeom prst="rect">
+            <a:avLst/>
+          </a:prstGeom>
+          <a:noFill/>
+          <a:ln/>
+        </p:spPr>
+        <p:txBody>
+          <a:bodyPr wrap="square" lIns="0" tIns="0" rIns="0" bIns="0" rtlCol="0" anchor="ctr"/>
+          <a:lstStyle/>
+          <a:p>
+            <a:pPr algn="ctr" indent="0" marL="0">
+              <a:buNone/>
+            </a:pPr>
+            <a:r>
+              <a:rPr lang="en-US" sz="1300" b="1" dirty="0">
+                <a:solidFill>
+                  <a:srgbClr val="9D174D"/>
+                </a:solidFill>
+                <a:latin typeface="Trebuchet MS" pitchFamily="34" charset="0"/>
+                <a:ea typeface="Trebuchet MS" pitchFamily="34" charset="-122"/>
+                <a:cs typeface="Trebuchet MS" pitchFamily="34" charset="-120"/>
+              </a:rPr>
+              <a:t>ance</a:t>
+            </a:r>
+            <a:endParaRPr lang="en-US" sz="1300" dirty="0"/>
+          </a:p>
+        </p:txBody>
+      </p:sp>
+      <p:sp>
+        <p:nvSpPr>
+          <p:cNvPr id="21" name="Text 19"/>
+          <p:cNvSpPr/>
+          <p:nvPr/>
+        </p:nvSpPr>
+        <p:spPr>
+          <a:xfrm>
+            <a:off x="4370832" y="2569464"/>
+            <a:ext cx="1828800" cy="201168"/>
+          </a:xfrm>
+          <a:prstGeom prst="rect">
+            <a:avLst/>
+          </a:prstGeom>
+          <a:noFill/>
+          <a:ln/>
+        </p:spPr>
+        <p:txBody>
+          <a:bodyPr wrap="square" lIns="0" tIns="0" rIns="0" bIns="0" rtlCol="0" anchor="t"/>
+          <a:lstStyle/>
+          <a:p>
+            <a:pPr algn="ctr" indent="0" marL="0">
+              <a:buNone/>
+            </a:pPr>
+            <a:r>
+              <a:rPr lang="en-US" sz="850" dirty="0">
+                <a:solidFill>
+                  <a:srgbClr val="475569"/>
+                </a:solidFill>
+                <a:latin typeface="Calibri" pitchFamily="34" charset="0"/>
+                <a:ea typeface="Calibri" pitchFamily="34" charset="-122"/>
+                <a:cs typeface="Calibri" pitchFamily="34" charset="-120"/>
+              </a:rPr>
+              <a:t>state of</a:t>
+            </a:r>
+            <a:endParaRPr lang="en-US" sz="850" dirty="0"/>
+          </a:p>
+        </p:txBody>
+      </p:sp>
+      <p:sp>
+        <p:nvSpPr>
+          <p:cNvPr id="22" name="Shape 20"/>
+          <p:cNvSpPr/>
+          <p:nvPr/>
+        </p:nvSpPr>
+        <p:spPr>
+          <a:xfrm>
+            <a:off x="6519672" y="2258568"/>
+            <a:ext cx="1828800" cy="292608"/>
+          </a:xfrm>
+          <a:prstGeom prst="rect">
+            <a:avLst>
+              <a:gd name="adj" fmla="val 25000"/>
+            </a:avLst>
+          </a:prstGeom>
+          <a:solidFill>
+            <a:srgbClr val="FCE7F3"/>
+          </a:solidFill>
+          <a:ln w="19050">
+            <a:solidFill>
+              <a:srgbClr val="DB2777"/>
+            </a:solidFill>
+            <a:prstDash val="solid"/>
+          </a:ln>
+          <a:effectLst>
+            <a:outerShdw sx="100000" sy="100000" kx="0" ky="0" algn="bl" rotWithShape="0" blurRad="101600" dist="38100" dir="8100000">
+              <a:srgbClr val="000000">
+                <a:alpha val="12000"/>
+              </a:srgbClr>
+            </a:outerShdw>
+          </a:effectLst>
+        </p:spPr>
+      </p:sp>
+      <p:sp>
+        <p:nvSpPr>
+          <p:cNvPr id="23" name="Text 21"/>
+          <p:cNvSpPr/>
+          <p:nvPr/>
+        </p:nvSpPr>
+        <p:spPr>
+          <a:xfrm>
+            <a:off x="6519672" y="2258568"/>
+            <a:ext cx="1828800" cy="292608"/>
+          </a:xfrm>
+          <a:prstGeom prst="rect">
+            <a:avLst/>
+          </a:prstGeom>
+          <a:noFill/>
+          <a:ln/>
+        </p:spPr>
+        <p:txBody>
+          <a:bodyPr wrap="square" lIns="0" tIns="0" rIns="0" bIns="0" rtlCol="0" anchor="ctr"/>
+          <a:lstStyle/>
+          <a:p>
+            <a:pPr algn="ctr" indent="0" marL="0">
+              <a:buNone/>
+            </a:pPr>
+            <a:r>
+              <a:rPr lang="en-US" sz="1300" b="1" dirty="0">
+                <a:solidFill>
+                  <a:srgbClr val="9D174D"/>
+                </a:solidFill>
+                <a:latin typeface="Trebuchet MS" pitchFamily="34" charset="0"/>
+                <a:ea typeface="Trebuchet MS" pitchFamily="34" charset="-122"/>
+                <a:cs typeface="Trebuchet MS" pitchFamily="34" charset="-120"/>
+              </a:rPr>
+              <a:t>s</a:t>
+            </a:r>
+            <a:endParaRPr lang="en-US" sz="1300" dirty="0"/>
+          </a:p>
+        </p:txBody>
+      </p:sp>
+      <p:sp>
+        <p:nvSpPr>
+          <p:cNvPr id="24" name="Text 22"/>
+          <p:cNvSpPr/>
+          <p:nvPr/>
+        </p:nvSpPr>
+        <p:spPr>
+          <a:xfrm>
+            <a:off x="6519672" y="2569464"/>
+            <a:ext cx="1828800" cy="201168"/>
+          </a:xfrm>
+          <a:prstGeom prst="rect">
+            <a:avLst/>
+          </a:prstGeom>
+          <a:noFill/>
+          <a:ln/>
+        </p:spPr>
+        <p:txBody>
+          <a:bodyPr wrap="square" lIns="0" tIns="0" rIns="0" bIns="0" rtlCol="0" anchor="t"/>
+          <a:lstStyle/>
+          <a:p>
+            <a:pPr algn="ctr" indent="0" marL="0">
+              <a:buNone/>
+            </a:pPr>
+            <a:r>
+              <a:rPr lang="en-US" sz="850" dirty="0">
+                <a:solidFill>
+                  <a:srgbClr val="475569"/>
+                </a:solidFill>
+                <a:latin typeface="Calibri" pitchFamily="34" charset="0"/>
+                <a:ea typeface="Calibri" pitchFamily="34" charset="-122"/>
+                <a:cs typeface="Calibri" pitchFamily="34" charset="-120"/>
+              </a:rPr>
+              <a:t>plural or present tense</a:t>
+            </a:r>
+            <a:endParaRPr lang="en-US" sz="850" dirty="0"/>
+          </a:p>
+        </p:txBody>
+      </p:sp>
+      <p:sp>
+        <p:nvSpPr>
+          <p:cNvPr id="25" name="Shape 23"/>
           <p:cNvSpPr/>
           <p:nvPr/>
         </p:nvSpPr>
@@ -27221,7 +28454,7 @@
       </p:sp>
       <p:sp>
         <p:nvSpPr>
-          <p:cNvPr id="20" name="Text 18"/>
+          <p:cNvPr id="26" name="Text 24"/>
           <p:cNvSpPr/>
           <p:nvPr/>
         </p:nvSpPr>
@@ -27260,7 +28493,7 @@
       </p:sp>
       <p:sp>
         <p:nvSpPr>
-          <p:cNvPr id="21" name="Shape 19"/>
+          <p:cNvPr id="27" name="Shape 25"/>
           <p:cNvSpPr/>
           <p:nvPr/>
         </p:nvSpPr>
@@ -27287,13 +28520,13 @@
       </p:sp>
       <p:sp>
         <p:nvSpPr>
-          <p:cNvPr id="22" name="Shape 20"/>
-          <p:cNvSpPr/>
-          <p:nvPr/>
-        </p:nvSpPr>
-        <p:spPr>
-          <a:xfrm>
-            <a:off x="2999232" y="3364992"/>
+          <p:cNvPr id="28" name="Shape 26"/>
+          <p:cNvSpPr/>
+          <p:nvPr/>
+        </p:nvSpPr>
+        <p:spPr>
+          <a:xfrm>
+            <a:off x="2313432" y="3364992"/>
             <a:ext cx="1645920" cy="475488"/>
           </a:xfrm>
           <a:prstGeom prst="rect">
@@ -27314,13 +28547,13 @@
       </p:sp>
       <p:sp>
         <p:nvSpPr>
-          <p:cNvPr id="23" name="Text 21"/>
-          <p:cNvSpPr/>
-          <p:nvPr/>
-        </p:nvSpPr>
-        <p:spPr>
-          <a:xfrm>
-            <a:off x="2999232" y="3364992"/>
+          <p:cNvPr id="29" name="Text 27"/>
+          <p:cNvSpPr/>
+          <p:nvPr/>
+        </p:nvSpPr>
+        <p:spPr>
+          <a:xfrm>
+            <a:off x="2313432" y="3364992"/>
             <a:ext cx="1645920" cy="475488"/>
           </a:xfrm>
           <a:prstGeom prst="rect">
@@ -27353,14 +28586,14 @@
       </p:sp>
       <p:sp>
         <p:nvSpPr>
-          <p:cNvPr id="24" name="Text 22"/>
-          <p:cNvSpPr/>
-          <p:nvPr/>
-        </p:nvSpPr>
-        <p:spPr>
-          <a:xfrm>
-            <a:off x="4645152" y="3364992"/>
-            <a:ext cx="1097280" cy="475488"/>
+          <p:cNvPr id="30" name="Text 28"/>
+          <p:cNvSpPr/>
+          <p:nvPr/>
+        </p:nvSpPr>
+        <p:spPr>
+          <a:xfrm>
+            <a:off x="3959352" y="3364992"/>
+            <a:ext cx="411480" cy="475488"/>
           </a:xfrm>
           <a:prstGeom prst="rect">
             <a:avLst/>
@@ -27392,13 +28625,13 @@
       </p:sp>
       <p:sp>
         <p:nvSpPr>
-          <p:cNvPr id="25" name="Shape 23"/>
-          <p:cNvSpPr/>
-          <p:nvPr/>
-        </p:nvSpPr>
-        <p:spPr>
-          <a:xfrm>
-            <a:off x="5742432" y="3364992"/>
+          <p:cNvPr id="31" name="Shape 29"/>
+          <p:cNvSpPr/>
+          <p:nvPr/>
+        </p:nvSpPr>
+        <p:spPr>
+          <a:xfrm>
+            <a:off x="4370832" y="3364992"/>
             <a:ext cx="1645920" cy="475488"/>
           </a:xfrm>
           <a:prstGeom prst="rect">
@@ -27419,13 +28652,13 @@
       </p:sp>
       <p:sp>
         <p:nvSpPr>
-          <p:cNvPr id="26" name="Text 24"/>
-          <p:cNvSpPr/>
-          <p:nvPr/>
-        </p:nvSpPr>
-        <p:spPr>
-          <a:xfrm>
-            <a:off x="5742432" y="3364992"/>
+          <p:cNvPr id="32" name="Text 30"/>
+          <p:cNvSpPr/>
+          <p:nvPr/>
+        </p:nvSpPr>
+        <p:spPr>
+          <a:xfrm>
+            <a:off x="4370832" y="3364992"/>
             <a:ext cx="1645920" cy="475488"/>
           </a:xfrm>
           <a:prstGeom prst="rect">
@@ -27458,7 +28691,112 @@
       </p:sp>
       <p:sp>
         <p:nvSpPr>
-          <p:cNvPr id="27" name="Shape 25"/>
+          <p:cNvPr id="33" name="Text 31"/>
+          <p:cNvSpPr/>
+          <p:nvPr/>
+        </p:nvSpPr>
+        <p:spPr>
+          <a:xfrm>
+            <a:off x="6016752" y="3364992"/>
+            <a:ext cx="411480" cy="475488"/>
+          </a:xfrm>
+          <a:prstGeom prst="rect">
+            <a:avLst/>
+          </a:prstGeom>
+          <a:noFill/>
+          <a:ln/>
+        </p:spPr>
+        <p:txBody>
+          <a:bodyPr wrap="square" lIns="0" tIns="0" rIns="0" bIns="0" rtlCol="0" anchor="ctr"/>
+          <a:lstStyle/>
+          <a:p>
+            <a:pPr algn="ctr" indent="0" marL="0">
+              <a:buNone/>
+            </a:pPr>
+            <a:r>
+              <a:rPr lang="en-US" sz="1600" b="1" dirty="0">
+                <a:solidFill>
+                  <a:srgbClr val="0D9488"/>
+                </a:solidFill>
+                <a:latin typeface="Trebuchet MS" pitchFamily="34" charset="0"/>
+                <a:ea typeface="Trebuchet MS" pitchFamily="34" charset="-122"/>
+                <a:cs typeface="Trebuchet MS" pitchFamily="34" charset="-120"/>
+              </a:rPr>
+              <a:t>·</a:t>
+            </a:r>
+            <a:endParaRPr lang="en-US" sz="1600" dirty="0"/>
+          </a:p>
+        </p:txBody>
+      </p:sp>
+      <p:sp>
+        <p:nvSpPr>
+          <p:cNvPr id="34" name="Shape 32"/>
+          <p:cNvSpPr/>
+          <p:nvPr/>
+        </p:nvSpPr>
+        <p:spPr>
+          <a:xfrm>
+            <a:off x="6428232" y="3364992"/>
+            <a:ext cx="1645920" cy="475488"/>
+          </a:xfrm>
+          <a:prstGeom prst="rect">
+            <a:avLst>
+              <a:gd name="adj" fmla="val 9615"/>
+            </a:avLst>
+          </a:prstGeom>
+          <a:solidFill>
+            <a:srgbClr val="FFFFFF"/>
+          </a:solidFill>
+          <a:ln w="12700">
+            <a:solidFill>
+              <a:srgbClr val="0D9488"/>
+            </a:solidFill>
+            <a:prstDash val="solid"/>
+          </a:ln>
+        </p:spPr>
+      </p:sp>
+      <p:sp>
+        <p:nvSpPr>
+          <p:cNvPr id="35" name="Text 33"/>
+          <p:cNvSpPr/>
+          <p:nvPr/>
+        </p:nvSpPr>
+        <p:spPr>
+          <a:xfrm>
+            <a:off x="6428232" y="3364992"/>
+            <a:ext cx="1645920" cy="475488"/>
+          </a:xfrm>
+          <a:prstGeom prst="rect">
+            <a:avLst/>
+          </a:prstGeom>
+          <a:noFill/>
+          <a:ln/>
+        </p:spPr>
+        <p:txBody>
+          <a:bodyPr wrap="square" lIns="0" tIns="0" rIns="0" bIns="0" rtlCol="0" anchor="ctr"/>
+          <a:lstStyle/>
+          <a:p>
+            <a:pPr algn="ctr" indent="0" marL="0">
+              <a:buNone/>
+            </a:pPr>
+            <a:r>
+              <a:rPr lang="en-US" sz="1400" b="1" dirty="0">
+                <a:solidFill>
+                  <a:srgbClr val="0D9488"/>
+                </a:solidFill>
+                <a:latin typeface="Trebuchet MS" pitchFamily="34" charset="0"/>
+                <a:ea typeface="Trebuchet MS" pitchFamily="34" charset="-122"/>
+                <a:cs typeface="Trebuchet MS" pitchFamily="34" charset="-120"/>
+              </a:rPr>
+              <a:t>ances</a:t>
+            </a:r>
+            <a:endParaRPr lang="en-US" sz="1400" dirty="0"/>
+          </a:p>
+        </p:txBody>
+      </p:sp>
+      <p:sp>
+        <p:nvSpPr>
+          <p:cNvPr id="36" name="Shape 34"/>
           <p:cNvSpPr/>
           <p:nvPr/>
         </p:nvSpPr>
@@ -27485,7 +28823,7 @@
       </p:sp>
       <p:sp>
         <p:nvSpPr>
-          <p:cNvPr id="28" name="Text 26"/>
+          <p:cNvPr id="37" name="Text 35"/>
           <p:cNvSpPr/>
           <p:nvPr/>
         </p:nvSpPr>
@@ -27524,7 +28862,7 @@
       </p:sp>
       <p:sp>
         <p:nvSpPr>
-          <p:cNvPr id="29" name="Shape 27"/>
+          <p:cNvPr id="38" name="Shape 36"/>
           <p:cNvSpPr/>
           <p:nvPr/>
         </p:nvSpPr>
@@ -27551,13 +28889,13 @@
       </p:sp>
       <p:sp>
         <p:nvSpPr>
-          <p:cNvPr id="30" name="Shape 28"/>
-          <p:cNvSpPr/>
-          <p:nvPr/>
-        </p:nvSpPr>
-        <p:spPr>
-          <a:xfrm>
-            <a:off x="3033522" y="4169664"/>
+          <p:cNvPr id="39" name="Shape 37"/>
+          <p:cNvSpPr/>
+          <p:nvPr/>
+        </p:nvSpPr>
+        <p:spPr>
+          <a:xfrm>
+            <a:off x="2023872" y="4169664"/>
             <a:ext cx="685800" cy="475488"/>
           </a:xfrm>
           <a:prstGeom prst="rect">
@@ -27578,13 +28916,13 @@
       </p:sp>
       <p:sp>
         <p:nvSpPr>
-          <p:cNvPr id="31" name="Text 29"/>
-          <p:cNvSpPr/>
-          <p:nvPr/>
-        </p:nvSpPr>
-        <p:spPr>
-          <a:xfrm>
-            <a:off x="3033522" y="4169664"/>
+          <p:cNvPr id="40" name="Text 38"/>
+          <p:cNvSpPr/>
+          <p:nvPr/>
+        </p:nvSpPr>
+        <p:spPr>
+          <a:xfrm>
+            <a:off x="2023872" y="4169664"/>
             <a:ext cx="685800" cy="475488"/>
           </a:xfrm>
           <a:prstGeom prst="rect">
@@ -27601,7 +28939,7 @@
               <a:buNone/>
             </a:pPr>
             <a:r>
-              <a:rPr lang="en-US" sz="1000" b="1" dirty="0">
+              <a:rPr lang="en-US" sz="900" b="1" dirty="0">
                 <a:solidFill>
                   <a:srgbClr val="9D174D"/>
                 </a:solidFill>
@@ -27611,19 +28949,19 @@
               </a:rPr>
               <a:t>a</a:t>
             </a:r>
-            <a:endParaRPr lang="en-US" sz="1000" dirty="0"/>
-          </a:p>
-        </p:txBody>
-      </p:sp>
-      <p:sp>
-        <p:nvSpPr>
-          <p:cNvPr id="32" name="Shape 30"/>
-          <p:cNvSpPr/>
-          <p:nvPr/>
-        </p:nvSpPr>
-        <p:spPr>
-          <a:xfrm>
-            <a:off x="4850892" y="4169664"/>
+            <a:endParaRPr lang="en-US" sz="900" dirty="0"/>
+          </a:p>
+        </p:txBody>
+      </p:sp>
+      <p:sp>
+        <p:nvSpPr>
+          <p:cNvPr id="41" name="Shape 39"/>
+          <p:cNvSpPr/>
+          <p:nvPr/>
+        </p:nvSpPr>
+        <p:spPr>
+          <a:xfrm>
+            <a:off x="2831592" y="4169664"/>
             <a:ext cx="685800" cy="475488"/>
           </a:xfrm>
           <a:prstGeom prst="rect">
@@ -27644,13 +28982,13 @@
       </p:sp>
       <p:sp>
         <p:nvSpPr>
-          <p:cNvPr id="33" name="Text 31"/>
-          <p:cNvSpPr/>
-          <p:nvPr/>
-        </p:nvSpPr>
-        <p:spPr>
-          <a:xfrm>
-            <a:off x="4850892" y="4169664"/>
+          <p:cNvPr id="42" name="Text 40"/>
+          <p:cNvSpPr/>
+          <p:nvPr/>
+        </p:nvSpPr>
+        <p:spPr>
+          <a:xfrm>
+            <a:off x="2831592" y="4169664"/>
             <a:ext cx="685800" cy="475488"/>
           </a:xfrm>
           <a:prstGeom prst="rect">
@@ -27667,7 +29005,7 @@
               <a:buNone/>
             </a:pPr>
             <a:r>
-              <a:rPr lang="en-US" sz="1000" b="1" dirty="0">
+              <a:rPr lang="en-US" sz="900" b="1" dirty="0">
                 <a:solidFill>
                   <a:srgbClr val="9D174D"/>
                 </a:solidFill>
@@ -27677,19 +29015,19 @@
               </a:rPr>
               <a:t>pp</a:t>
             </a:r>
-            <a:endParaRPr lang="en-US" sz="1000" dirty="0"/>
-          </a:p>
-        </p:txBody>
-      </p:sp>
-      <p:sp>
-        <p:nvSpPr>
-          <p:cNvPr id="34" name="Shape 32"/>
-          <p:cNvSpPr/>
-          <p:nvPr/>
-        </p:nvSpPr>
-        <p:spPr>
-          <a:xfrm>
-            <a:off x="6668262" y="4169664"/>
+            <a:endParaRPr lang="en-US" sz="900" dirty="0"/>
+          </a:p>
+        </p:txBody>
+      </p:sp>
+      <p:sp>
+        <p:nvSpPr>
+          <p:cNvPr id="43" name="Shape 41"/>
+          <p:cNvSpPr/>
+          <p:nvPr/>
+        </p:nvSpPr>
+        <p:spPr>
+          <a:xfrm>
+            <a:off x="3639312" y="4169664"/>
             <a:ext cx="685800" cy="475488"/>
           </a:xfrm>
           <a:prstGeom prst="rect">
@@ -27710,13 +29048,13 @@
       </p:sp>
       <p:sp>
         <p:nvSpPr>
-          <p:cNvPr id="35" name="Text 33"/>
-          <p:cNvSpPr/>
-          <p:nvPr/>
-        </p:nvSpPr>
-        <p:spPr>
-          <a:xfrm>
-            <a:off x="6668262" y="4169664"/>
+          <p:cNvPr id="44" name="Text 42"/>
+          <p:cNvSpPr/>
+          <p:nvPr/>
+        </p:nvSpPr>
+        <p:spPr>
+          <a:xfrm>
+            <a:off x="3639312" y="4169664"/>
             <a:ext cx="685800" cy="475488"/>
           </a:xfrm>
           <a:prstGeom prst="rect">
@@ -27733,7 +29071,7 @@
               <a:buNone/>
             </a:pPr>
             <a:r>
-              <a:rPr lang="en-US" sz="1000" b="1" dirty="0">
+              <a:rPr lang="en-US" sz="900" b="1" dirty="0">
                 <a:solidFill>
                   <a:srgbClr val="9D174D"/>
                 </a:solidFill>
@@ -27743,7 +29081,337 @@
               </a:rPr>
               <a:t>ear</a:t>
             </a:r>
-            <a:endParaRPr lang="en-US" sz="1000" dirty="0"/>
+            <a:endParaRPr lang="en-US" sz="900" dirty="0"/>
+          </a:p>
+        </p:txBody>
+      </p:sp>
+      <p:sp>
+        <p:nvSpPr>
+          <p:cNvPr id="45" name="Shape 43"/>
+          <p:cNvSpPr/>
+          <p:nvPr/>
+        </p:nvSpPr>
+        <p:spPr>
+          <a:xfrm>
+            <a:off x="4447032" y="4169664"/>
+            <a:ext cx="685800" cy="475488"/>
+          </a:xfrm>
+          <a:prstGeom prst="rect">
+            <a:avLst>
+              <a:gd name="adj" fmla="val 7692"/>
+            </a:avLst>
+          </a:prstGeom>
+          <a:solidFill>
+            <a:srgbClr val="FFFFFF"/>
+          </a:solidFill>
+          <a:ln w="12700">
+            <a:solidFill>
+              <a:srgbClr val="DB2777"/>
+            </a:solidFill>
+            <a:prstDash val="solid"/>
+          </a:ln>
+        </p:spPr>
+      </p:sp>
+      <p:sp>
+        <p:nvSpPr>
+          <p:cNvPr id="46" name="Text 44"/>
+          <p:cNvSpPr/>
+          <p:nvPr/>
+        </p:nvSpPr>
+        <p:spPr>
+          <a:xfrm>
+            <a:off x="4447032" y="4169664"/>
+            <a:ext cx="685800" cy="475488"/>
+          </a:xfrm>
+          <a:prstGeom prst="rect">
+            <a:avLst/>
+          </a:prstGeom>
+          <a:noFill/>
+          <a:ln/>
+        </p:spPr>
+        <p:txBody>
+          <a:bodyPr wrap="square" lIns="0" tIns="0" rIns="0" bIns="0" rtlCol="0" anchor="ctr"/>
+          <a:lstStyle/>
+          <a:p>
+            <a:pPr algn="ctr" indent="0" marL="0">
+              <a:buNone/>
+            </a:pPr>
+            <a:r>
+              <a:rPr lang="en-US" sz="900" b="1" dirty="0">
+                <a:solidFill>
+                  <a:srgbClr val="9D174D"/>
+                </a:solidFill>
+                <a:latin typeface="Trebuchet MS" pitchFamily="34" charset="0"/>
+                <a:ea typeface="Trebuchet MS" pitchFamily="34" charset="-122"/>
+                <a:cs typeface="Trebuchet MS" pitchFamily="34" charset="-120"/>
+              </a:rPr>
+              <a:t>a</a:t>
+            </a:r>
+            <a:endParaRPr lang="en-US" sz="900" dirty="0"/>
+          </a:p>
+        </p:txBody>
+      </p:sp>
+      <p:sp>
+        <p:nvSpPr>
+          <p:cNvPr id="47" name="Shape 45"/>
+          <p:cNvSpPr/>
+          <p:nvPr/>
+        </p:nvSpPr>
+        <p:spPr>
+          <a:xfrm>
+            <a:off x="5254752" y="4169664"/>
+            <a:ext cx="685800" cy="475488"/>
+          </a:xfrm>
+          <a:prstGeom prst="rect">
+            <a:avLst>
+              <a:gd name="adj" fmla="val 7692"/>
+            </a:avLst>
+          </a:prstGeom>
+          <a:solidFill>
+            <a:srgbClr val="FFFFFF"/>
+          </a:solidFill>
+          <a:ln w="12700">
+            <a:solidFill>
+              <a:srgbClr val="DB2777"/>
+            </a:solidFill>
+            <a:prstDash val="solid"/>
+          </a:ln>
+        </p:spPr>
+      </p:sp>
+      <p:sp>
+        <p:nvSpPr>
+          <p:cNvPr id="48" name="Text 46"/>
+          <p:cNvSpPr/>
+          <p:nvPr/>
+        </p:nvSpPr>
+        <p:spPr>
+          <a:xfrm>
+            <a:off x="5254752" y="4169664"/>
+            <a:ext cx="685800" cy="475488"/>
+          </a:xfrm>
+          <a:prstGeom prst="rect">
+            <a:avLst/>
+          </a:prstGeom>
+          <a:noFill/>
+          <a:ln/>
+        </p:spPr>
+        <p:txBody>
+          <a:bodyPr wrap="square" lIns="0" tIns="0" rIns="0" bIns="0" rtlCol="0" anchor="ctr"/>
+          <a:lstStyle/>
+          <a:p>
+            <a:pPr algn="ctr" indent="0" marL="0">
+              <a:buNone/>
+            </a:pPr>
+            <a:r>
+              <a:rPr lang="en-US" sz="900" b="1" dirty="0">
+                <a:solidFill>
+                  <a:srgbClr val="9D174D"/>
+                </a:solidFill>
+                <a:latin typeface="Trebuchet MS" pitchFamily="34" charset="0"/>
+                <a:ea typeface="Trebuchet MS" pitchFamily="34" charset="-122"/>
+                <a:cs typeface="Trebuchet MS" pitchFamily="34" charset="-120"/>
+              </a:rPr>
+              <a:t>n</a:t>
+            </a:r>
+            <a:endParaRPr lang="en-US" sz="900" dirty="0"/>
+          </a:p>
+        </p:txBody>
+      </p:sp>
+      <p:sp>
+        <p:nvSpPr>
+          <p:cNvPr id="49" name="Shape 47"/>
+          <p:cNvSpPr/>
+          <p:nvPr/>
+        </p:nvSpPr>
+        <p:spPr>
+          <a:xfrm>
+            <a:off x="6062472" y="4169664"/>
+            <a:ext cx="685800" cy="475488"/>
+          </a:xfrm>
+          <a:prstGeom prst="rect">
+            <a:avLst>
+              <a:gd name="adj" fmla="val 7692"/>
+            </a:avLst>
+          </a:prstGeom>
+          <a:solidFill>
+            <a:srgbClr val="FFFFFF"/>
+          </a:solidFill>
+          <a:ln w="12700">
+            <a:solidFill>
+              <a:srgbClr val="DB2777"/>
+            </a:solidFill>
+            <a:prstDash val="solid"/>
+          </a:ln>
+        </p:spPr>
+      </p:sp>
+      <p:sp>
+        <p:nvSpPr>
+          <p:cNvPr id="50" name="Text 48"/>
+          <p:cNvSpPr/>
+          <p:nvPr/>
+        </p:nvSpPr>
+        <p:spPr>
+          <a:xfrm>
+            <a:off x="6062472" y="4169664"/>
+            <a:ext cx="685800" cy="475488"/>
+          </a:xfrm>
+          <a:prstGeom prst="rect">
+            <a:avLst/>
+          </a:prstGeom>
+          <a:noFill/>
+          <a:ln/>
+        </p:spPr>
+        <p:txBody>
+          <a:bodyPr wrap="square" lIns="0" tIns="0" rIns="0" bIns="0" rtlCol="0" anchor="ctr"/>
+          <a:lstStyle/>
+          <a:p>
+            <a:pPr algn="ctr" indent="0" marL="0">
+              <a:buNone/>
+            </a:pPr>
+            <a:r>
+              <a:rPr lang="en-US" sz="900" b="1" dirty="0">
+                <a:solidFill>
+                  <a:srgbClr val="9D174D"/>
+                </a:solidFill>
+                <a:latin typeface="Trebuchet MS" pitchFamily="34" charset="0"/>
+                <a:ea typeface="Trebuchet MS" pitchFamily="34" charset="-122"/>
+                <a:cs typeface="Trebuchet MS" pitchFamily="34" charset="-120"/>
+              </a:rPr>
+              <a:t>c</a:t>
+            </a:r>
+            <a:endParaRPr lang="en-US" sz="900" dirty="0"/>
+          </a:p>
+        </p:txBody>
+      </p:sp>
+      <p:sp>
+        <p:nvSpPr>
+          <p:cNvPr id="51" name="Shape 49"/>
+          <p:cNvSpPr/>
+          <p:nvPr/>
+        </p:nvSpPr>
+        <p:spPr>
+          <a:xfrm>
+            <a:off x="6870192" y="4169664"/>
+            <a:ext cx="685800" cy="475488"/>
+          </a:xfrm>
+          <a:prstGeom prst="rect">
+            <a:avLst>
+              <a:gd name="adj" fmla="val 7692"/>
+            </a:avLst>
+          </a:prstGeom>
+          <a:solidFill>
+            <a:srgbClr val="FFFFFF"/>
+          </a:solidFill>
+          <a:ln w="12700">
+            <a:solidFill>
+              <a:srgbClr val="DB2777"/>
+            </a:solidFill>
+            <a:prstDash val="solid"/>
+          </a:ln>
+        </p:spPr>
+      </p:sp>
+      <p:sp>
+        <p:nvSpPr>
+          <p:cNvPr id="52" name="Text 50"/>
+          <p:cNvSpPr/>
+          <p:nvPr/>
+        </p:nvSpPr>
+        <p:spPr>
+          <a:xfrm>
+            <a:off x="6870192" y="4169664"/>
+            <a:ext cx="685800" cy="475488"/>
+          </a:xfrm>
+          <a:prstGeom prst="rect">
+            <a:avLst/>
+          </a:prstGeom>
+          <a:noFill/>
+          <a:ln/>
+        </p:spPr>
+        <p:txBody>
+          <a:bodyPr wrap="square" lIns="0" tIns="0" rIns="0" bIns="0" rtlCol="0" anchor="ctr"/>
+          <a:lstStyle/>
+          <a:p>
+            <a:pPr algn="ctr" indent="0" marL="0">
+              <a:buNone/>
+            </a:pPr>
+            <a:r>
+              <a:rPr lang="en-US" sz="900" b="1" dirty="0">
+                <a:solidFill>
+                  <a:srgbClr val="9D174D"/>
+                </a:solidFill>
+                <a:latin typeface="Trebuchet MS" pitchFamily="34" charset="0"/>
+                <a:ea typeface="Trebuchet MS" pitchFamily="34" charset="-122"/>
+                <a:cs typeface="Trebuchet MS" pitchFamily="34" charset="-120"/>
+              </a:rPr>
+              <a:t>e</a:t>
+            </a:r>
+            <a:endParaRPr lang="en-US" sz="900" dirty="0"/>
+          </a:p>
+        </p:txBody>
+      </p:sp>
+      <p:sp>
+        <p:nvSpPr>
+          <p:cNvPr id="53" name="Shape 51"/>
+          <p:cNvSpPr/>
+          <p:nvPr/>
+        </p:nvSpPr>
+        <p:spPr>
+          <a:xfrm>
+            <a:off x="7677912" y="4169664"/>
+            <a:ext cx="685800" cy="475488"/>
+          </a:xfrm>
+          <a:prstGeom prst="rect">
+            <a:avLst>
+              <a:gd name="adj" fmla="val 7692"/>
+            </a:avLst>
+          </a:prstGeom>
+          <a:solidFill>
+            <a:srgbClr val="FFFFFF"/>
+          </a:solidFill>
+          <a:ln w="12700">
+            <a:solidFill>
+              <a:srgbClr val="DB2777"/>
+            </a:solidFill>
+            <a:prstDash val="solid"/>
+          </a:ln>
+        </p:spPr>
+      </p:sp>
+      <p:sp>
+        <p:nvSpPr>
+          <p:cNvPr id="54" name="Text 52"/>
+          <p:cNvSpPr/>
+          <p:nvPr/>
+        </p:nvSpPr>
+        <p:spPr>
+          <a:xfrm>
+            <a:off x="7677912" y="4169664"/>
+            <a:ext cx="685800" cy="475488"/>
+          </a:xfrm>
+          <a:prstGeom prst="rect">
+            <a:avLst/>
+          </a:prstGeom>
+          <a:noFill/>
+          <a:ln/>
+        </p:spPr>
+        <p:txBody>
+          <a:bodyPr wrap="square" lIns="0" tIns="0" rIns="0" bIns="0" rtlCol="0" anchor="ctr"/>
+          <a:lstStyle/>
+          <a:p>
+            <a:pPr algn="ctr" indent="0" marL="0">
+              <a:buNone/>
+            </a:pPr>
+            <a:r>
+              <a:rPr lang="en-US" sz="900" b="1" dirty="0">
+                <a:solidFill>
+                  <a:srgbClr val="9D174D"/>
+                </a:solidFill>
+                <a:latin typeface="Trebuchet MS" pitchFamily="34" charset="0"/>
+                <a:ea typeface="Trebuchet MS" pitchFamily="34" charset="-122"/>
+                <a:cs typeface="Trebuchet MS" pitchFamily="34" charset="-120"/>
+              </a:rPr>
+              <a:t>s</a:t>
+            </a:r>
+            <a:endParaRPr lang="en-US" sz="900" dirty="0"/>
           </a:p>
         </p:txBody>
       </p:sp>
@@ -28033,7 +29701,7 @@
                 <a:ea typeface="Calibri" pitchFamily="34" charset="-122"/>
                 <a:cs typeface="Calibri" pitchFamily="34" charset="-120"/>
               </a:rPr>
-              <a:t>Word Labs  •  wordlabs.app  •  Root: 'appear' = to come into sight</a:t>
+              <a:t>Word Labs  •  wordlabs.app  •  Root: 'appear' = come into view</a:t>
             </a:r>
             <a:endParaRPr lang="en-US" sz="800" dirty="0"/>
           </a:p>
@@ -28172,7 +29840,7 @@
                 <a:ea typeface="Trebuchet MS" pitchFamily="34" charset="-122"/>
                 <a:cs typeface="Trebuchet MS" pitchFamily="34" charset="-120"/>
               </a:rPr>
-              <a:t>appearing</a:t>
+              <a:t>reappearance</a:t>
             </a:r>
             <a:endParaRPr lang="en-US" sz="2800" dirty="0"/>
           </a:p>
@@ -28860,7 +30528,7 @@
                 <a:ea typeface="Calibri" pitchFamily="34" charset="-122"/>
                 <a:cs typeface="Calibri" pitchFamily="34" charset="-120"/>
               </a:rPr>
-              <a:t>Word Labs  •  wordlabs.app  •  Root: 'appear' = to come into sight</a:t>
+              <a:t>Word Labs  •  wordlabs.app  •  Root: 'appear' = come into view</a:t>
             </a:r>
             <a:endParaRPr lang="en-US" sz="800" dirty="0"/>
           </a:p>
@@ -28999,7 +30667,7 @@
                 <a:ea typeface="Trebuchet MS" pitchFamily="34" charset="-122"/>
                 <a:cs typeface="Trebuchet MS" pitchFamily="34" charset="-120"/>
               </a:rPr>
-              <a:t>appearing</a:t>
+              <a:t>reappearance</a:t>
             </a:r>
             <a:endParaRPr lang="en-US" sz="2800" dirty="0"/>
           </a:p>
@@ -29079,7 +30747,7 @@
         </p:nvSpPr>
         <p:spPr>
           <a:xfrm>
-            <a:off x="2938272" y="2258568"/>
+            <a:off x="2221992" y="2258568"/>
             <a:ext cx="1828800" cy="292608"/>
           </a:xfrm>
           <a:prstGeom prst="rect">
@@ -29088,11 +30756,11 @@
             </a:avLst>
           </a:prstGeom>
           <a:solidFill>
-            <a:srgbClr val="CCFBF1"/>
+            <a:srgbClr val="DDD6FE"/>
           </a:solidFill>
           <a:ln w="19050">
             <a:solidFill>
-              <a:srgbClr val="0D9488"/>
+              <a:srgbClr val="7C3AED"/>
             </a:solidFill>
             <a:prstDash val="solid"/>
           </a:ln>
@@ -29113,7 +30781,7 @@
         </p:nvSpPr>
         <p:spPr>
           <a:xfrm>
-            <a:off x="2938272" y="2258568"/>
+            <a:off x="2221992" y="2258568"/>
             <a:ext cx="1828800" cy="292608"/>
           </a:xfrm>
           <a:prstGeom prst="rect">
@@ -29132,13 +30800,13 @@
             <a:r>
               <a:rPr lang="en-US" sz="1300" b="1" dirty="0">
                 <a:solidFill>
-                  <a:srgbClr val="0F766E"/>
+                  <a:srgbClr val="4C1D95"/>
                 </a:solidFill>
                 <a:latin typeface="Trebuchet MS" pitchFamily="34" charset="0"/>
                 <a:ea typeface="Trebuchet MS" pitchFamily="34" charset="-122"/>
                 <a:cs typeface="Trebuchet MS" pitchFamily="34" charset="-120"/>
               </a:rPr>
-              <a:t>appear</a:t>
+              <a:t>re</a:t>
             </a:r>
             <a:endParaRPr lang="en-US" sz="1300" dirty="0"/>
           </a:p>
@@ -29152,7 +30820,7 @@
         </p:nvSpPr>
         <p:spPr>
           <a:xfrm>
-            <a:off x="2938272" y="2569464"/>
+            <a:off x="2221992" y="2569464"/>
             <a:ext cx="1828800" cy="201168"/>
           </a:xfrm>
           <a:prstGeom prst="rect">
@@ -29177,7 +30845,7 @@
                 <a:ea typeface="Calibri" pitchFamily="34" charset="-122"/>
                 <a:cs typeface="Calibri" pitchFamily="34" charset="-120"/>
               </a:rPr>
-              <a:t>to come into sight</a:t>
+              <a:t>again</a:t>
             </a:r>
             <a:endParaRPr lang="en-US" sz="850" dirty="0"/>
           </a:p>
@@ -29191,7 +30859,7 @@
         </p:nvSpPr>
         <p:spPr>
           <a:xfrm>
-            <a:off x="5803392" y="2258568"/>
+            <a:off x="4370832" y="2258568"/>
             <a:ext cx="1828800" cy="292608"/>
           </a:xfrm>
           <a:prstGeom prst="rect">
@@ -29200,11 +30868,11 @@
             </a:avLst>
           </a:prstGeom>
           <a:solidFill>
-            <a:srgbClr val="FCE7F3"/>
+            <a:srgbClr val="CCFBF1"/>
           </a:solidFill>
           <a:ln w="19050">
             <a:solidFill>
-              <a:srgbClr val="DB2777"/>
+              <a:srgbClr val="0D9488"/>
             </a:solidFill>
             <a:prstDash val="solid"/>
           </a:ln>
@@ -29225,7 +30893,7 @@
         </p:nvSpPr>
         <p:spPr>
           <a:xfrm>
-            <a:off x="5803392" y="2258568"/>
+            <a:off x="4370832" y="2258568"/>
             <a:ext cx="1828800" cy="292608"/>
           </a:xfrm>
           <a:prstGeom prst="rect">
@@ -29244,13 +30912,13 @@
             <a:r>
               <a:rPr lang="en-US" sz="1300" b="1" dirty="0">
                 <a:solidFill>
-                  <a:srgbClr val="9D174D"/>
+                  <a:srgbClr val="0F766E"/>
                 </a:solidFill>
                 <a:latin typeface="Trebuchet MS" pitchFamily="34" charset="0"/>
                 <a:ea typeface="Trebuchet MS" pitchFamily="34" charset="-122"/>
                 <a:cs typeface="Trebuchet MS" pitchFamily="34" charset="-120"/>
               </a:rPr>
-              <a:t>ing</a:t>
+              <a:t>appear</a:t>
             </a:r>
             <a:endParaRPr lang="en-US" sz="1300" dirty="0"/>
           </a:p>
@@ -29264,7 +30932,7 @@
         </p:nvSpPr>
         <p:spPr>
           <a:xfrm>
-            <a:off x="5803392" y="2569464"/>
+            <a:off x="4370832" y="2569464"/>
             <a:ext cx="1828800" cy="201168"/>
           </a:xfrm>
           <a:prstGeom prst="rect">
@@ -29289,7 +30957,7 @@
                 <a:ea typeface="Calibri" pitchFamily="34" charset="-122"/>
                 <a:cs typeface="Calibri" pitchFamily="34" charset="-120"/>
               </a:rPr>
-              <a:t>action in progress</a:t>
+              <a:t>come into view</a:t>
             </a:r>
             <a:endParaRPr lang="en-US" sz="850" dirty="0"/>
           </a:p>
@@ -29298,6 +30966,118 @@
       <p:sp>
         <p:nvSpPr>
           <p:cNvPr id="22" name="Shape 20"/>
+          <p:cNvSpPr/>
+          <p:nvPr/>
+        </p:nvSpPr>
+        <p:spPr>
+          <a:xfrm>
+            <a:off x="6519672" y="2258568"/>
+            <a:ext cx="1828800" cy="292608"/>
+          </a:xfrm>
+          <a:prstGeom prst="rect">
+            <a:avLst>
+              <a:gd name="adj" fmla="val 25000"/>
+            </a:avLst>
+          </a:prstGeom>
+          <a:solidFill>
+            <a:srgbClr val="FCE7F3"/>
+          </a:solidFill>
+          <a:ln w="19050">
+            <a:solidFill>
+              <a:srgbClr val="DB2777"/>
+            </a:solidFill>
+            <a:prstDash val="solid"/>
+          </a:ln>
+          <a:effectLst>
+            <a:outerShdw sx="100000" sy="100000" kx="0" ky="0" algn="bl" rotWithShape="0" blurRad="101600" dist="38100" dir="8100000">
+              <a:srgbClr val="000000">
+                <a:alpha val="12000"/>
+              </a:srgbClr>
+            </a:outerShdw>
+          </a:effectLst>
+        </p:spPr>
+      </p:sp>
+      <p:sp>
+        <p:nvSpPr>
+          <p:cNvPr id="23" name="Text 21"/>
+          <p:cNvSpPr/>
+          <p:nvPr/>
+        </p:nvSpPr>
+        <p:spPr>
+          <a:xfrm>
+            <a:off x="6519672" y="2258568"/>
+            <a:ext cx="1828800" cy="292608"/>
+          </a:xfrm>
+          <a:prstGeom prst="rect">
+            <a:avLst/>
+          </a:prstGeom>
+          <a:noFill/>
+          <a:ln/>
+        </p:spPr>
+        <p:txBody>
+          <a:bodyPr wrap="square" lIns="0" tIns="0" rIns="0" bIns="0" rtlCol="0" anchor="ctr"/>
+          <a:lstStyle/>
+          <a:p>
+            <a:pPr algn="ctr" indent="0" marL="0">
+              <a:buNone/>
+            </a:pPr>
+            <a:r>
+              <a:rPr lang="en-US" sz="1300" b="1" dirty="0">
+                <a:solidFill>
+                  <a:srgbClr val="9D174D"/>
+                </a:solidFill>
+                <a:latin typeface="Trebuchet MS" pitchFamily="34" charset="0"/>
+                <a:ea typeface="Trebuchet MS" pitchFamily="34" charset="-122"/>
+                <a:cs typeface="Trebuchet MS" pitchFamily="34" charset="-120"/>
+              </a:rPr>
+              <a:t>ance</a:t>
+            </a:r>
+            <a:endParaRPr lang="en-US" sz="1300" dirty="0"/>
+          </a:p>
+        </p:txBody>
+      </p:sp>
+      <p:sp>
+        <p:nvSpPr>
+          <p:cNvPr id="24" name="Text 22"/>
+          <p:cNvSpPr/>
+          <p:nvPr/>
+        </p:nvSpPr>
+        <p:spPr>
+          <a:xfrm>
+            <a:off x="6519672" y="2569464"/>
+            <a:ext cx="1828800" cy="201168"/>
+          </a:xfrm>
+          <a:prstGeom prst="rect">
+            <a:avLst/>
+          </a:prstGeom>
+          <a:noFill/>
+          <a:ln/>
+        </p:spPr>
+        <p:txBody>
+          <a:bodyPr wrap="square" lIns="0" tIns="0" rIns="0" bIns="0" rtlCol="0" anchor="t"/>
+          <a:lstStyle/>
+          <a:p>
+            <a:pPr algn="ctr" indent="0" marL="0">
+              <a:buNone/>
+            </a:pPr>
+            <a:r>
+              <a:rPr lang="en-US" sz="850" dirty="0">
+                <a:solidFill>
+                  <a:srgbClr val="475569"/>
+                </a:solidFill>
+                <a:latin typeface="Calibri" pitchFamily="34" charset="0"/>
+                <a:ea typeface="Calibri" pitchFamily="34" charset="-122"/>
+                <a:cs typeface="Calibri" pitchFamily="34" charset="-120"/>
+              </a:rPr>
+              <a:t>state of</a:t>
+            </a:r>
+            <a:endParaRPr lang="en-US" sz="850" dirty="0"/>
+          </a:p>
+        </p:txBody>
+      </p:sp>
+      <p:sp>
+        <p:nvSpPr>
+          <p:cNvPr id="25" name="Shape 23"/>
           <p:cNvSpPr/>
           <p:nvPr/>
         </p:nvSpPr>
@@ -29324,7 +31104,7 @@
       </p:sp>
       <p:sp>
         <p:nvSpPr>
-          <p:cNvPr id="23" name="Text 21"/>
+          <p:cNvPr id="26" name="Text 24"/>
           <p:cNvSpPr/>
           <p:nvPr/>
         </p:nvSpPr>
@@ -29363,7 +31143,7 @@
       </p:sp>
       <p:sp>
         <p:nvSpPr>
-          <p:cNvPr id="24" name="Shape 22"/>
+          <p:cNvPr id="27" name="Shape 25"/>
           <p:cNvSpPr/>
           <p:nvPr/>
         </p:nvSpPr>
@@ -29390,7 +31170,7 @@
       </p:sp>
       <p:sp>
         <p:nvSpPr>
-          <p:cNvPr id="25" name="Text 23"/>
+          <p:cNvPr id="28" name="Text 26"/>
           <p:cNvSpPr/>
           <p:nvPr/>
         </p:nvSpPr>
@@ -29429,7 +31209,7 @@
       </p:sp>
       <p:sp>
         <p:nvSpPr>
-          <p:cNvPr id="26" name="Shape 24"/>
+          <p:cNvPr id="29" name="Shape 27"/>
           <p:cNvSpPr/>
           <p:nvPr/>
         </p:nvSpPr>
@@ -29456,7 +31236,7 @@
       </p:sp>
       <p:sp>
         <p:nvSpPr>
-          <p:cNvPr id="27" name="Text 25"/>
+          <p:cNvPr id="30" name="Text 28"/>
           <p:cNvSpPr/>
           <p:nvPr/>
         </p:nvSpPr>
@@ -29495,7 +31275,7 @@
       </p:sp>
       <p:sp>
         <p:nvSpPr>
-          <p:cNvPr id="28" name="Shape 26"/>
+          <p:cNvPr id="31" name="Shape 29"/>
           <p:cNvSpPr/>
           <p:nvPr/>
         </p:nvSpPr>
@@ -29522,7 +31302,7 @@
       </p:sp>
       <p:sp>
         <p:nvSpPr>
-          <p:cNvPr id="29" name="Text 27"/>
+          <p:cNvPr id="32" name="Text 30"/>
           <p:cNvSpPr/>
           <p:nvPr/>
         </p:nvSpPr>
@@ -29845,7 +31625,7 @@
                 <a:ea typeface="Calibri" pitchFamily="34" charset="-122"/>
                 <a:cs typeface="Calibri" pitchFamily="34" charset="-120"/>
               </a:rPr>
-              <a:t>Word Labs  •  wordlabs.app  •  Root: 'appear' = to come into sight</a:t>
+              <a:t>Word Labs  •  wordlabs.app  •  Root: 'appear' = come into view</a:t>
             </a:r>
             <a:endParaRPr lang="en-US" sz="800" dirty="0"/>
           </a:p>
@@ -29984,7 +31764,7 @@
                 <a:ea typeface="Trebuchet MS" pitchFamily="34" charset="-122"/>
                 <a:cs typeface="Trebuchet MS" pitchFamily="34" charset="-120"/>
               </a:rPr>
-              <a:t>appearing</a:t>
+              <a:t>reappearance</a:t>
             </a:r>
             <a:endParaRPr lang="en-US" sz="2800" dirty="0"/>
           </a:p>
@@ -30064,7 +31844,7 @@
         </p:nvSpPr>
         <p:spPr>
           <a:xfrm>
-            <a:off x="2938272" y="2258568"/>
+            <a:off x="2221992" y="2258568"/>
             <a:ext cx="1828800" cy="292608"/>
           </a:xfrm>
           <a:prstGeom prst="rect">
@@ -30073,11 +31853,11 @@
             </a:avLst>
           </a:prstGeom>
           <a:solidFill>
-            <a:srgbClr val="CCFBF1"/>
+            <a:srgbClr val="DDD6FE"/>
           </a:solidFill>
           <a:ln w="19050">
             <a:solidFill>
-              <a:srgbClr val="0D9488"/>
+              <a:srgbClr val="7C3AED"/>
             </a:solidFill>
             <a:prstDash val="solid"/>
           </a:ln>
@@ -30098,7 +31878,7 @@
         </p:nvSpPr>
         <p:spPr>
           <a:xfrm>
-            <a:off x="2938272" y="2258568"/>
+            <a:off x="2221992" y="2258568"/>
             <a:ext cx="1828800" cy="292608"/>
           </a:xfrm>
           <a:prstGeom prst="rect">
@@ -30117,13 +31897,13 @@
             <a:r>
               <a:rPr lang="en-US" sz="1300" b="1" dirty="0">
                 <a:solidFill>
-                  <a:srgbClr val="0F766E"/>
+                  <a:srgbClr val="4C1D95"/>
                 </a:solidFill>
                 <a:latin typeface="Trebuchet MS" pitchFamily="34" charset="0"/>
                 <a:ea typeface="Trebuchet MS" pitchFamily="34" charset="-122"/>
                 <a:cs typeface="Trebuchet MS" pitchFamily="34" charset="-120"/>
               </a:rPr>
-              <a:t>appear</a:t>
+              <a:t>re</a:t>
             </a:r>
             <a:endParaRPr lang="en-US" sz="1300" dirty="0"/>
           </a:p>
@@ -30137,7 +31917,7 @@
         </p:nvSpPr>
         <p:spPr>
           <a:xfrm>
-            <a:off x="2938272" y="2569464"/>
+            <a:off x="2221992" y="2569464"/>
             <a:ext cx="1828800" cy="201168"/>
           </a:xfrm>
           <a:prstGeom prst="rect">
@@ -30162,7 +31942,7 @@
                 <a:ea typeface="Calibri" pitchFamily="34" charset="-122"/>
                 <a:cs typeface="Calibri" pitchFamily="34" charset="-120"/>
               </a:rPr>
-              <a:t>to come into sight</a:t>
+              <a:t>again</a:t>
             </a:r>
             <a:endParaRPr lang="en-US" sz="850" dirty="0"/>
           </a:p>
@@ -30176,7 +31956,7 @@
         </p:nvSpPr>
         <p:spPr>
           <a:xfrm>
-            <a:off x="5803392" y="2258568"/>
+            <a:off x="4370832" y="2258568"/>
             <a:ext cx="1828800" cy="292608"/>
           </a:xfrm>
           <a:prstGeom prst="rect">
@@ -30185,11 +31965,11 @@
             </a:avLst>
           </a:prstGeom>
           <a:solidFill>
-            <a:srgbClr val="FCE7F3"/>
+            <a:srgbClr val="CCFBF1"/>
           </a:solidFill>
           <a:ln w="19050">
             <a:solidFill>
-              <a:srgbClr val="DB2777"/>
+              <a:srgbClr val="0D9488"/>
             </a:solidFill>
             <a:prstDash val="solid"/>
           </a:ln>
@@ -30210,7 +31990,7 @@
         </p:nvSpPr>
         <p:spPr>
           <a:xfrm>
-            <a:off x="5803392" y="2258568"/>
+            <a:off x="4370832" y="2258568"/>
             <a:ext cx="1828800" cy="292608"/>
           </a:xfrm>
           <a:prstGeom prst="rect">
@@ -30229,13 +32009,13 @@
             <a:r>
               <a:rPr lang="en-US" sz="1300" b="1" dirty="0">
                 <a:solidFill>
-                  <a:srgbClr val="9D174D"/>
+                  <a:srgbClr val="0F766E"/>
                 </a:solidFill>
                 <a:latin typeface="Trebuchet MS" pitchFamily="34" charset="0"/>
                 <a:ea typeface="Trebuchet MS" pitchFamily="34" charset="-122"/>
                 <a:cs typeface="Trebuchet MS" pitchFamily="34" charset="-120"/>
               </a:rPr>
-              <a:t>ing</a:t>
+              <a:t>appear</a:t>
             </a:r>
             <a:endParaRPr lang="en-US" sz="1300" dirty="0"/>
           </a:p>
@@ -30249,7 +32029,7 @@
         </p:nvSpPr>
         <p:spPr>
           <a:xfrm>
-            <a:off x="5803392" y="2569464"/>
+            <a:off x="4370832" y="2569464"/>
             <a:ext cx="1828800" cy="201168"/>
           </a:xfrm>
           <a:prstGeom prst="rect">
@@ -30274,7 +32054,7 @@
                 <a:ea typeface="Calibri" pitchFamily="34" charset="-122"/>
                 <a:cs typeface="Calibri" pitchFamily="34" charset="-120"/>
               </a:rPr>
-              <a:t>action in progress</a:t>
+              <a:t>come into view</a:t>
             </a:r>
             <a:endParaRPr lang="en-US" sz="850" dirty="0"/>
           </a:p>
@@ -30283,6 +32063,118 @@
       <p:sp>
         <p:nvSpPr>
           <p:cNvPr id="22" name="Shape 20"/>
+          <p:cNvSpPr/>
+          <p:nvPr/>
+        </p:nvSpPr>
+        <p:spPr>
+          <a:xfrm>
+            <a:off x="6519672" y="2258568"/>
+            <a:ext cx="1828800" cy="292608"/>
+          </a:xfrm>
+          <a:prstGeom prst="rect">
+            <a:avLst>
+              <a:gd name="adj" fmla="val 25000"/>
+            </a:avLst>
+          </a:prstGeom>
+          <a:solidFill>
+            <a:srgbClr val="FCE7F3"/>
+          </a:solidFill>
+          <a:ln w="19050">
+            <a:solidFill>
+              <a:srgbClr val="DB2777"/>
+            </a:solidFill>
+            <a:prstDash val="solid"/>
+          </a:ln>
+          <a:effectLst>
+            <a:outerShdw sx="100000" sy="100000" kx="0" ky="0" algn="bl" rotWithShape="0" blurRad="101600" dist="38100" dir="8100000">
+              <a:srgbClr val="000000">
+                <a:alpha val="12000"/>
+              </a:srgbClr>
+            </a:outerShdw>
+          </a:effectLst>
+        </p:spPr>
+      </p:sp>
+      <p:sp>
+        <p:nvSpPr>
+          <p:cNvPr id="23" name="Text 21"/>
+          <p:cNvSpPr/>
+          <p:nvPr/>
+        </p:nvSpPr>
+        <p:spPr>
+          <a:xfrm>
+            <a:off x="6519672" y="2258568"/>
+            <a:ext cx="1828800" cy="292608"/>
+          </a:xfrm>
+          <a:prstGeom prst="rect">
+            <a:avLst/>
+          </a:prstGeom>
+          <a:noFill/>
+          <a:ln/>
+        </p:spPr>
+        <p:txBody>
+          <a:bodyPr wrap="square" lIns="0" tIns="0" rIns="0" bIns="0" rtlCol="0" anchor="ctr"/>
+          <a:lstStyle/>
+          <a:p>
+            <a:pPr algn="ctr" indent="0" marL="0">
+              <a:buNone/>
+            </a:pPr>
+            <a:r>
+              <a:rPr lang="en-US" sz="1300" b="1" dirty="0">
+                <a:solidFill>
+                  <a:srgbClr val="9D174D"/>
+                </a:solidFill>
+                <a:latin typeface="Trebuchet MS" pitchFamily="34" charset="0"/>
+                <a:ea typeface="Trebuchet MS" pitchFamily="34" charset="-122"/>
+                <a:cs typeface="Trebuchet MS" pitchFamily="34" charset="-120"/>
+              </a:rPr>
+              <a:t>ance</a:t>
+            </a:r>
+            <a:endParaRPr lang="en-US" sz="1300" dirty="0"/>
+          </a:p>
+        </p:txBody>
+      </p:sp>
+      <p:sp>
+        <p:nvSpPr>
+          <p:cNvPr id="24" name="Text 22"/>
+          <p:cNvSpPr/>
+          <p:nvPr/>
+        </p:nvSpPr>
+        <p:spPr>
+          <a:xfrm>
+            <a:off x="6519672" y="2569464"/>
+            <a:ext cx="1828800" cy="201168"/>
+          </a:xfrm>
+          <a:prstGeom prst="rect">
+            <a:avLst/>
+          </a:prstGeom>
+          <a:noFill/>
+          <a:ln/>
+        </p:spPr>
+        <p:txBody>
+          <a:bodyPr wrap="square" lIns="0" tIns="0" rIns="0" bIns="0" rtlCol="0" anchor="t"/>
+          <a:lstStyle/>
+          <a:p>
+            <a:pPr algn="ctr" indent="0" marL="0">
+              <a:buNone/>
+            </a:pPr>
+            <a:r>
+              <a:rPr lang="en-US" sz="850" dirty="0">
+                <a:solidFill>
+                  <a:srgbClr val="475569"/>
+                </a:solidFill>
+                <a:latin typeface="Calibri" pitchFamily="34" charset="0"/>
+                <a:ea typeface="Calibri" pitchFamily="34" charset="-122"/>
+                <a:cs typeface="Calibri" pitchFamily="34" charset="-120"/>
+              </a:rPr>
+              <a:t>state of</a:t>
+            </a:r>
+            <a:endParaRPr lang="en-US" sz="850" dirty="0"/>
+          </a:p>
+        </p:txBody>
+      </p:sp>
+      <p:sp>
+        <p:nvSpPr>
+          <p:cNvPr id="25" name="Shape 23"/>
           <p:cNvSpPr/>
           <p:nvPr/>
         </p:nvSpPr>
@@ -30309,7 +32201,7 @@
       </p:sp>
       <p:sp>
         <p:nvSpPr>
-          <p:cNvPr id="23" name="Text 21"/>
+          <p:cNvPr id="26" name="Text 24"/>
           <p:cNvSpPr/>
           <p:nvPr/>
         </p:nvSpPr>
@@ -30348,7 +32240,7 @@
       </p:sp>
       <p:sp>
         <p:nvSpPr>
-          <p:cNvPr id="24" name="Shape 22"/>
+          <p:cNvPr id="27" name="Shape 25"/>
           <p:cNvSpPr/>
           <p:nvPr/>
         </p:nvSpPr>
@@ -30375,14 +32267,14 @@
       </p:sp>
       <p:sp>
         <p:nvSpPr>
-          <p:cNvPr id="25" name="Shape 23"/>
-          <p:cNvSpPr/>
-          <p:nvPr/>
-        </p:nvSpPr>
-        <p:spPr>
-          <a:xfrm>
-            <a:off x="2313432" y="3364992"/>
-            <a:ext cx="1645920" cy="475488"/>
+          <p:cNvPr id="28" name="Shape 26"/>
+          <p:cNvSpPr/>
+          <p:nvPr/>
+        </p:nvSpPr>
+        <p:spPr>
+          <a:xfrm>
+            <a:off x="1975104" y="3364992"/>
+            <a:ext cx="1554480" cy="475488"/>
           </a:xfrm>
           <a:prstGeom prst="rect">
             <a:avLst>
@@ -30402,14 +32294,14 @@
       </p:sp>
       <p:sp>
         <p:nvSpPr>
-          <p:cNvPr id="26" name="Text 24"/>
-          <p:cNvSpPr/>
-          <p:nvPr/>
-        </p:nvSpPr>
-        <p:spPr>
-          <a:xfrm>
-            <a:off x="2313432" y="3364992"/>
-            <a:ext cx="1645920" cy="475488"/>
+          <p:cNvPr id="29" name="Text 27"/>
+          <p:cNvSpPr/>
+          <p:nvPr/>
+        </p:nvSpPr>
+        <p:spPr>
+          <a:xfrm>
+            <a:off x="1975104" y="3364992"/>
+            <a:ext cx="1554480" cy="475488"/>
           </a:xfrm>
           <a:prstGeom prst="rect">
             <a:avLst/>
@@ -30433,7 +32325,7 @@
                 <a:ea typeface="Trebuchet MS" pitchFamily="34" charset="-122"/>
                 <a:cs typeface="Trebuchet MS" pitchFamily="34" charset="-120"/>
               </a:rPr>
-              <a:t>ap</a:t>
+              <a:t>re</a:t>
             </a:r>
             <a:endParaRPr lang="en-US" sz="1400" dirty="0"/>
           </a:p>
@@ -30441,14 +32333,14 @@
       </p:sp>
       <p:sp>
         <p:nvSpPr>
-          <p:cNvPr id="27" name="Text 25"/>
-          <p:cNvSpPr/>
-          <p:nvPr/>
-        </p:nvSpPr>
-        <p:spPr>
-          <a:xfrm>
-            <a:off x="3959352" y="3364992"/>
-            <a:ext cx="411480" cy="475488"/>
+          <p:cNvPr id="30" name="Text 28"/>
+          <p:cNvSpPr/>
+          <p:nvPr/>
+        </p:nvSpPr>
+        <p:spPr>
+          <a:xfrm>
+            <a:off x="3529584" y="3364992"/>
+            <a:ext cx="73152" cy="475488"/>
           </a:xfrm>
           <a:prstGeom prst="rect">
             <a:avLst/>
@@ -30480,14 +32372,14 @@
       </p:sp>
       <p:sp>
         <p:nvSpPr>
-          <p:cNvPr id="28" name="Shape 26"/>
-          <p:cNvSpPr/>
-          <p:nvPr/>
-        </p:nvSpPr>
-        <p:spPr>
-          <a:xfrm>
-            <a:off x="4370832" y="3364992"/>
-            <a:ext cx="1645920" cy="475488"/>
+          <p:cNvPr id="31" name="Shape 29"/>
+          <p:cNvSpPr/>
+          <p:nvPr/>
+        </p:nvSpPr>
+        <p:spPr>
+          <a:xfrm>
+            <a:off x="3602736" y="3364992"/>
+            <a:ext cx="1554480" cy="475488"/>
           </a:xfrm>
           <a:prstGeom prst="rect">
             <a:avLst>
@@ -30507,14 +32399,14 @@
       </p:sp>
       <p:sp>
         <p:nvSpPr>
-          <p:cNvPr id="29" name="Text 27"/>
-          <p:cNvSpPr/>
-          <p:nvPr/>
-        </p:nvSpPr>
-        <p:spPr>
-          <a:xfrm>
-            <a:off x="4370832" y="3364992"/>
-            <a:ext cx="1645920" cy="475488"/>
+          <p:cNvPr id="32" name="Text 30"/>
+          <p:cNvSpPr/>
+          <p:nvPr/>
+        </p:nvSpPr>
+        <p:spPr>
+          <a:xfrm>
+            <a:off x="3602736" y="3364992"/>
+            <a:ext cx="1554480" cy="475488"/>
           </a:xfrm>
           <a:prstGeom prst="rect">
             <a:avLst/>
@@ -30538,7 +32430,7 @@
                 <a:ea typeface="Trebuchet MS" pitchFamily="34" charset="-122"/>
                 <a:cs typeface="Trebuchet MS" pitchFamily="34" charset="-120"/>
               </a:rPr>
-              <a:t>pear</a:t>
+              <a:t>ap</a:t>
             </a:r>
             <a:endParaRPr lang="en-US" sz="1400" dirty="0"/>
           </a:p>
@@ -30546,14 +32438,14 @@
       </p:sp>
       <p:sp>
         <p:nvSpPr>
-          <p:cNvPr id="30" name="Text 28"/>
-          <p:cNvSpPr/>
-          <p:nvPr/>
-        </p:nvSpPr>
-        <p:spPr>
-          <a:xfrm>
-            <a:off x="6016752" y="3364992"/>
-            <a:ext cx="411480" cy="475488"/>
+          <p:cNvPr id="33" name="Text 31"/>
+          <p:cNvSpPr/>
+          <p:nvPr/>
+        </p:nvSpPr>
+        <p:spPr>
+          <a:xfrm>
+            <a:off x="5157216" y="3364992"/>
+            <a:ext cx="73152" cy="475488"/>
           </a:xfrm>
           <a:prstGeom prst="rect">
             <a:avLst/>
@@ -30585,14 +32477,14 @@
       </p:sp>
       <p:sp>
         <p:nvSpPr>
-          <p:cNvPr id="31" name="Shape 29"/>
-          <p:cNvSpPr/>
-          <p:nvPr/>
-        </p:nvSpPr>
-        <p:spPr>
-          <a:xfrm>
-            <a:off x="6428232" y="3364992"/>
-            <a:ext cx="1645920" cy="475488"/>
+          <p:cNvPr id="34" name="Shape 32"/>
+          <p:cNvSpPr/>
+          <p:nvPr/>
+        </p:nvSpPr>
+        <p:spPr>
+          <a:xfrm>
+            <a:off x="5230368" y="3364992"/>
+            <a:ext cx="1554480" cy="475488"/>
           </a:xfrm>
           <a:prstGeom prst="rect">
             <a:avLst>
@@ -30612,14 +32504,14 @@
       </p:sp>
       <p:sp>
         <p:nvSpPr>
-          <p:cNvPr id="32" name="Text 30"/>
-          <p:cNvSpPr/>
-          <p:nvPr/>
-        </p:nvSpPr>
-        <p:spPr>
-          <a:xfrm>
-            <a:off x="6428232" y="3364992"/>
-            <a:ext cx="1645920" cy="475488"/>
+          <p:cNvPr id="35" name="Text 33"/>
+          <p:cNvSpPr/>
+          <p:nvPr/>
+        </p:nvSpPr>
+        <p:spPr>
+          <a:xfrm>
+            <a:off x="5230368" y="3364992"/>
+            <a:ext cx="1554480" cy="475488"/>
           </a:xfrm>
           <a:prstGeom prst="rect">
             <a:avLst/>
@@ -30643,7 +32535,7 @@
                 <a:ea typeface="Trebuchet MS" pitchFamily="34" charset="-122"/>
                 <a:cs typeface="Trebuchet MS" pitchFamily="34" charset="-120"/>
               </a:rPr>
-              <a:t>ing</a:t>
+              <a:t>pear</a:t>
             </a:r>
             <a:endParaRPr lang="en-US" sz="1400" dirty="0"/>
           </a:p>
@@ -30651,7 +32543,112 @@
       </p:sp>
       <p:sp>
         <p:nvSpPr>
-          <p:cNvPr id="33" name="Shape 31"/>
+          <p:cNvPr id="36" name="Text 34"/>
+          <p:cNvSpPr/>
+          <p:nvPr/>
+        </p:nvSpPr>
+        <p:spPr>
+          <a:xfrm>
+            <a:off x="6784848" y="3364992"/>
+            <a:ext cx="73152" cy="475488"/>
+          </a:xfrm>
+          <a:prstGeom prst="rect">
+            <a:avLst/>
+          </a:prstGeom>
+          <a:noFill/>
+          <a:ln/>
+        </p:spPr>
+        <p:txBody>
+          <a:bodyPr wrap="square" lIns="0" tIns="0" rIns="0" bIns="0" rtlCol="0" anchor="ctr"/>
+          <a:lstStyle/>
+          <a:p>
+            <a:pPr algn="ctr" indent="0" marL="0">
+              <a:buNone/>
+            </a:pPr>
+            <a:r>
+              <a:rPr lang="en-US" sz="1600" b="1" dirty="0">
+                <a:solidFill>
+                  <a:srgbClr val="0D9488"/>
+                </a:solidFill>
+                <a:latin typeface="Trebuchet MS" pitchFamily="34" charset="0"/>
+                <a:ea typeface="Trebuchet MS" pitchFamily="34" charset="-122"/>
+                <a:cs typeface="Trebuchet MS" pitchFamily="34" charset="-120"/>
+              </a:rPr>
+              <a:t>·</a:t>
+            </a:r>
+            <a:endParaRPr lang="en-US" sz="1600" dirty="0"/>
+          </a:p>
+        </p:txBody>
+      </p:sp>
+      <p:sp>
+        <p:nvSpPr>
+          <p:cNvPr id="37" name="Shape 35"/>
+          <p:cNvSpPr/>
+          <p:nvPr/>
+        </p:nvSpPr>
+        <p:spPr>
+          <a:xfrm>
+            <a:off x="6858000" y="3364992"/>
+            <a:ext cx="1554480" cy="475488"/>
+          </a:xfrm>
+          <a:prstGeom prst="rect">
+            <a:avLst>
+              <a:gd name="adj" fmla="val 9615"/>
+            </a:avLst>
+          </a:prstGeom>
+          <a:solidFill>
+            <a:srgbClr val="FFFFFF"/>
+          </a:solidFill>
+          <a:ln w="12700">
+            <a:solidFill>
+              <a:srgbClr val="0D9488"/>
+            </a:solidFill>
+            <a:prstDash val="solid"/>
+          </a:ln>
+        </p:spPr>
+      </p:sp>
+      <p:sp>
+        <p:nvSpPr>
+          <p:cNvPr id="38" name="Text 36"/>
+          <p:cNvSpPr/>
+          <p:nvPr/>
+        </p:nvSpPr>
+        <p:spPr>
+          <a:xfrm>
+            <a:off x="6858000" y="3364992"/>
+            <a:ext cx="1554480" cy="475488"/>
+          </a:xfrm>
+          <a:prstGeom prst="rect">
+            <a:avLst/>
+          </a:prstGeom>
+          <a:noFill/>
+          <a:ln/>
+        </p:spPr>
+        <p:txBody>
+          <a:bodyPr wrap="square" lIns="0" tIns="0" rIns="0" bIns="0" rtlCol="0" anchor="ctr"/>
+          <a:lstStyle/>
+          <a:p>
+            <a:pPr algn="ctr" indent="0" marL="0">
+              <a:buNone/>
+            </a:pPr>
+            <a:r>
+              <a:rPr lang="en-US" sz="1400" b="1" dirty="0">
+                <a:solidFill>
+                  <a:srgbClr val="0D9488"/>
+                </a:solidFill>
+                <a:latin typeface="Trebuchet MS" pitchFamily="34" charset="0"/>
+                <a:ea typeface="Trebuchet MS" pitchFamily="34" charset="-122"/>
+                <a:cs typeface="Trebuchet MS" pitchFamily="34" charset="-120"/>
+              </a:rPr>
+              <a:t>ance</a:t>
+            </a:r>
+            <a:endParaRPr lang="en-US" sz="1400" dirty="0"/>
+          </a:p>
+        </p:txBody>
+      </p:sp>
+      <p:sp>
+        <p:nvSpPr>
+          <p:cNvPr id="39" name="Shape 37"/>
           <p:cNvSpPr/>
           <p:nvPr/>
         </p:nvSpPr>
@@ -30678,7 +32675,7 @@
       </p:sp>
       <p:sp>
         <p:nvSpPr>
-          <p:cNvPr id="34" name="Text 32"/>
+          <p:cNvPr id="40" name="Text 38"/>
           <p:cNvSpPr/>
           <p:nvPr/>
         </p:nvSpPr>
@@ -30717,7 +32714,7 @@
       </p:sp>
       <p:sp>
         <p:nvSpPr>
-          <p:cNvPr id="35" name="Shape 33"/>
+          <p:cNvPr id="41" name="Shape 39"/>
           <p:cNvSpPr/>
           <p:nvPr/>
         </p:nvSpPr>
@@ -30744,7 +32741,7 @@
       </p:sp>
       <p:sp>
         <p:nvSpPr>
-          <p:cNvPr id="36" name="Text 34"/>
+          <p:cNvPr id="42" name="Text 40"/>
           <p:cNvSpPr/>
           <p:nvPr/>
         </p:nvSpPr>
@@ -31067,7 +33064,7 @@
                 <a:ea typeface="Calibri" pitchFamily="34" charset="-122"/>
                 <a:cs typeface="Calibri" pitchFamily="34" charset="-120"/>
               </a:rPr>
-              <a:t>Word Labs  •  wordlabs.app  •  Root: 'appear' = to come into sight</a:t>
+              <a:t>Word Labs  •  wordlabs.app  •  Root: 'appear' = come into view</a:t>
             </a:r>
             <a:endParaRPr lang="en-US" sz="800" dirty="0"/>
           </a:p>
@@ -31206,7 +33203,7 @@
                 <a:ea typeface="Trebuchet MS" pitchFamily="34" charset="-122"/>
                 <a:cs typeface="Trebuchet MS" pitchFamily="34" charset="-120"/>
               </a:rPr>
-              <a:t>appearing</a:t>
+              <a:t>reappearance</a:t>
             </a:r>
             <a:endParaRPr lang="en-US" sz="2800" dirty="0"/>
           </a:p>
@@ -31286,7 +33283,7 @@
         </p:nvSpPr>
         <p:spPr>
           <a:xfrm>
-            <a:off x="2938272" y="2258568"/>
+            <a:off x="2221992" y="2258568"/>
             <a:ext cx="1828800" cy="292608"/>
           </a:xfrm>
           <a:prstGeom prst="rect">
@@ -31295,11 +33292,11 @@
             </a:avLst>
           </a:prstGeom>
           <a:solidFill>
-            <a:srgbClr val="CCFBF1"/>
+            <a:srgbClr val="DDD6FE"/>
           </a:solidFill>
           <a:ln w="19050">
             <a:solidFill>
-              <a:srgbClr val="0D9488"/>
+              <a:srgbClr val="7C3AED"/>
             </a:solidFill>
             <a:prstDash val="solid"/>
           </a:ln>
@@ -31320,7 +33317,7 @@
         </p:nvSpPr>
         <p:spPr>
           <a:xfrm>
-            <a:off x="2938272" y="2258568"/>
+            <a:off x="2221992" y="2258568"/>
             <a:ext cx="1828800" cy="292608"/>
           </a:xfrm>
           <a:prstGeom prst="rect">
@@ -31339,13 +33336,13 @@
             <a:r>
               <a:rPr lang="en-US" sz="1300" b="1" dirty="0">
                 <a:solidFill>
-                  <a:srgbClr val="0F766E"/>
+                  <a:srgbClr val="4C1D95"/>
                 </a:solidFill>
                 <a:latin typeface="Trebuchet MS" pitchFamily="34" charset="0"/>
                 <a:ea typeface="Trebuchet MS" pitchFamily="34" charset="-122"/>
                 <a:cs typeface="Trebuchet MS" pitchFamily="34" charset="-120"/>
               </a:rPr>
-              <a:t>appear</a:t>
+              <a:t>re</a:t>
             </a:r>
             <a:endParaRPr lang="en-US" sz="1300" dirty="0"/>
           </a:p>
@@ -31359,7 +33356,7 @@
         </p:nvSpPr>
         <p:spPr>
           <a:xfrm>
-            <a:off x="2938272" y="2569464"/>
+            <a:off x="2221992" y="2569464"/>
             <a:ext cx="1828800" cy="201168"/>
           </a:xfrm>
           <a:prstGeom prst="rect">
@@ -31384,7 +33381,7 @@
                 <a:ea typeface="Calibri" pitchFamily="34" charset="-122"/>
                 <a:cs typeface="Calibri" pitchFamily="34" charset="-120"/>
               </a:rPr>
-              <a:t>to come into sight</a:t>
+              <a:t>again</a:t>
             </a:r>
             <a:endParaRPr lang="en-US" sz="850" dirty="0"/>
           </a:p>
@@ -31398,7 +33395,7 @@
         </p:nvSpPr>
         <p:spPr>
           <a:xfrm>
-            <a:off x="5803392" y="2258568"/>
+            <a:off x="4370832" y="2258568"/>
             <a:ext cx="1828800" cy="292608"/>
           </a:xfrm>
           <a:prstGeom prst="rect">
@@ -31407,11 +33404,11 @@
             </a:avLst>
           </a:prstGeom>
           <a:solidFill>
-            <a:srgbClr val="FCE7F3"/>
+            <a:srgbClr val="CCFBF1"/>
           </a:solidFill>
           <a:ln w="19050">
             <a:solidFill>
-              <a:srgbClr val="DB2777"/>
+              <a:srgbClr val="0D9488"/>
             </a:solidFill>
             <a:prstDash val="solid"/>
           </a:ln>
@@ -31432,7 +33429,7 @@
         </p:nvSpPr>
         <p:spPr>
           <a:xfrm>
-            <a:off x="5803392" y="2258568"/>
+            <a:off x="4370832" y="2258568"/>
             <a:ext cx="1828800" cy="292608"/>
           </a:xfrm>
           <a:prstGeom prst="rect">
@@ -31451,13 +33448,13 @@
             <a:r>
               <a:rPr lang="en-US" sz="1300" b="1" dirty="0">
                 <a:solidFill>
-                  <a:srgbClr val="9D174D"/>
+                  <a:srgbClr val="0F766E"/>
                 </a:solidFill>
                 <a:latin typeface="Trebuchet MS" pitchFamily="34" charset="0"/>
                 <a:ea typeface="Trebuchet MS" pitchFamily="34" charset="-122"/>
                 <a:cs typeface="Trebuchet MS" pitchFamily="34" charset="-120"/>
               </a:rPr>
-              <a:t>ing</a:t>
+              <a:t>appear</a:t>
             </a:r>
             <a:endParaRPr lang="en-US" sz="1300" dirty="0"/>
           </a:p>
@@ -31471,7 +33468,7 @@
         </p:nvSpPr>
         <p:spPr>
           <a:xfrm>
-            <a:off x="5803392" y="2569464"/>
+            <a:off x="4370832" y="2569464"/>
             <a:ext cx="1828800" cy="201168"/>
           </a:xfrm>
           <a:prstGeom prst="rect">
@@ -31496,7 +33493,7 @@
                 <a:ea typeface="Calibri" pitchFamily="34" charset="-122"/>
                 <a:cs typeface="Calibri" pitchFamily="34" charset="-120"/>
               </a:rPr>
-              <a:t>action in progress</a:t>
+              <a:t>come into view</a:t>
             </a:r>
             <a:endParaRPr lang="en-US" sz="850" dirty="0"/>
           </a:p>
@@ -31505,6 +33502,118 @@
       <p:sp>
         <p:nvSpPr>
           <p:cNvPr id="22" name="Shape 20"/>
+          <p:cNvSpPr/>
+          <p:nvPr/>
+        </p:nvSpPr>
+        <p:spPr>
+          <a:xfrm>
+            <a:off x="6519672" y="2258568"/>
+            <a:ext cx="1828800" cy="292608"/>
+          </a:xfrm>
+          <a:prstGeom prst="rect">
+            <a:avLst>
+              <a:gd name="adj" fmla="val 25000"/>
+            </a:avLst>
+          </a:prstGeom>
+          <a:solidFill>
+            <a:srgbClr val="FCE7F3"/>
+          </a:solidFill>
+          <a:ln w="19050">
+            <a:solidFill>
+              <a:srgbClr val="DB2777"/>
+            </a:solidFill>
+            <a:prstDash val="solid"/>
+          </a:ln>
+          <a:effectLst>
+            <a:outerShdw sx="100000" sy="100000" kx="0" ky="0" algn="bl" rotWithShape="0" blurRad="101600" dist="38100" dir="8100000">
+              <a:srgbClr val="000000">
+                <a:alpha val="12000"/>
+              </a:srgbClr>
+            </a:outerShdw>
+          </a:effectLst>
+        </p:spPr>
+      </p:sp>
+      <p:sp>
+        <p:nvSpPr>
+          <p:cNvPr id="23" name="Text 21"/>
+          <p:cNvSpPr/>
+          <p:nvPr/>
+        </p:nvSpPr>
+        <p:spPr>
+          <a:xfrm>
+            <a:off x="6519672" y="2258568"/>
+            <a:ext cx="1828800" cy="292608"/>
+          </a:xfrm>
+          <a:prstGeom prst="rect">
+            <a:avLst/>
+          </a:prstGeom>
+          <a:noFill/>
+          <a:ln/>
+        </p:spPr>
+        <p:txBody>
+          <a:bodyPr wrap="square" lIns="0" tIns="0" rIns="0" bIns="0" rtlCol="0" anchor="ctr"/>
+          <a:lstStyle/>
+          <a:p>
+            <a:pPr algn="ctr" indent="0" marL="0">
+              <a:buNone/>
+            </a:pPr>
+            <a:r>
+              <a:rPr lang="en-US" sz="1300" b="1" dirty="0">
+                <a:solidFill>
+                  <a:srgbClr val="9D174D"/>
+                </a:solidFill>
+                <a:latin typeface="Trebuchet MS" pitchFamily="34" charset="0"/>
+                <a:ea typeface="Trebuchet MS" pitchFamily="34" charset="-122"/>
+                <a:cs typeface="Trebuchet MS" pitchFamily="34" charset="-120"/>
+              </a:rPr>
+              <a:t>ance</a:t>
+            </a:r>
+            <a:endParaRPr lang="en-US" sz="1300" dirty="0"/>
+          </a:p>
+        </p:txBody>
+      </p:sp>
+      <p:sp>
+        <p:nvSpPr>
+          <p:cNvPr id="24" name="Text 22"/>
+          <p:cNvSpPr/>
+          <p:nvPr/>
+        </p:nvSpPr>
+        <p:spPr>
+          <a:xfrm>
+            <a:off x="6519672" y="2569464"/>
+            <a:ext cx="1828800" cy="201168"/>
+          </a:xfrm>
+          <a:prstGeom prst="rect">
+            <a:avLst/>
+          </a:prstGeom>
+          <a:noFill/>
+          <a:ln/>
+        </p:spPr>
+        <p:txBody>
+          <a:bodyPr wrap="square" lIns="0" tIns="0" rIns="0" bIns="0" rtlCol="0" anchor="t"/>
+          <a:lstStyle/>
+          <a:p>
+            <a:pPr algn="ctr" indent="0" marL="0">
+              <a:buNone/>
+            </a:pPr>
+            <a:r>
+              <a:rPr lang="en-US" sz="850" dirty="0">
+                <a:solidFill>
+                  <a:srgbClr val="475569"/>
+                </a:solidFill>
+                <a:latin typeface="Calibri" pitchFamily="34" charset="0"/>
+                <a:ea typeface="Calibri" pitchFamily="34" charset="-122"/>
+                <a:cs typeface="Calibri" pitchFamily="34" charset="-120"/>
+              </a:rPr>
+              <a:t>state of</a:t>
+            </a:r>
+            <a:endParaRPr lang="en-US" sz="850" dirty="0"/>
+          </a:p>
+        </p:txBody>
+      </p:sp>
+      <p:sp>
+        <p:nvSpPr>
+          <p:cNvPr id="25" name="Shape 23"/>
           <p:cNvSpPr/>
           <p:nvPr/>
         </p:nvSpPr>
@@ -31531,7 +33640,7 @@
       </p:sp>
       <p:sp>
         <p:nvSpPr>
-          <p:cNvPr id="23" name="Text 21"/>
+          <p:cNvPr id="26" name="Text 24"/>
           <p:cNvSpPr/>
           <p:nvPr/>
         </p:nvSpPr>
@@ -31570,7 +33679,7 @@
       </p:sp>
       <p:sp>
         <p:nvSpPr>
-          <p:cNvPr id="24" name="Shape 22"/>
+          <p:cNvPr id="27" name="Shape 25"/>
           <p:cNvSpPr/>
           <p:nvPr/>
         </p:nvSpPr>
@@ -31597,14 +33706,14 @@
       </p:sp>
       <p:sp>
         <p:nvSpPr>
-          <p:cNvPr id="25" name="Shape 23"/>
-          <p:cNvSpPr/>
-          <p:nvPr/>
-        </p:nvSpPr>
-        <p:spPr>
-          <a:xfrm>
-            <a:off x="2313432" y="3364992"/>
-            <a:ext cx="1645920" cy="475488"/>
+          <p:cNvPr id="28" name="Shape 26"/>
+          <p:cNvSpPr/>
+          <p:nvPr/>
+        </p:nvSpPr>
+        <p:spPr>
+          <a:xfrm>
+            <a:off x="1975104" y="3364992"/>
+            <a:ext cx="1554480" cy="475488"/>
           </a:xfrm>
           <a:prstGeom prst="rect">
             <a:avLst>
@@ -31624,14 +33733,14 @@
       </p:sp>
       <p:sp>
         <p:nvSpPr>
-          <p:cNvPr id="26" name="Text 24"/>
-          <p:cNvSpPr/>
-          <p:nvPr/>
-        </p:nvSpPr>
-        <p:spPr>
-          <a:xfrm>
-            <a:off x="2313432" y="3364992"/>
-            <a:ext cx="1645920" cy="475488"/>
+          <p:cNvPr id="29" name="Text 27"/>
+          <p:cNvSpPr/>
+          <p:nvPr/>
+        </p:nvSpPr>
+        <p:spPr>
+          <a:xfrm>
+            <a:off x="1975104" y="3364992"/>
+            <a:ext cx="1554480" cy="475488"/>
           </a:xfrm>
           <a:prstGeom prst="rect">
             <a:avLst/>
@@ -31655,7 +33764,7 @@
                 <a:ea typeface="Trebuchet MS" pitchFamily="34" charset="-122"/>
                 <a:cs typeface="Trebuchet MS" pitchFamily="34" charset="-120"/>
               </a:rPr>
-              <a:t>ap</a:t>
+              <a:t>re</a:t>
             </a:r>
             <a:endParaRPr lang="en-US" sz="1400" dirty="0"/>
           </a:p>
@@ -31663,14 +33772,14 @@
       </p:sp>
       <p:sp>
         <p:nvSpPr>
-          <p:cNvPr id="27" name="Text 25"/>
-          <p:cNvSpPr/>
-          <p:nvPr/>
-        </p:nvSpPr>
-        <p:spPr>
-          <a:xfrm>
-            <a:off x="3959352" y="3364992"/>
-            <a:ext cx="411480" cy="475488"/>
+          <p:cNvPr id="30" name="Text 28"/>
+          <p:cNvSpPr/>
+          <p:nvPr/>
+        </p:nvSpPr>
+        <p:spPr>
+          <a:xfrm>
+            <a:off x="3529584" y="3364992"/>
+            <a:ext cx="73152" cy="475488"/>
           </a:xfrm>
           <a:prstGeom prst="rect">
             <a:avLst/>
@@ -31702,14 +33811,14 @@
       </p:sp>
       <p:sp>
         <p:nvSpPr>
-          <p:cNvPr id="28" name="Shape 26"/>
-          <p:cNvSpPr/>
-          <p:nvPr/>
-        </p:nvSpPr>
-        <p:spPr>
-          <a:xfrm>
-            <a:off x="4370832" y="3364992"/>
-            <a:ext cx="1645920" cy="475488"/>
+          <p:cNvPr id="31" name="Shape 29"/>
+          <p:cNvSpPr/>
+          <p:nvPr/>
+        </p:nvSpPr>
+        <p:spPr>
+          <a:xfrm>
+            <a:off x="3602736" y="3364992"/>
+            <a:ext cx="1554480" cy="475488"/>
           </a:xfrm>
           <a:prstGeom prst="rect">
             <a:avLst>
@@ -31729,14 +33838,14 @@
       </p:sp>
       <p:sp>
         <p:nvSpPr>
-          <p:cNvPr id="29" name="Text 27"/>
-          <p:cNvSpPr/>
-          <p:nvPr/>
-        </p:nvSpPr>
-        <p:spPr>
-          <a:xfrm>
-            <a:off x="4370832" y="3364992"/>
-            <a:ext cx="1645920" cy="475488"/>
+          <p:cNvPr id="32" name="Text 30"/>
+          <p:cNvSpPr/>
+          <p:nvPr/>
+        </p:nvSpPr>
+        <p:spPr>
+          <a:xfrm>
+            <a:off x="3602736" y="3364992"/>
+            <a:ext cx="1554480" cy="475488"/>
           </a:xfrm>
           <a:prstGeom prst="rect">
             <a:avLst/>
@@ -31760,7 +33869,7 @@
                 <a:ea typeface="Trebuchet MS" pitchFamily="34" charset="-122"/>
                 <a:cs typeface="Trebuchet MS" pitchFamily="34" charset="-120"/>
               </a:rPr>
-              <a:t>pear</a:t>
+              <a:t>ap</a:t>
             </a:r>
             <a:endParaRPr lang="en-US" sz="1400" dirty="0"/>
           </a:p>
@@ -31768,14 +33877,14 @@
       </p:sp>
       <p:sp>
         <p:nvSpPr>
-          <p:cNvPr id="30" name="Text 28"/>
-          <p:cNvSpPr/>
-          <p:nvPr/>
-        </p:nvSpPr>
-        <p:spPr>
-          <a:xfrm>
-            <a:off x="6016752" y="3364992"/>
-            <a:ext cx="411480" cy="475488"/>
+          <p:cNvPr id="33" name="Text 31"/>
+          <p:cNvSpPr/>
+          <p:nvPr/>
+        </p:nvSpPr>
+        <p:spPr>
+          <a:xfrm>
+            <a:off x="5157216" y="3364992"/>
+            <a:ext cx="73152" cy="475488"/>
           </a:xfrm>
           <a:prstGeom prst="rect">
             <a:avLst/>
@@ -31807,14 +33916,14 @@
       </p:sp>
       <p:sp>
         <p:nvSpPr>
-          <p:cNvPr id="31" name="Shape 29"/>
-          <p:cNvSpPr/>
-          <p:nvPr/>
-        </p:nvSpPr>
-        <p:spPr>
-          <a:xfrm>
-            <a:off x="6428232" y="3364992"/>
-            <a:ext cx="1645920" cy="475488"/>
+          <p:cNvPr id="34" name="Shape 32"/>
+          <p:cNvSpPr/>
+          <p:nvPr/>
+        </p:nvSpPr>
+        <p:spPr>
+          <a:xfrm>
+            <a:off x="5230368" y="3364992"/>
+            <a:ext cx="1554480" cy="475488"/>
           </a:xfrm>
           <a:prstGeom prst="rect">
             <a:avLst>
@@ -31834,14 +33943,14 @@
       </p:sp>
       <p:sp>
         <p:nvSpPr>
-          <p:cNvPr id="32" name="Text 30"/>
-          <p:cNvSpPr/>
-          <p:nvPr/>
-        </p:nvSpPr>
-        <p:spPr>
-          <a:xfrm>
-            <a:off x="6428232" y="3364992"/>
-            <a:ext cx="1645920" cy="475488"/>
+          <p:cNvPr id="35" name="Text 33"/>
+          <p:cNvSpPr/>
+          <p:nvPr/>
+        </p:nvSpPr>
+        <p:spPr>
+          <a:xfrm>
+            <a:off x="5230368" y="3364992"/>
+            <a:ext cx="1554480" cy="475488"/>
           </a:xfrm>
           <a:prstGeom prst="rect">
             <a:avLst/>
@@ -31865,7 +33974,7 @@
                 <a:ea typeface="Trebuchet MS" pitchFamily="34" charset="-122"/>
                 <a:cs typeface="Trebuchet MS" pitchFamily="34" charset="-120"/>
               </a:rPr>
-              <a:t>ing</a:t>
+              <a:t>pear</a:t>
             </a:r>
             <a:endParaRPr lang="en-US" sz="1400" dirty="0"/>
           </a:p>
@@ -31873,7 +33982,112 @@
       </p:sp>
       <p:sp>
         <p:nvSpPr>
-          <p:cNvPr id="33" name="Shape 31"/>
+          <p:cNvPr id="36" name="Text 34"/>
+          <p:cNvSpPr/>
+          <p:nvPr/>
+        </p:nvSpPr>
+        <p:spPr>
+          <a:xfrm>
+            <a:off x="6784848" y="3364992"/>
+            <a:ext cx="73152" cy="475488"/>
+          </a:xfrm>
+          <a:prstGeom prst="rect">
+            <a:avLst/>
+          </a:prstGeom>
+          <a:noFill/>
+          <a:ln/>
+        </p:spPr>
+        <p:txBody>
+          <a:bodyPr wrap="square" lIns="0" tIns="0" rIns="0" bIns="0" rtlCol="0" anchor="ctr"/>
+          <a:lstStyle/>
+          <a:p>
+            <a:pPr algn="ctr" indent="0" marL="0">
+              <a:buNone/>
+            </a:pPr>
+            <a:r>
+              <a:rPr lang="en-US" sz="1600" b="1" dirty="0">
+                <a:solidFill>
+                  <a:srgbClr val="0D9488"/>
+                </a:solidFill>
+                <a:latin typeface="Trebuchet MS" pitchFamily="34" charset="0"/>
+                <a:ea typeface="Trebuchet MS" pitchFamily="34" charset="-122"/>
+                <a:cs typeface="Trebuchet MS" pitchFamily="34" charset="-120"/>
+              </a:rPr>
+              <a:t>·</a:t>
+            </a:r>
+            <a:endParaRPr lang="en-US" sz="1600" dirty="0"/>
+          </a:p>
+        </p:txBody>
+      </p:sp>
+      <p:sp>
+        <p:nvSpPr>
+          <p:cNvPr id="37" name="Shape 35"/>
+          <p:cNvSpPr/>
+          <p:nvPr/>
+        </p:nvSpPr>
+        <p:spPr>
+          <a:xfrm>
+            <a:off x="6858000" y="3364992"/>
+            <a:ext cx="1554480" cy="475488"/>
+          </a:xfrm>
+          <a:prstGeom prst="rect">
+            <a:avLst>
+              <a:gd name="adj" fmla="val 9615"/>
+            </a:avLst>
+          </a:prstGeom>
+          <a:solidFill>
+            <a:srgbClr val="FFFFFF"/>
+          </a:solidFill>
+          <a:ln w="12700">
+            <a:solidFill>
+              <a:srgbClr val="0D9488"/>
+            </a:solidFill>
+            <a:prstDash val="solid"/>
+          </a:ln>
+        </p:spPr>
+      </p:sp>
+      <p:sp>
+        <p:nvSpPr>
+          <p:cNvPr id="38" name="Text 36"/>
+          <p:cNvSpPr/>
+          <p:nvPr/>
+        </p:nvSpPr>
+        <p:spPr>
+          <a:xfrm>
+            <a:off x="6858000" y="3364992"/>
+            <a:ext cx="1554480" cy="475488"/>
+          </a:xfrm>
+          <a:prstGeom prst="rect">
+            <a:avLst/>
+          </a:prstGeom>
+          <a:noFill/>
+          <a:ln/>
+        </p:spPr>
+        <p:txBody>
+          <a:bodyPr wrap="square" lIns="0" tIns="0" rIns="0" bIns="0" rtlCol="0" anchor="ctr"/>
+          <a:lstStyle/>
+          <a:p>
+            <a:pPr algn="ctr" indent="0" marL="0">
+              <a:buNone/>
+            </a:pPr>
+            <a:r>
+              <a:rPr lang="en-US" sz="1400" b="1" dirty="0">
+                <a:solidFill>
+                  <a:srgbClr val="0D9488"/>
+                </a:solidFill>
+                <a:latin typeface="Trebuchet MS" pitchFamily="34" charset="0"/>
+                <a:ea typeface="Trebuchet MS" pitchFamily="34" charset="-122"/>
+                <a:cs typeface="Trebuchet MS" pitchFamily="34" charset="-120"/>
+              </a:rPr>
+              <a:t>ance</a:t>
+            </a:r>
+            <a:endParaRPr lang="en-US" sz="1400" dirty="0"/>
+          </a:p>
+        </p:txBody>
+      </p:sp>
+      <p:sp>
+        <p:nvSpPr>
+          <p:cNvPr id="39" name="Shape 37"/>
           <p:cNvSpPr/>
           <p:nvPr/>
         </p:nvSpPr>
@@ -31900,7 +34114,7 @@
       </p:sp>
       <p:sp>
         <p:nvSpPr>
-          <p:cNvPr id="34" name="Text 32"/>
+          <p:cNvPr id="40" name="Text 38"/>
           <p:cNvSpPr/>
           <p:nvPr/>
         </p:nvSpPr>
@@ -31939,7 +34153,7 @@
       </p:sp>
       <p:sp>
         <p:nvSpPr>
-          <p:cNvPr id="35" name="Shape 33"/>
+          <p:cNvPr id="41" name="Shape 39"/>
           <p:cNvSpPr/>
           <p:nvPr/>
         </p:nvSpPr>
@@ -31966,14 +34180,14 @@
       </p:sp>
       <p:sp>
         <p:nvSpPr>
-          <p:cNvPr id="36" name="Shape 34"/>
-          <p:cNvSpPr/>
-          <p:nvPr/>
-        </p:nvSpPr>
-        <p:spPr>
-          <a:xfrm>
-            <a:off x="2427732" y="4169664"/>
-            <a:ext cx="685800" cy="475488"/>
+          <p:cNvPr id="42" name="Shape 40"/>
+          <p:cNvSpPr/>
+          <p:nvPr/>
+        </p:nvSpPr>
+        <p:spPr>
+          <a:xfrm>
+            <a:off x="1951828" y="4169664"/>
+            <a:ext cx="603504" cy="475488"/>
           </a:xfrm>
           <a:prstGeom prst="rect">
             <a:avLst>
@@ -31993,14 +34207,14 @@
       </p:sp>
       <p:sp>
         <p:nvSpPr>
-          <p:cNvPr id="37" name="Text 35"/>
-          <p:cNvSpPr/>
-          <p:nvPr/>
-        </p:nvSpPr>
-        <p:spPr>
-          <a:xfrm>
-            <a:off x="2427732" y="4169664"/>
-            <a:ext cx="685800" cy="475488"/>
+          <p:cNvPr id="43" name="Text 41"/>
+          <p:cNvSpPr/>
+          <p:nvPr/>
+        </p:nvSpPr>
+        <p:spPr>
+          <a:xfrm>
+            <a:off x="1951828" y="4169664"/>
+            <a:ext cx="603504" cy="475488"/>
           </a:xfrm>
           <a:prstGeom prst="rect">
             <a:avLst/>
@@ -32024,7 +34238,7 @@
                 <a:ea typeface="Trebuchet MS" pitchFamily="34" charset="-122"/>
                 <a:cs typeface="Trebuchet MS" pitchFamily="34" charset="-120"/>
               </a:rPr>
-              <a:t>a</a:t>
+              <a:t>r</a:t>
             </a:r>
             <a:endParaRPr lang="en-US" sz="900" dirty="0"/>
           </a:p>
@@ -32032,14 +34246,14 @@
       </p:sp>
       <p:sp>
         <p:nvSpPr>
-          <p:cNvPr id="38" name="Shape 36"/>
-          <p:cNvSpPr/>
-          <p:nvPr/>
-        </p:nvSpPr>
-        <p:spPr>
-          <a:xfrm>
-            <a:off x="3639312" y="4169664"/>
-            <a:ext cx="685800" cy="475488"/>
+          <p:cNvPr id="44" name="Shape 42"/>
+          <p:cNvSpPr/>
+          <p:nvPr/>
+        </p:nvSpPr>
+        <p:spPr>
+          <a:xfrm>
+            <a:off x="2605209" y="4169664"/>
+            <a:ext cx="603504" cy="475488"/>
           </a:xfrm>
           <a:prstGeom prst="rect">
             <a:avLst>
@@ -32059,14 +34273,14 @@
       </p:sp>
       <p:sp>
         <p:nvSpPr>
-          <p:cNvPr id="39" name="Text 37"/>
-          <p:cNvSpPr/>
-          <p:nvPr/>
-        </p:nvSpPr>
-        <p:spPr>
-          <a:xfrm>
-            <a:off x="3639312" y="4169664"/>
-            <a:ext cx="685800" cy="475488"/>
+          <p:cNvPr id="45" name="Text 43"/>
+          <p:cNvSpPr/>
+          <p:nvPr/>
+        </p:nvSpPr>
+        <p:spPr>
+          <a:xfrm>
+            <a:off x="2605209" y="4169664"/>
+            <a:ext cx="603504" cy="475488"/>
           </a:xfrm>
           <a:prstGeom prst="rect">
             <a:avLst/>
@@ -32090,7 +34304,7 @@
                 <a:ea typeface="Trebuchet MS" pitchFamily="34" charset="-122"/>
                 <a:cs typeface="Trebuchet MS" pitchFamily="34" charset="-120"/>
               </a:rPr>
-              <a:t>pp</a:t>
+              <a:t>e</a:t>
             </a:r>
             <a:endParaRPr lang="en-US" sz="900" dirty="0"/>
           </a:p>
@@ -32098,14 +34312,14 @@
       </p:sp>
       <p:sp>
         <p:nvSpPr>
-          <p:cNvPr id="40" name="Shape 38"/>
-          <p:cNvSpPr/>
-          <p:nvPr/>
-        </p:nvSpPr>
-        <p:spPr>
-          <a:xfrm>
-            <a:off x="4850892" y="4169664"/>
-            <a:ext cx="685800" cy="475488"/>
+          <p:cNvPr id="46" name="Shape 44"/>
+          <p:cNvSpPr/>
+          <p:nvPr/>
+        </p:nvSpPr>
+        <p:spPr>
+          <a:xfrm>
+            <a:off x="3258589" y="4169664"/>
+            <a:ext cx="603504" cy="475488"/>
           </a:xfrm>
           <a:prstGeom prst="rect">
             <a:avLst>
@@ -32125,14 +34339,14 @@
       </p:sp>
       <p:sp>
         <p:nvSpPr>
-          <p:cNvPr id="41" name="Text 39"/>
-          <p:cNvSpPr/>
-          <p:nvPr/>
-        </p:nvSpPr>
-        <p:spPr>
-          <a:xfrm>
-            <a:off x="4850892" y="4169664"/>
-            <a:ext cx="685800" cy="475488"/>
+          <p:cNvPr id="47" name="Text 45"/>
+          <p:cNvSpPr/>
+          <p:nvPr/>
+        </p:nvSpPr>
+        <p:spPr>
+          <a:xfrm>
+            <a:off x="3258589" y="4169664"/>
+            <a:ext cx="603504" cy="475488"/>
           </a:xfrm>
           <a:prstGeom prst="rect">
             <a:avLst/>
@@ -32156,7 +34370,7 @@
                 <a:ea typeface="Trebuchet MS" pitchFamily="34" charset="-122"/>
                 <a:cs typeface="Trebuchet MS" pitchFamily="34" charset="-120"/>
               </a:rPr>
-              <a:t>ear</a:t>
+              <a:t>a</a:t>
             </a:r>
             <a:endParaRPr lang="en-US" sz="900" dirty="0"/>
           </a:p>
@@ -32164,14 +34378,14 @@
       </p:sp>
       <p:sp>
         <p:nvSpPr>
-          <p:cNvPr id="42" name="Shape 40"/>
-          <p:cNvSpPr/>
-          <p:nvPr/>
-        </p:nvSpPr>
-        <p:spPr>
-          <a:xfrm>
-            <a:off x="6062472" y="4169664"/>
-            <a:ext cx="685800" cy="475488"/>
+          <p:cNvPr id="48" name="Shape 46"/>
+          <p:cNvSpPr/>
+          <p:nvPr/>
+        </p:nvSpPr>
+        <p:spPr>
+          <a:xfrm>
+            <a:off x="3911969" y="4169664"/>
+            <a:ext cx="603504" cy="475488"/>
           </a:xfrm>
           <a:prstGeom prst="rect">
             <a:avLst>
@@ -32191,14 +34405,14 @@
       </p:sp>
       <p:sp>
         <p:nvSpPr>
-          <p:cNvPr id="43" name="Text 41"/>
-          <p:cNvSpPr/>
-          <p:nvPr/>
-        </p:nvSpPr>
-        <p:spPr>
-          <a:xfrm>
-            <a:off x="6062472" y="4169664"/>
-            <a:ext cx="685800" cy="475488"/>
+          <p:cNvPr id="49" name="Text 47"/>
+          <p:cNvSpPr/>
+          <p:nvPr/>
+        </p:nvSpPr>
+        <p:spPr>
+          <a:xfrm>
+            <a:off x="3911969" y="4169664"/>
+            <a:ext cx="603504" cy="475488"/>
           </a:xfrm>
           <a:prstGeom prst="rect">
             <a:avLst/>
@@ -32222,7 +34436,7 @@
                 <a:ea typeface="Trebuchet MS" pitchFamily="34" charset="-122"/>
                 <a:cs typeface="Trebuchet MS" pitchFamily="34" charset="-120"/>
               </a:rPr>
-              <a:t>i</a:t>
+              <a:t>pp</a:t>
             </a:r>
             <a:endParaRPr lang="en-US" sz="900" dirty="0"/>
           </a:p>
@@ -32230,14 +34444,14 @@
       </p:sp>
       <p:sp>
         <p:nvSpPr>
-          <p:cNvPr id="44" name="Shape 42"/>
-          <p:cNvSpPr/>
-          <p:nvPr/>
-        </p:nvSpPr>
-        <p:spPr>
-          <a:xfrm>
-            <a:off x="7274052" y="4169664"/>
-            <a:ext cx="685800" cy="475488"/>
+          <p:cNvPr id="50" name="Shape 48"/>
+          <p:cNvSpPr/>
+          <p:nvPr/>
+        </p:nvSpPr>
+        <p:spPr>
+          <a:xfrm>
+            <a:off x="4565350" y="4169664"/>
+            <a:ext cx="603504" cy="475488"/>
           </a:xfrm>
           <a:prstGeom prst="rect">
             <a:avLst>
@@ -32257,14 +34471,14 @@
       </p:sp>
       <p:sp>
         <p:nvSpPr>
-          <p:cNvPr id="45" name="Text 43"/>
-          <p:cNvSpPr/>
-          <p:nvPr/>
-        </p:nvSpPr>
-        <p:spPr>
-          <a:xfrm>
-            <a:off x="7274052" y="4169664"/>
-            <a:ext cx="685800" cy="475488"/>
+          <p:cNvPr id="51" name="Text 49"/>
+          <p:cNvSpPr/>
+          <p:nvPr/>
+        </p:nvSpPr>
+        <p:spPr>
+          <a:xfrm>
+            <a:off x="4565350" y="4169664"/>
+            <a:ext cx="603504" cy="475488"/>
           </a:xfrm>
           <a:prstGeom prst="rect">
             <a:avLst/>
@@ -32288,7 +34502,337 @@
                 <a:ea typeface="Trebuchet MS" pitchFamily="34" charset="-122"/>
                 <a:cs typeface="Trebuchet MS" pitchFamily="34" charset="-120"/>
               </a:rPr>
-              <a:t>ng</a:t>
+              <a:t>ea</a:t>
+            </a:r>
+            <a:endParaRPr lang="en-US" sz="900" dirty="0"/>
+          </a:p>
+        </p:txBody>
+      </p:sp>
+      <p:sp>
+        <p:nvSpPr>
+          <p:cNvPr id="52" name="Shape 50"/>
+          <p:cNvSpPr/>
+          <p:nvPr/>
+        </p:nvSpPr>
+        <p:spPr>
+          <a:xfrm>
+            <a:off x="5218730" y="4169664"/>
+            <a:ext cx="603504" cy="475488"/>
+          </a:xfrm>
+          <a:prstGeom prst="rect">
+            <a:avLst>
+              <a:gd name="adj" fmla="val 7692"/>
+            </a:avLst>
+          </a:prstGeom>
+          <a:solidFill>
+            <a:srgbClr val="FFFFFF"/>
+          </a:solidFill>
+          <a:ln w="12700">
+            <a:solidFill>
+              <a:srgbClr val="DB2777"/>
+            </a:solidFill>
+            <a:prstDash val="solid"/>
+          </a:ln>
+        </p:spPr>
+      </p:sp>
+      <p:sp>
+        <p:nvSpPr>
+          <p:cNvPr id="53" name="Text 51"/>
+          <p:cNvSpPr/>
+          <p:nvPr/>
+        </p:nvSpPr>
+        <p:spPr>
+          <a:xfrm>
+            <a:off x="5218730" y="4169664"/>
+            <a:ext cx="603504" cy="475488"/>
+          </a:xfrm>
+          <a:prstGeom prst="rect">
+            <a:avLst/>
+          </a:prstGeom>
+          <a:noFill/>
+          <a:ln/>
+        </p:spPr>
+        <p:txBody>
+          <a:bodyPr wrap="square" lIns="0" tIns="0" rIns="0" bIns="0" rtlCol="0" anchor="ctr"/>
+          <a:lstStyle/>
+          <a:p>
+            <a:pPr algn="ctr" indent="0" marL="0">
+              <a:buNone/>
+            </a:pPr>
+            <a:r>
+              <a:rPr lang="en-US" sz="900" b="1" dirty="0">
+                <a:solidFill>
+                  <a:srgbClr val="9D174D"/>
+                </a:solidFill>
+                <a:latin typeface="Trebuchet MS" pitchFamily="34" charset="0"/>
+                <a:ea typeface="Trebuchet MS" pitchFamily="34" charset="-122"/>
+                <a:cs typeface="Trebuchet MS" pitchFamily="34" charset="-120"/>
+              </a:rPr>
+              <a:t>r</a:t>
+            </a:r>
+            <a:endParaRPr lang="en-US" sz="900" dirty="0"/>
+          </a:p>
+        </p:txBody>
+      </p:sp>
+      <p:sp>
+        <p:nvSpPr>
+          <p:cNvPr id="54" name="Shape 52"/>
+          <p:cNvSpPr/>
+          <p:nvPr/>
+        </p:nvSpPr>
+        <p:spPr>
+          <a:xfrm>
+            <a:off x="5872111" y="4169664"/>
+            <a:ext cx="603504" cy="475488"/>
+          </a:xfrm>
+          <a:prstGeom prst="rect">
+            <a:avLst>
+              <a:gd name="adj" fmla="val 7692"/>
+            </a:avLst>
+          </a:prstGeom>
+          <a:solidFill>
+            <a:srgbClr val="FFFFFF"/>
+          </a:solidFill>
+          <a:ln w="12700">
+            <a:solidFill>
+              <a:srgbClr val="DB2777"/>
+            </a:solidFill>
+            <a:prstDash val="solid"/>
+          </a:ln>
+        </p:spPr>
+      </p:sp>
+      <p:sp>
+        <p:nvSpPr>
+          <p:cNvPr id="55" name="Text 53"/>
+          <p:cNvSpPr/>
+          <p:nvPr/>
+        </p:nvSpPr>
+        <p:spPr>
+          <a:xfrm>
+            <a:off x="5872111" y="4169664"/>
+            <a:ext cx="603504" cy="475488"/>
+          </a:xfrm>
+          <a:prstGeom prst="rect">
+            <a:avLst/>
+          </a:prstGeom>
+          <a:noFill/>
+          <a:ln/>
+        </p:spPr>
+        <p:txBody>
+          <a:bodyPr wrap="square" lIns="0" tIns="0" rIns="0" bIns="0" rtlCol="0" anchor="ctr"/>
+          <a:lstStyle/>
+          <a:p>
+            <a:pPr algn="ctr" indent="0" marL="0">
+              <a:buNone/>
+            </a:pPr>
+            <a:r>
+              <a:rPr lang="en-US" sz="900" b="1" dirty="0">
+                <a:solidFill>
+                  <a:srgbClr val="9D174D"/>
+                </a:solidFill>
+                <a:latin typeface="Trebuchet MS" pitchFamily="34" charset="0"/>
+                <a:ea typeface="Trebuchet MS" pitchFamily="34" charset="-122"/>
+                <a:cs typeface="Trebuchet MS" pitchFamily="34" charset="-120"/>
+              </a:rPr>
+              <a:t>a</a:t>
+            </a:r>
+            <a:endParaRPr lang="en-US" sz="900" dirty="0"/>
+          </a:p>
+        </p:txBody>
+      </p:sp>
+      <p:sp>
+        <p:nvSpPr>
+          <p:cNvPr id="56" name="Shape 54"/>
+          <p:cNvSpPr/>
+          <p:nvPr/>
+        </p:nvSpPr>
+        <p:spPr>
+          <a:xfrm>
+            <a:off x="6525491" y="4169664"/>
+            <a:ext cx="603504" cy="475488"/>
+          </a:xfrm>
+          <a:prstGeom prst="rect">
+            <a:avLst>
+              <a:gd name="adj" fmla="val 7692"/>
+            </a:avLst>
+          </a:prstGeom>
+          <a:solidFill>
+            <a:srgbClr val="FFFFFF"/>
+          </a:solidFill>
+          <a:ln w="12700">
+            <a:solidFill>
+              <a:srgbClr val="DB2777"/>
+            </a:solidFill>
+            <a:prstDash val="solid"/>
+          </a:ln>
+        </p:spPr>
+      </p:sp>
+      <p:sp>
+        <p:nvSpPr>
+          <p:cNvPr id="57" name="Text 55"/>
+          <p:cNvSpPr/>
+          <p:nvPr/>
+        </p:nvSpPr>
+        <p:spPr>
+          <a:xfrm>
+            <a:off x="6525491" y="4169664"/>
+            <a:ext cx="603504" cy="475488"/>
+          </a:xfrm>
+          <a:prstGeom prst="rect">
+            <a:avLst/>
+          </a:prstGeom>
+          <a:noFill/>
+          <a:ln/>
+        </p:spPr>
+        <p:txBody>
+          <a:bodyPr wrap="square" lIns="0" tIns="0" rIns="0" bIns="0" rtlCol="0" anchor="ctr"/>
+          <a:lstStyle/>
+          <a:p>
+            <a:pPr algn="ctr" indent="0" marL="0">
+              <a:buNone/>
+            </a:pPr>
+            <a:r>
+              <a:rPr lang="en-US" sz="900" b="1" dirty="0">
+                <a:solidFill>
+                  <a:srgbClr val="9D174D"/>
+                </a:solidFill>
+                <a:latin typeface="Trebuchet MS" pitchFamily="34" charset="0"/>
+                <a:ea typeface="Trebuchet MS" pitchFamily="34" charset="-122"/>
+                <a:cs typeface="Trebuchet MS" pitchFamily="34" charset="-120"/>
+              </a:rPr>
+              <a:t>n</a:t>
+            </a:r>
+            <a:endParaRPr lang="en-US" sz="900" dirty="0"/>
+          </a:p>
+        </p:txBody>
+      </p:sp>
+      <p:sp>
+        <p:nvSpPr>
+          <p:cNvPr id="58" name="Shape 56"/>
+          <p:cNvSpPr/>
+          <p:nvPr/>
+        </p:nvSpPr>
+        <p:spPr>
+          <a:xfrm>
+            <a:off x="7178871" y="4169664"/>
+            <a:ext cx="603504" cy="475488"/>
+          </a:xfrm>
+          <a:prstGeom prst="rect">
+            <a:avLst>
+              <a:gd name="adj" fmla="val 7692"/>
+            </a:avLst>
+          </a:prstGeom>
+          <a:solidFill>
+            <a:srgbClr val="FFFFFF"/>
+          </a:solidFill>
+          <a:ln w="12700">
+            <a:solidFill>
+              <a:srgbClr val="DB2777"/>
+            </a:solidFill>
+            <a:prstDash val="solid"/>
+          </a:ln>
+        </p:spPr>
+      </p:sp>
+      <p:sp>
+        <p:nvSpPr>
+          <p:cNvPr id="59" name="Text 57"/>
+          <p:cNvSpPr/>
+          <p:nvPr/>
+        </p:nvSpPr>
+        <p:spPr>
+          <a:xfrm>
+            <a:off x="7178871" y="4169664"/>
+            <a:ext cx="603504" cy="475488"/>
+          </a:xfrm>
+          <a:prstGeom prst="rect">
+            <a:avLst/>
+          </a:prstGeom>
+          <a:noFill/>
+          <a:ln/>
+        </p:spPr>
+        <p:txBody>
+          <a:bodyPr wrap="square" lIns="0" tIns="0" rIns="0" bIns="0" rtlCol="0" anchor="ctr"/>
+          <a:lstStyle/>
+          <a:p>
+            <a:pPr algn="ctr" indent="0" marL="0">
+              <a:buNone/>
+            </a:pPr>
+            <a:r>
+              <a:rPr lang="en-US" sz="900" b="1" dirty="0">
+                <a:solidFill>
+                  <a:srgbClr val="9D174D"/>
+                </a:solidFill>
+                <a:latin typeface="Trebuchet MS" pitchFamily="34" charset="0"/>
+                <a:ea typeface="Trebuchet MS" pitchFamily="34" charset="-122"/>
+                <a:cs typeface="Trebuchet MS" pitchFamily="34" charset="-120"/>
+              </a:rPr>
+              <a:t>c</a:t>
+            </a:r>
+            <a:endParaRPr lang="en-US" sz="900" dirty="0"/>
+          </a:p>
+        </p:txBody>
+      </p:sp>
+      <p:sp>
+        <p:nvSpPr>
+          <p:cNvPr id="60" name="Shape 58"/>
+          <p:cNvSpPr/>
+          <p:nvPr/>
+        </p:nvSpPr>
+        <p:spPr>
+          <a:xfrm>
+            <a:off x="7832252" y="4169664"/>
+            <a:ext cx="603504" cy="475488"/>
+          </a:xfrm>
+          <a:prstGeom prst="rect">
+            <a:avLst>
+              <a:gd name="adj" fmla="val 7692"/>
+            </a:avLst>
+          </a:prstGeom>
+          <a:solidFill>
+            <a:srgbClr val="FFFFFF"/>
+          </a:solidFill>
+          <a:ln w="12700">
+            <a:solidFill>
+              <a:srgbClr val="DB2777"/>
+            </a:solidFill>
+            <a:prstDash val="solid"/>
+          </a:ln>
+        </p:spPr>
+      </p:sp>
+      <p:sp>
+        <p:nvSpPr>
+          <p:cNvPr id="61" name="Text 59"/>
+          <p:cNvSpPr/>
+          <p:nvPr/>
+        </p:nvSpPr>
+        <p:spPr>
+          <a:xfrm>
+            <a:off x="7832252" y="4169664"/>
+            <a:ext cx="603504" cy="475488"/>
+          </a:xfrm>
+          <a:prstGeom prst="rect">
+            <a:avLst/>
+          </a:prstGeom>
+          <a:noFill/>
+          <a:ln/>
+        </p:spPr>
+        <p:txBody>
+          <a:bodyPr wrap="square" lIns="0" tIns="0" rIns="0" bIns="0" rtlCol="0" anchor="ctr"/>
+          <a:lstStyle/>
+          <a:p>
+            <a:pPr algn="ctr" indent="0" marL="0">
+              <a:buNone/>
+            </a:pPr>
+            <a:r>
+              <a:rPr lang="en-US" sz="900" b="1" dirty="0">
+                <a:solidFill>
+                  <a:srgbClr val="9D174D"/>
+                </a:solidFill>
+                <a:latin typeface="Trebuchet MS" pitchFamily="34" charset="0"/>
+                <a:ea typeface="Trebuchet MS" pitchFamily="34" charset="-122"/>
+                <a:cs typeface="Trebuchet MS" pitchFamily="34" charset="-120"/>
+              </a:rPr>
+              <a:t>e</a:t>
             </a:r>
             <a:endParaRPr lang="en-US" sz="900" dirty="0"/>
           </a:p>
@@ -32580,7 +35124,7 @@
                 <a:ea typeface="Calibri" pitchFamily="34" charset="-122"/>
                 <a:cs typeface="Calibri" pitchFamily="34" charset="-120"/>
               </a:rPr>
-              <a:t>Word Labs  •  wordlabs.app  •  Root: 'appear' = to come into sight</a:t>
+              <a:t>Word Labs  •  wordlabs.app  •  Root: 'appear' = come into view</a:t>
             </a:r>
             <a:endParaRPr lang="en-US" sz="800" dirty="0"/>
           </a:p>
@@ -33749,7 +36293,7 @@
                 <a:ea typeface="Calibri" pitchFamily="34" charset="-122"/>
                 <a:cs typeface="Calibri" pitchFamily="34" charset="-120"/>
               </a:rPr>
-              <a:t>Word Labs  •  wordlabs.app  •  Root: 'appear' = to come into sight</a:t>
+              <a:t>Word Labs  •  wordlabs.app  •  Root: 'appear' = come into view</a:t>
             </a:r>
             <a:endParaRPr lang="en-US" sz="800" dirty="0"/>
           </a:p>
@@ -34050,7 +36594,7 @@
                 <a:ea typeface="Trebuchet MS" pitchFamily="34" charset="-122"/>
                 <a:cs typeface="Trebuchet MS" pitchFamily="34" charset="-120"/>
               </a:rPr>
-              <a:t>re-</a:t>
+              <a:t>dis-</a:t>
             </a:r>
             <a:endParaRPr lang="en-US" sz="1300" dirty="0"/>
           </a:p>
@@ -34242,7 +36786,7 @@
                 <a:ea typeface="Trebuchet MS" pitchFamily="34" charset="-122"/>
                 <a:cs typeface="Trebuchet MS" pitchFamily="34" charset="-120"/>
               </a:rPr>
-              <a:t>dis-</a:t>
+              <a:t>re-</a:t>
             </a:r>
             <a:endParaRPr lang="en-US" sz="1300" dirty="0"/>
           </a:p>
@@ -34331,7 +36875,7 @@
                 <a:ea typeface="Trebuchet MS" pitchFamily="34" charset="-122"/>
                 <a:cs typeface="Trebuchet MS" pitchFamily="34" charset="-120"/>
               </a:rPr>
-              <a:t>-ing</a:t>
+              <a:t>-ed</a:t>
             </a:r>
             <a:endParaRPr lang="en-US" sz="1300" dirty="0"/>
           </a:p>
@@ -34352,7 +36896,7 @@
             <a:avLst/>
           </a:prstGeom>
           <a:solidFill>
-            <a:srgbClr val="DDD6FE"/>
+            <a:srgbClr val="F8FAFC"/>
           </a:solidFill>
           <a:ln w="12700">
             <a:solidFill>
@@ -34364,14 +36908,64 @@
       </p:sp>
       <p:sp>
         <p:nvSpPr>
-          <p:cNvPr id="29" name="Text 27"/>
-          <p:cNvSpPr/>
-          <p:nvPr/>
-        </p:nvSpPr>
-        <p:spPr>
-          <a:xfrm>
-            <a:off x="365760" y="2404872"/>
-            <a:ext cx="2468880" cy="402336"/>
+          <p:cNvPr id="29" name="Shape 27"/>
+          <p:cNvSpPr/>
+          <p:nvPr/>
+        </p:nvSpPr>
+        <p:spPr>
+          <a:xfrm>
+            <a:off x="2971800" y="2404872"/>
+            <a:ext cx="2834640" cy="402336"/>
+          </a:xfrm>
+          <a:prstGeom prst="rect">
+            <a:avLst/>
+          </a:prstGeom>
+          <a:solidFill>
+            <a:srgbClr val="F8FAFC"/>
+          </a:solidFill>
+          <a:ln w="12700">
+            <a:solidFill>
+              <a:srgbClr val="E2E8F0"/>
+            </a:solidFill>
+            <a:prstDash val="solid"/>
+          </a:ln>
+        </p:spPr>
+      </p:sp>
+      <p:sp>
+        <p:nvSpPr>
+          <p:cNvPr id="30" name="Shape 28"/>
+          <p:cNvSpPr/>
+          <p:nvPr/>
+        </p:nvSpPr>
+        <p:spPr>
+          <a:xfrm>
+            <a:off x="5943600" y="2404872"/>
+            <a:ext cx="2834640" cy="402336"/>
+          </a:xfrm>
+          <a:prstGeom prst="rect">
+            <a:avLst/>
+          </a:prstGeom>
+          <a:solidFill>
+            <a:srgbClr val="FCE7F3"/>
+          </a:solidFill>
+          <a:ln w="12700">
+            <a:solidFill>
+              <a:srgbClr val="E2E8F0"/>
+            </a:solidFill>
+            <a:prstDash val="solid"/>
+          </a:ln>
+        </p:spPr>
+      </p:sp>
+      <p:sp>
+        <p:nvSpPr>
+          <p:cNvPr id="31" name="Text 29"/>
+          <p:cNvSpPr/>
+          <p:nvPr/>
+        </p:nvSpPr>
+        <p:spPr>
+          <a:xfrm>
+            <a:off x="5943600" y="2404872"/>
+            <a:ext cx="2834640" cy="402336"/>
           </a:xfrm>
           <a:prstGeom prst="rect">
             <a:avLst/>
@@ -34389,13 +36983,13 @@
             <a:r>
               <a:rPr lang="en-US" sz="1300" b="1" dirty="0">
                 <a:solidFill>
-                  <a:srgbClr val="4C1D95"/>
+                  <a:srgbClr val="9D174D"/>
                 </a:solidFill>
                 <a:latin typeface="Trebuchet MS" pitchFamily="34" charset="0"/>
                 <a:ea typeface="Trebuchet MS" pitchFamily="34" charset="-122"/>
                 <a:cs typeface="Trebuchet MS" pitchFamily="34" charset="-120"/>
               </a:rPr>
-              <a:t>mis-</a:t>
+              <a:t>-ing</a:t>
             </a:r>
             <a:endParaRPr lang="en-US" sz="1300" dirty="0"/>
           </a:p>
@@ -34403,20 +36997,45 @@
       </p:sp>
       <p:sp>
         <p:nvSpPr>
-          <p:cNvPr id="30" name="Shape 28"/>
-          <p:cNvSpPr/>
-          <p:nvPr/>
-        </p:nvSpPr>
-        <p:spPr>
-          <a:xfrm>
-            <a:off x="2971800" y="2404872"/>
+          <p:cNvPr id="32" name="Shape 30"/>
+          <p:cNvSpPr/>
+          <p:nvPr/>
+        </p:nvSpPr>
+        <p:spPr>
+          <a:xfrm>
+            <a:off x="365760" y="2825496"/>
+            <a:ext cx="2468880" cy="402336"/>
+          </a:xfrm>
+          <a:prstGeom prst="rect">
+            <a:avLst/>
+          </a:prstGeom>
+          <a:solidFill>
+            <a:srgbClr val="F1F5F9"/>
+          </a:solidFill>
+          <a:ln w="12700">
+            <a:solidFill>
+              <a:srgbClr val="E2E8F0"/>
+            </a:solidFill>
+            <a:prstDash val="solid"/>
+          </a:ln>
+        </p:spPr>
+      </p:sp>
+      <p:sp>
+        <p:nvSpPr>
+          <p:cNvPr id="33" name="Shape 31"/>
+          <p:cNvSpPr/>
+          <p:nvPr/>
+        </p:nvSpPr>
+        <p:spPr>
+          <a:xfrm>
+            <a:off x="2971800" y="2825496"/>
             <a:ext cx="2834640" cy="402336"/>
           </a:xfrm>
           <a:prstGeom prst="rect">
             <a:avLst/>
           </a:prstGeom>
           <a:solidFill>
-            <a:srgbClr val="F8FAFC"/>
+            <a:srgbClr val="F1F5F9"/>
           </a:solidFill>
           <a:ln w="12700">
             <a:solidFill>
@@ -34428,13 +37047,13 @@
       </p:sp>
       <p:sp>
         <p:nvSpPr>
-          <p:cNvPr id="31" name="Shape 29"/>
-          <p:cNvSpPr/>
-          <p:nvPr/>
-        </p:nvSpPr>
-        <p:spPr>
-          <a:xfrm>
-            <a:off x="5943600" y="2404872"/>
+          <p:cNvPr id="34" name="Shape 32"/>
+          <p:cNvSpPr/>
+          <p:nvPr/>
+        </p:nvSpPr>
+        <p:spPr>
+          <a:xfrm>
+            <a:off x="5943600" y="2825496"/>
             <a:ext cx="2834640" cy="402336"/>
           </a:xfrm>
           <a:prstGeom prst="rect">
@@ -34453,13 +37072,13 @@
       </p:sp>
       <p:sp>
         <p:nvSpPr>
-          <p:cNvPr id="32" name="Text 30"/>
-          <p:cNvSpPr/>
-          <p:nvPr/>
-        </p:nvSpPr>
-        <p:spPr>
-          <a:xfrm>
-            <a:off x="5943600" y="2404872"/>
+          <p:cNvPr id="35" name="Text 33"/>
+          <p:cNvSpPr/>
+          <p:nvPr/>
+        </p:nvSpPr>
+        <p:spPr>
+          <a:xfrm>
+            <a:off x="5943600" y="2825496"/>
             <a:ext cx="2834640" cy="402336"/>
           </a:xfrm>
           <a:prstGeom prst="rect">
@@ -34484,7 +37103,7 @@
                 <a:ea typeface="Trebuchet MS" pitchFamily="34" charset="-122"/>
                 <a:cs typeface="Trebuchet MS" pitchFamily="34" charset="-120"/>
               </a:rPr>
-              <a:t>-ed</a:t>
+              <a:t>-s</a:t>
             </a:r>
             <a:endParaRPr lang="en-US" sz="1300" dirty="0"/>
           </a:p>
@@ -34492,245 +37111,174 @@
       </p:sp>
       <p:sp>
         <p:nvSpPr>
-          <p:cNvPr id="33" name="Shape 31"/>
-          <p:cNvSpPr/>
-          <p:nvPr/>
-        </p:nvSpPr>
-        <p:spPr>
-          <a:xfrm>
-            <a:off x="365760" y="2825496"/>
-            <a:ext cx="2468880" cy="402336"/>
-          </a:xfrm>
-          <a:prstGeom prst="rect">
-            <a:avLst/>
-          </a:prstGeom>
-          <a:solidFill>
-            <a:srgbClr val="DDD6FE"/>
-          </a:solidFill>
-          <a:ln w="12700">
-            <a:solidFill>
-              <a:srgbClr val="E2E8F0"/>
-            </a:solidFill>
-            <a:prstDash val="solid"/>
-          </a:ln>
-        </p:spPr>
-      </p:sp>
-      <p:sp>
-        <p:nvSpPr>
-          <p:cNvPr id="34" name="Text 32"/>
-          <p:cNvSpPr/>
-          <p:nvPr/>
-        </p:nvSpPr>
-        <p:spPr>
-          <a:xfrm>
-            <a:off x="365760" y="2825496"/>
-            <a:ext cx="2468880" cy="402336"/>
-          </a:xfrm>
-          <a:prstGeom prst="rect">
-            <a:avLst/>
-          </a:prstGeom>
-          <a:noFill/>
-          <a:ln/>
-        </p:spPr>
-        <p:txBody>
-          <a:bodyPr wrap="square" lIns="0" tIns="0" rIns="0" bIns="0" rtlCol="0" anchor="ctr"/>
-          <a:lstStyle/>
-          <a:p>
-            <a:pPr algn="ctr" indent="0" marL="0">
-              <a:buNone/>
-            </a:pPr>
-            <a:r>
-              <a:rPr lang="en-US" sz="1300" b="1" dirty="0">
-                <a:solidFill>
-                  <a:srgbClr val="4C1D95"/>
+          <p:cNvPr id="36" name="Text 34"/>
+          <p:cNvSpPr/>
+          <p:nvPr/>
+        </p:nvSpPr>
+        <p:spPr>
+          <a:xfrm>
+            <a:off x="365760" y="3611880"/>
+            <a:ext cx="1828800" cy="347472"/>
+          </a:xfrm>
+          <a:prstGeom prst="rect">
+            <a:avLst/>
+          </a:prstGeom>
+          <a:noFill/>
+          <a:ln/>
+        </p:spPr>
+        <p:txBody>
+          <a:bodyPr wrap="square" lIns="0" tIns="0" rIns="0" bIns="0" rtlCol="0" anchor="ctr"/>
+          <a:lstStyle/>
+          <a:p>
+            <a:pPr algn="l" indent="0" marL="0">
+              <a:buNone/>
+            </a:pPr>
+            <a:r>
+              <a:rPr lang="en-US" sz="1200" b="1" dirty="0">
+                <a:solidFill>
+                  <a:srgbClr val="0F172A"/>
                 </a:solidFill>
                 <a:latin typeface="Trebuchet MS" pitchFamily="34" charset="0"/>
                 <a:ea typeface="Trebuchet MS" pitchFamily="34" charset="-122"/>
                 <a:cs typeface="Trebuchet MS" pitchFamily="34" charset="-120"/>
               </a:rPr>
-              <a:t>non-</a:t>
-            </a:r>
-            <a:endParaRPr lang="en-US" sz="1300" dirty="0"/>
-          </a:p>
-        </p:txBody>
-      </p:sp>
-      <p:sp>
-        <p:nvSpPr>
-          <p:cNvPr id="35" name="Shape 33"/>
-          <p:cNvSpPr/>
-          <p:nvPr/>
-        </p:nvSpPr>
-        <p:spPr>
-          <a:xfrm>
-            <a:off x="2971800" y="2825496"/>
-            <a:ext cx="2834640" cy="402336"/>
-          </a:xfrm>
-          <a:prstGeom prst="rect">
-            <a:avLst/>
-          </a:prstGeom>
-          <a:solidFill>
-            <a:srgbClr val="F1F5F9"/>
-          </a:solidFill>
-          <a:ln w="12700">
-            <a:solidFill>
-              <a:srgbClr val="E2E8F0"/>
-            </a:solidFill>
-            <a:prstDash val="solid"/>
-          </a:ln>
-        </p:spPr>
-      </p:sp>
-      <p:sp>
-        <p:nvSpPr>
-          <p:cNvPr id="36" name="Shape 34"/>
-          <p:cNvSpPr/>
-          <p:nvPr/>
-        </p:nvSpPr>
-        <p:spPr>
-          <a:xfrm>
-            <a:off x="5943600" y="2825496"/>
-            <a:ext cx="2834640" cy="402336"/>
-          </a:xfrm>
-          <a:prstGeom prst="rect">
-            <a:avLst/>
-          </a:prstGeom>
-          <a:solidFill>
-            <a:srgbClr val="FCE7F3"/>
-          </a:solidFill>
-          <a:ln w="12700">
-            <a:solidFill>
-              <a:srgbClr val="E2E8F0"/>
-            </a:solidFill>
-            <a:prstDash val="solid"/>
-          </a:ln>
-        </p:spPr>
-      </p:sp>
-      <p:sp>
-        <p:nvSpPr>
-          <p:cNvPr id="37" name="Text 35"/>
-          <p:cNvSpPr/>
-          <p:nvPr/>
-        </p:nvSpPr>
-        <p:spPr>
-          <a:xfrm>
-            <a:off x="5943600" y="2825496"/>
-            <a:ext cx="2834640" cy="402336"/>
-          </a:xfrm>
-          <a:prstGeom prst="rect">
-            <a:avLst/>
-          </a:prstGeom>
-          <a:noFill/>
-          <a:ln/>
-        </p:spPr>
-        <p:txBody>
-          <a:bodyPr wrap="square" lIns="0" tIns="0" rIns="0" bIns="0" rtlCol="0" anchor="ctr"/>
-          <a:lstStyle/>
-          <a:p>
-            <a:pPr algn="ctr" indent="0" marL="0">
-              <a:buNone/>
-            </a:pPr>
-            <a:r>
-              <a:rPr lang="en-US" sz="1300" b="1" dirty="0">
-                <a:solidFill>
-                  <a:srgbClr val="9D174D"/>
+              <a:t>Sample words:</a:t>
+            </a:r>
+            <a:endParaRPr lang="en-US" sz="1200" dirty="0"/>
+          </a:p>
+        </p:txBody>
+      </p:sp>
+      <p:sp>
+        <p:nvSpPr>
+          <p:cNvPr id="37" name="Shape 35"/>
+          <p:cNvSpPr/>
+          <p:nvPr/>
+        </p:nvSpPr>
+        <p:spPr>
+          <a:xfrm>
+            <a:off x="365760" y="4023360"/>
+            <a:ext cx="2011680" cy="402336"/>
+          </a:xfrm>
+          <a:prstGeom prst="rect">
+            <a:avLst>
+              <a:gd name="adj" fmla="val 13636"/>
+            </a:avLst>
+          </a:prstGeom>
+          <a:solidFill>
+            <a:srgbClr val="EEF2FF"/>
+          </a:solidFill>
+          <a:ln w="12700">
+            <a:solidFill>
+              <a:srgbClr val="6366F1"/>
+            </a:solidFill>
+            <a:prstDash val="solid"/>
+          </a:ln>
+        </p:spPr>
+      </p:sp>
+      <p:sp>
+        <p:nvSpPr>
+          <p:cNvPr id="38" name="Text 36"/>
+          <p:cNvSpPr/>
+          <p:nvPr/>
+        </p:nvSpPr>
+        <p:spPr>
+          <a:xfrm>
+            <a:off x="365760" y="4023360"/>
+            <a:ext cx="2011680" cy="402336"/>
+          </a:xfrm>
+          <a:prstGeom prst="rect">
+            <a:avLst/>
+          </a:prstGeom>
+          <a:noFill/>
+          <a:ln/>
+        </p:spPr>
+        <p:txBody>
+          <a:bodyPr wrap="square" lIns="0" tIns="0" rIns="0" bIns="0" rtlCol="0" anchor="ctr"/>
+          <a:lstStyle/>
+          <a:p>
+            <a:pPr algn="ctr" indent="0" marL="0">
+              <a:buNone/>
+            </a:pPr>
+            <a:r>
+              <a:rPr lang="en-US" sz="1200" b="1" dirty="0">
+                <a:solidFill>
+                  <a:srgbClr val="4338CA"/>
                 </a:solidFill>
                 <a:latin typeface="Trebuchet MS" pitchFamily="34" charset="0"/>
                 <a:ea typeface="Trebuchet MS" pitchFamily="34" charset="-122"/>
                 <a:cs typeface="Trebuchet MS" pitchFamily="34" charset="-120"/>
               </a:rPr>
-              <a:t>-s</a:t>
-            </a:r>
-            <a:endParaRPr lang="en-US" sz="1300" dirty="0"/>
-          </a:p>
-        </p:txBody>
-      </p:sp>
-      <p:sp>
-        <p:nvSpPr>
-          <p:cNvPr id="38" name="Shape 36"/>
-          <p:cNvSpPr/>
-          <p:nvPr/>
-        </p:nvSpPr>
-        <p:spPr>
-          <a:xfrm>
-            <a:off x="365760" y="3246120"/>
-            <a:ext cx="2468880" cy="402336"/>
-          </a:xfrm>
-          <a:prstGeom prst="rect">
-            <a:avLst/>
-          </a:prstGeom>
-          <a:solidFill>
-            <a:srgbClr val="DDD6FE"/>
-          </a:solidFill>
-          <a:ln w="12700">
-            <a:solidFill>
-              <a:srgbClr val="E2E8F0"/>
-            </a:solidFill>
-            <a:prstDash val="solid"/>
-          </a:ln>
-        </p:spPr>
-      </p:sp>
-      <p:sp>
-        <p:nvSpPr>
-          <p:cNvPr id="39" name="Text 37"/>
-          <p:cNvSpPr/>
-          <p:nvPr/>
-        </p:nvSpPr>
-        <p:spPr>
-          <a:xfrm>
-            <a:off x="365760" y="3246120"/>
-            <a:ext cx="2468880" cy="402336"/>
-          </a:xfrm>
-          <a:prstGeom prst="rect">
-            <a:avLst/>
-          </a:prstGeom>
-          <a:noFill/>
-          <a:ln/>
-        </p:spPr>
-        <p:txBody>
-          <a:bodyPr wrap="square" lIns="0" tIns="0" rIns="0" bIns="0" rtlCol="0" anchor="ctr"/>
-          <a:lstStyle/>
-          <a:p>
-            <a:pPr algn="ctr" indent="0" marL="0">
-              <a:buNone/>
-            </a:pPr>
-            <a:r>
-              <a:rPr lang="en-US" sz="1300" b="1" dirty="0">
-                <a:solidFill>
-                  <a:srgbClr val="4C1D95"/>
+              <a:t>appear</a:t>
+            </a:r>
+            <a:endParaRPr lang="en-US" sz="1200" dirty="0"/>
+          </a:p>
+        </p:txBody>
+      </p:sp>
+      <p:sp>
+        <p:nvSpPr>
+          <p:cNvPr id="39" name="Shape 37"/>
+          <p:cNvSpPr/>
+          <p:nvPr/>
+        </p:nvSpPr>
+        <p:spPr>
+          <a:xfrm>
+            <a:off x="2542032" y="4023360"/>
+            <a:ext cx="2011680" cy="402336"/>
+          </a:xfrm>
+          <a:prstGeom prst="rect">
+            <a:avLst>
+              <a:gd name="adj" fmla="val 13636"/>
+            </a:avLst>
+          </a:prstGeom>
+          <a:solidFill>
+            <a:srgbClr val="EEF2FF"/>
+          </a:solidFill>
+          <a:ln w="12700">
+            <a:solidFill>
+              <a:srgbClr val="6366F1"/>
+            </a:solidFill>
+            <a:prstDash val="solid"/>
+          </a:ln>
+        </p:spPr>
+      </p:sp>
+      <p:sp>
+        <p:nvSpPr>
+          <p:cNvPr id="40" name="Text 38"/>
+          <p:cNvSpPr/>
+          <p:nvPr/>
+        </p:nvSpPr>
+        <p:spPr>
+          <a:xfrm>
+            <a:off x="2542032" y="4023360"/>
+            <a:ext cx="2011680" cy="402336"/>
+          </a:xfrm>
+          <a:prstGeom prst="rect">
+            <a:avLst/>
+          </a:prstGeom>
+          <a:noFill/>
+          <a:ln/>
+        </p:spPr>
+        <p:txBody>
+          <a:bodyPr wrap="square" lIns="0" tIns="0" rIns="0" bIns="0" rtlCol="0" anchor="ctr"/>
+          <a:lstStyle/>
+          <a:p>
+            <a:pPr algn="ctr" indent="0" marL="0">
+              <a:buNone/>
+            </a:pPr>
+            <a:r>
+              <a:rPr lang="en-US" sz="1200" b="1" dirty="0">
+                <a:solidFill>
+                  <a:srgbClr val="4338CA"/>
                 </a:solidFill>
                 <a:latin typeface="Trebuchet MS" pitchFamily="34" charset="0"/>
                 <a:ea typeface="Trebuchet MS" pitchFamily="34" charset="-122"/>
                 <a:cs typeface="Trebuchet MS" pitchFamily="34" charset="-120"/>
               </a:rPr>
-              <a:t>un-</a:t>
-            </a:r>
-            <a:endParaRPr lang="en-US" sz="1300" dirty="0"/>
-          </a:p>
-        </p:txBody>
-      </p:sp>
-      <p:sp>
-        <p:nvSpPr>
-          <p:cNvPr id="40" name="Shape 38"/>
-          <p:cNvSpPr/>
-          <p:nvPr/>
-        </p:nvSpPr>
-        <p:spPr>
-          <a:xfrm>
-            <a:off x="2971800" y="3246120"/>
-            <a:ext cx="2834640" cy="402336"/>
-          </a:xfrm>
-          <a:prstGeom prst="rect">
-            <a:avLst/>
-          </a:prstGeom>
-          <a:solidFill>
-            <a:srgbClr val="F8FAFC"/>
-          </a:solidFill>
-          <a:ln w="12700">
-            <a:solidFill>
-              <a:srgbClr val="E2E8F0"/>
-            </a:solidFill>
-            <a:prstDash val="solid"/>
-          </a:ln>
-        </p:spPr>
+              <a:t>appears</a:t>
+            </a:r>
+            <a:endParaRPr lang="en-US" sz="1200" dirty="0"/>
+          </a:p>
+        </p:txBody>
       </p:sp>
       <p:sp>
         <p:nvSpPr>
@@ -34740,18 +37288,20 @@
         </p:nvSpPr>
         <p:spPr>
           <a:xfrm>
-            <a:off x="5943600" y="3246120"/>
-            <a:ext cx="2834640" cy="402336"/>
-          </a:xfrm>
-          <a:prstGeom prst="rect">
-            <a:avLst/>
-          </a:prstGeom>
-          <a:solidFill>
-            <a:srgbClr val="FCE7F3"/>
-          </a:solidFill>
-          <a:ln w="12700">
-            <a:solidFill>
-              <a:srgbClr val="E2E8F0"/>
+            <a:off x="4718304" y="4023360"/>
+            <a:ext cx="2011680" cy="402336"/>
+          </a:xfrm>
+          <a:prstGeom prst="rect">
+            <a:avLst>
+              <a:gd name="adj" fmla="val 13636"/>
+            </a:avLst>
+          </a:prstGeom>
+          <a:solidFill>
+            <a:srgbClr val="EEF2FF"/>
+          </a:solidFill>
+          <a:ln w="12700">
+            <a:solidFill>
+              <a:srgbClr val="6366F1"/>
             </a:solidFill>
             <a:prstDash val="solid"/>
           </a:ln>
@@ -34765,71 +37315,98 @@
         </p:nvSpPr>
         <p:spPr>
           <a:xfrm>
-            <a:off x="5943600" y="3246120"/>
-            <a:ext cx="2834640" cy="402336"/>
-          </a:xfrm>
-          <a:prstGeom prst="rect">
-            <a:avLst/>
-          </a:prstGeom>
-          <a:noFill/>
-          <a:ln/>
-        </p:spPr>
-        <p:txBody>
-          <a:bodyPr wrap="square" lIns="0" tIns="0" rIns="0" bIns="0" rtlCol="0" anchor="ctr"/>
-          <a:lstStyle/>
-          <a:p>
-            <a:pPr algn="ctr" indent="0" marL="0">
-              <a:buNone/>
-            </a:pPr>
-            <a:r>
-              <a:rPr lang="en-US" sz="1300" b="1" dirty="0">
-                <a:solidFill>
-                  <a:srgbClr val="9D174D"/>
+            <a:off x="4718304" y="4023360"/>
+            <a:ext cx="2011680" cy="402336"/>
+          </a:xfrm>
+          <a:prstGeom prst="rect">
+            <a:avLst/>
+          </a:prstGeom>
+          <a:noFill/>
+          <a:ln/>
+        </p:spPr>
+        <p:txBody>
+          <a:bodyPr wrap="square" lIns="0" tIns="0" rIns="0" bIns="0" rtlCol="0" anchor="ctr"/>
+          <a:lstStyle/>
+          <a:p>
+            <a:pPr algn="ctr" indent="0" marL="0">
+              <a:buNone/>
+            </a:pPr>
+            <a:r>
+              <a:rPr lang="en-US" sz="1200" b="1" dirty="0">
+                <a:solidFill>
+                  <a:srgbClr val="4338CA"/>
                 </a:solidFill>
                 <a:latin typeface="Trebuchet MS" pitchFamily="34" charset="0"/>
                 <a:ea typeface="Trebuchet MS" pitchFamily="34" charset="-122"/>
                 <a:cs typeface="Trebuchet MS" pitchFamily="34" charset="-120"/>
               </a:rPr>
-              <a:t>-ance</a:t>
-            </a:r>
-            <a:endParaRPr lang="en-US" sz="1300" dirty="0"/>
-          </a:p>
-        </p:txBody>
-      </p:sp>
-      <p:sp>
-        <p:nvSpPr>
-          <p:cNvPr id="43" name="Text 41"/>
-          <p:cNvSpPr/>
-          <p:nvPr/>
-        </p:nvSpPr>
-        <p:spPr>
-          <a:xfrm>
-            <a:off x="365760" y="3611880"/>
-            <a:ext cx="1828800" cy="347472"/>
-          </a:xfrm>
-          <a:prstGeom prst="rect">
-            <a:avLst/>
-          </a:prstGeom>
-          <a:noFill/>
-          <a:ln/>
-        </p:spPr>
-        <p:txBody>
-          <a:bodyPr wrap="square" lIns="0" tIns="0" rIns="0" bIns="0" rtlCol="0" anchor="ctr"/>
-          <a:lstStyle/>
-          <a:p>
-            <a:pPr algn="l" indent="0" marL="0">
+              <a:t>appeared</a:t>
+            </a:r>
+            <a:endParaRPr lang="en-US" sz="1200" dirty="0"/>
+          </a:p>
+        </p:txBody>
+      </p:sp>
+      <p:sp>
+        <p:nvSpPr>
+          <p:cNvPr id="43" name="Shape 41"/>
+          <p:cNvSpPr/>
+          <p:nvPr/>
+        </p:nvSpPr>
+        <p:spPr>
+          <a:xfrm>
+            <a:off x="6894576" y="4023360"/>
+            <a:ext cx="2011680" cy="402336"/>
+          </a:xfrm>
+          <a:prstGeom prst="rect">
+            <a:avLst>
+              <a:gd name="adj" fmla="val 13636"/>
+            </a:avLst>
+          </a:prstGeom>
+          <a:solidFill>
+            <a:srgbClr val="EEF2FF"/>
+          </a:solidFill>
+          <a:ln w="12700">
+            <a:solidFill>
+              <a:srgbClr val="6366F1"/>
+            </a:solidFill>
+            <a:prstDash val="solid"/>
+          </a:ln>
+        </p:spPr>
+      </p:sp>
+      <p:sp>
+        <p:nvSpPr>
+          <p:cNvPr id="44" name="Text 42"/>
+          <p:cNvSpPr/>
+          <p:nvPr/>
+        </p:nvSpPr>
+        <p:spPr>
+          <a:xfrm>
+            <a:off x="6894576" y="4023360"/>
+            <a:ext cx="2011680" cy="402336"/>
+          </a:xfrm>
+          <a:prstGeom prst="rect">
+            <a:avLst/>
+          </a:prstGeom>
+          <a:noFill/>
+          <a:ln/>
+        </p:spPr>
+        <p:txBody>
+          <a:bodyPr wrap="square" lIns="0" tIns="0" rIns="0" bIns="0" rtlCol="0" anchor="ctr"/>
+          <a:lstStyle/>
+          <a:p>
+            <a:pPr algn="ctr" indent="0" marL="0">
               <a:buNone/>
             </a:pPr>
             <a:r>
               <a:rPr lang="en-US" sz="1200" b="1" dirty="0">
                 <a:solidFill>
-                  <a:srgbClr val="0F172A"/>
+                  <a:srgbClr val="4338CA"/>
                 </a:solidFill>
                 <a:latin typeface="Trebuchet MS" pitchFamily="34" charset="0"/>
                 <a:ea typeface="Trebuchet MS" pitchFamily="34" charset="-122"/>
                 <a:cs typeface="Trebuchet MS" pitchFamily="34" charset="-120"/>
               </a:rPr>
-              <a:t>Sample words:</a:t>
+              <a:t>reappear</a:t>
             </a:r>
             <a:endParaRPr lang="en-US" sz="1200" dirty="0"/>
           </a:p>
@@ -34837,13 +37414,13 @@
       </p:sp>
       <p:sp>
         <p:nvSpPr>
-          <p:cNvPr id="44" name="Shape 42"/>
-          <p:cNvSpPr/>
-          <p:nvPr/>
-        </p:nvSpPr>
-        <p:spPr>
-          <a:xfrm>
-            <a:off x="365760" y="4023360"/>
+          <p:cNvPr id="45" name="Shape 43"/>
+          <p:cNvSpPr/>
+          <p:nvPr/>
+        </p:nvSpPr>
+        <p:spPr>
+          <a:xfrm>
+            <a:off x="365760" y="4498848"/>
             <a:ext cx="2011680" cy="402336"/>
           </a:xfrm>
           <a:prstGeom prst="rect">
@@ -34864,13 +37441,13 @@
       </p:sp>
       <p:sp>
         <p:nvSpPr>
-          <p:cNvPr id="45" name="Text 43"/>
-          <p:cNvSpPr/>
-          <p:nvPr/>
-        </p:nvSpPr>
-        <p:spPr>
-          <a:xfrm>
-            <a:off x="365760" y="4023360"/>
+          <p:cNvPr id="46" name="Text 44"/>
+          <p:cNvSpPr/>
+          <p:nvPr/>
+        </p:nvSpPr>
+        <p:spPr>
+          <a:xfrm>
+            <a:off x="365760" y="4498848"/>
             <a:ext cx="2011680" cy="402336"/>
           </a:xfrm>
           <a:prstGeom prst="rect">
@@ -34895,7 +37472,7 @@
                 <a:ea typeface="Trebuchet MS" pitchFamily="34" charset="-122"/>
                 <a:cs typeface="Trebuchet MS" pitchFamily="34" charset="-120"/>
               </a:rPr>
-              <a:t>appear</a:t>
+              <a:t>appearing</a:t>
             </a:r>
             <a:endParaRPr lang="en-US" sz="1200" dirty="0"/>
           </a:p>
@@ -34903,13 +37480,13 @@
       </p:sp>
       <p:sp>
         <p:nvSpPr>
-          <p:cNvPr id="46" name="Shape 44"/>
-          <p:cNvSpPr/>
-          <p:nvPr/>
-        </p:nvSpPr>
-        <p:spPr>
-          <a:xfrm>
-            <a:off x="2542032" y="4023360"/>
+          <p:cNvPr id="47" name="Shape 45"/>
+          <p:cNvSpPr/>
+          <p:nvPr/>
+        </p:nvSpPr>
+        <p:spPr>
+          <a:xfrm>
+            <a:off x="2542032" y="4498848"/>
             <a:ext cx="2011680" cy="402336"/>
           </a:xfrm>
           <a:prstGeom prst="rect">
@@ -34930,13 +37507,13 @@
       </p:sp>
       <p:sp>
         <p:nvSpPr>
-          <p:cNvPr id="47" name="Text 45"/>
-          <p:cNvSpPr/>
-          <p:nvPr/>
-        </p:nvSpPr>
-        <p:spPr>
-          <a:xfrm>
-            <a:off x="2542032" y="4023360"/>
+          <p:cNvPr id="48" name="Text 46"/>
+          <p:cNvSpPr/>
+          <p:nvPr/>
+        </p:nvSpPr>
+        <p:spPr>
+          <a:xfrm>
+            <a:off x="2542032" y="4498848"/>
             <a:ext cx="2011680" cy="402336"/>
           </a:xfrm>
           <a:prstGeom prst="rect">
@@ -34961,7 +37538,7 @@
                 <a:ea typeface="Trebuchet MS" pitchFamily="34" charset="-122"/>
                 <a:cs typeface="Trebuchet MS" pitchFamily="34" charset="-120"/>
               </a:rPr>
-              <a:t>appears</a:t>
+              <a:t>disappear</a:t>
             </a:r>
             <a:endParaRPr lang="en-US" sz="1200" dirty="0"/>
           </a:p>
@@ -34969,13 +37546,13 @@
       </p:sp>
       <p:sp>
         <p:nvSpPr>
-          <p:cNvPr id="48" name="Shape 46"/>
-          <p:cNvSpPr/>
-          <p:nvPr/>
-        </p:nvSpPr>
-        <p:spPr>
-          <a:xfrm>
-            <a:off x="4718304" y="4023360"/>
+          <p:cNvPr id="49" name="Shape 47"/>
+          <p:cNvSpPr/>
+          <p:nvPr/>
+        </p:nvSpPr>
+        <p:spPr>
+          <a:xfrm>
+            <a:off x="4718304" y="4498848"/>
             <a:ext cx="2011680" cy="402336"/>
           </a:xfrm>
           <a:prstGeom prst="rect">
@@ -34996,13 +37573,13 @@
       </p:sp>
       <p:sp>
         <p:nvSpPr>
-          <p:cNvPr id="49" name="Text 47"/>
-          <p:cNvSpPr/>
-          <p:nvPr/>
-        </p:nvSpPr>
-        <p:spPr>
-          <a:xfrm>
-            <a:off x="4718304" y="4023360"/>
+          <p:cNvPr id="50" name="Text 48"/>
+          <p:cNvSpPr/>
+          <p:nvPr/>
+        </p:nvSpPr>
+        <p:spPr>
+          <a:xfrm>
+            <a:off x="4718304" y="4498848"/>
             <a:ext cx="2011680" cy="402336"/>
           </a:xfrm>
           <a:prstGeom prst="rect">
@@ -35027,337 +37604,7 @@
                 <a:ea typeface="Trebuchet MS" pitchFamily="34" charset="-122"/>
                 <a:cs typeface="Trebuchet MS" pitchFamily="34" charset="-120"/>
               </a:rPr>
-              <a:t>appeared</a:t>
-            </a:r>
-            <a:endParaRPr lang="en-US" sz="1200" dirty="0"/>
-          </a:p>
-        </p:txBody>
-      </p:sp>
-      <p:sp>
-        <p:nvSpPr>
-          <p:cNvPr id="50" name="Shape 48"/>
-          <p:cNvSpPr/>
-          <p:nvPr/>
-        </p:nvSpPr>
-        <p:spPr>
-          <a:xfrm>
-            <a:off x="6894576" y="4023360"/>
-            <a:ext cx="2011680" cy="402336"/>
-          </a:xfrm>
-          <a:prstGeom prst="rect">
-            <a:avLst>
-              <a:gd name="adj" fmla="val 13636"/>
-            </a:avLst>
-          </a:prstGeom>
-          <a:solidFill>
-            <a:srgbClr val="EEF2FF"/>
-          </a:solidFill>
-          <a:ln w="12700">
-            <a:solidFill>
-              <a:srgbClr val="6366F1"/>
-            </a:solidFill>
-            <a:prstDash val="solid"/>
-          </a:ln>
-        </p:spPr>
-      </p:sp>
-      <p:sp>
-        <p:nvSpPr>
-          <p:cNvPr id="51" name="Text 49"/>
-          <p:cNvSpPr/>
-          <p:nvPr/>
-        </p:nvSpPr>
-        <p:spPr>
-          <a:xfrm>
-            <a:off x="6894576" y="4023360"/>
-            <a:ext cx="2011680" cy="402336"/>
-          </a:xfrm>
-          <a:prstGeom prst="rect">
-            <a:avLst/>
-          </a:prstGeom>
-          <a:noFill/>
-          <a:ln/>
-        </p:spPr>
-        <p:txBody>
-          <a:bodyPr wrap="square" lIns="0" tIns="0" rIns="0" bIns="0" rtlCol="0" anchor="ctr"/>
-          <a:lstStyle/>
-          <a:p>
-            <a:pPr algn="ctr" indent="0" marL="0">
-              <a:buNone/>
-            </a:pPr>
-            <a:r>
-              <a:rPr lang="en-US" sz="1200" b="1" dirty="0">
-                <a:solidFill>
-                  <a:srgbClr val="4338CA"/>
-                </a:solidFill>
-                <a:latin typeface="Trebuchet MS" pitchFamily="34" charset="0"/>
-                <a:ea typeface="Trebuchet MS" pitchFamily="34" charset="-122"/>
-                <a:cs typeface="Trebuchet MS" pitchFamily="34" charset="-120"/>
-              </a:rPr>
-              <a:t>appearing</a:t>
-            </a:r>
-            <a:endParaRPr lang="en-US" sz="1200" dirty="0"/>
-          </a:p>
-        </p:txBody>
-      </p:sp>
-      <p:sp>
-        <p:nvSpPr>
-          <p:cNvPr id="52" name="Shape 50"/>
-          <p:cNvSpPr/>
-          <p:nvPr/>
-        </p:nvSpPr>
-        <p:spPr>
-          <a:xfrm>
-            <a:off x="365760" y="4498848"/>
-            <a:ext cx="2011680" cy="402336"/>
-          </a:xfrm>
-          <a:prstGeom prst="rect">
-            <a:avLst>
-              <a:gd name="adj" fmla="val 13636"/>
-            </a:avLst>
-          </a:prstGeom>
-          <a:solidFill>
-            <a:srgbClr val="EEF2FF"/>
-          </a:solidFill>
-          <a:ln w="12700">
-            <a:solidFill>
-              <a:srgbClr val="6366F1"/>
-            </a:solidFill>
-            <a:prstDash val="solid"/>
-          </a:ln>
-        </p:spPr>
-      </p:sp>
-      <p:sp>
-        <p:nvSpPr>
-          <p:cNvPr id="53" name="Text 51"/>
-          <p:cNvSpPr/>
-          <p:nvPr/>
-        </p:nvSpPr>
-        <p:spPr>
-          <a:xfrm>
-            <a:off x="365760" y="4498848"/>
-            <a:ext cx="2011680" cy="402336"/>
-          </a:xfrm>
-          <a:prstGeom prst="rect">
-            <a:avLst/>
-          </a:prstGeom>
-          <a:noFill/>
-          <a:ln/>
-        </p:spPr>
-        <p:txBody>
-          <a:bodyPr wrap="square" lIns="0" tIns="0" rIns="0" bIns="0" rtlCol="0" anchor="ctr"/>
-          <a:lstStyle/>
-          <a:p>
-            <a:pPr algn="ctr" indent="0" marL="0">
-              <a:buNone/>
-            </a:pPr>
-            <a:r>
-              <a:rPr lang="en-US" sz="1200" b="1" dirty="0">
-                <a:solidFill>
-                  <a:srgbClr val="4338CA"/>
-                </a:solidFill>
-                <a:latin typeface="Trebuchet MS" pitchFamily="34" charset="0"/>
-                <a:ea typeface="Trebuchet MS" pitchFamily="34" charset="-122"/>
-                <a:cs typeface="Trebuchet MS" pitchFamily="34" charset="-120"/>
-              </a:rPr>
-              <a:t>appearance</a:t>
-            </a:r>
-            <a:endParaRPr lang="en-US" sz="1200" dirty="0"/>
-          </a:p>
-        </p:txBody>
-      </p:sp>
-      <p:sp>
-        <p:nvSpPr>
-          <p:cNvPr id="54" name="Shape 52"/>
-          <p:cNvSpPr/>
-          <p:nvPr/>
-        </p:nvSpPr>
-        <p:spPr>
-          <a:xfrm>
-            <a:off x="2542032" y="4498848"/>
-            <a:ext cx="2011680" cy="402336"/>
-          </a:xfrm>
-          <a:prstGeom prst="rect">
-            <a:avLst>
-              <a:gd name="adj" fmla="val 13636"/>
-            </a:avLst>
-          </a:prstGeom>
-          <a:solidFill>
-            <a:srgbClr val="EEF2FF"/>
-          </a:solidFill>
-          <a:ln w="12700">
-            <a:solidFill>
-              <a:srgbClr val="6366F1"/>
-            </a:solidFill>
-            <a:prstDash val="solid"/>
-          </a:ln>
-        </p:spPr>
-      </p:sp>
-      <p:sp>
-        <p:nvSpPr>
-          <p:cNvPr id="55" name="Text 53"/>
-          <p:cNvSpPr/>
-          <p:nvPr/>
-        </p:nvSpPr>
-        <p:spPr>
-          <a:xfrm>
-            <a:off x="2542032" y="4498848"/>
-            <a:ext cx="2011680" cy="402336"/>
-          </a:xfrm>
-          <a:prstGeom prst="rect">
-            <a:avLst/>
-          </a:prstGeom>
-          <a:noFill/>
-          <a:ln/>
-        </p:spPr>
-        <p:txBody>
-          <a:bodyPr wrap="square" lIns="0" tIns="0" rIns="0" bIns="0" rtlCol="0" anchor="ctr"/>
-          <a:lstStyle/>
-          <a:p>
-            <a:pPr algn="ctr" indent="0" marL="0">
-              <a:buNone/>
-            </a:pPr>
-            <a:r>
-              <a:rPr lang="en-US" sz="1200" b="1" dirty="0">
-                <a:solidFill>
-                  <a:srgbClr val="4338CA"/>
-                </a:solidFill>
-                <a:latin typeface="Trebuchet MS" pitchFamily="34" charset="0"/>
-                <a:ea typeface="Trebuchet MS" pitchFamily="34" charset="-122"/>
-                <a:cs typeface="Trebuchet MS" pitchFamily="34" charset="-120"/>
-              </a:rPr>
-              <a:t>disappear</a:t>
-            </a:r>
-            <a:endParaRPr lang="en-US" sz="1200" dirty="0"/>
-          </a:p>
-        </p:txBody>
-      </p:sp>
-      <p:sp>
-        <p:nvSpPr>
-          <p:cNvPr id="56" name="Shape 54"/>
-          <p:cNvSpPr/>
-          <p:nvPr/>
-        </p:nvSpPr>
-        <p:spPr>
-          <a:xfrm>
-            <a:off x="4718304" y="4498848"/>
-            <a:ext cx="2011680" cy="402336"/>
-          </a:xfrm>
-          <a:prstGeom prst="rect">
-            <a:avLst>
-              <a:gd name="adj" fmla="val 13636"/>
-            </a:avLst>
-          </a:prstGeom>
-          <a:solidFill>
-            <a:srgbClr val="EEF2FF"/>
-          </a:solidFill>
-          <a:ln w="12700">
-            <a:solidFill>
-              <a:srgbClr val="6366F1"/>
-            </a:solidFill>
-            <a:prstDash val="solid"/>
-          </a:ln>
-        </p:spPr>
-      </p:sp>
-      <p:sp>
-        <p:nvSpPr>
-          <p:cNvPr id="57" name="Text 55"/>
-          <p:cNvSpPr/>
-          <p:nvPr/>
-        </p:nvSpPr>
-        <p:spPr>
-          <a:xfrm>
-            <a:off x="4718304" y="4498848"/>
-            <a:ext cx="2011680" cy="402336"/>
-          </a:xfrm>
-          <a:prstGeom prst="rect">
-            <a:avLst/>
-          </a:prstGeom>
-          <a:noFill/>
-          <a:ln/>
-        </p:spPr>
-        <p:txBody>
-          <a:bodyPr wrap="square" lIns="0" tIns="0" rIns="0" bIns="0" rtlCol="0" anchor="ctr"/>
-          <a:lstStyle/>
-          <a:p>
-            <a:pPr algn="ctr" indent="0" marL="0">
-              <a:buNone/>
-            </a:pPr>
-            <a:r>
-              <a:rPr lang="en-US" sz="1200" b="1" dirty="0">
-                <a:solidFill>
-                  <a:srgbClr val="4338CA"/>
-                </a:solidFill>
-                <a:latin typeface="Trebuchet MS" pitchFamily="34" charset="0"/>
-                <a:ea typeface="Trebuchet MS" pitchFamily="34" charset="-122"/>
-                <a:cs typeface="Trebuchet MS" pitchFamily="34" charset="-120"/>
-              </a:rPr>
-              <a:t>disappearing</a:t>
-            </a:r>
-            <a:endParaRPr lang="en-US" sz="1200" dirty="0"/>
-          </a:p>
-        </p:txBody>
-      </p:sp>
-      <p:sp>
-        <p:nvSpPr>
-          <p:cNvPr id="58" name="Shape 56"/>
-          <p:cNvSpPr/>
-          <p:nvPr/>
-        </p:nvSpPr>
-        <p:spPr>
-          <a:xfrm>
-            <a:off x="6894576" y="4498848"/>
-            <a:ext cx="2011680" cy="402336"/>
-          </a:xfrm>
-          <a:prstGeom prst="rect">
-            <a:avLst>
-              <a:gd name="adj" fmla="val 13636"/>
-            </a:avLst>
-          </a:prstGeom>
-          <a:solidFill>
-            <a:srgbClr val="EEF2FF"/>
-          </a:solidFill>
-          <a:ln w="12700">
-            <a:solidFill>
-              <a:srgbClr val="6366F1"/>
-            </a:solidFill>
-            <a:prstDash val="solid"/>
-          </a:ln>
-        </p:spPr>
-      </p:sp>
-      <p:sp>
-        <p:nvSpPr>
-          <p:cNvPr id="59" name="Text 57"/>
-          <p:cNvSpPr/>
-          <p:nvPr/>
-        </p:nvSpPr>
-        <p:spPr>
-          <a:xfrm>
-            <a:off x="6894576" y="4498848"/>
-            <a:ext cx="2011680" cy="402336"/>
-          </a:xfrm>
-          <a:prstGeom prst="rect">
-            <a:avLst/>
-          </a:prstGeom>
-          <a:noFill/>
-          <a:ln/>
-        </p:spPr>
-        <p:txBody>
-          <a:bodyPr wrap="square" lIns="0" tIns="0" rIns="0" bIns="0" rtlCol="0" anchor="ctr"/>
-          <a:lstStyle/>
-          <a:p>
-            <a:pPr algn="ctr" indent="0" marL="0">
-              <a:buNone/>
-            </a:pPr>
-            <a:r>
-              <a:rPr lang="en-US" sz="1200" b="1" dirty="0">
-                <a:solidFill>
-                  <a:srgbClr val="4338CA"/>
-                </a:solidFill>
-                <a:latin typeface="Trebuchet MS" pitchFamily="34" charset="0"/>
-                <a:ea typeface="Trebuchet MS" pitchFamily="34" charset="-122"/>
-                <a:cs typeface="Trebuchet MS" pitchFamily="34" charset="-120"/>
-              </a:rPr>
-              <a:t>reappear</a:t>
+              <a:t>reappeared</a:t>
             </a:r>
             <a:endParaRPr lang="en-US" sz="1200" dirty="0"/>
           </a:p>
@@ -35649,7 +37896,7 @@
                 <a:ea typeface="Calibri" pitchFamily="34" charset="-122"/>
                 <a:cs typeface="Calibri" pitchFamily="34" charset="-120"/>
               </a:rPr>
-              <a:t>Word Labs  •  wordlabs.app  •  Root: 'appear' = to come into sight</a:t>
+              <a:t>Word Labs  •  wordlabs.app  •  Root: 'appear' = come into view</a:t>
             </a:r>
             <a:endParaRPr lang="en-US" sz="800" dirty="0"/>
           </a:p>
@@ -35813,7 +38060,7 @@
                 <a:ea typeface="Calibri" pitchFamily="34" charset="-122"/>
                 <a:cs typeface="Calibri" pitchFamily="34" charset="-120"/>
               </a:rPr>
-              <a:t>The core part of a word carrying its basic meaning. For example, 'appear' means 'to come into sight'.</a:t>
+              <a:t>The core part of a word carrying its basic meaning. For example, 'appear' means 'come into view'.</a:t>
             </a:r>
             <a:endParaRPr lang="en-US" sz="1350" dirty="0"/>
           </a:p>
@@ -36433,7 +38680,7 @@
                 <a:ea typeface="Calibri" pitchFamily="34" charset="-122"/>
                 <a:cs typeface="Calibri" pitchFamily="34" charset="-120"/>
               </a:rPr>
-              <a:t>Word Labs  •  wordlabs.app  •  Root: 'appear' = to come into sight</a:t>
+              <a:t>Word Labs  •  wordlabs.app  •  Root: 'appear' = come into view</a:t>
             </a:r>
             <a:endParaRPr lang="en-US" sz="800" dirty="0"/>
           </a:p>
@@ -36545,7 +38792,7 @@
                 <a:ea typeface="Calibri" pitchFamily="34" charset="-122"/>
                 <a:cs typeface="Calibri" pitchFamily="34" charset="-120"/>
               </a:rPr>
-              <a:t>1.  The root 'appear' comes from the Greek language.</a:t>
+              <a:t>1.  'appear' means 'come into view'.</a:t>
             </a:r>
             <a:endParaRPr lang="en-US" sz="1300" dirty="0"/>
           </a:p>
@@ -36568,11 +38815,11 @@
             </a:avLst>
           </a:prstGeom>
           <a:solidFill>
-            <a:srgbClr val="FEE2E2"/>
-          </a:solidFill>
-          <a:ln w="12700">
-            <a:solidFill>
-              <a:srgbClr val="DC2626"/>
+            <a:srgbClr val="DCFCE7"/>
+          </a:solidFill>
+          <a:ln w="12700">
+            <a:solidFill>
+              <a:srgbClr val="16A34A"/>
             </a:solidFill>
             <a:prstDash val="solid"/>
           </a:ln>
@@ -36605,13 +38852,13 @@
             <a:r>
               <a:rPr lang="en-US" sz="1100" b="1" dirty="0">
                 <a:solidFill>
-                  <a:srgbClr val="DC2626"/>
+                  <a:srgbClr val="16A34A"/>
                 </a:solidFill>
                 <a:latin typeface="Trebuchet MS" pitchFamily="34" charset="0"/>
                 <a:ea typeface="Trebuchet MS" pitchFamily="34" charset="-122"/>
                 <a:cs typeface="Trebuchet MS" pitchFamily="34" charset="-120"/>
               </a:rPr>
-              <a:t>FALSE</a:t>
+              <a:t>TRUE</a:t>
             </a:r>
             <a:endParaRPr lang="en-US" sz="1100" dirty="0"/>
           </a:p>
@@ -36684,7 +38931,7 @@
                 <a:ea typeface="Calibri" pitchFamily="34" charset="-122"/>
                 <a:cs typeface="Calibri" pitchFamily="34" charset="-120"/>
               </a:rPr>
-              <a:t>2.  Adding the suffix '-ance' to 'appear' makes the word 'appearance'.</a:t>
+              <a:t>2.  'appear' means 'to come into sight'.</a:t>
             </a:r>
             <a:endParaRPr lang="en-US" sz="1300" dirty="0"/>
           </a:p>
@@ -36823,7 +39070,7 @@
                 <a:ea typeface="Calibri" pitchFamily="34" charset="-122"/>
                 <a:cs typeface="Calibri" pitchFamily="34" charset="-120"/>
               </a:rPr>
-              <a:t>3.  'Reappear' means to come back into sight after being gone.</a:t>
+              <a:t>3.  'appear' means 'to disappear completely from view'.</a:t>
             </a:r>
             <a:endParaRPr lang="en-US" sz="1300" dirty="0"/>
           </a:p>
@@ -36846,11 +39093,11 @@
             </a:avLst>
           </a:prstGeom>
           <a:solidFill>
-            <a:srgbClr val="DCFCE7"/>
-          </a:solidFill>
-          <a:ln w="12700">
-            <a:solidFill>
-              <a:srgbClr val="16A34A"/>
+            <a:srgbClr val="FEE2E2"/>
+          </a:solidFill>
+          <a:ln w="12700">
+            <a:solidFill>
+              <a:srgbClr val="DC2626"/>
             </a:solidFill>
             <a:prstDash val="solid"/>
           </a:ln>
@@ -36883,13 +39130,13 @@
             <a:r>
               <a:rPr lang="en-US" sz="1100" b="1" dirty="0">
                 <a:solidFill>
-                  <a:srgbClr val="16A34A"/>
+                  <a:srgbClr val="DC2626"/>
                 </a:solidFill>
                 <a:latin typeface="Trebuchet MS" pitchFamily="34" charset="0"/>
                 <a:ea typeface="Trebuchet MS" pitchFamily="34" charset="-122"/>
                 <a:cs typeface="Trebuchet MS" pitchFamily="34" charset="-120"/>
               </a:rPr>
-              <a:t>TRUE</a:t>
+              <a:t>FALSE</a:t>
             </a:r>
             <a:endParaRPr lang="en-US" sz="1100" dirty="0"/>
           </a:p>
@@ -36962,7 +39209,7 @@
                 <a:ea typeface="Calibri" pitchFamily="34" charset="-122"/>
                 <a:cs typeface="Calibri" pitchFamily="34" charset="-120"/>
               </a:rPr>
-              <a:t>4.  The word 'disappear' contains the root 'appear'.</a:t>
+              <a:t>4.  'appears' means 'comes into sight; seems to be'.</a:t>
             </a:r>
             <a:endParaRPr lang="en-US" sz="1300" dirty="0"/>
           </a:p>
@@ -37101,7 +39348,7 @@
                 <a:ea typeface="Calibri" pitchFamily="34" charset="-122"/>
                 <a:cs typeface="Calibri" pitchFamily="34" charset="-120"/>
               </a:rPr>
-              <a:t>5.  The root 'appear' means to make a loud noise.</a:t>
+              <a:t>5.  'appears' means 'disappears from view'.</a:t>
             </a:r>
             <a:endParaRPr lang="en-US" sz="1300" dirty="0"/>
           </a:p>
@@ -37459,7 +39706,7 @@
                 <a:ea typeface="Calibri" pitchFamily="34" charset="-122"/>
                 <a:cs typeface="Calibri" pitchFamily="34" charset="-120"/>
               </a:rPr>
-              <a:t>Word Labs  •  wordlabs.app  •  Root: 'appear' = to come into sight</a:t>
+              <a:t>Word Labs  •  wordlabs.app  •  Root: 'appear' = come into view</a:t>
             </a:r>
             <a:endParaRPr lang="en-US" sz="800" dirty="0"/>
           </a:p>
@@ -37596,7 +39843,7 @@
                 <a:ea typeface="Trebuchet MS" pitchFamily="34" charset="-122"/>
                 <a:cs typeface="Trebuchet MS" pitchFamily="34" charset="-120"/>
               </a:rPr>
-              <a:t>to come into sight</a:t>
+              <a:t>come into view</a:t>
             </a:r>
             <a:endParaRPr lang="en-US" sz="2000" dirty="0"/>
           </a:p>
@@ -37635,7 +39882,7 @@
                 <a:ea typeface="Calibri" pitchFamily="34" charset="-122"/>
                 <a:cs typeface="Calibri" pitchFamily="34" charset="-120"/>
               </a:rPr>
-              <a:t>Origin: Latin: apparere</a:t>
+              <a:t>Origin: Core English root</a:t>
             </a:r>
             <a:endParaRPr lang="en-US" sz="1100" dirty="0"/>
           </a:p>
@@ -37938,7 +40185,7 @@
                 <a:ea typeface="Trebuchet MS" pitchFamily="34" charset="-122"/>
                 <a:cs typeface="Trebuchet MS" pitchFamily="34" charset="-120"/>
               </a:rPr>
-              <a:t>appearing</a:t>
+              <a:t>reappear</a:t>
             </a:r>
             <a:endParaRPr lang="en-US" sz="1300" dirty="0"/>
           </a:p>
@@ -38004,7 +40251,7 @@
                 <a:ea typeface="Trebuchet MS" pitchFamily="34" charset="-122"/>
                 <a:cs typeface="Trebuchet MS" pitchFamily="34" charset="-120"/>
               </a:rPr>
-              <a:t>appearance</a:t>
+              <a:t>appearing</a:t>
             </a:r>
             <a:endParaRPr lang="en-US" sz="1300" dirty="0"/>
           </a:p>
@@ -38136,7 +40383,7 @@
                 <a:ea typeface="Trebuchet MS" pitchFamily="34" charset="-122"/>
                 <a:cs typeface="Trebuchet MS" pitchFamily="34" charset="-120"/>
               </a:rPr>
-              <a:t>disappearing</a:t>
+              <a:t>reappeared</a:t>
             </a:r>
             <a:endParaRPr lang="en-US" sz="1300" dirty="0"/>
           </a:p>
@@ -38428,7 +40675,7 @@
                 <a:ea typeface="Calibri" pitchFamily="34" charset="-122"/>
                 <a:cs typeface="Calibri" pitchFamily="34" charset="-120"/>
               </a:rPr>
-              <a:t>Word Labs  •  wordlabs.app  •  Root: 'appear' = to come into sight</a:t>
+              <a:t>Word Labs  •  wordlabs.app  •  Root: 'appear' = come into view</a:t>
             </a:r>
             <a:endParaRPr lang="en-US" sz="800" dirty="0"/>
           </a:p>
@@ -38729,7 +40976,7 @@
                 <a:ea typeface="Trebuchet MS" pitchFamily="34" charset="-122"/>
                 <a:cs typeface="Trebuchet MS" pitchFamily="34" charset="-120"/>
               </a:rPr>
-              <a:t>re-</a:t>
+              <a:t>dis-</a:t>
             </a:r>
             <a:endParaRPr lang="en-US" sz="1300" dirty="0"/>
           </a:p>
@@ -38921,7 +41168,7 @@
                 <a:ea typeface="Trebuchet MS" pitchFamily="34" charset="-122"/>
                 <a:cs typeface="Trebuchet MS" pitchFamily="34" charset="-120"/>
               </a:rPr>
-              <a:t>dis-</a:t>
+              <a:t>re-</a:t>
             </a:r>
             <a:endParaRPr lang="en-US" sz="1300" dirty="0"/>
           </a:p>
@@ -39010,7 +41257,7 @@
                 <a:ea typeface="Trebuchet MS" pitchFamily="34" charset="-122"/>
                 <a:cs typeface="Trebuchet MS" pitchFamily="34" charset="-120"/>
               </a:rPr>
-              <a:t>-ing</a:t>
+              <a:t>-ed</a:t>
             </a:r>
             <a:endParaRPr lang="en-US" sz="1300" dirty="0"/>
           </a:p>
@@ -39031,7 +41278,7 @@
             <a:avLst/>
           </a:prstGeom>
           <a:solidFill>
-            <a:srgbClr val="DDD6FE"/>
+            <a:srgbClr val="F8FAFC"/>
           </a:solidFill>
           <a:ln w="12700">
             <a:solidFill>
@@ -39043,18 +41290,68 @@
       </p:sp>
       <p:sp>
         <p:nvSpPr>
-          <p:cNvPr id="29" name="Text 27"/>
-          <p:cNvSpPr/>
-          <p:nvPr/>
-        </p:nvSpPr>
-        <p:spPr>
-          <a:xfrm>
-            <a:off x="640080" y="2670048"/>
+          <p:cNvPr id="29" name="Shape 27"/>
+          <p:cNvSpPr/>
+          <p:nvPr/>
+        </p:nvSpPr>
+        <p:spPr>
+          <a:xfrm>
+            <a:off x="3291840" y="2670048"/>
+            <a:ext cx="1645920" cy="420624"/>
+          </a:xfrm>
+          <a:prstGeom prst="rect">
+            <a:avLst/>
+          </a:prstGeom>
+          <a:solidFill>
+            <a:srgbClr val="F8FAFC"/>
+          </a:solidFill>
+          <a:ln w="12700">
+            <a:solidFill>
+              <a:srgbClr val="E5E7EB"/>
+            </a:solidFill>
+            <a:prstDash val="solid"/>
+          </a:ln>
+        </p:spPr>
+      </p:sp>
+      <p:sp>
+        <p:nvSpPr>
+          <p:cNvPr id="30" name="Shape 28"/>
+          <p:cNvSpPr/>
+          <p:nvPr/>
+        </p:nvSpPr>
+        <p:spPr>
+          <a:xfrm>
+            <a:off x="5943600" y="2670048"/>
             <a:ext cx="1463040" cy="420624"/>
           </a:xfrm>
           <a:prstGeom prst="rect">
             <a:avLst/>
           </a:prstGeom>
+          <a:solidFill>
+            <a:srgbClr val="FCE7F3"/>
+          </a:solidFill>
+          <a:ln w="12700">
+            <a:solidFill>
+              <a:srgbClr val="E5E7EB"/>
+            </a:solidFill>
+            <a:prstDash val="solid"/>
+          </a:ln>
+        </p:spPr>
+      </p:sp>
+      <p:sp>
+        <p:nvSpPr>
+          <p:cNvPr id="31" name="Text 29"/>
+          <p:cNvSpPr/>
+          <p:nvPr/>
+        </p:nvSpPr>
+        <p:spPr>
+          <a:xfrm>
+            <a:off x="5943600" y="2670048"/>
+            <a:ext cx="1463040" cy="420624"/>
+          </a:xfrm>
+          <a:prstGeom prst="rect">
+            <a:avLst/>
+          </a:prstGeom>
           <a:noFill/>
           <a:ln/>
         </p:spPr>
@@ -39068,13 +41365,13 @@
             <a:r>
               <a:rPr lang="en-US" sz="1300" b="1" dirty="0">
                 <a:solidFill>
-                  <a:srgbClr val="4C1D95"/>
+                  <a:srgbClr val="9D174D"/>
                 </a:solidFill>
                 <a:latin typeface="Trebuchet MS" pitchFamily="34" charset="0"/>
                 <a:ea typeface="Trebuchet MS" pitchFamily="34" charset="-122"/>
                 <a:cs typeface="Trebuchet MS" pitchFamily="34" charset="-120"/>
               </a:rPr>
-              <a:t>mis-</a:t>
+              <a:t>-ing</a:t>
             </a:r>
             <a:endParaRPr lang="en-US" sz="1300" dirty="0"/>
           </a:p>
@@ -39082,20 +41379,45 @@
       </p:sp>
       <p:sp>
         <p:nvSpPr>
-          <p:cNvPr id="30" name="Shape 28"/>
-          <p:cNvSpPr/>
-          <p:nvPr/>
-        </p:nvSpPr>
-        <p:spPr>
-          <a:xfrm>
-            <a:off x="3291840" y="2670048"/>
+          <p:cNvPr id="32" name="Shape 30"/>
+          <p:cNvSpPr/>
+          <p:nvPr/>
+        </p:nvSpPr>
+        <p:spPr>
+          <a:xfrm>
+            <a:off x="640080" y="3127248"/>
+            <a:ext cx="1463040" cy="420624"/>
+          </a:xfrm>
+          <a:prstGeom prst="rect">
+            <a:avLst/>
+          </a:prstGeom>
+          <a:solidFill>
+            <a:srgbClr val="F1F5F9"/>
+          </a:solidFill>
+          <a:ln w="12700">
+            <a:solidFill>
+              <a:srgbClr val="E5E7EB"/>
+            </a:solidFill>
+            <a:prstDash val="solid"/>
+          </a:ln>
+        </p:spPr>
+      </p:sp>
+      <p:sp>
+        <p:nvSpPr>
+          <p:cNvPr id="33" name="Shape 31"/>
+          <p:cNvSpPr/>
+          <p:nvPr/>
+        </p:nvSpPr>
+        <p:spPr>
+          <a:xfrm>
+            <a:off x="3291840" y="3127248"/>
             <a:ext cx="1645920" cy="420624"/>
           </a:xfrm>
           <a:prstGeom prst="rect">
             <a:avLst/>
           </a:prstGeom>
           <a:solidFill>
-            <a:srgbClr val="F8FAFC"/>
+            <a:srgbClr val="F1F5F9"/>
           </a:solidFill>
           <a:ln w="12700">
             <a:solidFill>
@@ -39107,13 +41429,13 @@
       </p:sp>
       <p:sp>
         <p:nvSpPr>
-          <p:cNvPr id="31" name="Shape 29"/>
-          <p:cNvSpPr/>
-          <p:nvPr/>
-        </p:nvSpPr>
-        <p:spPr>
-          <a:xfrm>
-            <a:off x="5943600" y="2670048"/>
+          <p:cNvPr id="34" name="Shape 32"/>
+          <p:cNvSpPr/>
+          <p:nvPr/>
+        </p:nvSpPr>
+        <p:spPr>
+          <a:xfrm>
+            <a:off x="5943600" y="3127248"/>
             <a:ext cx="1463040" cy="420624"/>
           </a:xfrm>
           <a:prstGeom prst="rect">
@@ -39132,13 +41454,13 @@
       </p:sp>
       <p:sp>
         <p:nvSpPr>
-          <p:cNvPr id="32" name="Text 30"/>
-          <p:cNvSpPr/>
-          <p:nvPr/>
-        </p:nvSpPr>
-        <p:spPr>
-          <a:xfrm>
-            <a:off x="5943600" y="2670048"/>
+          <p:cNvPr id="35" name="Text 33"/>
+          <p:cNvSpPr/>
+          <p:nvPr/>
+        </p:nvSpPr>
+        <p:spPr>
+          <a:xfrm>
+            <a:off x="5943600" y="3127248"/>
             <a:ext cx="1463040" cy="420624"/>
           </a:xfrm>
           <a:prstGeom prst="rect">
@@ -39163,7 +41485,7 @@
                 <a:ea typeface="Trebuchet MS" pitchFamily="34" charset="-122"/>
                 <a:cs typeface="Trebuchet MS" pitchFamily="34" charset="-120"/>
               </a:rPr>
-              <a:t>-ed</a:t>
+              <a:t>-s</a:t>
             </a:r>
             <a:endParaRPr lang="en-US" sz="1300" dirty="0"/>
           </a:p>
@@ -39171,319 +41493,13 @@
       </p:sp>
       <p:sp>
         <p:nvSpPr>
-          <p:cNvPr id="33" name="Shape 31"/>
-          <p:cNvSpPr/>
-          <p:nvPr/>
-        </p:nvSpPr>
-        <p:spPr>
-          <a:xfrm>
-            <a:off x="640080" y="3127248"/>
-            <a:ext cx="1463040" cy="420624"/>
-          </a:xfrm>
-          <a:prstGeom prst="rect">
-            <a:avLst/>
-          </a:prstGeom>
-          <a:solidFill>
-            <a:srgbClr val="DDD6FE"/>
-          </a:solidFill>
-          <a:ln w="12700">
-            <a:solidFill>
-              <a:srgbClr val="E5E7EB"/>
-            </a:solidFill>
-            <a:prstDash val="solid"/>
-          </a:ln>
-        </p:spPr>
-      </p:sp>
-      <p:sp>
-        <p:nvSpPr>
-          <p:cNvPr id="34" name="Text 32"/>
-          <p:cNvSpPr/>
-          <p:nvPr/>
-        </p:nvSpPr>
-        <p:spPr>
-          <a:xfrm>
-            <a:off x="640080" y="3127248"/>
-            <a:ext cx="1463040" cy="420624"/>
-          </a:xfrm>
-          <a:prstGeom prst="rect">
-            <a:avLst/>
-          </a:prstGeom>
-          <a:noFill/>
-          <a:ln/>
-        </p:spPr>
-        <p:txBody>
-          <a:bodyPr wrap="square" lIns="0" tIns="0" rIns="0" bIns="0" rtlCol="0" anchor="ctr"/>
-          <a:lstStyle/>
-          <a:p>
-            <a:pPr algn="ctr" indent="0" marL="0">
-              <a:buNone/>
-            </a:pPr>
-            <a:r>
-              <a:rPr lang="en-US" sz="1300" b="1" dirty="0">
-                <a:solidFill>
-                  <a:srgbClr val="4C1D95"/>
-                </a:solidFill>
-                <a:latin typeface="Trebuchet MS" pitchFamily="34" charset="0"/>
-                <a:ea typeface="Trebuchet MS" pitchFamily="34" charset="-122"/>
-                <a:cs typeface="Trebuchet MS" pitchFamily="34" charset="-120"/>
-              </a:rPr>
-              <a:t>non-</a:t>
-            </a:r>
-            <a:endParaRPr lang="en-US" sz="1300" dirty="0"/>
-          </a:p>
-        </p:txBody>
-      </p:sp>
-      <p:sp>
-        <p:nvSpPr>
-          <p:cNvPr id="35" name="Shape 33"/>
-          <p:cNvSpPr/>
-          <p:nvPr/>
-        </p:nvSpPr>
-        <p:spPr>
-          <a:xfrm>
-            <a:off x="3291840" y="3127248"/>
-            <a:ext cx="1645920" cy="420624"/>
-          </a:xfrm>
-          <a:prstGeom prst="rect">
-            <a:avLst/>
-          </a:prstGeom>
-          <a:solidFill>
-            <a:srgbClr val="F1F5F9"/>
-          </a:solidFill>
-          <a:ln w="12700">
-            <a:solidFill>
-              <a:srgbClr val="E5E7EB"/>
-            </a:solidFill>
-            <a:prstDash val="solid"/>
-          </a:ln>
-        </p:spPr>
-      </p:sp>
-      <p:sp>
-        <p:nvSpPr>
-          <p:cNvPr id="36" name="Shape 34"/>
-          <p:cNvSpPr/>
-          <p:nvPr/>
-        </p:nvSpPr>
-        <p:spPr>
-          <a:xfrm>
-            <a:off x="5943600" y="3127248"/>
-            <a:ext cx="1463040" cy="420624"/>
-          </a:xfrm>
-          <a:prstGeom prst="rect">
-            <a:avLst/>
-          </a:prstGeom>
-          <a:solidFill>
-            <a:srgbClr val="FCE7F3"/>
-          </a:solidFill>
-          <a:ln w="12700">
-            <a:solidFill>
-              <a:srgbClr val="E5E7EB"/>
-            </a:solidFill>
-            <a:prstDash val="solid"/>
-          </a:ln>
-        </p:spPr>
-      </p:sp>
-      <p:sp>
-        <p:nvSpPr>
-          <p:cNvPr id="37" name="Text 35"/>
-          <p:cNvSpPr/>
-          <p:nvPr/>
-        </p:nvSpPr>
-        <p:spPr>
-          <a:xfrm>
-            <a:off x="5943600" y="3127248"/>
-            <a:ext cx="1463040" cy="420624"/>
-          </a:xfrm>
-          <a:prstGeom prst="rect">
-            <a:avLst/>
-          </a:prstGeom>
-          <a:noFill/>
-          <a:ln/>
-        </p:spPr>
-        <p:txBody>
-          <a:bodyPr wrap="square" lIns="0" tIns="0" rIns="0" bIns="0" rtlCol="0" anchor="ctr"/>
-          <a:lstStyle/>
-          <a:p>
-            <a:pPr algn="ctr" indent="0" marL="0">
-              <a:buNone/>
-            </a:pPr>
-            <a:r>
-              <a:rPr lang="en-US" sz="1300" b="1" dirty="0">
-                <a:solidFill>
-                  <a:srgbClr val="9D174D"/>
-                </a:solidFill>
-                <a:latin typeface="Trebuchet MS" pitchFamily="34" charset="0"/>
-                <a:ea typeface="Trebuchet MS" pitchFamily="34" charset="-122"/>
-                <a:cs typeface="Trebuchet MS" pitchFamily="34" charset="-120"/>
-              </a:rPr>
-              <a:t>-s</a:t>
-            </a:r>
-            <a:endParaRPr lang="en-US" sz="1300" dirty="0"/>
-          </a:p>
-        </p:txBody>
-      </p:sp>
-      <p:sp>
-        <p:nvSpPr>
-          <p:cNvPr id="38" name="Shape 36"/>
-          <p:cNvSpPr/>
-          <p:nvPr/>
-        </p:nvSpPr>
-        <p:spPr>
-          <a:xfrm>
-            <a:off x="640080" y="3584448"/>
-            <a:ext cx="1463040" cy="420624"/>
-          </a:xfrm>
-          <a:prstGeom prst="rect">
-            <a:avLst/>
-          </a:prstGeom>
-          <a:solidFill>
-            <a:srgbClr val="DDD6FE"/>
-          </a:solidFill>
-          <a:ln w="12700">
-            <a:solidFill>
-              <a:srgbClr val="E5E7EB"/>
-            </a:solidFill>
-            <a:prstDash val="solid"/>
-          </a:ln>
-        </p:spPr>
-      </p:sp>
-      <p:sp>
-        <p:nvSpPr>
-          <p:cNvPr id="39" name="Text 37"/>
-          <p:cNvSpPr/>
-          <p:nvPr/>
-        </p:nvSpPr>
-        <p:spPr>
-          <a:xfrm>
-            <a:off x="640080" y="3584448"/>
-            <a:ext cx="1463040" cy="420624"/>
-          </a:xfrm>
-          <a:prstGeom prst="rect">
-            <a:avLst/>
-          </a:prstGeom>
-          <a:noFill/>
-          <a:ln/>
-        </p:spPr>
-        <p:txBody>
-          <a:bodyPr wrap="square" lIns="0" tIns="0" rIns="0" bIns="0" rtlCol="0" anchor="ctr"/>
-          <a:lstStyle/>
-          <a:p>
-            <a:pPr algn="ctr" indent="0" marL="0">
-              <a:buNone/>
-            </a:pPr>
-            <a:r>
-              <a:rPr lang="en-US" sz="1300" b="1" dirty="0">
-                <a:solidFill>
-                  <a:srgbClr val="4C1D95"/>
-                </a:solidFill>
-                <a:latin typeface="Trebuchet MS" pitchFamily="34" charset="0"/>
-                <a:ea typeface="Trebuchet MS" pitchFamily="34" charset="-122"/>
-                <a:cs typeface="Trebuchet MS" pitchFamily="34" charset="-120"/>
-              </a:rPr>
-              <a:t>un-</a:t>
-            </a:r>
-            <a:endParaRPr lang="en-US" sz="1300" dirty="0"/>
-          </a:p>
-        </p:txBody>
-      </p:sp>
-      <p:sp>
-        <p:nvSpPr>
-          <p:cNvPr id="40" name="Shape 38"/>
-          <p:cNvSpPr/>
-          <p:nvPr/>
-        </p:nvSpPr>
-        <p:spPr>
-          <a:xfrm>
-            <a:off x="3291840" y="3584448"/>
-            <a:ext cx="1645920" cy="420624"/>
-          </a:xfrm>
-          <a:prstGeom prst="rect">
-            <a:avLst/>
-          </a:prstGeom>
-          <a:solidFill>
-            <a:srgbClr val="F8FAFC"/>
-          </a:solidFill>
-          <a:ln w="12700">
-            <a:solidFill>
-              <a:srgbClr val="E5E7EB"/>
-            </a:solidFill>
-            <a:prstDash val="solid"/>
-          </a:ln>
-        </p:spPr>
-      </p:sp>
-      <p:sp>
-        <p:nvSpPr>
-          <p:cNvPr id="41" name="Shape 39"/>
-          <p:cNvSpPr/>
-          <p:nvPr/>
-        </p:nvSpPr>
-        <p:spPr>
-          <a:xfrm>
-            <a:off x="5943600" y="3584448"/>
-            <a:ext cx="1463040" cy="420624"/>
-          </a:xfrm>
-          <a:prstGeom prst="rect">
-            <a:avLst/>
-          </a:prstGeom>
-          <a:solidFill>
-            <a:srgbClr val="FCE7F3"/>
-          </a:solidFill>
-          <a:ln w="12700">
-            <a:solidFill>
-              <a:srgbClr val="E5E7EB"/>
-            </a:solidFill>
-            <a:prstDash val="solid"/>
-          </a:ln>
-        </p:spPr>
-      </p:sp>
-      <p:sp>
-        <p:nvSpPr>
-          <p:cNvPr id="42" name="Text 40"/>
-          <p:cNvSpPr/>
-          <p:nvPr/>
-        </p:nvSpPr>
-        <p:spPr>
-          <a:xfrm>
-            <a:off x="5943600" y="3584448"/>
-            <a:ext cx="1463040" cy="420624"/>
-          </a:xfrm>
-          <a:prstGeom prst="rect">
-            <a:avLst/>
-          </a:prstGeom>
-          <a:noFill/>
-          <a:ln/>
-        </p:spPr>
-        <p:txBody>
-          <a:bodyPr wrap="square" lIns="0" tIns="0" rIns="0" bIns="0" rtlCol="0" anchor="ctr"/>
-          <a:lstStyle/>
-          <a:p>
-            <a:pPr algn="ctr" indent="0" marL="0">
-              <a:buNone/>
-            </a:pPr>
-            <a:r>
-              <a:rPr lang="en-US" sz="1300" b="1" dirty="0">
-                <a:solidFill>
-                  <a:srgbClr val="9D174D"/>
-                </a:solidFill>
-                <a:latin typeface="Trebuchet MS" pitchFamily="34" charset="0"/>
-                <a:ea typeface="Trebuchet MS" pitchFamily="34" charset="-122"/>
-                <a:cs typeface="Trebuchet MS" pitchFamily="34" charset="-120"/>
-              </a:rPr>
-              <a:t>-ance</a:t>
-            </a:r>
-            <a:endParaRPr lang="en-US" sz="1300" dirty="0"/>
-          </a:p>
-        </p:txBody>
-      </p:sp>
-      <p:sp>
-        <p:nvSpPr>
-          <p:cNvPr id="43" name="Text 41"/>
-          <p:cNvSpPr/>
-          <p:nvPr/>
-        </p:nvSpPr>
-        <p:spPr>
-          <a:xfrm>
-            <a:off x="365760" y="4178808"/>
+          <p:cNvPr id="36" name="Text 34"/>
+          <p:cNvSpPr/>
+          <p:nvPr/>
+        </p:nvSpPr>
+        <p:spPr>
+          <a:xfrm>
+            <a:off x="365760" y="3721608"/>
             <a:ext cx="1097280" cy="420624"/>
           </a:xfrm>
           <a:prstGeom prst="rect">
@@ -39516,14 +41532,14 @@
       </p:sp>
       <p:sp>
         <p:nvSpPr>
-          <p:cNvPr id="44" name="Shape 42"/>
-          <p:cNvSpPr/>
-          <p:nvPr/>
-        </p:nvSpPr>
-        <p:spPr>
-          <a:xfrm>
-            <a:off x="1508760" y="4178808"/>
-            <a:ext cx="822960" cy="420624"/>
+          <p:cNvPr id="37" name="Shape 35"/>
+          <p:cNvSpPr/>
+          <p:nvPr/>
+        </p:nvSpPr>
+        <p:spPr>
+          <a:xfrm>
+            <a:off x="1508760" y="3721608"/>
+            <a:ext cx="950976" cy="420624"/>
           </a:xfrm>
           <a:prstGeom prst="rect">
             <a:avLst>
@@ -39550,14 +41566,14 @@
       </p:sp>
       <p:sp>
         <p:nvSpPr>
-          <p:cNvPr id="45" name="Text 43"/>
-          <p:cNvSpPr/>
-          <p:nvPr/>
-        </p:nvSpPr>
-        <p:spPr>
-          <a:xfrm>
-            <a:off x="1508760" y="4178808"/>
-            <a:ext cx="822960" cy="420624"/>
+          <p:cNvPr id="38" name="Text 36"/>
+          <p:cNvSpPr/>
+          <p:nvPr/>
+        </p:nvSpPr>
+        <p:spPr>
+          <a:xfrm>
+            <a:off x="1508760" y="3721608"/>
+            <a:ext cx="950976" cy="420624"/>
           </a:xfrm>
           <a:prstGeom prst="rect">
             <a:avLst/>
@@ -39581,7 +41597,7 @@
                 <a:ea typeface="Trebuchet MS" pitchFamily="34" charset="-122"/>
                 <a:cs typeface="Trebuchet MS" pitchFamily="34" charset="-120"/>
               </a:rPr>
-              <a:t>re-</a:t>
+              <a:t>dis-</a:t>
             </a:r>
             <a:endParaRPr lang="en-US" sz="1300" dirty="0"/>
           </a:p>
@@ -39589,13 +41605,13 @@
       </p:sp>
       <p:sp>
         <p:nvSpPr>
-          <p:cNvPr id="46" name="Text 44"/>
-          <p:cNvSpPr/>
-          <p:nvPr/>
-        </p:nvSpPr>
-        <p:spPr>
-          <a:xfrm>
-            <a:off x="2359152" y="4178808"/>
+          <p:cNvPr id="39" name="Text 37"/>
+          <p:cNvSpPr/>
+          <p:nvPr/>
+        </p:nvSpPr>
+        <p:spPr>
+          <a:xfrm>
+            <a:off x="2487168" y="3721608"/>
             <a:ext cx="320040" cy="420624"/>
           </a:xfrm>
           <a:prstGeom prst="rect">
@@ -39628,13 +41644,13 @@
       </p:sp>
       <p:sp>
         <p:nvSpPr>
-          <p:cNvPr id="47" name="Shape 45"/>
-          <p:cNvSpPr/>
-          <p:nvPr/>
-        </p:nvSpPr>
-        <p:spPr>
-          <a:xfrm>
-            <a:off x="2706624" y="4178808"/>
+          <p:cNvPr id="40" name="Shape 38"/>
+          <p:cNvSpPr/>
+          <p:nvPr/>
+        </p:nvSpPr>
+        <p:spPr>
+          <a:xfrm>
+            <a:off x="2834640" y="3721608"/>
             <a:ext cx="1536192" cy="420624"/>
           </a:xfrm>
           <a:prstGeom prst="rect">
@@ -39662,13 +41678,13 @@
       </p:sp>
       <p:sp>
         <p:nvSpPr>
-          <p:cNvPr id="48" name="Text 46"/>
-          <p:cNvSpPr/>
-          <p:nvPr/>
-        </p:nvSpPr>
-        <p:spPr>
-          <a:xfrm>
-            <a:off x="2706624" y="4178808"/>
+          <p:cNvPr id="41" name="Text 39"/>
+          <p:cNvSpPr/>
+          <p:nvPr/>
+        </p:nvSpPr>
+        <p:spPr>
+          <a:xfrm>
+            <a:off x="2834640" y="3721608"/>
             <a:ext cx="1536192" cy="420624"/>
           </a:xfrm>
           <a:prstGeom prst="rect">
@@ -39701,13 +41717,13 @@
       </p:sp>
       <p:sp>
         <p:nvSpPr>
-          <p:cNvPr id="49" name="Text 47"/>
-          <p:cNvSpPr/>
-          <p:nvPr/>
-        </p:nvSpPr>
-        <p:spPr>
-          <a:xfrm>
-            <a:off x="4270248" y="4178808"/>
+          <p:cNvPr id="42" name="Text 40"/>
+          <p:cNvSpPr/>
+          <p:nvPr/>
+        </p:nvSpPr>
+        <p:spPr>
+          <a:xfrm>
+            <a:off x="4398264" y="3721608"/>
             <a:ext cx="320040" cy="420624"/>
           </a:xfrm>
           <a:prstGeom prst="rect">
@@ -39740,13 +41756,13 @@
       </p:sp>
       <p:sp>
         <p:nvSpPr>
-          <p:cNvPr id="50" name="Shape 48"/>
-          <p:cNvSpPr/>
-          <p:nvPr/>
-        </p:nvSpPr>
-        <p:spPr>
-          <a:xfrm>
-            <a:off x="4617720" y="4178808"/>
+          <p:cNvPr id="43" name="Shape 41"/>
+          <p:cNvSpPr/>
+          <p:nvPr/>
+        </p:nvSpPr>
+        <p:spPr>
+          <a:xfrm>
+            <a:off x="4745736" y="3721608"/>
             <a:ext cx="1097280" cy="420624"/>
           </a:xfrm>
           <a:prstGeom prst="rect">
@@ -39774,13 +41790,13 @@
       </p:sp>
       <p:sp>
         <p:nvSpPr>
-          <p:cNvPr id="51" name="Text 49"/>
-          <p:cNvSpPr/>
-          <p:nvPr/>
-        </p:nvSpPr>
-        <p:spPr>
-          <a:xfrm>
-            <a:off x="4617720" y="4178808"/>
+          <p:cNvPr id="44" name="Text 42"/>
+          <p:cNvSpPr/>
+          <p:nvPr/>
+        </p:nvSpPr>
+        <p:spPr>
+          <a:xfrm>
+            <a:off x="4745736" y="3721608"/>
             <a:ext cx="1097280" cy="420624"/>
           </a:xfrm>
           <a:prstGeom prst="rect">
@@ -39813,13 +41829,13 @@
       </p:sp>
       <p:sp>
         <p:nvSpPr>
-          <p:cNvPr id="52" name="Text 50"/>
-          <p:cNvSpPr/>
-          <p:nvPr/>
-        </p:nvSpPr>
-        <p:spPr>
-          <a:xfrm>
-            <a:off x="5788152" y="4178808"/>
+          <p:cNvPr id="45" name="Text 43"/>
+          <p:cNvSpPr/>
+          <p:nvPr/>
+        </p:nvSpPr>
+        <p:spPr>
+          <a:xfrm>
+            <a:off x="5916168" y="3721608"/>
             <a:ext cx="365760" cy="420624"/>
           </a:xfrm>
           <a:prstGeom prst="rect">
@@ -39852,13 +41868,13 @@
       </p:sp>
       <p:sp>
         <p:nvSpPr>
-          <p:cNvPr id="53" name="Shape 51"/>
-          <p:cNvSpPr/>
-          <p:nvPr/>
-        </p:nvSpPr>
-        <p:spPr>
-          <a:xfrm>
-            <a:off x="6199632" y="4178808"/>
+          <p:cNvPr id="46" name="Shape 44"/>
+          <p:cNvSpPr/>
+          <p:nvPr/>
+        </p:nvSpPr>
+        <p:spPr>
+          <a:xfrm>
+            <a:off x="6327648" y="3721608"/>
             <a:ext cx="2194560" cy="420624"/>
           </a:xfrm>
           <a:prstGeom prst="rect">
@@ -39879,13 +41895,13 @@
       </p:sp>
       <p:sp>
         <p:nvSpPr>
-          <p:cNvPr id="54" name="Text 52"/>
-          <p:cNvSpPr/>
-          <p:nvPr/>
-        </p:nvSpPr>
-        <p:spPr>
-          <a:xfrm>
-            <a:off x="6199632" y="4178808"/>
+          <p:cNvPr id="47" name="Text 45"/>
+          <p:cNvSpPr/>
+          <p:nvPr/>
+        </p:nvSpPr>
+        <p:spPr>
+          <a:xfrm>
+            <a:off x="6327648" y="3721608"/>
             <a:ext cx="2194560" cy="420624"/>
           </a:xfrm>
           <a:prstGeom prst="rect">
@@ -40202,7 +42218,7 @@
                 <a:ea typeface="Calibri" pitchFamily="34" charset="-122"/>
                 <a:cs typeface="Calibri" pitchFamily="34" charset="-120"/>
               </a:rPr>
-              <a:t>Word Labs  •  wordlabs.app  •  Root: 'appear' = to come into sight</a:t>
+              <a:t>Word Labs  •  wordlabs.app  •  Root: 'appear' = come into view</a:t>
             </a:r>
             <a:endParaRPr lang="en-US" sz="800" dirty="0"/>
           </a:p>
@@ -40380,7 +42396,7 @@
                 <a:ea typeface="Calibri" pitchFamily="34" charset="-122"/>
                 <a:cs typeface="Calibri" pitchFamily="34" charset="-120"/>
               </a:rPr>
-              <a:t>The way something or someone looks to other people.</a:t>
+              <a:t>coming into sight, happening now</a:t>
             </a:r>
             <a:endParaRPr lang="en-US" sz="1200" dirty="0"/>
           </a:p>
@@ -40519,7 +42535,7 @@
                 <a:ea typeface="Calibri" pitchFamily="34" charset="-122"/>
                 <a:cs typeface="Calibri" pitchFamily="34" charset="-120"/>
               </a:rPr>
-              <a:t>The act of coming into sight or showing up somewhere.</a:t>
+              <a:t>to appear again after being hidden or gone</a:t>
             </a:r>
             <a:endParaRPr lang="en-US" sz="1200" dirty="0"/>
           </a:p>
@@ -40658,7 +42674,7 @@
                 <a:ea typeface="Calibri" pitchFamily="34" charset="-122"/>
                 <a:cs typeface="Calibri" pitchFamily="34" charset="-120"/>
               </a:rPr>
-              <a:t>To go out of sight or stop being visible.</a:t>
+              <a:t>to stop being seen or to vanish</a:t>
             </a:r>
             <a:endParaRPr lang="en-US" sz="1200" dirty="0"/>
           </a:p>
@@ -40731,7 +42747,7 @@
                 <a:ea typeface="Trebuchet MS" pitchFamily="34" charset="-122"/>
                 <a:cs typeface="Trebuchet MS" pitchFamily="34" charset="-120"/>
               </a:rPr>
-              <a:t>appearing</a:t>
+              <a:t>reappear</a:t>
             </a:r>
             <a:endParaRPr lang="en-US" sz="1200" dirty="0"/>
           </a:p>
@@ -40797,7 +42813,7 @@
                 <a:ea typeface="Calibri" pitchFamily="34" charset="-122"/>
                 <a:cs typeface="Calibri" pitchFamily="34" charset="-120"/>
               </a:rPr>
-              <a:t>When something came into view or was seen in the past.</a:t>
+              <a:t>came into sight, in the past</a:t>
             </a:r>
             <a:endParaRPr lang="en-US" sz="1200" dirty="0"/>
           </a:p>
@@ -40870,7 +42886,7 @@
                 <a:ea typeface="Trebuchet MS" pitchFamily="34" charset="-122"/>
                 <a:cs typeface="Trebuchet MS" pitchFamily="34" charset="-120"/>
               </a:rPr>
-              <a:t>appearance</a:t>
+              <a:t>appearing</a:t>
             </a:r>
             <a:endParaRPr lang="en-US" sz="1200" dirty="0"/>
           </a:p>
@@ -40936,7 +42952,7 @@
                 <a:ea typeface="Calibri" pitchFamily="34" charset="-122"/>
                 <a:cs typeface="Calibri" pitchFamily="34" charset="-120"/>
               </a:rPr>
-              <a:t>The act of going out of sight or vanishing.</a:t>
+              <a:t>appeared again after being gone or hidden</a:t>
             </a:r>
             <a:endParaRPr lang="en-US" sz="1200" dirty="0"/>
           </a:p>
@@ -41075,7 +43091,7 @@
                 <a:ea typeface="Calibri" pitchFamily="34" charset="-122"/>
                 <a:cs typeface="Calibri" pitchFamily="34" charset="-120"/>
               </a:rPr>
-              <a:t>To come into sight or become visible to someone.</a:t>
+              <a:t>to come into sight</a:t>
             </a:r>
             <a:endParaRPr lang="en-US" sz="1200" dirty="0"/>
           </a:p>
@@ -41148,7 +43164,7 @@
                 <a:ea typeface="Trebuchet MS" pitchFamily="34" charset="-122"/>
                 <a:cs typeface="Trebuchet MS" pitchFamily="34" charset="-120"/>
               </a:rPr>
-              <a:t>disappearing</a:t>
+              <a:t>reappeared</a:t>
             </a:r>
             <a:endParaRPr lang="en-US" sz="1200" dirty="0"/>
           </a:p>
@@ -41214,7 +43230,7 @@
                 <a:ea typeface="Calibri" pitchFamily="34" charset="-122"/>
                 <a:cs typeface="Calibri" pitchFamily="34" charset="-120"/>
               </a:rPr>
-              <a:t>When something is visible or seems to be a certain way.</a:t>
+              <a:t>comes into sight; seems to be</a:t>
             </a:r>
             <a:endParaRPr lang="en-US" sz="1200" dirty="0"/>
           </a:p>
@@ -41506,7 +43522,7 @@
                 <a:ea typeface="Calibri" pitchFamily="34" charset="-122"/>
                 <a:cs typeface="Calibri" pitchFamily="34" charset="-120"/>
               </a:rPr>
-              <a:t>Word Labs  •  wordlabs.app  •  Root: 'appear' = to come into sight</a:t>
+              <a:t>Word Labs  •  wordlabs.app  •  Root: 'appear' = come into view</a:t>
             </a:r>
             <a:endParaRPr lang="en-US" sz="800" dirty="0"/>
           </a:p>
@@ -41709,7 +43725,7 @@
                 <a:ea typeface="Calibri" pitchFamily="34" charset="-122"/>
                 <a:cs typeface="Calibri" pitchFamily="34" charset="-120"/>
               </a:rPr>
-              <a:t>The magician made a rabbit appear out of the empty hat, which amazed the whole audience.</a:t>
+              <a:t>A rainbow began to appear after the rain stopped.</a:t>
             </a:r>
             <a:endParaRPr lang="en-US" sz="1500" dirty="0"/>
           </a:p>
@@ -41873,7 +43889,7 @@
                 <a:ea typeface="Calibri" pitchFamily="34" charset="-122"/>
                 <a:cs typeface="Calibri" pitchFamily="34" charset="-120"/>
               </a:rPr>
-              <a:t>After the storm passed, a beautiful rainbow began to appear across the sky.</a:t>
+              <a:t>It appears that the weather is improving.</a:t>
             </a:r>
             <a:endParaRPr lang="en-US" sz="1500" dirty="0"/>
           </a:p>
@@ -42037,7 +44053,7 @@
                 <a:ea typeface="Calibri" pitchFamily="34" charset="-122"/>
                 <a:cs typeface="Calibri" pitchFamily="34" charset="-120"/>
               </a:rPr>
-              <a:t>The shy student did not want to make an appearance at the school concert this year.</a:t>
+              <a:t>The sun appeared from behind the clouds.</a:t>
             </a:r>
             <a:endParaRPr lang="en-US" sz="1500" dirty="0"/>
           </a:p>
